--- a/LabBook_40.pptx
+++ b/LabBook_40.pptx
@@ -234,7 +234,7 @@
           <a:p>
             <a:fld id="{8438F8DC-35B0-48E6-A86E-42F1F08DD00F}" type="datetimeFigureOut">
               <a:rPr lang="es-ES" smtClean="0"/>
-              <a:t>25/5/26</a:t>
+              <a:t>02/06/2026</a:t>
             </a:fld>
             <a:endParaRPr lang="es-ES"/>
           </a:p>
@@ -411,7 +411,7 @@
           <a:p>
             <a:fld id="{FACBDC12-F39B-4B97-8F4D-6734F9D366FF}" type="datetimeFigureOut">
               <a:rPr lang="es-ES" smtClean="0"/>
-              <a:t>25/5/26</a:t>
+              <a:t>02/06/2026</a:t>
             </a:fld>
             <a:endParaRPr lang="es-ES"/>
           </a:p>
@@ -3169,7 +3169,7 @@
         <p:spPr>
           <a:xfrm>
             <a:off x="2749676" y="5610250"/>
-            <a:ext cx="8223124" cy="289823"/>
+            <a:ext cx="8223124" cy="579646"/>
           </a:xfrm>
           <a:prstGeom prst="rect">
             <a:avLst/>
@@ -3180,6 +3180,26 @@
             <a:spAutoFit/>
           </a:bodyPr>
           <a:lstStyle/>
+          <a:p>
+            <a:r>
+              <a:rPr lang="es-ES" spc="165" dirty="0" err="1">
+                <a:latin typeface="Arial"/>
+                <a:cs typeface="Arial"/>
+              </a:rPr>
+              <a:t>Students</a:t>
+            </a:r>
+            <a:r>
+              <a:rPr lang="es-ES" spc="165" dirty="0">
+                <a:latin typeface="Arial"/>
+                <a:cs typeface="Arial"/>
+              </a:rPr>
+              <a:t>: </a:t>
+            </a:r>
+            <a:r>
+              <a:rPr lang="es-ES" dirty="0"/>
+              <a:t>Pablo de Manuel Vicente, José Alberto Peña Cruz (GRUPO B1)</a:t>
+            </a:r>
+          </a:p>
           <a:p>
             <a:pPr marL="12700">
               <a:lnSpc>
@@ -3190,18 +3210,11 @@
               </a:spcBef>
             </a:pPr>
             <a:r>
-              <a:rPr lang="es-ES" spc="165" dirty="0" err="1">
-                <a:latin typeface="Arial"/>
-                <a:cs typeface="Arial"/>
-              </a:rPr>
-              <a:t>Student</a:t>
-            </a:r>
-            <a:r>
               <a:rPr lang="es-ES" spc="165" dirty="0">
                 <a:latin typeface="Arial"/>
                 <a:cs typeface="Arial"/>
               </a:rPr>
-              <a:t>: </a:t>
+              <a:t> </a:t>
             </a:r>
             <a:endParaRPr sz="1800" dirty="0">
               <a:latin typeface="Arial"/>

--- a/LabBook_40.pptx
+++ b/LabBook_40.pptx
@@ -5,21 +5,27 @@
     <p:sldMasterId id="2147483648" r:id="rId1"/>
   </p:sldMasterIdLst>
   <p:notesMasterIdLst>
-    <p:notesMasterId r:id="rId11"/>
+    <p:notesMasterId r:id="rId17"/>
   </p:notesMasterIdLst>
   <p:handoutMasterIdLst>
-    <p:handoutMasterId r:id="rId12"/>
+    <p:handoutMasterId r:id="rId18"/>
   </p:handoutMasterIdLst>
   <p:sldIdLst>
     <p:sldId id="256" r:id="rId2"/>
     <p:sldId id="289" r:id="rId3"/>
     <p:sldId id="290" r:id="rId4"/>
     <p:sldId id="291" r:id="rId5"/>
-    <p:sldId id="292" r:id="rId6"/>
-    <p:sldId id="293" r:id="rId7"/>
-    <p:sldId id="294" r:id="rId8"/>
-    <p:sldId id="295" r:id="rId9"/>
-    <p:sldId id="288" r:id="rId10"/>
+    <p:sldId id="298" r:id="rId6"/>
+    <p:sldId id="297" r:id="rId7"/>
+    <p:sldId id="296" r:id="rId8"/>
+    <p:sldId id="292" r:id="rId9"/>
+    <p:sldId id="293" r:id="rId10"/>
+    <p:sldId id="299" r:id="rId11"/>
+    <p:sldId id="300" r:id="rId12"/>
+    <p:sldId id="301" r:id="rId13"/>
+    <p:sldId id="294" r:id="rId14"/>
+    <p:sldId id="295" r:id="rId15"/>
+    <p:sldId id="288" r:id="rId16"/>
   </p:sldIdLst>
   <p:sldSz cx="12192000" cy="6858000"/>
   <p:notesSz cx="12192000" cy="6858000"/>
@@ -762,6 +768,330 @@
 </p:notes>
 </file>
 
+<file path=ppt/notesSlides/notesSlide10.xml><?xml version="1.0" encoding="utf-8"?>
+<p:notes xmlns:a="http://schemas.openxmlformats.org/drawingml/2006/main" xmlns:r="http://schemas.openxmlformats.org/officeDocument/2006/relationships" xmlns:p="http://schemas.openxmlformats.org/presentationml/2006/main">
+  <p:cSld>
+    <p:spTree>
+      <p:nvGrpSpPr>
+        <p:cNvPr id="1" name="">
+          <a:extLst>
+            <a:ext uri="{FF2B5EF4-FFF2-40B4-BE49-F238E27FC236}">
+              <a16:creationId xmlns:a16="http://schemas.microsoft.com/office/drawing/2014/main" id="{77E91E37-C099-BFAF-435A-9593AFA83C97}"/>
+            </a:ext>
+          </a:extLst>
+        </p:cNvPr>
+        <p:cNvGrpSpPr/>
+        <p:nvPr/>
+      </p:nvGrpSpPr>
+      <p:grpSpPr>
+        <a:xfrm>
+          <a:off x="0" y="0"/>
+          <a:ext cx="0" cy="0"/>
+          <a:chOff x="0" y="0"/>
+          <a:chExt cx="0" cy="0"/>
+        </a:xfrm>
+      </p:grpSpPr>
+      <p:sp>
+        <p:nvSpPr>
+          <p:cNvPr id="2" name="Marcador de imagen de diapositiva 1">
+            <a:extLst>
+              <a:ext uri="{FF2B5EF4-FFF2-40B4-BE49-F238E27FC236}">
+                <a16:creationId xmlns:a16="http://schemas.microsoft.com/office/drawing/2014/main" id="{1ED950CF-52D1-AF5C-CB82-F5D67D475D15}"/>
+              </a:ext>
+            </a:extLst>
+          </p:cNvPr>
+          <p:cNvSpPr>
+            <a:spLocks noGrp="1" noRot="1" noChangeAspect="1"/>
+          </p:cNvSpPr>
+          <p:nvPr>
+            <p:ph type="sldImg"/>
+          </p:nvPr>
+        </p:nvSpPr>
+        <p:spPr/>
+      </p:sp>
+      <p:sp>
+        <p:nvSpPr>
+          <p:cNvPr id="3" name="Marcador de notas 2">
+            <a:extLst>
+              <a:ext uri="{FF2B5EF4-FFF2-40B4-BE49-F238E27FC236}">
+                <a16:creationId xmlns:a16="http://schemas.microsoft.com/office/drawing/2014/main" id="{BE14ED31-B507-254C-78F0-3CA2270262C5}"/>
+              </a:ext>
+            </a:extLst>
+          </p:cNvPr>
+          <p:cNvSpPr>
+            <a:spLocks noGrp="1"/>
+          </p:cNvSpPr>
+          <p:nvPr>
+            <p:ph type="body" idx="1"/>
+          </p:nvPr>
+        </p:nvSpPr>
+        <p:spPr/>
+        <p:txBody>
+          <a:bodyPr/>
+          <a:lstStyle/>
+          <a:p>
+            <a:endParaRPr lang="es-ES" dirty="0"/>
+          </a:p>
+        </p:txBody>
+      </p:sp>
+      <p:sp>
+        <p:nvSpPr>
+          <p:cNvPr id="4" name="Marcador de número de diapositiva 3">
+            <a:extLst>
+              <a:ext uri="{FF2B5EF4-FFF2-40B4-BE49-F238E27FC236}">
+                <a16:creationId xmlns:a16="http://schemas.microsoft.com/office/drawing/2014/main" id="{08FCCA78-4177-0C14-DDFE-3DA7E267D9E0}"/>
+              </a:ext>
+            </a:extLst>
+          </p:cNvPr>
+          <p:cNvSpPr>
+            <a:spLocks noGrp="1"/>
+          </p:cNvSpPr>
+          <p:nvPr>
+            <p:ph type="sldNum" sz="quarter" idx="5"/>
+          </p:nvPr>
+        </p:nvSpPr>
+        <p:spPr/>
+        <p:txBody>
+          <a:bodyPr/>
+          <a:lstStyle/>
+          <a:p>
+            <a:fld id="{676223B9-C868-4436-87D9-1A3152E1157A}" type="slidenum">
+              <a:rPr lang="es-ES" smtClean="0"/>
+              <a:t>12</a:t>
+            </a:fld>
+            <a:endParaRPr lang="es-ES"/>
+          </a:p>
+        </p:txBody>
+      </p:sp>
+    </p:spTree>
+    <p:extLst>
+      <p:ext uri="{BB962C8B-B14F-4D97-AF65-F5344CB8AC3E}">
+        <p14:creationId xmlns:p14="http://schemas.microsoft.com/office/powerpoint/2010/main" val="1169325138"/>
+      </p:ext>
+    </p:extLst>
+  </p:cSld>
+  <p:clrMapOvr>
+    <a:masterClrMapping/>
+  </p:clrMapOvr>
+</p:notes>
+</file>
+
+<file path=ppt/notesSlides/notesSlide11.xml><?xml version="1.0" encoding="utf-8"?>
+<p:notes xmlns:a="http://schemas.openxmlformats.org/drawingml/2006/main" xmlns:r="http://schemas.openxmlformats.org/officeDocument/2006/relationships" xmlns:p="http://schemas.openxmlformats.org/presentationml/2006/main">
+  <p:cSld>
+    <p:spTree>
+      <p:nvGrpSpPr>
+        <p:cNvPr id="1" name="">
+          <a:extLst>
+            <a:ext uri="{FF2B5EF4-FFF2-40B4-BE49-F238E27FC236}">
+              <a16:creationId xmlns:a16="http://schemas.microsoft.com/office/drawing/2014/main" id="{E0D9EAE7-9EAB-544B-26F0-D89AD57C0BCA}"/>
+            </a:ext>
+          </a:extLst>
+        </p:cNvPr>
+        <p:cNvGrpSpPr/>
+        <p:nvPr/>
+      </p:nvGrpSpPr>
+      <p:grpSpPr>
+        <a:xfrm>
+          <a:off x="0" y="0"/>
+          <a:ext cx="0" cy="0"/>
+          <a:chOff x="0" y="0"/>
+          <a:chExt cx="0" cy="0"/>
+        </a:xfrm>
+      </p:grpSpPr>
+      <p:sp>
+        <p:nvSpPr>
+          <p:cNvPr id="2" name="Marcador de imagen de diapositiva 1">
+            <a:extLst>
+              <a:ext uri="{FF2B5EF4-FFF2-40B4-BE49-F238E27FC236}">
+                <a16:creationId xmlns:a16="http://schemas.microsoft.com/office/drawing/2014/main" id="{77142DDC-39F3-B8EF-C550-B1BDBF798325}"/>
+              </a:ext>
+            </a:extLst>
+          </p:cNvPr>
+          <p:cNvSpPr>
+            <a:spLocks noGrp="1" noRot="1" noChangeAspect="1"/>
+          </p:cNvSpPr>
+          <p:nvPr>
+            <p:ph type="sldImg"/>
+          </p:nvPr>
+        </p:nvSpPr>
+        <p:spPr/>
+      </p:sp>
+      <p:sp>
+        <p:nvSpPr>
+          <p:cNvPr id="3" name="Marcador de notas 2">
+            <a:extLst>
+              <a:ext uri="{FF2B5EF4-FFF2-40B4-BE49-F238E27FC236}">
+                <a16:creationId xmlns:a16="http://schemas.microsoft.com/office/drawing/2014/main" id="{214E7676-8E00-A60E-B890-D4F612C9A57A}"/>
+              </a:ext>
+            </a:extLst>
+          </p:cNvPr>
+          <p:cNvSpPr>
+            <a:spLocks noGrp="1"/>
+          </p:cNvSpPr>
+          <p:nvPr>
+            <p:ph type="body" idx="1"/>
+          </p:nvPr>
+        </p:nvSpPr>
+        <p:spPr/>
+        <p:txBody>
+          <a:bodyPr/>
+          <a:lstStyle/>
+          <a:p>
+            <a:endParaRPr lang="es-ES" dirty="0"/>
+          </a:p>
+        </p:txBody>
+      </p:sp>
+      <p:sp>
+        <p:nvSpPr>
+          <p:cNvPr id="4" name="Marcador de número de diapositiva 3">
+            <a:extLst>
+              <a:ext uri="{FF2B5EF4-FFF2-40B4-BE49-F238E27FC236}">
+                <a16:creationId xmlns:a16="http://schemas.microsoft.com/office/drawing/2014/main" id="{8F8AAF8C-62CF-3619-1C70-91E48BE9A4C4}"/>
+              </a:ext>
+            </a:extLst>
+          </p:cNvPr>
+          <p:cNvSpPr>
+            <a:spLocks noGrp="1"/>
+          </p:cNvSpPr>
+          <p:nvPr>
+            <p:ph type="sldNum" sz="quarter" idx="5"/>
+          </p:nvPr>
+        </p:nvSpPr>
+        <p:spPr/>
+        <p:txBody>
+          <a:bodyPr/>
+          <a:lstStyle/>
+          <a:p>
+            <a:fld id="{676223B9-C868-4436-87D9-1A3152E1157A}" type="slidenum">
+              <a:rPr lang="es-ES" smtClean="0"/>
+              <a:t>13</a:t>
+            </a:fld>
+            <a:endParaRPr lang="es-ES"/>
+          </a:p>
+        </p:txBody>
+      </p:sp>
+    </p:spTree>
+    <p:extLst>
+      <p:ext uri="{BB962C8B-B14F-4D97-AF65-F5344CB8AC3E}">
+        <p14:creationId xmlns:p14="http://schemas.microsoft.com/office/powerpoint/2010/main" val="2163104795"/>
+      </p:ext>
+    </p:extLst>
+  </p:cSld>
+  <p:clrMapOvr>
+    <a:masterClrMapping/>
+  </p:clrMapOvr>
+</p:notes>
+</file>
+
+<file path=ppt/notesSlides/notesSlide12.xml><?xml version="1.0" encoding="utf-8"?>
+<p:notes xmlns:a="http://schemas.openxmlformats.org/drawingml/2006/main" xmlns:r="http://schemas.openxmlformats.org/officeDocument/2006/relationships" xmlns:p="http://schemas.openxmlformats.org/presentationml/2006/main">
+  <p:cSld>
+    <p:spTree>
+      <p:nvGrpSpPr>
+        <p:cNvPr id="1" name="">
+          <a:extLst>
+            <a:ext uri="{FF2B5EF4-FFF2-40B4-BE49-F238E27FC236}">
+              <a16:creationId xmlns:a16="http://schemas.microsoft.com/office/drawing/2014/main" id="{974169CA-A6E9-D0C3-4D3A-6AF908910447}"/>
+            </a:ext>
+          </a:extLst>
+        </p:cNvPr>
+        <p:cNvGrpSpPr/>
+        <p:nvPr/>
+      </p:nvGrpSpPr>
+      <p:grpSpPr>
+        <a:xfrm>
+          <a:off x="0" y="0"/>
+          <a:ext cx="0" cy="0"/>
+          <a:chOff x="0" y="0"/>
+          <a:chExt cx="0" cy="0"/>
+        </a:xfrm>
+      </p:grpSpPr>
+      <p:sp>
+        <p:nvSpPr>
+          <p:cNvPr id="2" name="Marcador de imagen de diapositiva 1">
+            <a:extLst>
+              <a:ext uri="{FF2B5EF4-FFF2-40B4-BE49-F238E27FC236}">
+                <a16:creationId xmlns:a16="http://schemas.microsoft.com/office/drawing/2014/main" id="{DEC97DB9-2632-3700-0312-BB76DC46DEE3}"/>
+              </a:ext>
+            </a:extLst>
+          </p:cNvPr>
+          <p:cNvSpPr>
+            <a:spLocks noGrp="1" noRot="1" noChangeAspect="1"/>
+          </p:cNvSpPr>
+          <p:nvPr>
+            <p:ph type="sldImg"/>
+          </p:nvPr>
+        </p:nvSpPr>
+        <p:spPr/>
+      </p:sp>
+      <p:sp>
+        <p:nvSpPr>
+          <p:cNvPr id="3" name="Marcador de notas 2">
+            <a:extLst>
+              <a:ext uri="{FF2B5EF4-FFF2-40B4-BE49-F238E27FC236}">
+                <a16:creationId xmlns:a16="http://schemas.microsoft.com/office/drawing/2014/main" id="{4A897758-8CC0-1479-13D7-87B5FBD747CB}"/>
+              </a:ext>
+            </a:extLst>
+          </p:cNvPr>
+          <p:cNvSpPr>
+            <a:spLocks noGrp="1"/>
+          </p:cNvSpPr>
+          <p:nvPr>
+            <p:ph type="body" idx="1"/>
+          </p:nvPr>
+        </p:nvSpPr>
+        <p:spPr/>
+        <p:txBody>
+          <a:bodyPr/>
+          <a:lstStyle/>
+          <a:p>
+            <a:endParaRPr lang="es-ES" dirty="0"/>
+          </a:p>
+        </p:txBody>
+      </p:sp>
+      <p:sp>
+        <p:nvSpPr>
+          <p:cNvPr id="4" name="Marcador de número de diapositiva 3">
+            <a:extLst>
+              <a:ext uri="{FF2B5EF4-FFF2-40B4-BE49-F238E27FC236}">
+                <a16:creationId xmlns:a16="http://schemas.microsoft.com/office/drawing/2014/main" id="{5060DEFB-1A44-3354-5B15-298FF8A10085}"/>
+              </a:ext>
+            </a:extLst>
+          </p:cNvPr>
+          <p:cNvSpPr>
+            <a:spLocks noGrp="1"/>
+          </p:cNvSpPr>
+          <p:nvPr>
+            <p:ph type="sldNum" sz="quarter" idx="5"/>
+          </p:nvPr>
+        </p:nvSpPr>
+        <p:spPr/>
+        <p:txBody>
+          <a:bodyPr/>
+          <a:lstStyle/>
+          <a:p>
+            <a:fld id="{676223B9-C868-4436-87D9-1A3152E1157A}" type="slidenum">
+              <a:rPr lang="es-ES" smtClean="0"/>
+              <a:t>14</a:t>
+            </a:fld>
+            <a:endParaRPr lang="es-ES"/>
+          </a:p>
+        </p:txBody>
+      </p:sp>
+    </p:spTree>
+    <p:extLst>
+      <p:ext uri="{BB962C8B-B14F-4D97-AF65-F5344CB8AC3E}">
+        <p14:creationId xmlns:p14="http://schemas.microsoft.com/office/powerpoint/2010/main" val="1576459404"/>
+      </p:ext>
+    </p:extLst>
+  </p:cSld>
+  <p:clrMapOvr>
+    <a:masterClrMapping/>
+  </p:clrMapOvr>
+</p:notes>
+</file>
+
 <file path=ppt/notesSlides/notesSlide2.xml><?xml version="1.0" encoding="utf-8"?>
 <p:notes xmlns:a="http://schemas.openxmlformats.org/drawingml/2006/main" xmlns:r="http://schemas.openxmlformats.org/officeDocument/2006/relationships" xmlns:p="http://schemas.openxmlformats.org/presentationml/2006/main">
   <p:cSld>
@@ -878,6 +1208,330 @@
         <p:cNvPr id="1" name="">
           <a:extLst>
             <a:ext uri="{FF2B5EF4-FFF2-40B4-BE49-F238E27FC236}">
+              <a16:creationId xmlns:a16="http://schemas.microsoft.com/office/drawing/2014/main" id="{333AFEFD-B507-247B-F58E-711861562E96}"/>
+            </a:ext>
+          </a:extLst>
+        </p:cNvPr>
+        <p:cNvGrpSpPr/>
+        <p:nvPr/>
+      </p:nvGrpSpPr>
+      <p:grpSpPr>
+        <a:xfrm>
+          <a:off x="0" y="0"/>
+          <a:ext cx="0" cy="0"/>
+          <a:chOff x="0" y="0"/>
+          <a:chExt cx="0" cy="0"/>
+        </a:xfrm>
+      </p:grpSpPr>
+      <p:sp>
+        <p:nvSpPr>
+          <p:cNvPr id="2" name="Marcador de imagen de diapositiva 1">
+            <a:extLst>
+              <a:ext uri="{FF2B5EF4-FFF2-40B4-BE49-F238E27FC236}">
+                <a16:creationId xmlns:a16="http://schemas.microsoft.com/office/drawing/2014/main" id="{9448D75B-541D-4818-C136-BBE3071AB9A3}"/>
+              </a:ext>
+            </a:extLst>
+          </p:cNvPr>
+          <p:cNvSpPr>
+            <a:spLocks noGrp="1" noRot="1" noChangeAspect="1"/>
+          </p:cNvSpPr>
+          <p:nvPr>
+            <p:ph type="sldImg"/>
+          </p:nvPr>
+        </p:nvSpPr>
+        <p:spPr/>
+      </p:sp>
+      <p:sp>
+        <p:nvSpPr>
+          <p:cNvPr id="3" name="Marcador de notas 2">
+            <a:extLst>
+              <a:ext uri="{FF2B5EF4-FFF2-40B4-BE49-F238E27FC236}">
+                <a16:creationId xmlns:a16="http://schemas.microsoft.com/office/drawing/2014/main" id="{A7417D2C-6122-996A-4D0E-7B47260006E5}"/>
+              </a:ext>
+            </a:extLst>
+          </p:cNvPr>
+          <p:cNvSpPr>
+            <a:spLocks noGrp="1"/>
+          </p:cNvSpPr>
+          <p:nvPr>
+            <p:ph type="body" idx="1"/>
+          </p:nvPr>
+        </p:nvSpPr>
+        <p:spPr/>
+        <p:txBody>
+          <a:bodyPr/>
+          <a:lstStyle/>
+          <a:p>
+            <a:endParaRPr lang="es-ES" dirty="0"/>
+          </a:p>
+        </p:txBody>
+      </p:sp>
+      <p:sp>
+        <p:nvSpPr>
+          <p:cNvPr id="4" name="Marcador de número de diapositiva 3">
+            <a:extLst>
+              <a:ext uri="{FF2B5EF4-FFF2-40B4-BE49-F238E27FC236}">
+                <a16:creationId xmlns:a16="http://schemas.microsoft.com/office/drawing/2014/main" id="{FE99F406-AF99-391D-EB3C-A8F84CDAC3CE}"/>
+              </a:ext>
+            </a:extLst>
+          </p:cNvPr>
+          <p:cNvSpPr>
+            <a:spLocks noGrp="1"/>
+          </p:cNvSpPr>
+          <p:nvPr>
+            <p:ph type="sldNum" sz="quarter" idx="5"/>
+          </p:nvPr>
+        </p:nvSpPr>
+        <p:spPr/>
+        <p:txBody>
+          <a:bodyPr/>
+          <a:lstStyle/>
+          <a:p>
+            <a:fld id="{676223B9-C868-4436-87D9-1A3152E1157A}" type="slidenum">
+              <a:rPr lang="es-ES" smtClean="0"/>
+              <a:t>5</a:t>
+            </a:fld>
+            <a:endParaRPr lang="es-ES"/>
+          </a:p>
+        </p:txBody>
+      </p:sp>
+    </p:spTree>
+    <p:extLst>
+      <p:ext uri="{BB962C8B-B14F-4D97-AF65-F5344CB8AC3E}">
+        <p14:creationId xmlns:p14="http://schemas.microsoft.com/office/powerpoint/2010/main" val="4082035406"/>
+      </p:ext>
+    </p:extLst>
+  </p:cSld>
+  <p:clrMapOvr>
+    <a:masterClrMapping/>
+  </p:clrMapOvr>
+</p:notes>
+</file>
+
+<file path=ppt/notesSlides/notesSlide4.xml><?xml version="1.0" encoding="utf-8"?>
+<p:notes xmlns:a="http://schemas.openxmlformats.org/drawingml/2006/main" xmlns:r="http://schemas.openxmlformats.org/officeDocument/2006/relationships" xmlns:p="http://schemas.openxmlformats.org/presentationml/2006/main">
+  <p:cSld>
+    <p:spTree>
+      <p:nvGrpSpPr>
+        <p:cNvPr id="1" name="">
+          <a:extLst>
+            <a:ext uri="{FF2B5EF4-FFF2-40B4-BE49-F238E27FC236}">
+              <a16:creationId xmlns:a16="http://schemas.microsoft.com/office/drawing/2014/main" id="{9D2D4DB8-4BD0-4C04-11AA-EA64AD7709CC}"/>
+            </a:ext>
+          </a:extLst>
+        </p:cNvPr>
+        <p:cNvGrpSpPr/>
+        <p:nvPr/>
+      </p:nvGrpSpPr>
+      <p:grpSpPr>
+        <a:xfrm>
+          <a:off x="0" y="0"/>
+          <a:ext cx="0" cy="0"/>
+          <a:chOff x="0" y="0"/>
+          <a:chExt cx="0" cy="0"/>
+        </a:xfrm>
+      </p:grpSpPr>
+      <p:sp>
+        <p:nvSpPr>
+          <p:cNvPr id="2" name="Marcador de imagen de diapositiva 1">
+            <a:extLst>
+              <a:ext uri="{FF2B5EF4-FFF2-40B4-BE49-F238E27FC236}">
+                <a16:creationId xmlns:a16="http://schemas.microsoft.com/office/drawing/2014/main" id="{1D65D447-3652-3CFC-DF28-7AE0BC83B9AF}"/>
+              </a:ext>
+            </a:extLst>
+          </p:cNvPr>
+          <p:cNvSpPr>
+            <a:spLocks noGrp="1" noRot="1" noChangeAspect="1"/>
+          </p:cNvSpPr>
+          <p:nvPr>
+            <p:ph type="sldImg"/>
+          </p:nvPr>
+        </p:nvSpPr>
+        <p:spPr/>
+      </p:sp>
+      <p:sp>
+        <p:nvSpPr>
+          <p:cNvPr id="3" name="Marcador de notas 2">
+            <a:extLst>
+              <a:ext uri="{FF2B5EF4-FFF2-40B4-BE49-F238E27FC236}">
+                <a16:creationId xmlns:a16="http://schemas.microsoft.com/office/drawing/2014/main" id="{F51236E7-899E-110C-0F29-B829B2792958}"/>
+              </a:ext>
+            </a:extLst>
+          </p:cNvPr>
+          <p:cNvSpPr>
+            <a:spLocks noGrp="1"/>
+          </p:cNvSpPr>
+          <p:nvPr>
+            <p:ph type="body" idx="1"/>
+          </p:nvPr>
+        </p:nvSpPr>
+        <p:spPr/>
+        <p:txBody>
+          <a:bodyPr/>
+          <a:lstStyle/>
+          <a:p>
+            <a:endParaRPr lang="es-ES" dirty="0"/>
+          </a:p>
+        </p:txBody>
+      </p:sp>
+      <p:sp>
+        <p:nvSpPr>
+          <p:cNvPr id="4" name="Marcador de número de diapositiva 3">
+            <a:extLst>
+              <a:ext uri="{FF2B5EF4-FFF2-40B4-BE49-F238E27FC236}">
+                <a16:creationId xmlns:a16="http://schemas.microsoft.com/office/drawing/2014/main" id="{556D4F0D-D000-5E61-5249-B7278695885C}"/>
+              </a:ext>
+            </a:extLst>
+          </p:cNvPr>
+          <p:cNvSpPr>
+            <a:spLocks noGrp="1"/>
+          </p:cNvSpPr>
+          <p:nvPr>
+            <p:ph type="sldNum" sz="quarter" idx="5"/>
+          </p:nvPr>
+        </p:nvSpPr>
+        <p:spPr/>
+        <p:txBody>
+          <a:bodyPr/>
+          <a:lstStyle/>
+          <a:p>
+            <a:fld id="{676223B9-C868-4436-87D9-1A3152E1157A}" type="slidenum">
+              <a:rPr lang="es-ES" smtClean="0"/>
+              <a:t>6</a:t>
+            </a:fld>
+            <a:endParaRPr lang="es-ES"/>
+          </a:p>
+        </p:txBody>
+      </p:sp>
+    </p:spTree>
+    <p:extLst>
+      <p:ext uri="{BB962C8B-B14F-4D97-AF65-F5344CB8AC3E}">
+        <p14:creationId xmlns:p14="http://schemas.microsoft.com/office/powerpoint/2010/main" val="3594700699"/>
+      </p:ext>
+    </p:extLst>
+  </p:cSld>
+  <p:clrMapOvr>
+    <a:masterClrMapping/>
+  </p:clrMapOvr>
+</p:notes>
+</file>
+
+<file path=ppt/notesSlides/notesSlide5.xml><?xml version="1.0" encoding="utf-8"?>
+<p:notes xmlns:a="http://schemas.openxmlformats.org/drawingml/2006/main" xmlns:r="http://schemas.openxmlformats.org/officeDocument/2006/relationships" xmlns:p="http://schemas.openxmlformats.org/presentationml/2006/main">
+  <p:cSld>
+    <p:spTree>
+      <p:nvGrpSpPr>
+        <p:cNvPr id="1" name="">
+          <a:extLst>
+            <a:ext uri="{FF2B5EF4-FFF2-40B4-BE49-F238E27FC236}">
+              <a16:creationId xmlns:a16="http://schemas.microsoft.com/office/drawing/2014/main" id="{7E3BE5FE-E5FD-AA88-D645-CF52CCFB6618}"/>
+            </a:ext>
+          </a:extLst>
+        </p:cNvPr>
+        <p:cNvGrpSpPr/>
+        <p:nvPr/>
+      </p:nvGrpSpPr>
+      <p:grpSpPr>
+        <a:xfrm>
+          <a:off x="0" y="0"/>
+          <a:ext cx="0" cy="0"/>
+          <a:chOff x="0" y="0"/>
+          <a:chExt cx="0" cy="0"/>
+        </a:xfrm>
+      </p:grpSpPr>
+      <p:sp>
+        <p:nvSpPr>
+          <p:cNvPr id="2" name="Marcador de imagen de diapositiva 1">
+            <a:extLst>
+              <a:ext uri="{FF2B5EF4-FFF2-40B4-BE49-F238E27FC236}">
+                <a16:creationId xmlns:a16="http://schemas.microsoft.com/office/drawing/2014/main" id="{C9A2B5C6-5A39-5D7A-A1F1-250415CC2E3C}"/>
+              </a:ext>
+            </a:extLst>
+          </p:cNvPr>
+          <p:cNvSpPr>
+            <a:spLocks noGrp="1" noRot="1" noChangeAspect="1"/>
+          </p:cNvSpPr>
+          <p:nvPr>
+            <p:ph type="sldImg"/>
+          </p:nvPr>
+        </p:nvSpPr>
+        <p:spPr/>
+      </p:sp>
+      <p:sp>
+        <p:nvSpPr>
+          <p:cNvPr id="3" name="Marcador de notas 2">
+            <a:extLst>
+              <a:ext uri="{FF2B5EF4-FFF2-40B4-BE49-F238E27FC236}">
+                <a16:creationId xmlns:a16="http://schemas.microsoft.com/office/drawing/2014/main" id="{382A750A-9F6E-00EF-5FF7-AD6FD79416DE}"/>
+              </a:ext>
+            </a:extLst>
+          </p:cNvPr>
+          <p:cNvSpPr>
+            <a:spLocks noGrp="1"/>
+          </p:cNvSpPr>
+          <p:nvPr>
+            <p:ph type="body" idx="1"/>
+          </p:nvPr>
+        </p:nvSpPr>
+        <p:spPr/>
+        <p:txBody>
+          <a:bodyPr/>
+          <a:lstStyle/>
+          <a:p>
+            <a:endParaRPr lang="es-ES" dirty="0"/>
+          </a:p>
+        </p:txBody>
+      </p:sp>
+      <p:sp>
+        <p:nvSpPr>
+          <p:cNvPr id="4" name="Marcador de número de diapositiva 3">
+            <a:extLst>
+              <a:ext uri="{FF2B5EF4-FFF2-40B4-BE49-F238E27FC236}">
+                <a16:creationId xmlns:a16="http://schemas.microsoft.com/office/drawing/2014/main" id="{48F4681F-530D-8388-5196-6754E31E4689}"/>
+              </a:ext>
+            </a:extLst>
+          </p:cNvPr>
+          <p:cNvSpPr>
+            <a:spLocks noGrp="1"/>
+          </p:cNvSpPr>
+          <p:nvPr>
+            <p:ph type="sldNum" sz="quarter" idx="5"/>
+          </p:nvPr>
+        </p:nvSpPr>
+        <p:spPr/>
+        <p:txBody>
+          <a:bodyPr/>
+          <a:lstStyle/>
+          <a:p>
+            <a:fld id="{676223B9-C868-4436-87D9-1A3152E1157A}" type="slidenum">
+              <a:rPr lang="es-ES" smtClean="0"/>
+              <a:t>7</a:t>
+            </a:fld>
+            <a:endParaRPr lang="es-ES"/>
+          </a:p>
+        </p:txBody>
+      </p:sp>
+    </p:spTree>
+    <p:extLst>
+      <p:ext uri="{BB962C8B-B14F-4D97-AF65-F5344CB8AC3E}">
+        <p14:creationId xmlns:p14="http://schemas.microsoft.com/office/powerpoint/2010/main" val="3538558381"/>
+      </p:ext>
+    </p:extLst>
+  </p:cSld>
+  <p:clrMapOvr>
+    <a:masterClrMapping/>
+  </p:clrMapOvr>
+</p:notes>
+</file>
+
+<file path=ppt/notesSlides/notesSlide6.xml><?xml version="1.0" encoding="utf-8"?>
+<p:notes xmlns:a="http://schemas.openxmlformats.org/drawingml/2006/main" xmlns:r="http://schemas.openxmlformats.org/officeDocument/2006/relationships" xmlns:p="http://schemas.openxmlformats.org/presentationml/2006/main">
+  <p:cSld>
+    <p:spTree>
+      <p:nvGrpSpPr>
+        <p:cNvPr id="1" name="">
+          <a:extLst>
+            <a:ext uri="{FF2B5EF4-FFF2-40B4-BE49-F238E27FC236}">
               <a16:creationId xmlns:a16="http://schemas.microsoft.com/office/drawing/2014/main" id="{AEE2BF37-98F6-CD9B-2255-0A64B5CEA44D}"/>
             </a:ext>
           </a:extLst>
@@ -959,7 +1613,7 @@
           <a:p>
             <a:fld id="{676223B9-C868-4436-87D9-1A3152E1157A}" type="slidenum">
               <a:rPr lang="es-ES" smtClean="0"/>
-              <a:t>5</a:t>
+              <a:t>8</a:t>
             </a:fld>
             <a:endParaRPr lang="es-ES"/>
           </a:p>
@@ -978,7 +1632,7 @@
 </p:notes>
 </file>
 
-<file path=ppt/notesSlides/notesSlide4.xml><?xml version="1.0" encoding="utf-8"?>
+<file path=ppt/notesSlides/notesSlide7.xml><?xml version="1.0" encoding="utf-8"?>
 <p:notes xmlns:a="http://schemas.openxmlformats.org/drawingml/2006/main" xmlns:r="http://schemas.openxmlformats.org/officeDocument/2006/relationships" xmlns:p="http://schemas.openxmlformats.org/presentationml/2006/main">
   <p:cSld>
     <p:spTree>
@@ -1067,7 +1721,7 @@
           <a:p>
             <a:fld id="{676223B9-C868-4436-87D9-1A3152E1157A}" type="slidenum">
               <a:rPr lang="es-ES" smtClean="0"/>
-              <a:t>6</a:t>
+              <a:t>9</a:t>
             </a:fld>
             <a:endParaRPr lang="es-ES"/>
           </a:p>
@@ -1086,7 +1740,7 @@
 </p:notes>
 </file>
 
-<file path=ppt/notesSlides/notesSlide5.xml><?xml version="1.0" encoding="utf-8"?>
+<file path=ppt/notesSlides/notesSlide8.xml><?xml version="1.0" encoding="utf-8"?>
 <p:notes xmlns:a="http://schemas.openxmlformats.org/drawingml/2006/main" xmlns:r="http://schemas.openxmlformats.org/officeDocument/2006/relationships" xmlns:p="http://schemas.openxmlformats.org/presentationml/2006/main">
   <p:cSld>
     <p:spTree>
@@ -1094,7 +1748,7 @@
         <p:cNvPr id="1" name="">
           <a:extLst>
             <a:ext uri="{FF2B5EF4-FFF2-40B4-BE49-F238E27FC236}">
-              <a16:creationId xmlns:a16="http://schemas.microsoft.com/office/drawing/2014/main" id="{E0D9EAE7-9EAB-544B-26F0-D89AD57C0BCA}"/>
+              <a16:creationId xmlns:a16="http://schemas.microsoft.com/office/drawing/2014/main" id="{C0F18364-5FB9-A910-CA28-0CB1AB8B1C90}"/>
             </a:ext>
           </a:extLst>
         </p:cNvPr>
@@ -1114,7 +1768,7 @@
           <p:cNvPr id="2" name="Marcador de imagen de diapositiva 1">
             <a:extLst>
               <a:ext uri="{FF2B5EF4-FFF2-40B4-BE49-F238E27FC236}">
-                <a16:creationId xmlns:a16="http://schemas.microsoft.com/office/drawing/2014/main" id="{77142DDC-39F3-B8EF-C550-B1BDBF798325}"/>
+                <a16:creationId xmlns:a16="http://schemas.microsoft.com/office/drawing/2014/main" id="{2342B0AC-0A86-A94B-B392-F0CDBE2FB789}"/>
               </a:ext>
             </a:extLst>
           </p:cNvPr>
@@ -1132,7 +1786,7 @@
           <p:cNvPr id="3" name="Marcador de notas 2">
             <a:extLst>
               <a:ext uri="{FF2B5EF4-FFF2-40B4-BE49-F238E27FC236}">
-                <a16:creationId xmlns:a16="http://schemas.microsoft.com/office/drawing/2014/main" id="{214E7676-8E00-A60E-B890-D4F612C9A57A}"/>
+                <a16:creationId xmlns:a16="http://schemas.microsoft.com/office/drawing/2014/main" id="{F652A67F-0647-B64F-B721-F9892CB31156}"/>
               </a:ext>
             </a:extLst>
           </p:cNvPr>
@@ -1157,7 +1811,7 @@
           <p:cNvPr id="4" name="Marcador de número de diapositiva 3">
             <a:extLst>
               <a:ext uri="{FF2B5EF4-FFF2-40B4-BE49-F238E27FC236}">
-                <a16:creationId xmlns:a16="http://schemas.microsoft.com/office/drawing/2014/main" id="{8F8AAF8C-62CF-3619-1C70-91E48BE9A4C4}"/>
+                <a16:creationId xmlns:a16="http://schemas.microsoft.com/office/drawing/2014/main" id="{25370700-2B4D-6DEC-4032-98ECF4675F2A}"/>
               </a:ext>
             </a:extLst>
           </p:cNvPr>
@@ -1175,7 +1829,7 @@
           <a:p>
             <a:fld id="{676223B9-C868-4436-87D9-1A3152E1157A}" type="slidenum">
               <a:rPr lang="es-ES" smtClean="0"/>
-              <a:t>7</a:t>
+              <a:t>10</a:t>
             </a:fld>
             <a:endParaRPr lang="es-ES"/>
           </a:p>
@@ -1184,7 +1838,7 @@
     </p:spTree>
     <p:extLst>
       <p:ext uri="{BB962C8B-B14F-4D97-AF65-F5344CB8AC3E}">
-        <p14:creationId xmlns:p14="http://schemas.microsoft.com/office/powerpoint/2010/main" val="2163104795"/>
+        <p14:creationId xmlns:p14="http://schemas.microsoft.com/office/powerpoint/2010/main" val="2048767167"/>
       </p:ext>
     </p:extLst>
   </p:cSld>
@@ -1194,7 +1848,7 @@
 </p:notes>
 </file>
 
-<file path=ppt/notesSlides/notesSlide6.xml><?xml version="1.0" encoding="utf-8"?>
+<file path=ppt/notesSlides/notesSlide9.xml><?xml version="1.0" encoding="utf-8"?>
 <p:notes xmlns:a="http://schemas.openxmlformats.org/drawingml/2006/main" xmlns:r="http://schemas.openxmlformats.org/officeDocument/2006/relationships" xmlns:p="http://schemas.openxmlformats.org/presentationml/2006/main">
   <p:cSld>
     <p:spTree>
@@ -1202,7 +1856,7 @@
         <p:cNvPr id="1" name="">
           <a:extLst>
             <a:ext uri="{FF2B5EF4-FFF2-40B4-BE49-F238E27FC236}">
-              <a16:creationId xmlns:a16="http://schemas.microsoft.com/office/drawing/2014/main" id="{974169CA-A6E9-D0C3-4D3A-6AF908910447}"/>
+              <a16:creationId xmlns:a16="http://schemas.microsoft.com/office/drawing/2014/main" id="{3BEF9B3B-6F8B-305A-3973-B610A8B22DB5}"/>
             </a:ext>
           </a:extLst>
         </p:cNvPr>
@@ -1222,7 +1876,7 @@
           <p:cNvPr id="2" name="Marcador de imagen de diapositiva 1">
             <a:extLst>
               <a:ext uri="{FF2B5EF4-FFF2-40B4-BE49-F238E27FC236}">
-                <a16:creationId xmlns:a16="http://schemas.microsoft.com/office/drawing/2014/main" id="{DEC97DB9-2632-3700-0312-BB76DC46DEE3}"/>
+                <a16:creationId xmlns:a16="http://schemas.microsoft.com/office/drawing/2014/main" id="{50D00C3A-4E07-51E6-67AF-D1D6321434BC}"/>
               </a:ext>
             </a:extLst>
           </p:cNvPr>
@@ -1240,7 +1894,7 @@
           <p:cNvPr id="3" name="Marcador de notas 2">
             <a:extLst>
               <a:ext uri="{FF2B5EF4-FFF2-40B4-BE49-F238E27FC236}">
-                <a16:creationId xmlns:a16="http://schemas.microsoft.com/office/drawing/2014/main" id="{4A897758-8CC0-1479-13D7-87B5FBD747CB}"/>
+                <a16:creationId xmlns:a16="http://schemas.microsoft.com/office/drawing/2014/main" id="{2EB860B7-B37C-11E5-FD9C-B32D8E904243}"/>
               </a:ext>
             </a:extLst>
           </p:cNvPr>
@@ -1265,7 +1919,7 @@
           <p:cNvPr id="4" name="Marcador de número de diapositiva 3">
             <a:extLst>
               <a:ext uri="{FF2B5EF4-FFF2-40B4-BE49-F238E27FC236}">
-                <a16:creationId xmlns:a16="http://schemas.microsoft.com/office/drawing/2014/main" id="{5060DEFB-1A44-3354-5B15-298FF8A10085}"/>
+                <a16:creationId xmlns:a16="http://schemas.microsoft.com/office/drawing/2014/main" id="{5973A8A5-B7C3-21AA-7A30-7D5CA8B9FC2D}"/>
               </a:ext>
             </a:extLst>
           </p:cNvPr>
@@ -1283,7 +1937,7 @@
           <a:p>
             <a:fld id="{676223B9-C868-4436-87D9-1A3152E1157A}" type="slidenum">
               <a:rPr lang="es-ES" smtClean="0"/>
-              <a:t>8</a:t>
+              <a:t>11</a:t>
             </a:fld>
             <a:endParaRPr lang="es-ES"/>
           </a:p>
@@ -1292,7 +1946,7 @@
     </p:spTree>
     <p:extLst>
       <p:ext uri="{BB962C8B-B14F-4D97-AF65-F5344CB8AC3E}">
-        <p14:creationId xmlns:p14="http://schemas.microsoft.com/office/powerpoint/2010/main" val="1576459404"/>
+        <p14:creationId xmlns:p14="http://schemas.microsoft.com/office/powerpoint/2010/main" val="3235359734"/>
       </p:ext>
     </p:extLst>
   </p:cSld>
@@ -3289,6 +3943,2576 @@
 </p:sld>
 </file>
 
+<file path=ppt/slides/slide10.xml><?xml version="1.0" encoding="utf-8"?>
+<p:sld xmlns:a="http://schemas.openxmlformats.org/drawingml/2006/main" xmlns:r="http://schemas.openxmlformats.org/officeDocument/2006/relationships" xmlns:p="http://schemas.openxmlformats.org/presentationml/2006/main">
+  <p:cSld>
+    <p:spTree>
+      <p:nvGrpSpPr>
+        <p:cNvPr id="1" name="">
+          <a:extLst>
+            <a:ext uri="{FF2B5EF4-FFF2-40B4-BE49-F238E27FC236}">
+              <a16:creationId xmlns:a16="http://schemas.microsoft.com/office/drawing/2014/main" id="{5F3AB2D8-1C39-9C66-9B89-D566CC698772}"/>
+            </a:ext>
+          </a:extLst>
+        </p:cNvPr>
+        <p:cNvGrpSpPr/>
+        <p:nvPr/>
+      </p:nvGrpSpPr>
+      <p:grpSpPr>
+        <a:xfrm>
+          <a:off x="0" y="0"/>
+          <a:ext cx="0" cy="0"/>
+          <a:chOff x="0" y="0"/>
+          <a:chExt cx="0" cy="0"/>
+        </a:xfrm>
+      </p:grpSpPr>
+      <p:sp>
+        <p:nvSpPr>
+          <p:cNvPr id="16" name="object 16">
+            <a:extLst>
+              <a:ext uri="{FF2B5EF4-FFF2-40B4-BE49-F238E27FC236}">
+                <a16:creationId xmlns:a16="http://schemas.microsoft.com/office/drawing/2014/main" id="{E2D48625-1C82-DBB4-913C-70F6C61D1B1A}"/>
+              </a:ext>
+            </a:extLst>
+          </p:cNvPr>
+          <p:cNvSpPr txBox="1">
+            <a:spLocks noGrp="1"/>
+          </p:cNvSpPr>
+          <p:nvPr>
+            <p:ph type="title"/>
+          </p:nvPr>
+        </p:nvSpPr>
+        <p:spPr>
+          <a:xfrm>
+            <a:off x="685800" y="408883"/>
+            <a:ext cx="10994410" cy="874598"/>
+          </a:xfrm>
+          <a:prstGeom prst="rect">
+            <a:avLst/>
+          </a:prstGeom>
+        </p:spPr>
+        <p:txBody>
+          <a:bodyPr vert="horz" wrap="square" lIns="0" tIns="12700" rIns="0" bIns="0" rtlCol="0">
+            <a:spAutoFit/>
+          </a:bodyPr>
+          <a:lstStyle/>
+          <a:p>
+            <a:pPr marL="12700" algn="just">
+              <a:lnSpc>
+                <a:spcPct val="100000"/>
+              </a:lnSpc>
+              <a:spcBef>
+                <a:spcPts val="100"/>
+              </a:spcBef>
+            </a:pPr>
+            <a:r>
+              <a:rPr lang="en-US" dirty="0"/>
+              <a:t>Learning outcome #2a – Notebook section 2. Layout Fundamentals – </a:t>
+            </a:r>
+            <a:r>
+              <a:rPr lang="en-US" dirty="0">
+                <a:solidFill>
+                  <a:srgbClr val="FF0000"/>
+                </a:solidFill>
+              </a:rPr>
+              <a:t>1 slide per component</a:t>
+            </a:r>
+            <a:br>
+              <a:rPr lang="en-US" sz="2500" dirty="0"/>
+            </a:br>
+            <a:r>
+              <a:rPr lang="en-US" sz="1800" b="0" i="1" dirty="0"/>
+              <a:t>“Use your design results from Lab2 and Lab3 to create layout instances of your designed components: DCs, MMIs, MZIs &amp; Ring Resonators” </a:t>
+            </a:r>
+            <a:r>
+              <a:rPr lang="en-US" sz="1800" b="0" i="1" dirty="0">
+                <a:solidFill>
+                  <a:srgbClr val="FF0000"/>
+                </a:solidFill>
+                <a:sym typeface="Wingdings" pitchFamily="2" charset="2"/>
+              </a:rPr>
+              <a:t> Make cells for all your components</a:t>
+            </a:r>
+            <a:endParaRPr sz="2500" b="0" i="1" dirty="0">
+              <a:solidFill>
+                <a:srgbClr val="FF0000"/>
+              </a:solidFill>
+              <a:latin typeface="+mj-lt"/>
+              <a:cs typeface="Lucida Sans"/>
+            </a:endParaRPr>
+          </a:p>
+        </p:txBody>
+      </p:sp>
+      <p:pic>
+        <p:nvPicPr>
+          <p:cNvPr id="83" name="Gráfico 82">
+            <a:extLst>
+              <a:ext uri="{FF2B5EF4-FFF2-40B4-BE49-F238E27FC236}">
+                <a16:creationId xmlns:a16="http://schemas.microsoft.com/office/drawing/2014/main" id="{CCFA9FF5-8FFE-3786-7529-79975F051318}"/>
+              </a:ext>
+            </a:extLst>
+          </p:cNvPr>
+          <p:cNvPicPr>
+            <a:picLocks noChangeAspect="1"/>
+          </p:cNvPicPr>
+          <p:nvPr/>
+        </p:nvPicPr>
+        <p:blipFill>
+          <a:blip>
+            <a:extLst>
+              <a:ext uri="{96DAC541-7B7A-43D3-8B79-37D633B846F1}">
+                <asvg:svgBlip xmlns:asvg="http://schemas.microsoft.com/office/drawing/2016/SVG/main" r:embed="rId3"/>
+              </a:ext>
+            </a:extLst>
+          </a:blip>
+          <a:stretch>
+            <a:fillRect/>
+          </a:stretch>
+        </p:blipFill>
+        <p:spPr>
+          <a:xfrm>
+            <a:off x="5045006" y="6356057"/>
+            <a:ext cx="6409575" cy="363174"/>
+          </a:xfrm>
+          <a:prstGeom prst="rect">
+            <a:avLst/>
+          </a:prstGeom>
+        </p:spPr>
+      </p:pic>
+      <p:sp>
+        <p:nvSpPr>
+          <p:cNvPr id="84" name="Marcador de número de diapositiva 83">
+            <a:extLst>
+              <a:ext uri="{FF2B5EF4-FFF2-40B4-BE49-F238E27FC236}">
+                <a16:creationId xmlns:a16="http://schemas.microsoft.com/office/drawing/2014/main" id="{8AE23808-3086-B1BD-C63A-C0F94EA0DEBC}"/>
+              </a:ext>
+            </a:extLst>
+          </p:cNvPr>
+          <p:cNvSpPr>
+            <a:spLocks noGrp="1"/>
+          </p:cNvSpPr>
+          <p:nvPr>
+            <p:ph type="sldNum" sz="quarter" idx="7"/>
+          </p:nvPr>
+        </p:nvSpPr>
+        <p:spPr/>
+        <p:txBody>
+          <a:bodyPr/>
+          <a:lstStyle/>
+          <a:p>
+            <a:fld id="{B6F15528-21DE-4FAA-801E-634DDDAF4B2B}" type="slidenum">
+              <a:rPr lang="es-ES" smtClean="0"/>
+              <a:t>10</a:t>
+            </a:fld>
+            <a:endParaRPr lang="es-ES"/>
+          </a:p>
+        </p:txBody>
+      </p:sp>
+      <p:sp>
+        <p:nvSpPr>
+          <p:cNvPr id="3" name="Marcador de pie de página 2">
+            <a:extLst>
+              <a:ext uri="{FF2B5EF4-FFF2-40B4-BE49-F238E27FC236}">
+                <a16:creationId xmlns:a16="http://schemas.microsoft.com/office/drawing/2014/main" id="{9729283B-E105-B3E7-20B4-7BCEFC0E71BE}"/>
+              </a:ext>
+            </a:extLst>
+          </p:cNvPr>
+          <p:cNvSpPr>
+            <a:spLocks noGrp="1"/>
+          </p:cNvSpPr>
+          <p:nvPr>
+            <p:ph type="ftr" sz="quarter" idx="5"/>
+          </p:nvPr>
+        </p:nvSpPr>
+        <p:spPr/>
+        <p:txBody>
+          <a:bodyPr/>
+          <a:lstStyle/>
+          <a:p>
+            <a:pPr marL="12700">
+              <a:spcBef>
+                <a:spcPts val="15"/>
+              </a:spcBef>
+            </a:pPr>
+            <a:r>
+              <a:rPr lang="es-ES" spc="-5"/>
+              <a:t>LAB 4.0. LAYOUT</a:t>
+            </a:r>
+            <a:endParaRPr lang="es-ES" spc="-5" dirty="0"/>
+          </a:p>
+        </p:txBody>
+      </p:sp>
+      <p:sp>
+        <p:nvSpPr>
+          <p:cNvPr id="6" name="Rectángulo 5">
+            <a:extLst>
+              <a:ext uri="{FF2B5EF4-FFF2-40B4-BE49-F238E27FC236}">
+                <a16:creationId xmlns:a16="http://schemas.microsoft.com/office/drawing/2014/main" id="{E636A2A0-F851-A09C-1515-FFD9AC73AE00}"/>
+              </a:ext>
+            </a:extLst>
+          </p:cNvPr>
+          <p:cNvSpPr/>
+          <p:nvPr/>
+        </p:nvSpPr>
+        <p:spPr>
+          <a:xfrm>
+            <a:off x="609441" y="1418373"/>
+            <a:ext cx="5332571" cy="4751794"/>
+          </a:xfrm>
+          <a:prstGeom prst="rect">
+            <a:avLst/>
+          </a:prstGeom>
+          <a:noFill/>
+          <a:ln w="28575">
+            <a:solidFill>
+              <a:srgbClr val="E0700D"/>
+            </a:solidFill>
+          </a:ln>
+        </p:spPr>
+        <p:style>
+          <a:lnRef idx="2">
+            <a:schemeClr val="accent1">
+              <a:shade val="15000"/>
+            </a:schemeClr>
+          </a:lnRef>
+          <a:fillRef idx="1">
+            <a:schemeClr val="accent1"/>
+          </a:fillRef>
+          <a:effectRef idx="0">
+            <a:schemeClr val="accent1"/>
+          </a:effectRef>
+          <a:fontRef idx="minor">
+            <a:schemeClr val="lt1"/>
+          </a:fontRef>
+        </p:style>
+        <p:txBody>
+          <a:bodyPr rtlCol="0" anchor="ctr"/>
+          <a:lstStyle/>
+          <a:p>
+            <a:pPr algn="ctr"/>
+            <a:endParaRPr lang="en-US"/>
+          </a:p>
+        </p:txBody>
+      </p:sp>
+      <p:sp>
+        <p:nvSpPr>
+          <p:cNvPr id="7" name="CuadroTexto 6">
+            <a:extLst>
+              <a:ext uri="{FF2B5EF4-FFF2-40B4-BE49-F238E27FC236}">
+                <a16:creationId xmlns:a16="http://schemas.microsoft.com/office/drawing/2014/main" id="{74C3D586-F8DC-1AE0-3EF9-C133001130A4}"/>
+              </a:ext>
+            </a:extLst>
+          </p:cNvPr>
+          <p:cNvSpPr txBox="1"/>
+          <p:nvPr/>
+        </p:nvSpPr>
+        <p:spPr>
+          <a:xfrm>
+            <a:off x="2063316" y="2494306"/>
+            <a:ext cx="2424831" cy="646331"/>
+          </a:xfrm>
+          <a:prstGeom prst="rect">
+            <a:avLst/>
+          </a:prstGeom>
+          <a:noFill/>
+        </p:spPr>
+        <p:txBody>
+          <a:bodyPr wrap="none" rtlCol="0">
+            <a:spAutoFit/>
+          </a:bodyPr>
+          <a:lstStyle/>
+          <a:p>
+            <a:pPr algn="ctr"/>
+            <a:r>
+              <a:rPr lang="en-US" dirty="0"/>
+              <a:t>Component as cell code</a:t>
+            </a:r>
+          </a:p>
+          <a:p>
+            <a:pPr algn="ctr"/>
+            <a:endParaRPr lang="en-US" dirty="0"/>
+          </a:p>
+        </p:txBody>
+      </p:sp>
+      <p:sp>
+        <p:nvSpPr>
+          <p:cNvPr id="8" name="Rectángulo 7">
+            <a:extLst>
+              <a:ext uri="{FF2B5EF4-FFF2-40B4-BE49-F238E27FC236}">
+                <a16:creationId xmlns:a16="http://schemas.microsoft.com/office/drawing/2014/main" id="{3026A42F-EF5D-944C-6640-8F379606CA63}"/>
+              </a:ext>
+            </a:extLst>
+          </p:cNvPr>
+          <p:cNvSpPr/>
+          <p:nvPr/>
+        </p:nvSpPr>
+        <p:spPr>
+          <a:xfrm>
+            <a:off x="6476841" y="1420406"/>
+            <a:ext cx="5332571" cy="4751794"/>
+          </a:xfrm>
+          <a:prstGeom prst="rect">
+            <a:avLst/>
+          </a:prstGeom>
+          <a:noFill/>
+          <a:ln w="28575">
+            <a:solidFill>
+              <a:srgbClr val="E0700D"/>
+            </a:solidFill>
+          </a:ln>
+        </p:spPr>
+        <p:style>
+          <a:lnRef idx="2">
+            <a:schemeClr val="accent1">
+              <a:shade val="15000"/>
+            </a:schemeClr>
+          </a:lnRef>
+          <a:fillRef idx="1">
+            <a:schemeClr val="accent1"/>
+          </a:fillRef>
+          <a:effectRef idx="0">
+            <a:schemeClr val="accent1"/>
+          </a:effectRef>
+          <a:fontRef idx="minor">
+            <a:schemeClr val="lt1"/>
+          </a:fontRef>
+        </p:style>
+        <p:txBody>
+          <a:bodyPr rtlCol="0" anchor="ctr"/>
+          <a:lstStyle/>
+          <a:p>
+            <a:pPr algn="ctr"/>
+            <a:endParaRPr lang="en-US"/>
+          </a:p>
+        </p:txBody>
+      </p:sp>
+      <p:sp>
+        <p:nvSpPr>
+          <p:cNvPr id="9" name="CuadroTexto 8">
+            <a:extLst>
+              <a:ext uri="{FF2B5EF4-FFF2-40B4-BE49-F238E27FC236}">
+                <a16:creationId xmlns:a16="http://schemas.microsoft.com/office/drawing/2014/main" id="{12C2DB07-3275-5D21-60B3-79063CF58086}"/>
+              </a:ext>
+            </a:extLst>
+          </p:cNvPr>
+          <p:cNvSpPr txBox="1"/>
+          <p:nvPr/>
+        </p:nvSpPr>
+        <p:spPr>
+          <a:xfrm>
+            <a:off x="7644330" y="2496339"/>
+            <a:ext cx="2997616" cy="369332"/>
+          </a:xfrm>
+          <a:prstGeom prst="rect">
+            <a:avLst/>
+          </a:prstGeom>
+          <a:noFill/>
+        </p:spPr>
+        <p:txBody>
+          <a:bodyPr wrap="none" rtlCol="0">
+            <a:spAutoFit/>
+          </a:bodyPr>
+          <a:lstStyle/>
+          <a:p>
+            <a:pPr algn="ctr"/>
+            <a:r>
+              <a:rPr lang="es-ES" dirty="0" err="1"/>
+              <a:t>Component</a:t>
+            </a:r>
+            <a:r>
+              <a:rPr lang="es-ES" dirty="0"/>
+              <a:t> as </a:t>
+            </a:r>
+            <a:r>
+              <a:rPr lang="es-ES" dirty="0" err="1"/>
+              <a:t>cell</a:t>
+            </a:r>
+            <a:r>
+              <a:rPr lang="es-ES" dirty="0"/>
+              <a:t> </a:t>
+            </a:r>
+            <a:r>
+              <a:rPr lang="es-ES" dirty="0" err="1"/>
+              <a:t>screenshot</a:t>
+            </a:r>
+            <a:endParaRPr lang="en-US" dirty="0"/>
+          </a:p>
+        </p:txBody>
+      </p:sp>
+      <p:pic>
+        <p:nvPicPr>
+          <p:cNvPr id="4" name="Imagen 3">
+            <a:extLst>
+              <a:ext uri="{FF2B5EF4-FFF2-40B4-BE49-F238E27FC236}">
+                <a16:creationId xmlns:a16="http://schemas.microsoft.com/office/drawing/2014/main" id="{C9F24CAF-D146-9E5E-789D-B33DF58B786A}"/>
+              </a:ext>
+            </a:extLst>
+          </p:cNvPr>
+          <p:cNvPicPr>
+            <a:picLocks noChangeAspect="1"/>
+          </p:cNvPicPr>
+          <p:nvPr/>
+        </p:nvPicPr>
+        <p:blipFill>
+          <a:blip r:embed="rId4"/>
+          <a:stretch>
+            <a:fillRect/>
+          </a:stretch>
+        </p:blipFill>
+        <p:spPr>
+          <a:xfrm>
+            <a:off x="6745795" y="1818094"/>
+            <a:ext cx="4794662" cy="3619500"/>
+          </a:xfrm>
+          <a:prstGeom prst="rect">
+            <a:avLst/>
+          </a:prstGeom>
+        </p:spPr>
+      </p:pic>
+      <p:pic>
+        <p:nvPicPr>
+          <p:cNvPr id="10" name="Imagen 9">
+            <a:extLst>
+              <a:ext uri="{FF2B5EF4-FFF2-40B4-BE49-F238E27FC236}">
+                <a16:creationId xmlns:a16="http://schemas.microsoft.com/office/drawing/2014/main" id="{96EE7864-1DBE-069C-DE23-6959DE71C34B}"/>
+              </a:ext>
+            </a:extLst>
+          </p:cNvPr>
+          <p:cNvPicPr>
+            <a:picLocks noChangeAspect="1"/>
+          </p:cNvPicPr>
+          <p:nvPr/>
+        </p:nvPicPr>
+        <p:blipFill>
+          <a:blip r:embed="rId5"/>
+          <a:stretch>
+            <a:fillRect/>
+          </a:stretch>
+        </p:blipFill>
+        <p:spPr>
+          <a:xfrm>
+            <a:off x="1952594" y="1452411"/>
+            <a:ext cx="2800411" cy="4734715"/>
+          </a:xfrm>
+          <a:prstGeom prst="rect">
+            <a:avLst/>
+          </a:prstGeom>
+        </p:spPr>
+      </p:pic>
+    </p:spTree>
+    <p:extLst>
+      <p:ext uri="{BB962C8B-B14F-4D97-AF65-F5344CB8AC3E}">
+        <p14:creationId xmlns:p14="http://schemas.microsoft.com/office/powerpoint/2010/main" val="3033464332"/>
+      </p:ext>
+    </p:extLst>
+  </p:cSld>
+  <p:clrMapOvr>
+    <a:masterClrMapping/>
+  </p:clrMapOvr>
+</p:sld>
+</file>
+
+<file path=ppt/slides/slide11.xml><?xml version="1.0" encoding="utf-8"?>
+<p:sld xmlns:a="http://schemas.openxmlformats.org/drawingml/2006/main" xmlns:r="http://schemas.openxmlformats.org/officeDocument/2006/relationships" xmlns:p="http://schemas.openxmlformats.org/presentationml/2006/main">
+  <p:cSld>
+    <p:spTree>
+      <p:nvGrpSpPr>
+        <p:cNvPr id="1" name="">
+          <a:extLst>
+            <a:ext uri="{FF2B5EF4-FFF2-40B4-BE49-F238E27FC236}">
+              <a16:creationId xmlns:a16="http://schemas.microsoft.com/office/drawing/2014/main" id="{FBC6C894-2823-BA52-A099-18B6B3FAD44C}"/>
+            </a:ext>
+          </a:extLst>
+        </p:cNvPr>
+        <p:cNvGrpSpPr/>
+        <p:nvPr/>
+      </p:nvGrpSpPr>
+      <p:grpSpPr>
+        <a:xfrm>
+          <a:off x="0" y="0"/>
+          <a:ext cx="0" cy="0"/>
+          <a:chOff x="0" y="0"/>
+          <a:chExt cx="0" cy="0"/>
+        </a:xfrm>
+      </p:grpSpPr>
+      <p:sp>
+        <p:nvSpPr>
+          <p:cNvPr id="16" name="object 16">
+            <a:extLst>
+              <a:ext uri="{FF2B5EF4-FFF2-40B4-BE49-F238E27FC236}">
+                <a16:creationId xmlns:a16="http://schemas.microsoft.com/office/drawing/2014/main" id="{73A1E1B4-2F1B-D00A-6CDB-2F3C89EB13DD}"/>
+              </a:ext>
+            </a:extLst>
+          </p:cNvPr>
+          <p:cNvSpPr txBox="1">
+            <a:spLocks noGrp="1"/>
+          </p:cNvSpPr>
+          <p:nvPr>
+            <p:ph type="title"/>
+          </p:nvPr>
+        </p:nvSpPr>
+        <p:spPr>
+          <a:xfrm>
+            <a:off x="685800" y="408883"/>
+            <a:ext cx="10994410" cy="874598"/>
+          </a:xfrm>
+          <a:prstGeom prst="rect">
+            <a:avLst/>
+          </a:prstGeom>
+        </p:spPr>
+        <p:txBody>
+          <a:bodyPr vert="horz" wrap="square" lIns="0" tIns="12700" rIns="0" bIns="0" rtlCol="0">
+            <a:spAutoFit/>
+          </a:bodyPr>
+          <a:lstStyle/>
+          <a:p>
+            <a:pPr marL="12700" algn="just">
+              <a:lnSpc>
+                <a:spcPct val="100000"/>
+              </a:lnSpc>
+              <a:spcBef>
+                <a:spcPts val="100"/>
+              </a:spcBef>
+            </a:pPr>
+            <a:r>
+              <a:rPr lang="en-US" dirty="0"/>
+              <a:t>Learning outcome #2a – Notebook section 2. Layout Fundamentals – </a:t>
+            </a:r>
+            <a:r>
+              <a:rPr lang="en-US" dirty="0">
+                <a:solidFill>
+                  <a:srgbClr val="FF0000"/>
+                </a:solidFill>
+              </a:rPr>
+              <a:t>1 slide per component</a:t>
+            </a:r>
+            <a:br>
+              <a:rPr lang="en-US" sz="2500" dirty="0"/>
+            </a:br>
+            <a:r>
+              <a:rPr lang="en-US" sz="1800" b="0" i="1" dirty="0"/>
+              <a:t>“Use your design results from Lab2 and Lab3 to create layout instances of your designed components: DCs, MMIs, MZIs &amp; Ring Resonators” </a:t>
+            </a:r>
+            <a:r>
+              <a:rPr lang="en-US" sz="1800" b="0" i="1" dirty="0">
+                <a:solidFill>
+                  <a:srgbClr val="FF0000"/>
+                </a:solidFill>
+                <a:sym typeface="Wingdings" pitchFamily="2" charset="2"/>
+              </a:rPr>
+              <a:t> Make cells for all your components</a:t>
+            </a:r>
+            <a:endParaRPr sz="2500" b="0" i="1" dirty="0">
+              <a:solidFill>
+                <a:srgbClr val="FF0000"/>
+              </a:solidFill>
+              <a:latin typeface="+mj-lt"/>
+              <a:cs typeface="Lucida Sans"/>
+            </a:endParaRPr>
+          </a:p>
+        </p:txBody>
+      </p:sp>
+      <p:pic>
+        <p:nvPicPr>
+          <p:cNvPr id="83" name="Gráfico 82">
+            <a:extLst>
+              <a:ext uri="{FF2B5EF4-FFF2-40B4-BE49-F238E27FC236}">
+                <a16:creationId xmlns:a16="http://schemas.microsoft.com/office/drawing/2014/main" id="{7C1BF71B-393B-9471-A88F-63868BC63242}"/>
+              </a:ext>
+            </a:extLst>
+          </p:cNvPr>
+          <p:cNvPicPr>
+            <a:picLocks noChangeAspect="1"/>
+          </p:cNvPicPr>
+          <p:nvPr/>
+        </p:nvPicPr>
+        <p:blipFill>
+          <a:blip>
+            <a:extLst>
+              <a:ext uri="{96DAC541-7B7A-43D3-8B79-37D633B846F1}">
+                <asvg:svgBlip xmlns:asvg="http://schemas.microsoft.com/office/drawing/2016/SVG/main" r:embed="rId3"/>
+              </a:ext>
+            </a:extLst>
+          </a:blip>
+          <a:stretch>
+            <a:fillRect/>
+          </a:stretch>
+        </p:blipFill>
+        <p:spPr>
+          <a:xfrm>
+            <a:off x="5045006" y="6356057"/>
+            <a:ext cx="6409575" cy="363174"/>
+          </a:xfrm>
+          <a:prstGeom prst="rect">
+            <a:avLst/>
+          </a:prstGeom>
+        </p:spPr>
+      </p:pic>
+      <p:sp>
+        <p:nvSpPr>
+          <p:cNvPr id="84" name="Marcador de número de diapositiva 83">
+            <a:extLst>
+              <a:ext uri="{FF2B5EF4-FFF2-40B4-BE49-F238E27FC236}">
+                <a16:creationId xmlns:a16="http://schemas.microsoft.com/office/drawing/2014/main" id="{31D1EC0F-1251-D8C6-B16C-970901095A79}"/>
+              </a:ext>
+            </a:extLst>
+          </p:cNvPr>
+          <p:cNvSpPr>
+            <a:spLocks noGrp="1"/>
+          </p:cNvSpPr>
+          <p:nvPr>
+            <p:ph type="sldNum" sz="quarter" idx="7"/>
+          </p:nvPr>
+        </p:nvSpPr>
+        <p:spPr/>
+        <p:txBody>
+          <a:bodyPr/>
+          <a:lstStyle/>
+          <a:p>
+            <a:fld id="{B6F15528-21DE-4FAA-801E-634DDDAF4B2B}" type="slidenum">
+              <a:rPr lang="es-ES" smtClean="0"/>
+              <a:t>11</a:t>
+            </a:fld>
+            <a:endParaRPr lang="es-ES"/>
+          </a:p>
+        </p:txBody>
+      </p:sp>
+      <p:sp>
+        <p:nvSpPr>
+          <p:cNvPr id="3" name="Marcador de pie de página 2">
+            <a:extLst>
+              <a:ext uri="{FF2B5EF4-FFF2-40B4-BE49-F238E27FC236}">
+                <a16:creationId xmlns:a16="http://schemas.microsoft.com/office/drawing/2014/main" id="{A2007D0D-6350-5DA5-2051-E90AB4733B10}"/>
+              </a:ext>
+            </a:extLst>
+          </p:cNvPr>
+          <p:cNvSpPr>
+            <a:spLocks noGrp="1"/>
+          </p:cNvSpPr>
+          <p:nvPr>
+            <p:ph type="ftr" sz="quarter" idx="5"/>
+          </p:nvPr>
+        </p:nvSpPr>
+        <p:spPr/>
+        <p:txBody>
+          <a:bodyPr/>
+          <a:lstStyle/>
+          <a:p>
+            <a:pPr marL="12700">
+              <a:spcBef>
+                <a:spcPts val="15"/>
+              </a:spcBef>
+            </a:pPr>
+            <a:r>
+              <a:rPr lang="es-ES" spc="-5"/>
+              <a:t>LAB 4.0. LAYOUT</a:t>
+            </a:r>
+            <a:endParaRPr lang="es-ES" spc="-5" dirty="0"/>
+          </a:p>
+        </p:txBody>
+      </p:sp>
+      <p:sp>
+        <p:nvSpPr>
+          <p:cNvPr id="6" name="Rectángulo 5">
+            <a:extLst>
+              <a:ext uri="{FF2B5EF4-FFF2-40B4-BE49-F238E27FC236}">
+                <a16:creationId xmlns:a16="http://schemas.microsoft.com/office/drawing/2014/main" id="{62F4BF54-BAF3-EAA9-7EF2-A4B966C324E5}"/>
+              </a:ext>
+            </a:extLst>
+          </p:cNvPr>
+          <p:cNvSpPr/>
+          <p:nvPr/>
+        </p:nvSpPr>
+        <p:spPr>
+          <a:xfrm>
+            <a:off x="609441" y="1418373"/>
+            <a:ext cx="5332571" cy="4751794"/>
+          </a:xfrm>
+          <a:prstGeom prst="rect">
+            <a:avLst/>
+          </a:prstGeom>
+          <a:noFill/>
+          <a:ln w="28575">
+            <a:solidFill>
+              <a:srgbClr val="E0700D"/>
+            </a:solidFill>
+          </a:ln>
+        </p:spPr>
+        <p:style>
+          <a:lnRef idx="2">
+            <a:schemeClr val="accent1">
+              <a:shade val="15000"/>
+            </a:schemeClr>
+          </a:lnRef>
+          <a:fillRef idx="1">
+            <a:schemeClr val="accent1"/>
+          </a:fillRef>
+          <a:effectRef idx="0">
+            <a:schemeClr val="accent1"/>
+          </a:effectRef>
+          <a:fontRef idx="minor">
+            <a:schemeClr val="lt1"/>
+          </a:fontRef>
+        </p:style>
+        <p:txBody>
+          <a:bodyPr rtlCol="0" anchor="ctr"/>
+          <a:lstStyle/>
+          <a:p>
+            <a:pPr algn="ctr"/>
+            <a:endParaRPr lang="en-US"/>
+          </a:p>
+        </p:txBody>
+      </p:sp>
+      <p:sp>
+        <p:nvSpPr>
+          <p:cNvPr id="7" name="CuadroTexto 6">
+            <a:extLst>
+              <a:ext uri="{FF2B5EF4-FFF2-40B4-BE49-F238E27FC236}">
+                <a16:creationId xmlns:a16="http://schemas.microsoft.com/office/drawing/2014/main" id="{87781917-5FA1-0802-98FF-5714207293EF}"/>
+              </a:ext>
+            </a:extLst>
+          </p:cNvPr>
+          <p:cNvSpPr txBox="1"/>
+          <p:nvPr/>
+        </p:nvSpPr>
+        <p:spPr>
+          <a:xfrm>
+            <a:off x="2063316" y="2494306"/>
+            <a:ext cx="2424831" cy="646331"/>
+          </a:xfrm>
+          <a:prstGeom prst="rect">
+            <a:avLst/>
+          </a:prstGeom>
+          <a:noFill/>
+        </p:spPr>
+        <p:txBody>
+          <a:bodyPr wrap="none" rtlCol="0">
+            <a:spAutoFit/>
+          </a:bodyPr>
+          <a:lstStyle/>
+          <a:p>
+            <a:pPr algn="ctr"/>
+            <a:r>
+              <a:rPr lang="en-US" dirty="0"/>
+              <a:t>Component as cell code</a:t>
+            </a:r>
+          </a:p>
+          <a:p>
+            <a:pPr algn="ctr"/>
+            <a:endParaRPr lang="en-US" dirty="0"/>
+          </a:p>
+        </p:txBody>
+      </p:sp>
+      <p:sp>
+        <p:nvSpPr>
+          <p:cNvPr id="8" name="Rectángulo 7">
+            <a:extLst>
+              <a:ext uri="{FF2B5EF4-FFF2-40B4-BE49-F238E27FC236}">
+                <a16:creationId xmlns:a16="http://schemas.microsoft.com/office/drawing/2014/main" id="{37BE4B45-850A-7A35-89D2-F1C8C0DFC8C9}"/>
+              </a:ext>
+            </a:extLst>
+          </p:cNvPr>
+          <p:cNvSpPr/>
+          <p:nvPr/>
+        </p:nvSpPr>
+        <p:spPr>
+          <a:xfrm>
+            <a:off x="6476841" y="1420406"/>
+            <a:ext cx="5332571" cy="4751794"/>
+          </a:xfrm>
+          <a:prstGeom prst="rect">
+            <a:avLst/>
+          </a:prstGeom>
+          <a:noFill/>
+          <a:ln w="28575">
+            <a:solidFill>
+              <a:srgbClr val="E0700D"/>
+            </a:solidFill>
+          </a:ln>
+        </p:spPr>
+        <p:style>
+          <a:lnRef idx="2">
+            <a:schemeClr val="accent1">
+              <a:shade val="15000"/>
+            </a:schemeClr>
+          </a:lnRef>
+          <a:fillRef idx="1">
+            <a:schemeClr val="accent1"/>
+          </a:fillRef>
+          <a:effectRef idx="0">
+            <a:schemeClr val="accent1"/>
+          </a:effectRef>
+          <a:fontRef idx="minor">
+            <a:schemeClr val="lt1"/>
+          </a:fontRef>
+        </p:style>
+        <p:txBody>
+          <a:bodyPr rtlCol="0" anchor="ctr"/>
+          <a:lstStyle/>
+          <a:p>
+            <a:pPr algn="ctr"/>
+            <a:endParaRPr lang="en-US"/>
+          </a:p>
+        </p:txBody>
+      </p:sp>
+      <p:sp>
+        <p:nvSpPr>
+          <p:cNvPr id="9" name="CuadroTexto 8">
+            <a:extLst>
+              <a:ext uri="{FF2B5EF4-FFF2-40B4-BE49-F238E27FC236}">
+                <a16:creationId xmlns:a16="http://schemas.microsoft.com/office/drawing/2014/main" id="{8E09A17F-41A7-3D4D-2A08-E0BA92149893}"/>
+              </a:ext>
+            </a:extLst>
+          </p:cNvPr>
+          <p:cNvSpPr txBox="1"/>
+          <p:nvPr/>
+        </p:nvSpPr>
+        <p:spPr>
+          <a:xfrm>
+            <a:off x="7644330" y="2496339"/>
+            <a:ext cx="2997616" cy="369332"/>
+          </a:xfrm>
+          <a:prstGeom prst="rect">
+            <a:avLst/>
+          </a:prstGeom>
+          <a:noFill/>
+        </p:spPr>
+        <p:txBody>
+          <a:bodyPr wrap="none" rtlCol="0">
+            <a:spAutoFit/>
+          </a:bodyPr>
+          <a:lstStyle/>
+          <a:p>
+            <a:pPr algn="ctr"/>
+            <a:r>
+              <a:rPr lang="es-ES" dirty="0" err="1"/>
+              <a:t>Component</a:t>
+            </a:r>
+            <a:r>
+              <a:rPr lang="es-ES" dirty="0"/>
+              <a:t> as </a:t>
+            </a:r>
+            <a:r>
+              <a:rPr lang="es-ES" dirty="0" err="1"/>
+              <a:t>cell</a:t>
+            </a:r>
+            <a:r>
+              <a:rPr lang="es-ES" dirty="0"/>
+              <a:t> </a:t>
+            </a:r>
+            <a:r>
+              <a:rPr lang="es-ES" dirty="0" err="1"/>
+              <a:t>screenshot</a:t>
+            </a:r>
+            <a:endParaRPr lang="en-US" dirty="0"/>
+          </a:p>
+        </p:txBody>
+      </p:sp>
+      <p:pic>
+        <p:nvPicPr>
+          <p:cNvPr id="10" name="Imagen 9">
+            <a:extLst>
+              <a:ext uri="{FF2B5EF4-FFF2-40B4-BE49-F238E27FC236}">
+                <a16:creationId xmlns:a16="http://schemas.microsoft.com/office/drawing/2014/main" id="{81FE5DD7-78A1-F92B-C1C4-850DBC9C3A4D}"/>
+              </a:ext>
+            </a:extLst>
+          </p:cNvPr>
+          <p:cNvPicPr>
+            <a:picLocks noChangeAspect="1"/>
+          </p:cNvPicPr>
+          <p:nvPr/>
+        </p:nvPicPr>
+        <p:blipFill>
+          <a:blip r:embed="rId4"/>
+          <a:stretch>
+            <a:fillRect/>
+          </a:stretch>
+        </p:blipFill>
+        <p:spPr>
+          <a:xfrm>
+            <a:off x="1752600" y="1676400"/>
+            <a:ext cx="2904762" cy="3619048"/>
+          </a:xfrm>
+          <a:prstGeom prst="rect">
+            <a:avLst/>
+          </a:prstGeom>
+        </p:spPr>
+      </p:pic>
+      <p:pic>
+        <p:nvPicPr>
+          <p:cNvPr id="12" name="Imagen 11">
+            <a:extLst>
+              <a:ext uri="{FF2B5EF4-FFF2-40B4-BE49-F238E27FC236}">
+                <a16:creationId xmlns:a16="http://schemas.microsoft.com/office/drawing/2014/main" id="{A59DB7B7-56AE-2CEC-B1AC-26CB1FFABAA5}"/>
+              </a:ext>
+            </a:extLst>
+          </p:cNvPr>
+          <p:cNvPicPr>
+            <a:picLocks noChangeAspect="1"/>
+          </p:cNvPicPr>
+          <p:nvPr/>
+        </p:nvPicPr>
+        <p:blipFill>
+          <a:blip r:embed="rId5"/>
+          <a:stretch>
+            <a:fillRect/>
+          </a:stretch>
+        </p:blipFill>
+        <p:spPr>
+          <a:xfrm>
+            <a:off x="6822153" y="1798419"/>
+            <a:ext cx="4632428" cy="3497029"/>
+          </a:xfrm>
+          <a:prstGeom prst="rect">
+            <a:avLst/>
+          </a:prstGeom>
+        </p:spPr>
+      </p:pic>
+    </p:spTree>
+    <p:extLst>
+      <p:ext uri="{BB962C8B-B14F-4D97-AF65-F5344CB8AC3E}">
+        <p14:creationId xmlns:p14="http://schemas.microsoft.com/office/powerpoint/2010/main" val="4183811432"/>
+      </p:ext>
+    </p:extLst>
+  </p:cSld>
+  <p:clrMapOvr>
+    <a:masterClrMapping/>
+  </p:clrMapOvr>
+</p:sld>
+</file>
+
+<file path=ppt/slides/slide12.xml><?xml version="1.0" encoding="utf-8"?>
+<p:sld xmlns:a="http://schemas.openxmlformats.org/drawingml/2006/main" xmlns:r="http://schemas.openxmlformats.org/officeDocument/2006/relationships" xmlns:p="http://schemas.openxmlformats.org/presentationml/2006/main">
+  <p:cSld>
+    <p:spTree>
+      <p:nvGrpSpPr>
+        <p:cNvPr id="1" name="">
+          <a:extLst>
+            <a:ext uri="{FF2B5EF4-FFF2-40B4-BE49-F238E27FC236}">
+              <a16:creationId xmlns:a16="http://schemas.microsoft.com/office/drawing/2014/main" id="{260BA36C-C775-73C9-1B75-0F0A1F2E8DFA}"/>
+            </a:ext>
+          </a:extLst>
+        </p:cNvPr>
+        <p:cNvGrpSpPr/>
+        <p:nvPr/>
+      </p:nvGrpSpPr>
+      <p:grpSpPr>
+        <a:xfrm>
+          <a:off x="0" y="0"/>
+          <a:ext cx="0" cy="0"/>
+          <a:chOff x="0" y="0"/>
+          <a:chExt cx="0" cy="0"/>
+        </a:xfrm>
+      </p:grpSpPr>
+      <p:sp>
+        <p:nvSpPr>
+          <p:cNvPr id="16" name="object 16">
+            <a:extLst>
+              <a:ext uri="{FF2B5EF4-FFF2-40B4-BE49-F238E27FC236}">
+                <a16:creationId xmlns:a16="http://schemas.microsoft.com/office/drawing/2014/main" id="{F54CCF96-EC2B-8AEB-C6E8-EC8E2598D6DD}"/>
+              </a:ext>
+            </a:extLst>
+          </p:cNvPr>
+          <p:cNvSpPr txBox="1">
+            <a:spLocks noGrp="1"/>
+          </p:cNvSpPr>
+          <p:nvPr>
+            <p:ph type="title"/>
+          </p:nvPr>
+        </p:nvSpPr>
+        <p:spPr>
+          <a:xfrm>
+            <a:off x="685800" y="408883"/>
+            <a:ext cx="10994410" cy="874598"/>
+          </a:xfrm>
+          <a:prstGeom prst="rect">
+            <a:avLst/>
+          </a:prstGeom>
+        </p:spPr>
+        <p:txBody>
+          <a:bodyPr vert="horz" wrap="square" lIns="0" tIns="12700" rIns="0" bIns="0" rtlCol="0">
+            <a:spAutoFit/>
+          </a:bodyPr>
+          <a:lstStyle/>
+          <a:p>
+            <a:pPr marL="12700" algn="just">
+              <a:lnSpc>
+                <a:spcPct val="100000"/>
+              </a:lnSpc>
+              <a:spcBef>
+                <a:spcPts val="100"/>
+              </a:spcBef>
+            </a:pPr>
+            <a:r>
+              <a:rPr lang="en-US" dirty="0"/>
+              <a:t>Learning outcome #2a – Notebook section 2. Layout Fundamentals – </a:t>
+            </a:r>
+            <a:r>
+              <a:rPr lang="en-US" dirty="0">
+                <a:solidFill>
+                  <a:srgbClr val="FF0000"/>
+                </a:solidFill>
+              </a:rPr>
+              <a:t>1 slide per component</a:t>
+            </a:r>
+            <a:br>
+              <a:rPr lang="en-US" sz="2500" dirty="0"/>
+            </a:br>
+            <a:r>
+              <a:rPr lang="en-US" sz="1800" b="0" i="1" dirty="0"/>
+              <a:t>“Use your design results from Lab2 and Lab3 to create layout instances of your designed components: DCs, MMIs, MZIs &amp; Ring Resonators” </a:t>
+            </a:r>
+            <a:r>
+              <a:rPr lang="en-US" sz="1800" b="0" i="1" dirty="0">
+                <a:solidFill>
+                  <a:srgbClr val="FF0000"/>
+                </a:solidFill>
+                <a:sym typeface="Wingdings" pitchFamily="2" charset="2"/>
+              </a:rPr>
+              <a:t> Make cells for all your components</a:t>
+            </a:r>
+            <a:endParaRPr sz="2500" b="0" i="1" dirty="0">
+              <a:solidFill>
+                <a:srgbClr val="FF0000"/>
+              </a:solidFill>
+              <a:latin typeface="+mj-lt"/>
+              <a:cs typeface="Lucida Sans"/>
+            </a:endParaRPr>
+          </a:p>
+        </p:txBody>
+      </p:sp>
+      <p:pic>
+        <p:nvPicPr>
+          <p:cNvPr id="83" name="Gráfico 82">
+            <a:extLst>
+              <a:ext uri="{FF2B5EF4-FFF2-40B4-BE49-F238E27FC236}">
+                <a16:creationId xmlns:a16="http://schemas.microsoft.com/office/drawing/2014/main" id="{F3262DDE-C09E-5531-BF65-88C5304EF2A2}"/>
+              </a:ext>
+            </a:extLst>
+          </p:cNvPr>
+          <p:cNvPicPr>
+            <a:picLocks noChangeAspect="1"/>
+          </p:cNvPicPr>
+          <p:nvPr/>
+        </p:nvPicPr>
+        <p:blipFill>
+          <a:blip>
+            <a:extLst>
+              <a:ext uri="{96DAC541-7B7A-43D3-8B79-37D633B846F1}">
+                <asvg:svgBlip xmlns:asvg="http://schemas.microsoft.com/office/drawing/2016/SVG/main" r:embed="rId3"/>
+              </a:ext>
+            </a:extLst>
+          </a:blip>
+          <a:stretch>
+            <a:fillRect/>
+          </a:stretch>
+        </p:blipFill>
+        <p:spPr>
+          <a:xfrm>
+            <a:off x="5045006" y="6356057"/>
+            <a:ext cx="6409575" cy="363174"/>
+          </a:xfrm>
+          <a:prstGeom prst="rect">
+            <a:avLst/>
+          </a:prstGeom>
+        </p:spPr>
+      </p:pic>
+      <p:sp>
+        <p:nvSpPr>
+          <p:cNvPr id="84" name="Marcador de número de diapositiva 83">
+            <a:extLst>
+              <a:ext uri="{FF2B5EF4-FFF2-40B4-BE49-F238E27FC236}">
+                <a16:creationId xmlns:a16="http://schemas.microsoft.com/office/drawing/2014/main" id="{8CC63B39-FDA6-0108-BC90-3CC04E142361}"/>
+              </a:ext>
+            </a:extLst>
+          </p:cNvPr>
+          <p:cNvSpPr>
+            <a:spLocks noGrp="1"/>
+          </p:cNvSpPr>
+          <p:nvPr>
+            <p:ph type="sldNum" sz="quarter" idx="7"/>
+          </p:nvPr>
+        </p:nvSpPr>
+        <p:spPr/>
+        <p:txBody>
+          <a:bodyPr/>
+          <a:lstStyle/>
+          <a:p>
+            <a:fld id="{B6F15528-21DE-4FAA-801E-634DDDAF4B2B}" type="slidenum">
+              <a:rPr lang="es-ES" smtClean="0"/>
+              <a:t>12</a:t>
+            </a:fld>
+            <a:endParaRPr lang="es-ES"/>
+          </a:p>
+        </p:txBody>
+      </p:sp>
+      <p:sp>
+        <p:nvSpPr>
+          <p:cNvPr id="3" name="Marcador de pie de página 2">
+            <a:extLst>
+              <a:ext uri="{FF2B5EF4-FFF2-40B4-BE49-F238E27FC236}">
+                <a16:creationId xmlns:a16="http://schemas.microsoft.com/office/drawing/2014/main" id="{E2143986-4F3F-4FE5-E5A5-FDA459E09158}"/>
+              </a:ext>
+            </a:extLst>
+          </p:cNvPr>
+          <p:cNvSpPr>
+            <a:spLocks noGrp="1"/>
+          </p:cNvSpPr>
+          <p:nvPr>
+            <p:ph type="ftr" sz="quarter" idx="5"/>
+          </p:nvPr>
+        </p:nvSpPr>
+        <p:spPr/>
+        <p:txBody>
+          <a:bodyPr/>
+          <a:lstStyle/>
+          <a:p>
+            <a:pPr marL="12700">
+              <a:spcBef>
+                <a:spcPts val="15"/>
+              </a:spcBef>
+            </a:pPr>
+            <a:r>
+              <a:rPr lang="es-ES" spc="-5"/>
+              <a:t>LAB 4.0. LAYOUT</a:t>
+            </a:r>
+            <a:endParaRPr lang="es-ES" spc="-5" dirty="0"/>
+          </a:p>
+        </p:txBody>
+      </p:sp>
+      <p:sp>
+        <p:nvSpPr>
+          <p:cNvPr id="6" name="Rectángulo 5">
+            <a:extLst>
+              <a:ext uri="{FF2B5EF4-FFF2-40B4-BE49-F238E27FC236}">
+                <a16:creationId xmlns:a16="http://schemas.microsoft.com/office/drawing/2014/main" id="{7C3E8DE9-FAAE-7281-B535-7248F032DA1A}"/>
+              </a:ext>
+            </a:extLst>
+          </p:cNvPr>
+          <p:cNvSpPr/>
+          <p:nvPr/>
+        </p:nvSpPr>
+        <p:spPr>
+          <a:xfrm>
+            <a:off x="609441" y="1418373"/>
+            <a:ext cx="5332571" cy="4751794"/>
+          </a:xfrm>
+          <a:prstGeom prst="rect">
+            <a:avLst/>
+          </a:prstGeom>
+          <a:noFill/>
+          <a:ln w="28575">
+            <a:solidFill>
+              <a:srgbClr val="E0700D"/>
+            </a:solidFill>
+          </a:ln>
+        </p:spPr>
+        <p:style>
+          <a:lnRef idx="2">
+            <a:schemeClr val="accent1">
+              <a:shade val="15000"/>
+            </a:schemeClr>
+          </a:lnRef>
+          <a:fillRef idx="1">
+            <a:schemeClr val="accent1"/>
+          </a:fillRef>
+          <a:effectRef idx="0">
+            <a:schemeClr val="accent1"/>
+          </a:effectRef>
+          <a:fontRef idx="minor">
+            <a:schemeClr val="lt1"/>
+          </a:fontRef>
+        </p:style>
+        <p:txBody>
+          <a:bodyPr rtlCol="0" anchor="ctr"/>
+          <a:lstStyle/>
+          <a:p>
+            <a:pPr algn="ctr"/>
+            <a:endParaRPr lang="en-US"/>
+          </a:p>
+        </p:txBody>
+      </p:sp>
+      <p:sp>
+        <p:nvSpPr>
+          <p:cNvPr id="7" name="CuadroTexto 6">
+            <a:extLst>
+              <a:ext uri="{FF2B5EF4-FFF2-40B4-BE49-F238E27FC236}">
+                <a16:creationId xmlns:a16="http://schemas.microsoft.com/office/drawing/2014/main" id="{7C8E6F84-33CF-A1CF-9A7A-546D83111E3D}"/>
+              </a:ext>
+            </a:extLst>
+          </p:cNvPr>
+          <p:cNvSpPr txBox="1"/>
+          <p:nvPr/>
+        </p:nvSpPr>
+        <p:spPr>
+          <a:xfrm>
+            <a:off x="2063316" y="2494306"/>
+            <a:ext cx="2424831" cy="646331"/>
+          </a:xfrm>
+          <a:prstGeom prst="rect">
+            <a:avLst/>
+          </a:prstGeom>
+          <a:noFill/>
+        </p:spPr>
+        <p:txBody>
+          <a:bodyPr wrap="none" rtlCol="0">
+            <a:spAutoFit/>
+          </a:bodyPr>
+          <a:lstStyle/>
+          <a:p>
+            <a:pPr algn="ctr"/>
+            <a:r>
+              <a:rPr lang="en-US" dirty="0"/>
+              <a:t>Component as cell code</a:t>
+            </a:r>
+          </a:p>
+          <a:p>
+            <a:pPr algn="ctr"/>
+            <a:endParaRPr lang="en-US" dirty="0"/>
+          </a:p>
+        </p:txBody>
+      </p:sp>
+      <p:sp>
+        <p:nvSpPr>
+          <p:cNvPr id="8" name="Rectángulo 7">
+            <a:extLst>
+              <a:ext uri="{FF2B5EF4-FFF2-40B4-BE49-F238E27FC236}">
+                <a16:creationId xmlns:a16="http://schemas.microsoft.com/office/drawing/2014/main" id="{69028C20-15FA-3C83-BC7E-3568B280DA33}"/>
+              </a:ext>
+            </a:extLst>
+          </p:cNvPr>
+          <p:cNvSpPr/>
+          <p:nvPr/>
+        </p:nvSpPr>
+        <p:spPr>
+          <a:xfrm>
+            <a:off x="6476841" y="1420406"/>
+            <a:ext cx="5332571" cy="4751794"/>
+          </a:xfrm>
+          <a:prstGeom prst="rect">
+            <a:avLst/>
+          </a:prstGeom>
+          <a:noFill/>
+          <a:ln w="28575">
+            <a:solidFill>
+              <a:srgbClr val="E0700D"/>
+            </a:solidFill>
+          </a:ln>
+        </p:spPr>
+        <p:style>
+          <a:lnRef idx="2">
+            <a:schemeClr val="accent1">
+              <a:shade val="15000"/>
+            </a:schemeClr>
+          </a:lnRef>
+          <a:fillRef idx="1">
+            <a:schemeClr val="accent1"/>
+          </a:fillRef>
+          <a:effectRef idx="0">
+            <a:schemeClr val="accent1"/>
+          </a:effectRef>
+          <a:fontRef idx="minor">
+            <a:schemeClr val="lt1"/>
+          </a:fontRef>
+        </p:style>
+        <p:txBody>
+          <a:bodyPr rtlCol="0" anchor="ctr"/>
+          <a:lstStyle/>
+          <a:p>
+            <a:pPr algn="ctr"/>
+            <a:endParaRPr lang="en-US"/>
+          </a:p>
+        </p:txBody>
+      </p:sp>
+      <p:sp>
+        <p:nvSpPr>
+          <p:cNvPr id="9" name="CuadroTexto 8">
+            <a:extLst>
+              <a:ext uri="{FF2B5EF4-FFF2-40B4-BE49-F238E27FC236}">
+                <a16:creationId xmlns:a16="http://schemas.microsoft.com/office/drawing/2014/main" id="{C5A84EA9-2366-E036-2AC4-7AABF7D3BAFA}"/>
+              </a:ext>
+            </a:extLst>
+          </p:cNvPr>
+          <p:cNvSpPr txBox="1"/>
+          <p:nvPr/>
+        </p:nvSpPr>
+        <p:spPr>
+          <a:xfrm>
+            <a:off x="7644330" y="2496339"/>
+            <a:ext cx="2997616" cy="369332"/>
+          </a:xfrm>
+          <a:prstGeom prst="rect">
+            <a:avLst/>
+          </a:prstGeom>
+          <a:noFill/>
+        </p:spPr>
+        <p:txBody>
+          <a:bodyPr wrap="none" rtlCol="0">
+            <a:spAutoFit/>
+          </a:bodyPr>
+          <a:lstStyle/>
+          <a:p>
+            <a:pPr algn="ctr"/>
+            <a:r>
+              <a:rPr lang="es-ES" dirty="0" err="1"/>
+              <a:t>Component</a:t>
+            </a:r>
+            <a:r>
+              <a:rPr lang="es-ES" dirty="0"/>
+              <a:t> as </a:t>
+            </a:r>
+            <a:r>
+              <a:rPr lang="es-ES" dirty="0" err="1"/>
+              <a:t>cell</a:t>
+            </a:r>
+            <a:r>
+              <a:rPr lang="es-ES" dirty="0"/>
+              <a:t> </a:t>
+            </a:r>
+            <a:r>
+              <a:rPr lang="es-ES" dirty="0" err="1"/>
+              <a:t>screenshot</a:t>
+            </a:r>
+            <a:endParaRPr lang="en-US" dirty="0"/>
+          </a:p>
+        </p:txBody>
+      </p:sp>
+      <p:pic>
+        <p:nvPicPr>
+          <p:cNvPr id="4" name="Imagen 3">
+            <a:extLst>
+              <a:ext uri="{FF2B5EF4-FFF2-40B4-BE49-F238E27FC236}">
+                <a16:creationId xmlns:a16="http://schemas.microsoft.com/office/drawing/2014/main" id="{CD07358E-D471-C32C-094B-CA591D03A175}"/>
+              </a:ext>
+            </a:extLst>
+          </p:cNvPr>
+          <p:cNvPicPr>
+            <a:picLocks noChangeAspect="1"/>
+          </p:cNvPicPr>
+          <p:nvPr/>
+        </p:nvPicPr>
+        <p:blipFill>
+          <a:blip r:embed="rId4"/>
+          <a:stretch>
+            <a:fillRect/>
+          </a:stretch>
+        </p:blipFill>
+        <p:spPr>
+          <a:xfrm>
+            <a:off x="1676400" y="1493735"/>
+            <a:ext cx="2651801" cy="4646318"/>
+          </a:xfrm>
+          <a:prstGeom prst="rect">
+            <a:avLst/>
+          </a:prstGeom>
+        </p:spPr>
+      </p:pic>
+      <p:pic>
+        <p:nvPicPr>
+          <p:cNvPr id="10" name="Imagen 9">
+            <a:extLst>
+              <a:ext uri="{FF2B5EF4-FFF2-40B4-BE49-F238E27FC236}">
+                <a16:creationId xmlns:a16="http://schemas.microsoft.com/office/drawing/2014/main" id="{5CC882DB-EEBA-F031-CE45-48E89D9CE121}"/>
+              </a:ext>
+            </a:extLst>
+          </p:cNvPr>
+          <p:cNvPicPr>
+            <a:picLocks noChangeAspect="1"/>
+          </p:cNvPicPr>
+          <p:nvPr/>
+        </p:nvPicPr>
+        <p:blipFill>
+          <a:blip r:embed="rId5"/>
+          <a:stretch>
+            <a:fillRect/>
+          </a:stretch>
+        </p:blipFill>
+        <p:spPr>
+          <a:xfrm>
+            <a:off x="6628623" y="1981200"/>
+            <a:ext cx="5029005" cy="3796406"/>
+          </a:xfrm>
+          <a:prstGeom prst="rect">
+            <a:avLst/>
+          </a:prstGeom>
+        </p:spPr>
+      </p:pic>
+    </p:spTree>
+    <p:extLst>
+      <p:ext uri="{BB962C8B-B14F-4D97-AF65-F5344CB8AC3E}">
+        <p14:creationId xmlns:p14="http://schemas.microsoft.com/office/powerpoint/2010/main" val="1136669547"/>
+      </p:ext>
+    </p:extLst>
+  </p:cSld>
+  <p:clrMapOvr>
+    <a:masterClrMapping/>
+  </p:clrMapOvr>
+</p:sld>
+</file>
+
+<file path=ppt/slides/slide13.xml><?xml version="1.0" encoding="utf-8"?>
+<p:sld xmlns:a="http://schemas.openxmlformats.org/drawingml/2006/main" xmlns:r="http://schemas.openxmlformats.org/officeDocument/2006/relationships" xmlns:p="http://schemas.openxmlformats.org/presentationml/2006/main">
+  <p:cSld>
+    <p:spTree>
+      <p:nvGrpSpPr>
+        <p:cNvPr id="1" name="">
+          <a:extLst>
+            <a:ext uri="{FF2B5EF4-FFF2-40B4-BE49-F238E27FC236}">
+              <a16:creationId xmlns:a16="http://schemas.microsoft.com/office/drawing/2014/main" id="{64DC463A-FEB0-DAC2-C592-982AED782F72}"/>
+            </a:ext>
+          </a:extLst>
+        </p:cNvPr>
+        <p:cNvGrpSpPr/>
+        <p:nvPr/>
+      </p:nvGrpSpPr>
+      <p:grpSpPr>
+        <a:xfrm>
+          <a:off x="0" y="0"/>
+          <a:ext cx="0" cy="0"/>
+          <a:chOff x="0" y="0"/>
+          <a:chExt cx="0" cy="0"/>
+        </a:xfrm>
+      </p:grpSpPr>
+      <p:sp>
+        <p:nvSpPr>
+          <p:cNvPr id="16" name="object 16">
+            <a:extLst>
+              <a:ext uri="{FF2B5EF4-FFF2-40B4-BE49-F238E27FC236}">
+                <a16:creationId xmlns:a16="http://schemas.microsoft.com/office/drawing/2014/main" id="{6D9825A0-3864-7B82-F4C0-6912BF1AE353}"/>
+              </a:ext>
+            </a:extLst>
+          </p:cNvPr>
+          <p:cNvSpPr txBox="1">
+            <a:spLocks noGrp="1"/>
+          </p:cNvSpPr>
+          <p:nvPr>
+            <p:ph type="title"/>
+          </p:nvPr>
+        </p:nvSpPr>
+        <p:spPr>
+          <a:xfrm>
+            <a:off x="685800" y="408883"/>
+            <a:ext cx="10994410" cy="397545"/>
+          </a:xfrm>
+          <a:prstGeom prst="rect">
+            <a:avLst/>
+          </a:prstGeom>
+        </p:spPr>
+        <p:txBody>
+          <a:bodyPr vert="horz" wrap="square" lIns="0" tIns="12700" rIns="0" bIns="0" rtlCol="0">
+            <a:spAutoFit/>
+          </a:bodyPr>
+          <a:lstStyle/>
+          <a:p>
+            <a:pPr marL="12700" algn="l">
+              <a:lnSpc>
+                <a:spcPct val="100000"/>
+              </a:lnSpc>
+              <a:spcBef>
+                <a:spcPts val="100"/>
+              </a:spcBef>
+            </a:pPr>
+            <a:r>
+              <a:rPr lang="en-US" sz="2500" dirty="0"/>
+              <a:t>Learning outcome #3 – Notebook section 3. Complete layout</a:t>
+            </a:r>
+            <a:endParaRPr sz="2500" b="0" i="1" dirty="0">
+              <a:latin typeface="+mj-lt"/>
+              <a:cs typeface="Lucida Sans"/>
+            </a:endParaRPr>
+          </a:p>
+        </p:txBody>
+      </p:sp>
+      <p:pic>
+        <p:nvPicPr>
+          <p:cNvPr id="83" name="Gráfico 82">
+            <a:extLst>
+              <a:ext uri="{FF2B5EF4-FFF2-40B4-BE49-F238E27FC236}">
+                <a16:creationId xmlns:a16="http://schemas.microsoft.com/office/drawing/2014/main" id="{0DEB6AD1-A7A1-CBBC-33E2-C1A03F2E3EC4}"/>
+              </a:ext>
+            </a:extLst>
+          </p:cNvPr>
+          <p:cNvPicPr>
+            <a:picLocks noChangeAspect="1"/>
+          </p:cNvPicPr>
+          <p:nvPr/>
+        </p:nvPicPr>
+        <p:blipFill>
+          <a:blip>
+            <a:extLst>
+              <a:ext uri="{96DAC541-7B7A-43D3-8B79-37D633B846F1}">
+                <asvg:svgBlip xmlns:asvg="http://schemas.microsoft.com/office/drawing/2016/SVG/main" r:embed="rId3"/>
+              </a:ext>
+            </a:extLst>
+          </a:blip>
+          <a:stretch>
+            <a:fillRect/>
+          </a:stretch>
+        </p:blipFill>
+        <p:spPr>
+          <a:xfrm>
+            <a:off x="5045006" y="6356057"/>
+            <a:ext cx="6409575" cy="363174"/>
+          </a:xfrm>
+          <a:prstGeom prst="rect">
+            <a:avLst/>
+          </a:prstGeom>
+        </p:spPr>
+      </p:pic>
+      <p:sp>
+        <p:nvSpPr>
+          <p:cNvPr id="84" name="Marcador de número de diapositiva 83">
+            <a:extLst>
+              <a:ext uri="{FF2B5EF4-FFF2-40B4-BE49-F238E27FC236}">
+                <a16:creationId xmlns:a16="http://schemas.microsoft.com/office/drawing/2014/main" id="{00F7002D-478B-4959-3169-5E518898EBC4}"/>
+              </a:ext>
+            </a:extLst>
+          </p:cNvPr>
+          <p:cNvSpPr>
+            <a:spLocks noGrp="1"/>
+          </p:cNvSpPr>
+          <p:nvPr>
+            <p:ph type="sldNum" sz="quarter" idx="7"/>
+          </p:nvPr>
+        </p:nvSpPr>
+        <p:spPr/>
+        <p:txBody>
+          <a:bodyPr/>
+          <a:lstStyle/>
+          <a:p>
+            <a:fld id="{B6F15528-21DE-4FAA-801E-634DDDAF4B2B}" type="slidenum">
+              <a:rPr lang="es-ES" smtClean="0"/>
+              <a:t>13</a:t>
+            </a:fld>
+            <a:endParaRPr lang="es-ES"/>
+          </a:p>
+        </p:txBody>
+      </p:sp>
+      <p:sp>
+        <p:nvSpPr>
+          <p:cNvPr id="3" name="Marcador de pie de página 2">
+            <a:extLst>
+              <a:ext uri="{FF2B5EF4-FFF2-40B4-BE49-F238E27FC236}">
+                <a16:creationId xmlns:a16="http://schemas.microsoft.com/office/drawing/2014/main" id="{C305F97E-3B7E-8203-F806-FFA5E41962D7}"/>
+              </a:ext>
+            </a:extLst>
+          </p:cNvPr>
+          <p:cNvSpPr>
+            <a:spLocks noGrp="1"/>
+          </p:cNvSpPr>
+          <p:nvPr>
+            <p:ph type="ftr" sz="quarter" idx="5"/>
+          </p:nvPr>
+        </p:nvSpPr>
+        <p:spPr/>
+        <p:txBody>
+          <a:bodyPr/>
+          <a:lstStyle/>
+          <a:p>
+            <a:pPr marL="12700">
+              <a:spcBef>
+                <a:spcPts val="15"/>
+              </a:spcBef>
+            </a:pPr>
+            <a:r>
+              <a:rPr lang="es-ES" spc="-5"/>
+              <a:t>LAB 4.0. LAYOUT</a:t>
+            </a:r>
+            <a:endParaRPr lang="es-ES" spc="-5" dirty="0"/>
+          </a:p>
+        </p:txBody>
+      </p:sp>
+      <p:sp>
+        <p:nvSpPr>
+          <p:cNvPr id="2" name="CuadroTexto 1">
+            <a:extLst>
+              <a:ext uri="{FF2B5EF4-FFF2-40B4-BE49-F238E27FC236}">
+                <a16:creationId xmlns:a16="http://schemas.microsoft.com/office/drawing/2014/main" id="{58187553-D412-F56C-DD26-11B2C97C2B31}"/>
+              </a:ext>
+            </a:extLst>
+          </p:cNvPr>
+          <p:cNvSpPr txBox="1"/>
+          <p:nvPr/>
+        </p:nvSpPr>
+        <p:spPr>
+          <a:xfrm>
+            <a:off x="685800" y="990600"/>
+            <a:ext cx="5410200" cy="5181600"/>
+          </a:xfrm>
+          <a:prstGeom prst="rect">
+            <a:avLst/>
+          </a:prstGeom>
+          <a:solidFill>
+            <a:schemeClr val="bg1">
+              <a:lumMod val="95000"/>
+            </a:schemeClr>
+          </a:solidFill>
+          <a:ln w="28575">
+            <a:solidFill>
+              <a:srgbClr val="E0700D"/>
+            </a:solidFill>
+          </a:ln>
+        </p:spPr>
+        <p:txBody>
+          <a:bodyPr wrap="square" rtlCol="0">
+            <a:noAutofit/>
+          </a:bodyPr>
+          <a:lstStyle/>
+          <a:p>
+            <a:pPr algn="just"/>
+            <a:r>
+              <a:rPr lang="en-US" sz="1200" dirty="0">
+                <a:latin typeface="Arial" panose="020B0604020202020204" pitchFamily="34" charset="0"/>
+                <a:cs typeface="Arial" panose="020B0604020202020204" pitchFamily="34" charset="0"/>
+              </a:rPr>
+              <a:t>Read and describe 4 code blocks in section 3</a:t>
+            </a:r>
+          </a:p>
+          <a:p>
+            <a:pPr algn="just"/>
+            <a:endParaRPr lang="en-US" sz="1200" dirty="0">
+              <a:latin typeface="Arial" panose="020B0604020202020204" pitchFamily="34" charset="0"/>
+              <a:cs typeface="Arial" panose="020B0604020202020204" pitchFamily="34" charset="0"/>
+            </a:endParaRPr>
+          </a:p>
+          <a:p>
+            <a:pPr algn="just"/>
+            <a:r>
+              <a:rPr lang="en-US" sz="1200" dirty="0">
+                <a:latin typeface="Arial" panose="020B0604020202020204" pitchFamily="34" charset="0"/>
+                <a:cs typeface="Arial" panose="020B0604020202020204" pitchFamily="34" charset="0"/>
+              </a:rPr>
+              <a:t>Python code block 1: </a:t>
+            </a:r>
+          </a:p>
+          <a:p>
+            <a:pPr algn="just"/>
+            <a:endParaRPr lang="en-US" sz="1200" dirty="0">
+              <a:latin typeface="Arial" panose="020B0604020202020204" pitchFamily="34" charset="0"/>
+              <a:cs typeface="Arial" panose="020B0604020202020204" pitchFamily="34" charset="0"/>
+            </a:endParaRPr>
+          </a:p>
+          <a:p>
+            <a:pPr algn="just"/>
+            <a:r>
+              <a:rPr lang="en-US" sz="1200" dirty="0">
+                <a:latin typeface="Arial" panose="020B0604020202020204" pitchFamily="34" charset="0"/>
+                <a:cs typeface="Arial" panose="020B0604020202020204" pitchFamily="34" charset="0"/>
+              </a:rPr>
+              <a:t>Python code block 2: </a:t>
+            </a:r>
+          </a:p>
+          <a:p>
+            <a:pPr algn="just"/>
+            <a:endParaRPr lang="en-US" sz="1200" dirty="0">
+              <a:latin typeface="Arial" panose="020B0604020202020204" pitchFamily="34" charset="0"/>
+              <a:cs typeface="Arial" panose="020B0604020202020204" pitchFamily="34" charset="0"/>
+            </a:endParaRPr>
+          </a:p>
+          <a:p>
+            <a:pPr algn="just"/>
+            <a:r>
+              <a:rPr lang="en-US" sz="1200" dirty="0">
+                <a:latin typeface="Arial" panose="020B0604020202020204" pitchFamily="34" charset="0"/>
+                <a:cs typeface="Arial" panose="020B0604020202020204" pitchFamily="34" charset="0"/>
+              </a:rPr>
+              <a:t>Python code block 3: </a:t>
+            </a:r>
+          </a:p>
+          <a:p>
+            <a:pPr algn="just"/>
+            <a:endParaRPr lang="en-US" sz="1200" dirty="0">
+              <a:latin typeface="Arial" panose="020B0604020202020204" pitchFamily="34" charset="0"/>
+              <a:cs typeface="Arial" panose="020B0604020202020204" pitchFamily="34" charset="0"/>
+            </a:endParaRPr>
+          </a:p>
+          <a:p>
+            <a:pPr algn="just"/>
+            <a:r>
+              <a:rPr lang="en-US" sz="1200" dirty="0">
+                <a:latin typeface="Arial" panose="020B0604020202020204" pitchFamily="34" charset="0"/>
+                <a:cs typeface="Arial" panose="020B0604020202020204" pitchFamily="34" charset="0"/>
+              </a:rPr>
+              <a:t>Python code block 4: </a:t>
+            </a:r>
+          </a:p>
+          <a:p>
+            <a:pPr algn="just"/>
+            <a:endParaRPr lang="en-US" sz="1200" dirty="0">
+              <a:latin typeface="Arial" panose="020B0604020202020204" pitchFamily="34" charset="0"/>
+              <a:cs typeface="Arial" panose="020B0604020202020204" pitchFamily="34" charset="0"/>
+            </a:endParaRPr>
+          </a:p>
+        </p:txBody>
+      </p:sp>
+      <p:sp>
+        <p:nvSpPr>
+          <p:cNvPr id="8" name="Rectángulo 7">
+            <a:extLst>
+              <a:ext uri="{FF2B5EF4-FFF2-40B4-BE49-F238E27FC236}">
+                <a16:creationId xmlns:a16="http://schemas.microsoft.com/office/drawing/2014/main" id="{F4B67F4D-126C-4796-4E73-E68F0F3CB6B3}"/>
+              </a:ext>
+            </a:extLst>
+          </p:cNvPr>
+          <p:cNvSpPr/>
+          <p:nvPr/>
+        </p:nvSpPr>
+        <p:spPr>
+          <a:xfrm>
+            <a:off x="6248400" y="990285"/>
+            <a:ext cx="5638799" cy="5181600"/>
+          </a:xfrm>
+          <a:prstGeom prst="rect">
+            <a:avLst/>
+          </a:prstGeom>
+          <a:noFill/>
+          <a:ln w="28575">
+            <a:solidFill>
+              <a:srgbClr val="E0700D"/>
+            </a:solidFill>
+          </a:ln>
+        </p:spPr>
+        <p:style>
+          <a:lnRef idx="2">
+            <a:schemeClr val="accent1">
+              <a:shade val="15000"/>
+            </a:schemeClr>
+          </a:lnRef>
+          <a:fillRef idx="1">
+            <a:schemeClr val="accent1"/>
+          </a:fillRef>
+          <a:effectRef idx="0">
+            <a:schemeClr val="accent1"/>
+          </a:effectRef>
+          <a:fontRef idx="minor">
+            <a:schemeClr val="lt1"/>
+          </a:fontRef>
+        </p:style>
+        <p:txBody>
+          <a:bodyPr rtlCol="0" anchor="ctr"/>
+          <a:lstStyle/>
+          <a:p>
+            <a:pPr algn="ctr"/>
+            <a:endParaRPr lang="en-US"/>
+          </a:p>
+        </p:txBody>
+      </p:sp>
+      <p:sp>
+        <p:nvSpPr>
+          <p:cNvPr id="9" name="CuadroTexto 8">
+            <a:extLst>
+              <a:ext uri="{FF2B5EF4-FFF2-40B4-BE49-F238E27FC236}">
+                <a16:creationId xmlns:a16="http://schemas.microsoft.com/office/drawing/2014/main" id="{24F5FE71-3005-DD28-5A06-1330678AD855}"/>
+              </a:ext>
+            </a:extLst>
+          </p:cNvPr>
+          <p:cNvSpPr txBox="1"/>
+          <p:nvPr/>
+        </p:nvSpPr>
+        <p:spPr>
+          <a:xfrm>
+            <a:off x="7663860" y="3105834"/>
+            <a:ext cx="2807885" cy="646331"/>
+          </a:xfrm>
+          <a:prstGeom prst="rect">
+            <a:avLst/>
+          </a:prstGeom>
+          <a:noFill/>
+        </p:spPr>
+        <p:txBody>
+          <a:bodyPr wrap="none" rtlCol="0">
+            <a:spAutoFit/>
+          </a:bodyPr>
+          <a:lstStyle/>
+          <a:p>
+            <a:pPr algn="ctr"/>
+            <a:r>
+              <a:rPr lang="es-ES" dirty="0"/>
+              <a:t>Complete </a:t>
+            </a:r>
+            <a:r>
+              <a:rPr lang="es-ES" dirty="0" err="1"/>
+              <a:t>layout</a:t>
+            </a:r>
+            <a:r>
+              <a:rPr lang="es-ES" dirty="0"/>
+              <a:t> </a:t>
+            </a:r>
+            <a:r>
+              <a:rPr lang="es-ES" dirty="0" err="1"/>
+              <a:t>screenshot</a:t>
+            </a:r>
+            <a:endParaRPr lang="es-ES" dirty="0"/>
+          </a:p>
+          <a:p>
+            <a:pPr algn="ctr"/>
+            <a:r>
+              <a:rPr lang="es-ES" dirty="0"/>
+              <a:t> </a:t>
+            </a:r>
+            <a:r>
+              <a:rPr lang="es-ES" dirty="0" err="1"/>
+              <a:t>screenshot</a:t>
+            </a:r>
+            <a:endParaRPr lang="en-US" dirty="0"/>
+          </a:p>
+        </p:txBody>
+      </p:sp>
+    </p:spTree>
+    <p:extLst>
+      <p:ext uri="{BB962C8B-B14F-4D97-AF65-F5344CB8AC3E}">
+        <p14:creationId xmlns:p14="http://schemas.microsoft.com/office/powerpoint/2010/main" val="3190811588"/>
+      </p:ext>
+    </p:extLst>
+  </p:cSld>
+  <p:clrMapOvr>
+    <a:masterClrMapping/>
+  </p:clrMapOvr>
+</p:sld>
+</file>
+
+<file path=ppt/slides/slide14.xml><?xml version="1.0" encoding="utf-8"?>
+<p:sld xmlns:a="http://schemas.openxmlformats.org/drawingml/2006/main" xmlns:r="http://schemas.openxmlformats.org/officeDocument/2006/relationships" xmlns:p="http://schemas.openxmlformats.org/presentationml/2006/main">
+  <p:cSld>
+    <p:spTree>
+      <p:nvGrpSpPr>
+        <p:cNvPr id="1" name="">
+          <a:extLst>
+            <a:ext uri="{FF2B5EF4-FFF2-40B4-BE49-F238E27FC236}">
+              <a16:creationId xmlns:a16="http://schemas.microsoft.com/office/drawing/2014/main" id="{AF9787F0-CB2C-2FE5-5614-A0F16A628E7A}"/>
+            </a:ext>
+          </a:extLst>
+        </p:cNvPr>
+        <p:cNvGrpSpPr/>
+        <p:nvPr/>
+      </p:nvGrpSpPr>
+      <p:grpSpPr>
+        <a:xfrm>
+          <a:off x="0" y="0"/>
+          <a:ext cx="0" cy="0"/>
+          <a:chOff x="0" y="0"/>
+          <a:chExt cx="0" cy="0"/>
+        </a:xfrm>
+      </p:grpSpPr>
+      <p:sp>
+        <p:nvSpPr>
+          <p:cNvPr id="16" name="object 16">
+            <a:extLst>
+              <a:ext uri="{FF2B5EF4-FFF2-40B4-BE49-F238E27FC236}">
+                <a16:creationId xmlns:a16="http://schemas.microsoft.com/office/drawing/2014/main" id="{102B708D-0704-5977-EC6F-88CF05CBBE8F}"/>
+              </a:ext>
+            </a:extLst>
+          </p:cNvPr>
+          <p:cNvSpPr txBox="1">
+            <a:spLocks noGrp="1"/>
+          </p:cNvSpPr>
+          <p:nvPr>
+            <p:ph type="title"/>
+          </p:nvPr>
+        </p:nvSpPr>
+        <p:spPr>
+          <a:xfrm>
+            <a:off x="685800" y="408883"/>
+            <a:ext cx="10994410" cy="397545"/>
+          </a:xfrm>
+          <a:prstGeom prst="rect">
+            <a:avLst/>
+          </a:prstGeom>
+        </p:spPr>
+        <p:txBody>
+          <a:bodyPr vert="horz" wrap="square" lIns="0" tIns="12700" rIns="0" bIns="0" rtlCol="0">
+            <a:spAutoFit/>
+          </a:bodyPr>
+          <a:lstStyle/>
+          <a:p>
+            <a:pPr marL="12700" algn="l">
+              <a:lnSpc>
+                <a:spcPct val="100000"/>
+              </a:lnSpc>
+              <a:spcBef>
+                <a:spcPts val="100"/>
+              </a:spcBef>
+            </a:pPr>
+            <a:r>
+              <a:rPr lang="en-US" sz="2500" dirty="0"/>
+              <a:t>Learning outcome #4 – Notebook section 4. Exercises – 1 slide per bullet point</a:t>
+            </a:r>
+            <a:endParaRPr sz="2500" b="0" i="1" dirty="0">
+              <a:latin typeface="+mj-lt"/>
+              <a:cs typeface="Lucida Sans"/>
+            </a:endParaRPr>
+          </a:p>
+        </p:txBody>
+      </p:sp>
+      <p:pic>
+        <p:nvPicPr>
+          <p:cNvPr id="83" name="Gráfico 82">
+            <a:extLst>
+              <a:ext uri="{FF2B5EF4-FFF2-40B4-BE49-F238E27FC236}">
+                <a16:creationId xmlns:a16="http://schemas.microsoft.com/office/drawing/2014/main" id="{25386122-0096-23D3-AB3A-550FBF0A3140}"/>
+              </a:ext>
+            </a:extLst>
+          </p:cNvPr>
+          <p:cNvPicPr>
+            <a:picLocks noChangeAspect="1"/>
+          </p:cNvPicPr>
+          <p:nvPr/>
+        </p:nvPicPr>
+        <p:blipFill>
+          <a:blip>
+            <a:extLst>
+              <a:ext uri="{96DAC541-7B7A-43D3-8B79-37D633B846F1}">
+                <asvg:svgBlip xmlns:asvg="http://schemas.microsoft.com/office/drawing/2016/SVG/main" r:embed="rId3"/>
+              </a:ext>
+            </a:extLst>
+          </a:blip>
+          <a:stretch>
+            <a:fillRect/>
+          </a:stretch>
+        </p:blipFill>
+        <p:spPr>
+          <a:xfrm>
+            <a:off x="5045006" y="6356057"/>
+            <a:ext cx="6409575" cy="363174"/>
+          </a:xfrm>
+          <a:prstGeom prst="rect">
+            <a:avLst/>
+          </a:prstGeom>
+        </p:spPr>
+      </p:pic>
+      <p:sp>
+        <p:nvSpPr>
+          <p:cNvPr id="84" name="Marcador de número de diapositiva 83">
+            <a:extLst>
+              <a:ext uri="{FF2B5EF4-FFF2-40B4-BE49-F238E27FC236}">
+                <a16:creationId xmlns:a16="http://schemas.microsoft.com/office/drawing/2014/main" id="{713FD8D6-DEAF-544C-DE8A-FEED1CFD257F}"/>
+              </a:ext>
+            </a:extLst>
+          </p:cNvPr>
+          <p:cNvSpPr>
+            <a:spLocks noGrp="1"/>
+          </p:cNvSpPr>
+          <p:nvPr>
+            <p:ph type="sldNum" sz="quarter" idx="7"/>
+          </p:nvPr>
+        </p:nvSpPr>
+        <p:spPr/>
+        <p:txBody>
+          <a:bodyPr/>
+          <a:lstStyle/>
+          <a:p>
+            <a:fld id="{B6F15528-21DE-4FAA-801E-634DDDAF4B2B}" type="slidenum">
+              <a:rPr lang="es-ES" smtClean="0"/>
+              <a:t>14</a:t>
+            </a:fld>
+            <a:endParaRPr lang="es-ES"/>
+          </a:p>
+        </p:txBody>
+      </p:sp>
+      <p:sp>
+        <p:nvSpPr>
+          <p:cNvPr id="3" name="Marcador de pie de página 2">
+            <a:extLst>
+              <a:ext uri="{FF2B5EF4-FFF2-40B4-BE49-F238E27FC236}">
+                <a16:creationId xmlns:a16="http://schemas.microsoft.com/office/drawing/2014/main" id="{30B40145-CD7B-EB6E-E37D-B6E973BB915B}"/>
+              </a:ext>
+            </a:extLst>
+          </p:cNvPr>
+          <p:cNvSpPr>
+            <a:spLocks noGrp="1"/>
+          </p:cNvSpPr>
+          <p:nvPr>
+            <p:ph type="ftr" sz="quarter" idx="5"/>
+          </p:nvPr>
+        </p:nvSpPr>
+        <p:spPr/>
+        <p:txBody>
+          <a:bodyPr/>
+          <a:lstStyle/>
+          <a:p>
+            <a:pPr marL="12700">
+              <a:spcBef>
+                <a:spcPts val="15"/>
+              </a:spcBef>
+            </a:pPr>
+            <a:r>
+              <a:rPr lang="es-ES" spc="-5"/>
+              <a:t>LAB 4.0. LAYOUT</a:t>
+            </a:r>
+            <a:endParaRPr lang="es-ES" spc="-5" dirty="0"/>
+          </a:p>
+        </p:txBody>
+      </p:sp>
+      <p:sp>
+        <p:nvSpPr>
+          <p:cNvPr id="2" name="CuadroTexto 1">
+            <a:extLst>
+              <a:ext uri="{FF2B5EF4-FFF2-40B4-BE49-F238E27FC236}">
+                <a16:creationId xmlns:a16="http://schemas.microsoft.com/office/drawing/2014/main" id="{3C6D55FC-5031-5DAE-893E-BF1355747932}"/>
+              </a:ext>
+            </a:extLst>
+          </p:cNvPr>
+          <p:cNvSpPr txBox="1"/>
+          <p:nvPr/>
+        </p:nvSpPr>
+        <p:spPr>
+          <a:xfrm>
+            <a:off x="685800" y="990600"/>
+            <a:ext cx="5410200" cy="5181600"/>
+          </a:xfrm>
+          <a:prstGeom prst="rect">
+            <a:avLst/>
+          </a:prstGeom>
+          <a:solidFill>
+            <a:schemeClr val="bg1">
+              <a:lumMod val="95000"/>
+            </a:schemeClr>
+          </a:solidFill>
+          <a:ln w="28575">
+            <a:solidFill>
+              <a:srgbClr val="E0700D"/>
+            </a:solidFill>
+          </a:ln>
+        </p:spPr>
+        <p:txBody>
+          <a:bodyPr wrap="square" rtlCol="0">
+            <a:noAutofit/>
+          </a:bodyPr>
+          <a:lstStyle/>
+          <a:p>
+            <a:pPr algn="just"/>
+            <a:r>
+              <a:rPr lang="en-US" sz="1200" b="1" dirty="0">
+                <a:latin typeface="Arial" panose="020B0604020202020204" pitchFamily="34" charset="0"/>
+                <a:cs typeface="Arial" panose="020B0604020202020204" pitchFamily="34" charset="0"/>
+              </a:rPr>
+              <a:t>Code for …</a:t>
+            </a:r>
+          </a:p>
+          <a:p>
+            <a:pPr algn="just"/>
+            <a:endParaRPr lang="en-US" sz="1200" b="1" dirty="0">
+              <a:latin typeface="Arial" panose="020B0604020202020204" pitchFamily="34" charset="0"/>
+              <a:cs typeface="Arial" panose="020B0604020202020204" pitchFamily="34" charset="0"/>
+            </a:endParaRPr>
+          </a:p>
+          <a:p>
+            <a:pPr algn="just"/>
+            <a:r>
+              <a:rPr lang="en-US" sz="1200" b="1" dirty="0">
+                <a:latin typeface="Arial" panose="020B0604020202020204" pitchFamily="34" charset="0"/>
+                <a:cs typeface="Arial" panose="020B0604020202020204" pitchFamily="34" charset="0"/>
+              </a:rPr>
+              <a:t>Part a) Creating components</a:t>
+            </a:r>
+          </a:p>
+          <a:p>
+            <a:pPr algn="just"/>
+            <a:r>
+              <a:rPr lang="en-US" sz="1200" dirty="0">
+                <a:latin typeface="Arial" panose="020B0604020202020204" pitchFamily="34" charset="0"/>
+                <a:cs typeface="Arial" panose="020B0604020202020204" pitchFamily="34" charset="0"/>
+              </a:rPr>
+              <a:t>- Create a cell component for a unbalanced MZI, using 2x2 50:50 MMIs with arm length difference as parameter</a:t>
+            </a:r>
+          </a:p>
+          <a:p>
+            <a:pPr algn="just"/>
+            <a:r>
+              <a:rPr lang="en-US" sz="1200" dirty="0">
+                <a:latin typeface="Arial" panose="020B0604020202020204" pitchFamily="34" charset="0"/>
+                <a:cs typeface="Arial" panose="020B0604020202020204" pitchFamily="34" charset="0"/>
+              </a:rPr>
+              <a:t>- Create a cell component based on the previous, where the arms have thermal tuners on top of each one</a:t>
+            </a:r>
+          </a:p>
+          <a:p>
+            <a:pPr algn="just"/>
+            <a:r>
+              <a:rPr lang="en-US" sz="1200" dirty="0">
+                <a:latin typeface="Arial" panose="020B0604020202020204" pitchFamily="34" charset="0"/>
+                <a:cs typeface="Arial" panose="020B0604020202020204" pitchFamily="34" charset="0"/>
+              </a:rPr>
+              <a:t>- Create a cell component for an all-pass ring resonator, using 2x2 50:50 MMIs, with extra length parameter for different perimeters</a:t>
+            </a:r>
+          </a:p>
+          <a:p>
+            <a:pPr algn="just"/>
+            <a:r>
+              <a:rPr lang="en-US" sz="1200" dirty="0">
+                <a:latin typeface="Arial" panose="020B0604020202020204" pitchFamily="34" charset="0"/>
+                <a:cs typeface="Arial" panose="020B0604020202020204" pitchFamily="34" charset="0"/>
+              </a:rPr>
+              <a:t>- Create a cell component based on the previous, where the ring has a thermal tuner on top along all the perimeter</a:t>
+            </a:r>
+          </a:p>
+          <a:p>
+            <a:pPr algn="just"/>
+            <a:r>
+              <a:rPr lang="en-US" sz="1200" dirty="0">
+                <a:latin typeface="Arial" panose="020B0604020202020204" pitchFamily="34" charset="0"/>
+                <a:cs typeface="Arial" panose="020B0604020202020204" pitchFamily="34" charset="0"/>
+              </a:rPr>
+              <a:t>- Create a cell component based on existing </a:t>
+            </a:r>
+            <a:r>
+              <a:rPr lang="en-US" sz="1200" dirty="0" err="1">
+                <a:latin typeface="Arial" panose="020B0604020202020204" pitchFamily="34" charset="0"/>
+                <a:cs typeface="Arial" panose="020B0604020202020204" pitchFamily="34" charset="0"/>
+              </a:rPr>
+              <a:t>GDSfactory</a:t>
+            </a:r>
+            <a:r>
+              <a:rPr lang="en-US" sz="1200" dirty="0">
+                <a:latin typeface="Arial" panose="020B0604020202020204" pitchFamily="34" charset="0"/>
+                <a:cs typeface="Arial" panose="020B0604020202020204" pitchFamily="34" charset="0"/>
+              </a:rPr>
+              <a:t> spiral components, with length as parameter</a:t>
+            </a:r>
+          </a:p>
+          <a:p>
+            <a:pPr algn="just"/>
+            <a:endParaRPr lang="en-US" sz="1200" dirty="0">
+              <a:latin typeface="Arial" panose="020B0604020202020204" pitchFamily="34" charset="0"/>
+              <a:cs typeface="Arial" panose="020B0604020202020204" pitchFamily="34" charset="0"/>
+            </a:endParaRPr>
+          </a:p>
+          <a:p>
+            <a:pPr algn="just"/>
+            <a:r>
+              <a:rPr lang="en-US" sz="1200" b="1" dirty="0">
+                <a:latin typeface="Arial" panose="020B0604020202020204" pitchFamily="34" charset="0"/>
+                <a:cs typeface="Arial" panose="020B0604020202020204" pitchFamily="34" charset="0"/>
+              </a:rPr>
+              <a:t>Part b) Creating die</a:t>
+            </a:r>
+          </a:p>
+          <a:p>
+            <a:pPr algn="just"/>
+            <a:r>
+              <a:rPr lang="en-US" sz="1200" dirty="0">
+                <a:latin typeface="Arial" panose="020B0604020202020204" pitchFamily="34" charset="0"/>
+                <a:cs typeface="Arial" panose="020B0604020202020204" pitchFamily="34" charset="0"/>
+              </a:rPr>
+              <a:t>- Create a die  W = 5 mm x L = 10 mm </a:t>
+            </a:r>
+          </a:p>
+          <a:p>
+            <a:pPr algn="just"/>
+            <a:r>
+              <a:rPr lang="en-US" sz="1200" dirty="0">
+                <a:latin typeface="Arial" panose="020B0604020202020204" pitchFamily="34" charset="0"/>
+                <a:cs typeface="Arial" panose="020B0604020202020204" pitchFamily="34" charset="0"/>
+              </a:rPr>
+              <a:t>- Create an array of I/</a:t>
+            </a:r>
+            <a:r>
+              <a:rPr lang="en-US" sz="1200" dirty="0" err="1">
+                <a:latin typeface="Arial" panose="020B0604020202020204" pitchFamily="34" charset="0"/>
+                <a:cs typeface="Arial" panose="020B0604020202020204" pitchFamily="34" charset="0"/>
+              </a:rPr>
+              <a:t>Os</a:t>
+            </a:r>
+            <a:r>
+              <a:rPr lang="en-US" sz="1200" dirty="0">
+                <a:latin typeface="Arial" panose="020B0604020202020204" pitchFamily="34" charset="0"/>
+                <a:cs typeface="Arial" panose="020B0604020202020204" pitchFamily="34" charset="0"/>
+              </a:rPr>
+              <a:t> spaced at 250 µm (as much I/</a:t>
+            </a:r>
+            <a:r>
+              <a:rPr lang="en-US" sz="1200" dirty="0" err="1">
+                <a:latin typeface="Arial" panose="020B0604020202020204" pitchFamily="34" charset="0"/>
+                <a:cs typeface="Arial" panose="020B0604020202020204" pitchFamily="34" charset="0"/>
+              </a:rPr>
+              <a:t>Os</a:t>
+            </a:r>
+            <a:r>
+              <a:rPr lang="en-US" sz="1200" dirty="0">
+                <a:latin typeface="Arial" panose="020B0604020202020204" pitchFamily="34" charset="0"/>
+                <a:cs typeface="Arial" panose="020B0604020202020204" pitchFamily="34" charset="0"/>
+              </a:rPr>
+              <a:t> as the width allows)</a:t>
+            </a:r>
+          </a:p>
+          <a:p>
+            <a:pPr algn="just"/>
+            <a:r>
+              <a:rPr lang="en-US" sz="1200" dirty="0">
+                <a:latin typeface="Arial" panose="020B0604020202020204" pitchFamily="34" charset="0"/>
+                <a:cs typeface="Arial" panose="020B0604020202020204" pitchFamily="34" charset="0"/>
+              </a:rPr>
+              <a:t>- Create a cell component of this die, with I/</a:t>
+            </a:r>
+            <a:r>
+              <a:rPr lang="en-US" sz="1200" dirty="0" err="1">
+                <a:latin typeface="Arial" panose="020B0604020202020204" pitchFamily="34" charset="0"/>
+                <a:cs typeface="Arial" panose="020B0604020202020204" pitchFamily="34" charset="0"/>
+              </a:rPr>
+              <a:t>Os</a:t>
+            </a:r>
+            <a:r>
+              <a:rPr lang="en-US" sz="1200" dirty="0">
+                <a:latin typeface="Arial" panose="020B0604020202020204" pitchFamily="34" charset="0"/>
+                <a:cs typeface="Arial" panose="020B0604020202020204" pitchFamily="34" charset="0"/>
+              </a:rPr>
+              <a:t> accessible to connect</a:t>
+            </a:r>
+          </a:p>
+          <a:p>
+            <a:pPr algn="just"/>
+            <a:endParaRPr lang="en-US" sz="1200" dirty="0">
+              <a:latin typeface="Arial" panose="020B0604020202020204" pitchFamily="34" charset="0"/>
+              <a:cs typeface="Arial" panose="020B0604020202020204" pitchFamily="34" charset="0"/>
+            </a:endParaRPr>
+          </a:p>
+          <a:p>
+            <a:pPr algn="just"/>
+            <a:r>
+              <a:rPr lang="en-US" sz="1200" b="1" dirty="0">
+                <a:latin typeface="Arial" panose="020B0604020202020204" pitchFamily="34" charset="0"/>
+                <a:cs typeface="Arial" panose="020B0604020202020204" pitchFamily="34" charset="0"/>
+              </a:rPr>
+              <a:t>Part c) </a:t>
+            </a:r>
+            <a:r>
+              <a:rPr lang="en-US" sz="1200" b="1" dirty="0" err="1">
+                <a:latin typeface="Arial" panose="020B0604020202020204" pitchFamily="34" charset="0"/>
+                <a:cs typeface="Arial" panose="020B0604020202020204" pitchFamily="34" charset="0"/>
+              </a:rPr>
+              <a:t>Floorplaning</a:t>
+            </a:r>
+            <a:r>
+              <a:rPr lang="en-US" sz="1200" b="1" dirty="0">
+                <a:latin typeface="Arial" panose="020B0604020202020204" pitchFamily="34" charset="0"/>
+                <a:cs typeface="Arial" panose="020B0604020202020204" pitchFamily="34" charset="0"/>
+              </a:rPr>
+              <a:t> and die layout</a:t>
+            </a:r>
+          </a:p>
+          <a:p>
+            <a:pPr algn="just"/>
+            <a:r>
+              <a:rPr lang="en-US" sz="1200" dirty="0">
+                <a:latin typeface="Arial" panose="020B0604020202020204" pitchFamily="34" charset="0"/>
+                <a:cs typeface="Arial" panose="020B0604020202020204" pitchFamily="34" charset="0"/>
+              </a:rPr>
+              <a:t>- Make an instance of the die as host component for your layout</a:t>
+            </a:r>
+          </a:p>
+          <a:p>
+            <a:pPr algn="just"/>
+            <a:r>
+              <a:rPr lang="en-US" sz="1200" dirty="0">
+                <a:latin typeface="Arial" panose="020B0604020202020204" pitchFamily="34" charset="0"/>
+                <a:cs typeface="Arial" panose="020B0604020202020204" pitchFamily="34" charset="0"/>
+              </a:rPr>
+              <a:t>- Add 3 sets of 3 straight waveguides, from left to right of the die, top, middle and bottom of the die</a:t>
+            </a:r>
+          </a:p>
+          <a:p>
+            <a:pPr algn="just"/>
+            <a:r>
+              <a:rPr lang="en-US" sz="1200" dirty="0">
+                <a:latin typeface="Arial" panose="020B0604020202020204" pitchFamily="34" charset="0"/>
+                <a:cs typeface="Arial" panose="020B0604020202020204" pitchFamily="34" charset="0"/>
+              </a:rPr>
+              <a:t>- Add 2 of each of the components above, with different lengths</a:t>
+            </a:r>
+          </a:p>
+          <a:p>
+            <a:pPr algn="just"/>
+            <a:r>
+              <a:rPr lang="en-US" sz="1200" dirty="0">
+                <a:latin typeface="Arial" panose="020B0604020202020204" pitchFamily="34" charset="0"/>
+                <a:cs typeface="Arial" panose="020B0604020202020204" pitchFamily="34" charset="0"/>
+              </a:rPr>
+              <a:t>- Connect all your components to the I/</a:t>
+            </a:r>
+            <a:r>
+              <a:rPr lang="en-US" sz="1200" dirty="0" err="1">
+                <a:latin typeface="Arial" panose="020B0604020202020204" pitchFamily="34" charset="0"/>
+                <a:cs typeface="Arial" panose="020B0604020202020204" pitchFamily="34" charset="0"/>
+              </a:rPr>
+              <a:t>Os</a:t>
+            </a:r>
+            <a:r>
+              <a:rPr lang="en-US" sz="1200" dirty="0">
+                <a:latin typeface="Arial" panose="020B0604020202020204" pitchFamily="34" charset="0"/>
+                <a:cs typeface="Arial" panose="020B0604020202020204" pitchFamily="34" charset="0"/>
+              </a:rPr>
+              <a:t> </a:t>
+            </a:r>
+          </a:p>
+        </p:txBody>
+      </p:sp>
+      <p:sp>
+        <p:nvSpPr>
+          <p:cNvPr id="8" name="Rectángulo 7">
+            <a:extLst>
+              <a:ext uri="{FF2B5EF4-FFF2-40B4-BE49-F238E27FC236}">
+                <a16:creationId xmlns:a16="http://schemas.microsoft.com/office/drawing/2014/main" id="{B7F15AC0-F440-2DF1-6C9D-0A7E2EAFC2C8}"/>
+              </a:ext>
+            </a:extLst>
+          </p:cNvPr>
+          <p:cNvSpPr/>
+          <p:nvPr/>
+        </p:nvSpPr>
+        <p:spPr>
+          <a:xfrm>
+            <a:off x="6248400" y="990285"/>
+            <a:ext cx="5638799" cy="5181600"/>
+          </a:xfrm>
+          <a:prstGeom prst="rect">
+            <a:avLst/>
+          </a:prstGeom>
+          <a:noFill/>
+          <a:ln w="28575">
+            <a:solidFill>
+              <a:srgbClr val="E0700D"/>
+            </a:solidFill>
+          </a:ln>
+        </p:spPr>
+        <p:style>
+          <a:lnRef idx="2">
+            <a:schemeClr val="accent1">
+              <a:shade val="15000"/>
+            </a:schemeClr>
+          </a:lnRef>
+          <a:fillRef idx="1">
+            <a:schemeClr val="accent1"/>
+          </a:fillRef>
+          <a:effectRef idx="0">
+            <a:schemeClr val="accent1"/>
+          </a:effectRef>
+          <a:fontRef idx="minor">
+            <a:schemeClr val="lt1"/>
+          </a:fontRef>
+        </p:style>
+        <p:txBody>
+          <a:bodyPr rtlCol="0" anchor="ctr"/>
+          <a:lstStyle/>
+          <a:p>
+            <a:pPr algn="ctr"/>
+            <a:endParaRPr lang="en-US"/>
+          </a:p>
+        </p:txBody>
+      </p:sp>
+      <p:sp>
+        <p:nvSpPr>
+          <p:cNvPr id="9" name="CuadroTexto 8">
+            <a:extLst>
+              <a:ext uri="{FF2B5EF4-FFF2-40B4-BE49-F238E27FC236}">
+                <a16:creationId xmlns:a16="http://schemas.microsoft.com/office/drawing/2014/main" id="{9452515D-9AC0-62DB-2A62-0C197A32C5E7}"/>
+              </a:ext>
+            </a:extLst>
+          </p:cNvPr>
+          <p:cNvSpPr txBox="1"/>
+          <p:nvPr/>
+        </p:nvSpPr>
+        <p:spPr>
+          <a:xfrm>
+            <a:off x="8180318" y="3105834"/>
+            <a:ext cx="1774973" cy="369332"/>
+          </a:xfrm>
+          <a:prstGeom prst="rect">
+            <a:avLst/>
+          </a:prstGeom>
+          <a:noFill/>
+        </p:spPr>
+        <p:txBody>
+          <a:bodyPr wrap="none" rtlCol="0">
+            <a:spAutoFit/>
+          </a:bodyPr>
+          <a:lstStyle/>
+          <a:p>
+            <a:pPr algn="ctr"/>
+            <a:r>
+              <a:rPr lang="es-ES" dirty="0" err="1"/>
+              <a:t>Screenshot</a:t>
+            </a:r>
+            <a:r>
+              <a:rPr lang="es-ES" dirty="0"/>
+              <a:t> </a:t>
+            </a:r>
+            <a:r>
+              <a:rPr lang="es-ES" dirty="0" err="1"/>
+              <a:t>for</a:t>
+            </a:r>
+            <a:r>
+              <a:rPr lang="es-ES" dirty="0"/>
+              <a:t> …</a:t>
+            </a:r>
+            <a:endParaRPr lang="en-US" dirty="0"/>
+          </a:p>
+        </p:txBody>
+      </p:sp>
+    </p:spTree>
+    <p:extLst>
+      <p:ext uri="{BB962C8B-B14F-4D97-AF65-F5344CB8AC3E}">
+        <p14:creationId xmlns:p14="http://schemas.microsoft.com/office/powerpoint/2010/main" val="708738583"/>
+      </p:ext>
+    </p:extLst>
+  </p:cSld>
+  <p:clrMapOvr>
+    <a:masterClrMapping/>
+  </p:clrMapOvr>
+</p:sld>
+</file>
+
+<file path=ppt/slides/slide15.xml><?xml version="1.0" encoding="utf-8"?>
+<p:sld xmlns:a="http://schemas.openxmlformats.org/drawingml/2006/main" xmlns:r="http://schemas.openxmlformats.org/officeDocument/2006/relationships" xmlns:p="http://schemas.openxmlformats.org/presentationml/2006/main">
+  <p:cSld>
+    <p:spTree>
+      <p:nvGrpSpPr>
+        <p:cNvPr id="1" name=""/>
+        <p:cNvGrpSpPr/>
+        <p:nvPr/>
+      </p:nvGrpSpPr>
+      <p:grpSpPr>
+        <a:xfrm>
+          <a:off x="0" y="0"/>
+          <a:ext cx="0" cy="0"/>
+          <a:chOff x="0" y="0"/>
+          <a:chExt cx="0" cy="0"/>
+        </a:xfrm>
+      </p:grpSpPr>
+      <p:sp>
+        <p:nvSpPr>
+          <p:cNvPr id="3" name="object 3"/>
+          <p:cNvSpPr/>
+          <p:nvPr/>
+        </p:nvSpPr>
+        <p:spPr>
+          <a:xfrm>
+            <a:off x="3945635" y="2636520"/>
+            <a:ext cx="8246363" cy="1584959"/>
+          </a:xfrm>
+          <a:prstGeom prst="rect">
+            <a:avLst/>
+          </a:prstGeom>
+          <a:blipFill>
+            <a:blip r:embed="rId2" cstate="print"/>
+            <a:stretch>
+              <a:fillRect/>
+            </a:stretch>
+          </a:blipFill>
+        </p:spPr>
+        <p:txBody>
+          <a:bodyPr wrap="square" lIns="0" tIns="0" rIns="0" bIns="0" rtlCol="0"/>
+          <a:lstStyle/>
+          <a:p>
+            <a:endParaRPr/>
+          </a:p>
+        </p:txBody>
+      </p:sp>
+      <p:sp>
+        <p:nvSpPr>
+          <p:cNvPr id="4" name="object 4"/>
+          <p:cNvSpPr txBox="1">
+            <a:spLocks noGrp="1"/>
+          </p:cNvSpPr>
+          <p:nvPr>
+            <p:ph type="title"/>
+          </p:nvPr>
+        </p:nvSpPr>
+        <p:spPr>
+          <a:xfrm>
+            <a:off x="4513326" y="3165729"/>
+            <a:ext cx="2233295" cy="513715"/>
+          </a:xfrm>
+          <a:prstGeom prst="rect">
+            <a:avLst/>
+          </a:prstGeom>
+        </p:spPr>
+        <p:txBody>
+          <a:bodyPr vert="horz" wrap="square" lIns="0" tIns="13335" rIns="0" bIns="0" rtlCol="0">
+            <a:spAutoFit/>
+          </a:bodyPr>
+          <a:lstStyle/>
+          <a:p>
+            <a:pPr marL="12700">
+              <a:lnSpc>
+                <a:spcPct val="100000"/>
+              </a:lnSpc>
+              <a:spcBef>
+                <a:spcPts val="105"/>
+              </a:spcBef>
+            </a:pPr>
+            <a:r>
+              <a:rPr sz="3200" b="1" spc="-5" dirty="0">
+                <a:solidFill>
+                  <a:srgbClr val="FFFFFF"/>
+                </a:solidFill>
+                <a:latin typeface="Lucida Sans"/>
+                <a:cs typeface="Lucida Sans"/>
+              </a:rPr>
+              <a:t>Thank</a:t>
+            </a:r>
+            <a:r>
+              <a:rPr sz="3200" b="1" spc="-55" dirty="0">
+                <a:solidFill>
+                  <a:srgbClr val="FFFFFF"/>
+                </a:solidFill>
+                <a:latin typeface="Lucida Sans"/>
+                <a:cs typeface="Lucida Sans"/>
+              </a:rPr>
+              <a:t> </a:t>
+            </a:r>
+            <a:r>
+              <a:rPr sz="3200" b="1" dirty="0">
+                <a:solidFill>
+                  <a:srgbClr val="FFFFFF"/>
+                </a:solidFill>
+                <a:latin typeface="Lucida Sans"/>
+                <a:cs typeface="Lucida Sans"/>
+              </a:rPr>
+              <a:t>you</a:t>
+            </a:r>
+            <a:endParaRPr sz="3200">
+              <a:latin typeface="Lucida Sans"/>
+              <a:cs typeface="Lucida Sans"/>
+            </a:endParaRPr>
+          </a:p>
+        </p:txBody>
+      </p:sp>
+      <p:sp>
+        <p:nvSpPr>
+          <p:cNvPr id="5" name="Marcador de número de diapositiva 4">
+            <a:extLst>
+              <a:ext uri="{FF2B5EF4-FFF2-40B4-BE49-F238E27FC236}">
+                <a16:creationId xmlns:a16="http://schemas.microsoft.com/office/drawing/2014/main" id="{B052DA19-AD24-7D24-2AE9-51F8F5A7F5E0}"/>
+              </a:ext>
+            </a:extLst>
+          </p:cNvPr>
+          <p:cNvSpPr>
+            <a:spLocks noGrp="1"/>
+          </p:cNvSpPr>
+          <p:nvPr>
+            <p:ph type="sldNum" sz="quarter" idx="7"/>
+          </p:nvPr>
+        </p:nvSpPr>
+        <p:spPr/>
+        <p:txBody>
+          <a:bodyPr/>
+          <a:lstStyle/>
+          <a:p>
+            <a:fld id="{B6F15528-21DE-4FAA-801E-634DDDAF4B2B}" type="slidenum">
+              <a:rPr lang="es-ES" smtClean="0"/>
+              <a:t>15</a:t>
+            </a:fld>
+            <a:endParaRPr lang="es-ES"/>
+          </a:p>
+        </p:txBody>
+      </p:sp>
+    </p:spTree>
+  </p:cSld>
+  <p:clrMapOvr>
+    <a:masterClrMapping/>
+  </p:clrMapOvr>
+</p:sld>
+</file>
+
 <file path=ppt/slides/slide2.xml><?xml version="1.0" encoding="utf-8"?>
 <p:sld xmlns:a="http://schemas.openxmlformats.org/drawingml/2006/main" xmlns:r="http://schemas.openxmlformats.org/officeDocument/2006/relationships" xmlns:p="http://schemas.openxmlformats.org/presentationml/2006/main">
   <p:cSld>
@@ -4245,8 +7469,8 @@
         </p:nvSpPr>
         <p:spPr>
           <a:xfrm>
-            <a:off x="609441" y="4860334"/>
-            <a:ext cx="11199971" cy="1384995"/>
+            <a:off x="467846" y="1420406"/>
+            <a:ext cx="5715159" cy="3970318"/>
           </a:xfrm>
           <a:prstGeom prst="rect">
             <a:avLst/>
@@ -4270,61 +7494,310 @@
           <a:p>
             <a:pPr algn="just"/>
             <a:r>
-              <a:rPr lang="en-US" sz="1200" dirty="0">
+              <a:rPr lang="es-ES" sz="1200" b="1" dirty="0">
                 <a:latin typeface="Arial" panose="020B0604020202020204" pitchFamily="34" charset="0"/>
                 <a:cs typeface="Arial" panose="020B0604020202020204" pitchFamily="34" charset="0"/>
               </a:rPr>
-              <a:t>A PDK is …</a:t>
+              <a:t>Un PDK, o Process </a:t>
+            </a:r>
+            <a:r>
+              <a:rPr lang="es-ES" sz="1200" b="1" dirty="0" err="1">
+                <a:latin typeface="Arial" panose="020B0604020202020204" pitchFamily="34" charset="0"/>
+                <a:cs typeface="Arial" panose="020B0604020202020204" pitchFamily="34" charset="0"/>
+              </a:rPr>
+              <a:t>Design</a:t>
+            </a:r>
+            <a:r>
+              <a:rPr lang="es-ES" sz="1200" b="1" dirty="0">
+                <a:latin typeface="Arial" panose="020B0604020202020204" pitchFamily="34" charset="0"/>
+                <a:cs typeface="Arial" panose="020B0604020202020204" pitchFamily="34" charset="0"/>
+              </a:rPr>
+              <a:t> Kit, es</a:t>
+            </a:r>
+            <a:r>
+              <a:rPr lang="es-ES" sz="1200" dirty="0">
+                <a:latin typeface="Arial" panose="020B0604020202020204" pitchFamily="34" charset="0"/>
+                <a:cs typeface="Arial" panose="020B0604020202020204" pitchFamily="34" charset="0"/>
+              </a:rPr>
+              <a:t> el conjunto de archivos, reglas de diseño, mapas de capas, librerías de componentes, modelos y documentación que proporciona una </a:t>
+            </a:r>
+            <a:r>
+              <a:rPr lang="es-ES" sz="1200" dirty="0" err="1">
+                <a:latin typeface="Arial" panose="020B0604020202020204" pitchFamily="34" charset="0"/>
+                <a:cs typeface="Arial" panose="020B0604020202020204" pitchFamily="34" charset="0"/>
+              </a:rPr>
+              <a:t>foundry</a:t>
+            </a:r>
+            <a:r>
+              <a:rPr lang="es-ES" sz="1200" dirty="0">
+                <a:latin typeface="Arial" panose="020B0604020202020204" pitchFamily="34" charset="0"/>
+                <a:cs typeface="Arial" panose="020B0604020202020204" pitchFamily="34" charset="0"/>
+              </a:rPr>
+              <a:t> para poder diseñar un circuito fotónico integrado compatible con su proceso de fabricación.</a:t>
             </a:r>
           </a:p>
           <a:p>
             <a:pPr algn="just"/>
+            <a:endParaRPr lang="es-ES" sz="1200" dirty="0">
+              <a:latin typeface="Arial" panose="020B0604020202020204" pitchFamily="34" charset="0"/>
+              <a:cs typeface="Arial" panose="020B0604020202020204" pitchFamily="34" charset="0"/>
+            </a:endParaRPr>
+          </a:p>
+          <a:p>
+            <a:pPr algn="just"/>
+            <a:r>
+              <a:rPr lang="es-ES" sz="1200" b="1" dirty="0">
+                <a:latin typeface="Arial" panose="020B0604020202020204" pitchFamily="34" charset="0"/>
+                <a:cs typeface="Arial" panose="020B0604020202020204" pitchFamily="34" charset="0"/>
+              </a:rPr>
+              <a:t>En general, las capas de </a:t>
+            </a:r>
+            <a:r>
+              <a:rPr lang="es-ES" sz="1200" b="1" dirty="0" err="1">
+                <a:latin typeface="Arial" panose="020B0604020202020204" pitchFamily="34" charset="0"/>
+                <a:cs typeface="Arial" panose="020B0604020202020204" pitchFamily="34" charset="0"/>
+              </a:rPr>
+              <a:t>layout</a:t>
+            </a:r>
+            <a:r>
+              <a:rPr lang="es-ES" sz="1200" b="1" dirty="0">
+                <a:latin typeface="Arial" panose="020B0604020202020204" pitchFamily="34" charset="0"/>
+                <a:cs typeface="Arial" panose="020B0604020202020204" pitchFamily="34" charset="0"/>
+              </a:rPr>
+              <a:t> de un PDK representan </a:t>
+            </a:r>
+            <a:r>
+              <a:rPr lang="es-ES" sz="1200" dirty="0">
+                <a:latin typeface="Arial" panose="020B0604020202020204" pitchFamily="34" charset="0"/>
+                <a:cs typeface="Arial" panose="020B0604020202020204" pitchFamily="34" charset="0"/>
+              </a:rPr>
+              <a:t>los distintos niveles físicos o máscaras que se usarán durante la fabricación del chip. Cada capa tiene una función concreta dentro del diseño: definir guías ópticas, zonas </a:t>
+            </a:r>
+            <a:r>
+              <a:rPr lang="es-ES" sz="1200" dirty="0" err="1">
+                <a:latin typeface="Arial" panose="020B0604020202020204" pitchFamily="34" charset="0"/>
+                <a:cs typeface="Arial" panose="020B0604020202020204" pitchFamily="34" charset="0"/>
+              </a:rPr>
+              <a:t>slab</a:t>
+            </a:r>
+            <a:r>
+              <a:rPr lang="es-ES" sz="1200" dirty="0">
+                <a:latin typeface="Arial" panose="020B0604020202020204" pitchFamily="34" charset="0"/>
+                <a:cs typeface="Arial" panose="020B0604020202020204" pitchFamily="34" charset="0"/>
+              </a:rPr>
+              <a:t>, </a:t>
+            </a:r>
+            <a:r>
+              <a:rPr lang="es-ES" sz="1200" dirty="0" err="1">
+                <a:latin typeface="Arial" panose="020B0604020202020204" pitchFamily="34" charset="0"/>
+                <a:cs typeface="Arial" panose="020B0604020202020204" pitchFamily="34" charset="0"/>
+              </a:rPr>
+              <a:t>heaters</a:t>
+            </a:r>
+            <a:r>
+              <a:rPr lang="es-ES" sz="1200" dirty="0">
+                <a:latin typeface="Arial" panose="020B0604020202020204" pitchFamily="34" charset="0"/>
+                <a:cs typeface="Arial" panose="020B0604020202020204" pitchFamily="34" charset="0"/>
+              </a:rPr>
+              <a:t> metálicos, </a:t>
+            </a:r>
+            <a:r>
+              <a:rPr lang="es-ES" sz="1200" dirty="0" err="1">
+                <a:latin typeface="Arial" panose="020B0604020202020204" pitchFamily="34" charset="0"/>
+                <a:cs typeface="Arial" panose="020B0604020202020204" pitchFamily="34" charset="0"/>
+              </a:rPr>
+              <a:t>pads</a:t>
+            </a:r>
+            <a:r>
+              <a:rPr lang="es-ES" sz="1200" dirty="0">
+                <a:latin typeface="Arial" panose="020B0604020202020204" pitchFamily="34" charset="0"/>
+                <a:cs typeface="Arial" panose="020B0604020202020204" pitchFamily="34" charset="0"/>
+              </a:rPr>
+              <a:t> eléctricos, límites del chip o etiquetas de identificación.</a:t>
+            </a:r>
+          </a:p>
+          <a:p>
+            <a:pPr algn="just"/>
+            <a:endParaRPr lang="es-ES" sz="1200" dirty="0">
+              <a:latin typeface="Arial" panose="020B0604020202020204" pitchFamily="34" charset="0"/>
+              <a:cs typeface="Arial" panose="020B0604020202020204" pitchFamily="34" charset="0"/>
+            </a:endParaRPr>
+          </a:p>
+          <a:p>
+            <a:pPr algn="just"/>
+            <a:r>
+              <a:rPr lang="es-ES" sz="1200" b="1" dirty="0">
+                <a:latin typeface="Arial" panose="020B0604020202020204" pitchFamily="34" charset="0"/>
+                <a:cs typeface="Arial" panose="020B0604020202020204" pitchFamily="34" charset="0"/>
+              </a:rPr>
+              <a:t>En nuestro PDK particular encontramos</a:t>
+            </a:r>
+            <a:r>
+              <a:rPr lang="es-ES" sz="1200" dirty="0">
+                <a:latin typeface="Arial" panose="020B0604020202020204" pitchFamily="34" charset="0"/>
+                <a:cs typeface="Arial" panose="020B0604020202020204" pitchFamily="34" charset="0"/>
+              </a:rPr>
+              <a:t> las siguientes capas:</a:t>
+            </a:r>
+          </a:p>
+          <a:p>
+            <a:pPr algn="just"/>
+            <a:endParaRPr lang="es-ES" sz="1200" dirty="0">
+              <a:latin typeface="Arial" panose="020B0604020202020204" pitchFamily="34" charset="0"/>
+              <a:cs typeface="Arial" panose="020B0604020202020204" pitchFamily="34" charset="0"/>
+            </a:endParaRPr>
+          </a:p>
+          <a:p>
+            <a:pPr marL="171450" indent="-171450" algn="just">
+              <a:buFont typeface="Arial" panose="020B0604020202020204" pitchFamily="34" charset="0"/>
+              <a:buChar char="•"/>
+            </a:pPr>
+            <a:r>
+              <a:rPr lang="es-ES" sz="1200" dirty="0">
+                <a:latin typeface="Arial" panose="020B0604020202020204" pitchFamily="34" charset="0"/>
+                <a:cs typeface="Arial" panose="020B0604020202020204" pitchFamily="34" charset="0"/>
+              </a:rPr>
+              <a:t>WG, 1/0: capa principal de guía de onda óptica.</a:t>
+            </a:r>
+          </a:p>
+          <a:p>
+            <a:pPr marL="171450" indent="-171450" algn="just">
+              <a:buFont typeface="Arial" panose="020B0604020202020204" pitchFamily="34" charset="0"/>
+              <a:buChar char="•"/>
+            </a:pPr>
+            <a:r>
+              <a:rPr lang="es-ES" sz="1200" dirty="0">
+                <a:latin typeface="Arial" panose="020B0604020202020204" pitchFamily="34" charset="0"/>
+                <a:cs typeface="Arial" panose="020B0604020202020204" pitchFamily="34" charset="0"/>
+              </a:rPr>
+              <a:t>HEATER, 4/0: capa de </a:t>
+            </a:r>
+            <a:r>
+              <a:rPr lang="es-ES" sz="1200" dirty="0" err="1">
+                <a:latin typeface="Arial" panose="020B0604020202020204" pitchFamily="34" charset="0"/>
+                <a:cs typeface="Arial" panose="020B0604020202020204" pitchFamily="34" charset="0"/>
+              </a:rPr>
+              <a:t>heaters</a:t>
+            </a:r>
+            <a:r>
+              <a:rPr lang="es-ES" sz="1200" dirty="0">
+                <a:latin typeface="Arial" panose="020B0604020202020204" pitchFamily="34" charset="0"/>
+                <a:cs typeface="Arial" panose="020B0604020202020204" pitchFamily="34" charset="0"/>
+              </a:rPr>
+              <a:t> metálicos para sintonización térmica.</a:t>
+            </a:r>
+          </a:p>
+          <a:p>
+            <a:pPr marL="171450" indent="-171450" algn="just">
+              <a:buFont typeface="Arial" panose="020B0604020202020204" pitchFamily="34" charset="0"/>
+              <a:buChar char="•"/>
+            </a:pPr>
+            <a:r>
+              <a:rPr lang="es-ES" sz="1200" dirty="0">
+                <a:latin typeface="Arial" panose="020B0604020202020204" pitchFamily="34" charset="0"/>
+                <a:cs typeface="Arial" panose="020B0604020202020204" pitchFamily="34" charset="0"/>
+              </a:rPr>
+              <a:t>SLAB, 21/0: capa </a:t>
+            </a:r>
+            <a:r>
+              <a:rPr lang="es-ES" sz="1200" dirty="0" err="1">
+                <a:latin typeface="Arial" panose="020B0604020202020204" pitchFamily="34" charset="0"/>
+                <a:cs typeface="Arial" panose="020B0604020202020204" pitchFamily="34" charset="0"/>
+              </a:rPr>
+              <a:t>slab</a:t>
+            </a:r>
+            <a:r>
+              <a:rPr lang="es-ES" sz="1200" dirty="0">
+                <a:latin typeface="Arial" panose="020B0604020202020204" pitchFamily="34" charset="0"/>
+                <a:cs typeface="Arial" panose="020B0604020202020204" pitchFamily="34" charset="0"/>
+              </a:rPr>
+              <a:t>, asociada a regiones de guía parcialmente grabadas o de soporte óptico.</a:t>
+            </a:r>
+          </a:p>
+          <a:p>
+            <a:pPr marL="171450" indent="-171450" algn="just">
+              <a:buFont typeface="Arial" panose="020B0604020202020204" pitchFamily="34" charset="0"/>
+              <a:buChar char="•"/>
+            </a:pPr>
+            <a:r>
+              <a:rPr lang="es-ES" sz="1200" dirty="0">
+                <a:latin typeface="Arial" panose="020B0604020202020204" pitchFamily="34" charset="0"/>
+                <a:cs typeface="Arial" panose="020B0604020202020204" pitchFamily="34" charset="0"/>
+              </a:rPr>
+              <a:t>PAD, 41/0: capa de </a:t>
+            </a:r>
+            <a:r>
+              <a:rPr lang="es-ES" sz="1200" dirty="0" err="1">
+                <a:latin typeface="Arial" panose="020B0604020202020204" pitchFamily="34" charset="0"/>
+                <a:cs typeface="Arial" panose="020B0604020202020204" pitchFamily="34" charset="0"/>
+              </a:rPr>
+              <a:t>pads</a:t>
+            </a:r>
+            <a:r>
+              <a:rPr lang="es-ES" sz="1200" dirty="0">
+                <a:latin typeface="Arial" panose="020B0604020202020204" pitchFamily="34" charset="0"/>
+                <a:cs typeface="Arial" panose="020B0604020202020204" pitchFamily="34" charset="0"/>
+              </a:rPr>
+              <a:t> metálicos para conexiones eléctricas.</a:t>
+            </a:r>
+          </a:p>
+          <a:p>
+            <a:pPr marL="171450" indent="-171450" algn="just">
+              <a:buFont typeface="Arial" panose="020B0604020202020204" pitchFamily="34" charset="0"/>
+              <a:buChar char="•"/>
+            </a:pPr>
+            <a:r>
+              <a:rPr lang="es-ES" sz="1200" dirty="0">
+                <a:latin typeface="Arial" panose="020B0604020202020204" pitchFamily="34" charset="0"/>
+                <a:cs typeface="Arial" panose="020B0604020202020204" pitchFamily="34" charset="0"/>
+              </a:rPr>
+              <a:t>FLOORPLAN, 99/0: capa que define el contorno o área disponible del chip.</a:t>
+            </a:r>
+          </a:p>
+          <a:p>
+            <a:pPr marL="171450" indent="-171450" algn="just">
+              <a:buFont typeface="Arial" panose="020B0604020202020204" pitchFamily="34" charset="0"/>
+              <a:buChar char="•"/>
+            </a:pPr>
+            <a:r>
+              <a:rPr lang="es-ES" sz="1200" dirty="0">
+                <a:latin typeface="Arial" panose="020B0604020202020204" pitchFamily="34" charset="0"/>
+                <a:cs typeface="Arial" panose="020B0604020202020204" pitchFamily="34" charset="0"/>
+              </a:rPr>
+              <a:t>LABEL_SETTINGS, 100/0: capa de etiquetas de configuración del </a:t>
+            </a:r>
+            <a:r>
+              <a:rPr lang="es-ES" sz="1200" dirty="0" err="1">
+                <a:latin typeface="Arial" panose="020B0604020202020204" pitchFamily="34" charset="0"/>
+                <a:cs typeface="Arial" panose="020B0604020202020204" pitchFamily="34" charset="0"/>
+              </a:rPr>
+              <a:t>layout</a:t>
+            </a:r>
+            <a:r>
+              <a:rPr lang="es-ES" sz="1200" dirty="0">
+                <a:latin typeface="Arial" panose="020B0604020202020204" pitchFamily="34" charset="0"/>
+                <a:cs typeface="Arial" panose="020B0604020202020204" pitchFamily="34" charset="0"/>
+              </a:rPr>
+              <a:t>.</a:t>
+            </a:r>
+          </a:p>
+          <a:p>
+            <a:pPr marL="171450" indent="-171450" algn="just">
+              <a:buFont typeface="Arial" panose="020B0604020202020204" pitchFamily="34" charset="0"/>
+              <a:buChar char="•"/>
+            </a:pPr>
+            <a:r>
+              <a:rPr lang="es-ES" sz="1200" dirty="0">
+                <a:latin typeface="Arial" panose="020B0604020202020204" pitchFamily="34" charset="0"/>
+                <a:cs typeface="Arial" panose="020B0604020202020204" pitchFamily="34" charset="0"/>
+              </a:rPr>
+              <a:t>LABEL_INSTANCE, 101/0: capa de etiquetas de instancia o identificación de celdas.</a:t>
+            </a:r>
             <a:endParaRPr lang="en-US" sz="1200" dirty="0">
               <a:latin typeface="Arial" panose="020B0604020202020204" pitchFamily="34" charset="0"/>
               <a:cs typeface="Arial" panose="020B0604020202020204" pitchFamily="34" charset="0"/>
             </a:endParaRPr>
           </a:p>
-          <a:p>
-            <a:pPr algn="just"/>
-            <a:r>
-              <a:rPr lang="en-US" sz="1200" dirty="0">
-                <a:latin typeface="Arial" panose="020B0604020202020204" pitchFamily="34" charset="0"/>
-                <a:cs typeface="Arial" panose="020B0604020202020204" pitchFamily="34" charset="0"/>
-              </a:rPr>
-              <a:t>In general, the layers for layout in a PDK represent …</a:t>
-            </a:r>
-          </a:p>
-          <a:p>
-            <a:pPr algn="just"/>
-            <a:endParaRPr lang="en-US" sz="1200" dirty="0">
-              <a:latin typeface="Arial" panose="020B0604020202020204" pitchFamily="34" charset="0"/>
-              <a:cs typeface="Arial" panose="020B0604020202020204" pitchFamily="34" charset="0"/>
-            </a:endParaRPr>
-          </a:p>
-          <a:p>
-            <a:pPr algn="just"/>
-            <a:endParaRPr lang="en-US" sz="1200" dirty="0">
-              <a:latin typeface="Arial" panose="020B0604020202020204" pitchFamily="34" charset="0"/>
-              <a:cs typeface="Arial" panose="020B0604020202020204" pitchFamily="34" charset="0"/>
-            </a:endParaRPr>
-          </a:p>
-          <a:p>
-            <a:pPr algn="just"/>
-            <a:r>
-              <a:rPr lang="en-US" sz="1200" dirty="0">
-                <a:latin typeface="Arial" panose="020B0604020202020204" pitchFamily="34" charset="0"/>
-                <a:cs typeface="Arial" panose="020B0604020202020204" pitchFamily="34" charset="0"/>
-              </a:rPr>
-              <a:t>For our particular PDK we find the following layers, with number and label/description: </a:t>
-            </a:r>
-          </a:p>
-          <a:p>
-            <a:pPr algn="just"/>
-            <a:endParaRPr lang="en-US" sz="1200" dirty="0">
-              <a:latin typeface="Arial" panose="020B0604020202020204" pitchFamily="34" charset="0"/>
-              <a:cs typeface="Arial" panose="020B0604020202020204" pitchFamily="34" charset="0"/>
-            </a:endParaRPr>
-          </a:p>
         </p:txBody>
       </p:sp>
       <p:sp>
@@ -4341,8 +7814,8 @@
         </p:nvSpPr>
         <p:spPr>
           <a:xfrm>
-            <a:off x="609441" y="1418373"/>
-            <a:ext cx="5332571" cy="3306028"/>
+            <a:off x="7619434" y="4726434"/>
+            <a:ext cx="3048159" cy="1417895"/>
           </a:xfrm>
           <a:prstGeom prst="rect">
             <a:avLst/>
@@ -4381,46 +7854,6 @@
       </p:sp>
       <p:sp>
         <p:nvSpPr>
-          <p:cNvPr id="7" name="CuadroTexto 6">
-            <a:extLst>
-              <a:ext uri="{FF2B5EF4-FFF2-40B4-BE49-F238E27FC236}">
-                <a16:creationId xmlns:a16="http://schemas.microsoft.com/office/drawing/2014/main" id="{024B9AF7-5B09-CE7C-68D9-8620B8F4F607}"/>
-              </a:ext>
-            </a:extLst>
-          </p:cNvPr>
-          <p:cNvSpPr txBox="1"/>
-          <p:nvPr/>
-        </p:nvSpPr>
-        <p:spPr>
-          <a:xfrm>
-            <a:off x="763342" y="2494306"/>
-            <a:ext cx="5024773" cy="646331"/>
-          </a:xfrm>
-          <a:prstGeom prst="rect">
-            <a:avLst/>
-          </a:prstGeom>
-          <a:noFill/>
-        </p:spPr>
-        <p:txBody>
-          <a:bodyPr wrap="none" rtlCol="0">
-            <a:spAutoFit/>
-          </a:bodyPr>
-          <a:lstStyle/>
-          <a:p>
-            <a:pPr algn="ctr"/>
-            <a:r>
-              <a:rPr lang="en-US" dirty="0"/>
-              <a:t>Paste code to view the layer distribution of this PDK</a:t>
-            </a:r>
-          </a:p>
-          <a:p>
-            <a:pPr algn="ctr"/>
-            <a:endParaRPr lang="en-US" dirty="0"/>
-          </a:p>
-        </p:txBody>
-      </p:sp>
-      <p:sp>
-        <p:nvSpPr>
           <p:cNvPr id="8" name="Rectángulo 7">
             <a:extLst>
               <a:ext uri="{FF2B5EF4-FFF2-40B4-BE49-F238E27FC236}">
@@ -4536,6 +7969,66 @@
           </a:p>
         </p:txBody>
       </p:sp>
+      <p:pic>
+        <p:nvPicPr>
+          <p:cNvPr id="5" name="Imagen 4">
+            <a:extLst>
+              <a:ext uri="{FF2B5EF4-FFF2-40B4-BE49-F238E27FC236}">
+                <a16:creationId xmlns:a16="http://schemas.microsoft.com/office/drawing/2014/main" id="{0018ECD3-A0A9-E9D6-049C-CA1157072A2B}"/>
+              </a:ext>
+            </a:extLst>
+          </p:cNvPr>
+          <p:cNvPicPr>
+            <a:picLocks noChangeAspect="1"/>
+          </p:cNvPicPr>
+          <p:nvPr/>
+        </p:nvPicPr>
+        <p:blipFill>
+          <a:blip r:embed="rId4"/>
+          <a:stretch>
+            <a:fillRect/>
+          </a:stretch>
+        </p:blipFill>
+        <p:spPr>
+          <a:xfrm>
+            <a:off x="7766935" y="4848363"/>
+            <a:ext cx="2752381" cy="1200000"/>
+          </a:xfrm>
+          <a:prstGeom prst="rect">
+            <a:avLst/>
+          </a:prstGeom>
+        </p:spPr>
+      </p:pic>
+      <p:pic>
+        <p:nvPicPr>
+          <p:cNvPr id="11" name="Imagen 10">
+            <a:extLst>
+              <a:ext uri="{FF2B5EF4-FFF2-40B4-BE49-F238E27FC236}">
+                <a16:creationId xmlns:a16="http://schemas.microsoft.com/office/drawing/2014/main" id="{406D7DC2-E701-284A-F9A4-9A7760BA0692}"/>
+              </a:ext>
+            </a:extLst>
+          </p:cNvPr>
+          <p:cNvPicPr>
+            <a:picLocks noChangeAspect="1"/>
+          </p:cNvPicPr>
+          <p:nvPr/>
+        </p:nvPicPr>
+        <p:blipFill>
+          <a:blip r:embed="rId5"/>
+          <a:stretch>
+            <a:fillRect/>
+          </a:stretch>
+        </p:blipFill>
+        <p:spPr>
+          <a:xfrm>
+            <a:off x="7085726" y="1542335"/>
+            <a:ext cx="4114800" cy="3106271"/>
+          </a:xfrm>
+          <a:prstGeom prst="rect">
+            <a:avLst/>
+          </a:prstGeom>
+        </p:spPr>
+      </p:pic>
     </p:spTree>
     <p:extLst>
       <p:ext uri="{BB962C8B-B14F-4D97-AF65-F5344CB8AC3E}">
@@ -4751,7 +8244,7 @@
         <p:spPr>
           <a:xfrm>
             <a:off x="609441" y="4860334"/>
-            <a:ext cx="11199971" cy="646331"/>
+            <a:ext cx="11199971" cy="830997"/>
           </a:xfrm>
           <a:prstGeom prst="rect">
             <a:avLst/>
@@ -4773,48 +8266,140 @@
           </a:bodyPr>
           <a:lstStyle/>
           <a:p>
-            <a:pPr algn="just"/>
-            <a:r>
-              <a:rPr lang="en-US" sz="1200" dirty="0">
+            <a:pPr marL="171450" indent="-171450" algn="just">
+              <a:buFont typeface="Arial" panose="020B0604020202020204" pitchFamily="34" charset="0"/>
+              <a:buChar char="•"/>
+            </a:pPr>
+            <a:r>
+              <a:rPr lang="es-ES" sz="1200" dirty="0">
                 <a:latin typeface="Arial" panose="020B0604020202020204" pitchFamily="34" charset="0"/>
                 <a:cs typeface="Arial" panose="020B0604020202020204" pitchFamily="34" charset="0"/>
               </a:rPr>
-              <a:t>Describe component. </a:t>
-            </a:r>
-            <a:r>
-              <a:rPr lang="en-US" sz="1200" dirty="0">
-                <a:solidFill>
-                  <a:srgbClr val="FF0000"/>
-                </a:solidFill>
+              <a:t>El primer componente es el </a:t>
+            </a:r>
+            <a:r>
+              <a:rPr lang="es-ES" sz="1200" dirty="0" err="1">
                 <a:latin typeface="Arial" panose="020B0604020202020204" pitchFamily="34" charset="0"/>
                 <a:cs typeface="Arial" panose="020B0604020202020204" pitchFamily="34" charset="0"/>
               </a:rPr>
-              <a:t>Example</a:t>
-            </a:r>
-            <a:r>
-              <a:rPr lang="en-US" sz="1200" dirty="0">
+              <a:t>directional</a:t>
+            </a:r>
+            <a:r>
+              <a:rPr lang="es-ES" sz="1200" dirty="0">
                 <a:latin typeface="Arial" panose="020B0604020202020204" pitchFamily="34" charset="0"/>
                 <a:cs typeface="Arial" panose="020B0604020202020204" pitchFamily="34" charset="0"/>
               </a:rPr>
-              <a:t>: this is the MMI we designed in Lab2, it is a 2x2 with paired interference, target coupling constant K = 0.5. The relevant dimensions are W_MMI = XX µm L_MMI = YY µm and the I/O positions with respect to center are at +/- </a:t>
-            </a:r>
-            <a:r>
-              <a:rPr lang="en-US" sz="1200" dirty="0" err="1">
+              <a:t> </a:t>
+            </a:r>
+            <a:r>
+              <a:rPr lang="es-ES" sz="1200" dirty="0" err="1">
                 <a:latin typeface="Arial" panose="020B0604020202020204" pitchFamily="34" charset="0"/>
                 <a:cs typeface="Arial" panose="020B0604020202020204" pitchFamily="34" charset="0"/>
               </a:rPr>
-              <a:t>dY</a:t>
-            </a:r>
-            <a:r>
-              <a:rPr lang="en-US" sz="1200" dirty="0">
+              <a:t>coupler</a:t>
+            </a:r>
+            <a:r>
+              <a:rPr lang="es-ES" sz="1200" dirty="0">
                 <a:latin typeface="Arial" panose="020B0604020202020204" pitchFamily="34" charset="0"/>
                 <a:cs typeface="Arial" panose="020B0604020202020204" pitchFamily="34" charset="0"/>
               </a:rPr>
-              <a:t> µm</a:t>
-            </a:r>
-          </a:p>
-          <a:p>
-            <a:pPr algn="just"/>
+              <a:t> 2x2 diseñado en el Lab2. </a:t>
+            </a:r>
+          </a:p>
+          <a:p>
+            <a:pPr marL="171450" indent="-171450" algn="just">
+              <a:buFont typeface="Arial" panose="020B0604020202020204" pitchFamily="34" charset="0"/>
+              <a:buChar char="•"/>
+            </a:pPr>
+            <a:r>
+              <a:rPr lang="es-ES" sz="1200" dirty="0">
+                <a:latin typeface="Arial" panose="020B0604020202020204" pitchFamily="34" charset="0"/>
+                <a:cs typeface="Arial" panose="020B0604020202020204" pitchFamily="34" charset="0"/>
+              </a:rPr>
+              <a:t>Su objetivo es funcionar como acoplador 50:50, por lo que la constante de acoplo objetivo es K = 0.5. </a:t>
+            </a:r>
+          </a:p>
+          <a:p>
+            <a:pPr marL="171450" indent="-171450" algn="just">
+              <a:buFont typeface="Arial" panose="020B0604020202020204" pitchFamily="34" charset="0"/>
+              <a:buChar char="•"/>
+            </a:pPr>
+            <a:r>
+              <a:rPr lang="es-ES" sz="1200" dirty="0">
+                <a:latin typeface="Arial" panose="020B0604020202020204" pitchFamily="34" charset="0"/>
+                <a:cs typeface="Arial" panose="020B0604020202020204" pitchFamily="34" charset="0"/>
+              </a:rPr>
+              <a:t>A partir del diseño del Lab2 se obtuvo una </a:t>
+            </a:r>
+            <a:r>
+              <a:rPr lang="es-ES" sz="1200" dirty="0" err="1">
+                <a:latin typeface="Arial" panose="020B0604020202020204" pitchFamily="34" charset="0"/>
+                <a:cs typeface="Arial" panose="020B0604020202020204" pitchFamily="34" charset="0"/>
+              </a:rPr>
+              <a:t>L_pi</a:t>
+            </a:r>
+            <a:r>
+              <a:rPr lang="es-ES" sz="1200" dirty="0">
+                <a:latin typeface="Arial" panose="020B0604020202020204" pitchFamily="34" charset="0"/>
+                <a:cs typeface="Arial" panose="020B0604020202020204" pitchFamily="34" charset="0"/>
+              </a:rPr>
+              <a:t> = 94.027 µm, por lo que la longitud de la región de acoplo usada en </a:t>
+            </a:r>
+            <a:r>
+              <a:rPr lang="es-ES" sz="1200" dirty="0" err="1">
+                <a:latin typeface="Arial" panose="020B0604020202020204" pitchFamily="34" charset="0"/>
+                <a:cs typeface="Arial" panose="020B0604020202020204" pitchFamily="34" charset="0"/>
+              </a:rPr>
+              <a:t>layout</a:t>
+            </a:r>
+            <a:r>
+              <a:rPr lang="es-ES" sz="1200" dirty="0">
+                <a:latin typeface="Arial" panose="020B0604020202020204" pitchFamily="34" charset="0"/>
+                <a:cs typeface="Arial" panose="020B0604020202020204" pitchFamily="34" charset="0"/>
+              </a:rPr>
+              <a:t> es </a:t>
+            </a:r>
+            <a:r>
+              <a:rPr lang="es-ES" sz="1200" dirty="0" err="1">
+                <a:latin typeface="Arial" panose="020B0604020202020204" pitchFamily="34" charset="0"/>
+                <a:cs typeface="Arial" panose="020B0604020202020204" pitchFamily="34" charset="0"/>
+              </a:rPr>
+              <a:t>L_coupler</a:t>
+            </a:r>
+            <a:r>
+              <a:rPr lang="es-ES" sz="1200" dirty="0">
+                <a:latin typeface="Arial" panose="020B0604020202020204" pitchFamily="34" charset="0"/>
+                <a:cs typeface="Arial" panose="020B0604020202020204" pitchFamily="34" charset="0"/>
+              </a:rPr>
+              <a:t> = </a:t>
+            </a:r>
+            <a:r>
+              <a:rPr lang="es-ES" sz="1200" dirty="0" err="1">
+                <a:latin typeface="Arial" panose="020B0604020202020204" pitchFamily="34" charset="0"/>
+                <a:cs typeface="Arial" panose="020B0604020202020204" pitchFamily="34" charset="0"/>
+              </a:rPr>
+              <a:t>L_pi</a:t>
+            </a:r>
+            <a:r>
+              <a:rPr lang="es-ES" sz="1200" dirty="0">
+                <a:latin typeface="Arial" panose="020B0604020202020204" pitchFamily="34" charset="0"/>
+                <a:cs typeface="Arial" panose="020B0604020202020204" pitchFamily="34" charset="0"/>
+              </a:rPr>
+              <a:t>/2 = 47.013 µm. </a:t>
+            </a:r>
+          </a:p>
+          <a:p>
+            <a:pPr marL="171450" indent="-171450" algn="just">
+              <a:buFont typeface="Arial" panose="020B0604020202020204" pitchFamily="34" charset="0"/>
+              <a:buChar char="•"/>
+            </a:pPr>
+            <a:r>
+              <a:rPr lang="es-ES" sz="1200" dirty="0">
+                <a:latin typeface="Arial" panose="020B0604020202020204" pitchFamily="34" charset="0"/>
+                <a:cs typeface="Arial" panose="020B0604020202020204" pitchFamily="34" charset="0"/>
+              </a:rPr>
+              <a:t>La separación entre las dos guías en la zona de acoplo es gap = 0.6 µm.</a:t>
+            </a:r>
             <a:endParaRPr lang="en-US" sz="1200" dirty="0">
               <a:latin typeface="Arial" panose="020B0604020202020204" pitchFamily="34" charset="0"/>
               <a:cs typeface="Arial" panose="020B0604020202020204" pitchFamily="34" charset="0"/>
@@ -5011,6 +8596,66 @@
           </a:p>
         </p:txBody>
       </p:sp>
+      <p:pic>
+        <p:nvPicPr>
+          <p:cNvPr id="5" name="Imagen 4">
+            <a:extLst>
+              <a:ext uri="{FF2B5EF4-FFF2-40B4-BE49-F238E27FC236}">
+                <a16:creationId xmlns:a16="http://schemas.microsoft.com/office/drawing/2014/main" id="{4B7ABE2D-6D28-CDBC-685F-ACE14A8E7C49}"/>
+              </a:ext>
+            </a:extLst>
+          </p:cNvPr>
+          <p:cNvPicPr>
+            <a:picLocks noChangeAspect="1"/>
+          </p:cNvPicPr>
+          <p:nvPr/>
+        </p:nvPicPr>
+        <p:blipFill>
+          <a:blip r:embed="rId4"/>
+          <a:stretch>
+            <a:fillRect/>
+          </a:stretch>
+        </p:blipFill>
+        <p:spPr>
+          <a:xfrm>
+            <a:off x="1382585" y="1524524"/>
+            <a:ext cx="3786281" cy="3117078"/>
+          </a:xfrm>
+          <a:prstGeom prst="rect">
+            <a:avLst/>
+          </a:prstGeom>
+        </p:spPr>
+      </p:pic>
+      <p:pic>
+        <p:nvPicPr>
+          <p:cNvPr id="11" name="Imagen 10">
+            <a:extLst>
+              <a:ext uri="{FF2B5EF4-FFF2-40B4-BE49-F238E27FC236}">
+                <a16:creationId xmlns:a16="http://schemas.microsoft.com/office/drawing/2014/main" id="{0BFC2595-3D53-A1E4-F55C-965E609BB07A}"/>
+              </a:ext>
+            </a:extLst>
+          </p:cNvPr>
+          <p:cNvPicPr>
+            <a:picLocks noChangeAspect="1"/>
+          </p:cNvPicPr>
+          <p:nvPr/>
+        </p:nvPicPr>
+        <p:blipFill>
+          <a:blip r:embed="rId5"/>
+          <a:stretch>
+            <a:fillRect/>
+          </a:stretch>
+        </p:blipFill>
+        <p:spPr>
+          <a:xfrm>
+            <a:off x="7132215" y="1462068"/>
+            <a:ext cx="4312302" cy="3255365"/>
+          </a:xfrm>
+          <a:prstGeom prst="rect">
+            <a:avLst/>
+          </a:prstGeom>
+        </p:spPr>
+      </p:pic>
     </p:spTree>
     <p:extLst>
       <p:ext uri="{BB962C8B-B14F-4D97-AF65-F5344CB8AC3E}">
@@ -5025,6 +8670,1794 @@
 </file>
 
 <file path=ppt/slides/slide5.xml><?xml version="1.0" encoding="utf-8"?>
+<p:sld xmlns:a="http://schemas.openxmlformats.org/drawingml/2006/main" xmlns:r="http://schemas.openxmlformats.org/officeDocument/2006/relationships" xmlns:p="http://schemas.openxmlformats.org/presentationml/2006/main">
+  <p:cSld>
+    <p:spTree>
+      <p:nvGrpSpPr>
+        <p:cNvPr id="1" name="">
+          <a:extLst>
+            <a:ext uri="{FF2B5EF4-FFF2-40B4-BE49-F238E27FC236}">
+              <a16:creationId xmlns:a16="http://schemas.microsoft.com/office/drawing/2014/main" id="{F62503F6-520B-0D90-037F-75271D78B5A0}"/>
+            </a:ext>
+          </a:extLst>
+        </p:cNvPr>
+        <p:cNvGrpSpPr/>
+        <p:nvPr/>
+      </p:nvGrpSpPr>
+      <p:grpSpPr>
+        <a:xfrm>
+          <a:off x="0" y="0"/>
+          <a:ext cx="0" cy="0"/>
+          <a:chOff x="0" y="0"/>
+          <a:chExt cx="0" cy="0"/>
+        </a:xfrm>
+      </p:grpSpPr>
+      <p:sp>
+        <p:nvSpPr>
+          <p:cNvPr id="16" name="object 16">
+            <a:extLst>
+              <a:ext uri="{FF2B5EF4-FFF2-40B4-BE49-F238E27FC236}">
+                <a16:creationId xmlns:a16="http://schemas.microsoft.com/office/drawing/2014/main" id="{516ADD87-09A1-3BB0-06EB-EDB91AA2A96A}"/>
+              </a:ext>
+            </a:extLst>
+          </p:cNvPr>
+          <p:cNvSpPr txBox="1">
+            <a:spLocks noGrp="1"/>
+          </p:cNvSpPr>
+          <p:nvPr>
+            <p:ph type="title"/>
+          </p:nvPr>
+        </p:nvSpPr>
+        <p:spPr>
+          <a:xfrm>
+            <a:off x="685800" y="408883"/>
+            <a:ext cx="10994410" cy="782265"/>
+          </a:xfrm>
+          <a:prstGeom prst="rect">
+            <a:avLst/>
+          </a:prstGeom>
+        </p:spPr>
+        <p:txBody>
+          <a:bodyPr vert="horz" wrap="square" lIns="0" tIns="12700" rIns="0" bIns="0" rtlCol="0">
+            <a:spAutoFit/>
+          </a:bodyPr>
+          <a:lstStyle/>
+          <a:p>
+            <a:pPr marL="12700" algn="just">
+              <a:lnSpc>
+                <a:spcPct val="100000"/>
+              </a:lnSpc>
+              <a:spcBef>
+                <a:spcPts val="100"/>
+              </a:spcBef>
+            </a:pPr>
+            <a:r>
+              <a:rPr lang="en-US" sz="2500" dirty="0"/>
+              <a:t>Learning outcome #1b – Notebook section 1. Technology – </a:t>
+            </a:r>
+            <a:r>
+              <a:rPr lang="en-US" sz="2500" dirty="0">
+                <a:solidFill>
+                  <a:srgbClr val="FF0000"/>
+                </a:solidFill>
+              </a:rPr>
+              <a:t>1 slide per component</a:t>
+            </a:r>
+            <a:br>
+              <a:rPr lang="en-US" sz="2500" dirty="0"/>
+            </a:br>
+            <a:endParaRPr sz="2500" b="0" i="1" dirty="0">
+              <a:latin typeface="+mj-lt"/>
+              <a:cs typeface="Lucida Sans"/>
+            </a:endParaRPr>
+          </a:p>
+        </p:txBody>
+      </p:sp>
+      <p:pic>
+        <p:nvPicPr>
+          <p:cNvPr id="83" name="Gráfico 82">
+            <a:extLst>
+              <a:ext uri="{FF2B5EF4-FFF2-40B4-BE49-F238E27FC236}">
+                <a16:creationId xmlns:a16="http://schemas.microsoft.com/office/drawing/2014/main" id="{1027AE9C-38AD-925C-44D3-A1488AA17DDD}"/>
+              </a:ext>
+            </a:extLst>
+          </p:cNvPr>
+          <p:cNvPicPr>
+            <a:picLocks noChangeAspect="1"/>
+          </p:cNvPicPr>
+          <p:nvPr/>
+        </p:nvPicPr>
+        <p:blipFill>
+          <a:blip>
+            <a:extLst>
+              <a:ext uri="{96DAC541-7B7A-43D3-8B79-37D633B846F1}">
+                <asvg:svgBlip xmlns:asvg="http://schemas.microsoft.com/office/drawing/2016/SVG/main" r:embed="rId3"/>
+              </a:ext>
+            </a:extLst>
+          </a:blip>
+          <a:stretch>
+            <a:fillRect/>
+          </a:stretch>
+        </p:blipFill>
+        <p:spPr>
+          <a:xfrm>
+            <a:off x="5045006" y="6356057"/>
+            <a:ext cx="6409575" cy="363174"/>
+          </a:xfrm>
+          <a:prstGeom prst="rect">
+            <a:avLst/>
+          </a:prstGeom>
+        </p:spPr>
+      </p:pic>
+      <p:sp>
+        <p:nvSpPr>
+          <p:cNvPr id="84" name="Marcador de número de diapositiva 83">
+            <a:extLst>
+              <a:ext uri="{FF2B5EF4-FFF2-40B4-BE49-F238E27FC236}">
+                <a16:creationId xmlns:a16="http://schemas.microsoft.com/office/drawing/2014/main" id="{A5F8291A-74FC-69CF-2819-A55528BEFEF6}"/>
+              </a:ext>
+            </a:extLst>
+          </p:cNvPr>
+          <p:cNvSpPr>
+            <a:spLocks noGrp="1"/>
+          </p:cNvSpPr>
+          <p:nvPr>
+            <p:ph type="sldNum" sz="quarter" idx="7"/>
+          </p:nvPr>
+        </p:nvSpPr>
+        <p:spPr/>
+        <p:txBody>
+          <a:bodyPr/>
+          <a:lstStyle/>
+          <a:p>
+            <a:fld id="{B6F15528-21DE-4FAA-801E-634DDDAF4B2B}" type="slidenum">
+              <a:rPr lang="es-ES" smtClean="0"/>
+              <a:t>5</a:t>
+            </a:fld>
+            <a:endParaRPr lang="es-ES"/>
+          </a:p>
+        </p:txBody>
+      </p:sp>
+      <p:sp>
+        <p:nvSpPr>
+          <p:cNvPr id="3" name="Marcador de pie de página 2">
+            <a:extLst>
+              <a:ext uri="{FF2B5EF4-FFF2-40B4-BE49-F238E27FC236}">
+                <a16:creationId xmlns:a16="http://schemas.microsoft.com/office/drawing/2014/main" id="{4620255F-CADD-0ECC-ED0E-7C04250A1AD9}"/>
+              </a:ext>
+            </a:extLst>
+          </p:cNvPr>
+          <p:cNvSpPr>
+            <a:spLocks noGrp="1"/>
+          </p:cNvSpPr>
+          <p:nvPr>
+            <p:ph type="ftr" sz="quarter" idx="5"/>
+          </p:nvPr>
+        </p:nvSpPr>
+        <p:spPr/>
+        <p:txBody>
+          <a:bodyPr/>
+          <a:lstStyle/>
+          <a:p>
+            <a:pPr marL="12700">
+              <a:spcBef>
+                <a:spcPts val="15"/>
+              </a:spcBef>
+            </a:pPr>
+            <a:r>
+              <a:rPr lang="es-ES" spc="-5"/>
+              <a:t>LAB 4.0. LAYOUT</a:t>
+            </a:r>
+            <a:endParaRPr lang="es-ES" spc="-5" dirty="0"/>
+          </a:p>
+        </p:txBody>
+      </p:sp>
+      <p:sp>
+        <p:nvSpPr>
+          <p:cNvPr id="2" name="CuadroTexto 1">
+            <a:extLst>
+              <a:ext uri="{FF2B5EF4-FFF2-40B4-BE49-F238E27FC236}">
+                <a16:creationId xmlns:a16="http://schemas.microsoft.com/office/drawing/2014/main" id="{A383C362-D660-924A-A354-53E516CA93C1}"/>
+              </a:ext>
+            </a:extLst>
+          </p:cNvPr>
+          <p:cNvSpPr txBox="1"/>
+          <p:nvPr/>
+        </p:nvSpPr>
+        <p:spPr>
+          <a:xfrm>
+            <a:off x="609441" y="4678160"/>
+            <a:ext cx="11199971" cy="1569660"/>
+          </a:xfrm>
+          <a:prstGeom prst="rect">
+            <a:avLst/>
+          </a:prstGeom>
+          <a:solidFill>
+            <a:schemeClr val="bg1">
+              <a:lumMod val="95000"/>
+            </a:schemeClr>
+          </a:solidFill>
+          <a:ln w="28575">
+            <a:solidFill>
+              <a:srgbClr val="E0700D"/>
+            </a:solidFill>
+          </a:ln>
+        </p:spPr>
+        <p:txBody>
+          <a:bodyPr wrap="square" rtlCol="0">
+            <a:spAutoFit/>
+          </a:bodyPr>
+          <a:lstStyle/>
+          <a:p>
+            <a:pPr marL="171450" indent="-171450" algn="just">
+              <a:buFont typeface="Arial" panose="020B0604020202020204" pitchFamily="34" charset="0"/>
+              <a:buChar char="•"/>
+            </a:pPr>
+            <a:r>
+              <a:rPr lang="es-ES" sz="1200" dirty="0">
+                <a:latin typeface="Arial" panose="020B0604020202020204" pitchFamily="34" charset="0"/>
+                <a:cs typeface="Arial" panose="020B0604020202020204" pitchFamily="34" charset="0"/>
+              </a:rPr>
+              <a:t>Este componente es el MMI 2x2 que hemos obtenido a partir del diseño del Lab2. </a:t>
+            </a:r>
+          </a:p>
+          <a:p>
+            <a:pPr marL="171450" indent="-171450" algn="just">
+              <a:buFont typeface="Arial" panose="020B0604020202020204" pitchFamily="34" charset="0"/>
+              <a:buChar char="•"/>
+            </a:pPr>
+            <a:r>
+              <a:rPr lang="es-ES" sz="1200" dirty="0">
+                <a:latin typeface="Arial" panose="020B0604020202020204" pitchFamily="34" charset="0"/>
+                <a:cs typeface="Arial" panose="020B0604020202020204" pitchFamily="34" charset="0"/>
+              </a:rPr>
+              <a:t>Un MMI utiliza una región central más ancha para excitar varios modos ópticos. Ajustando bien su longitud, esos modos interfieren de forma que la potencia se reparte entre las salidas.</a:t>
+            </a:r>
+          </a:p>
+          <a:p>
+            <a:pPr marL="171450" indent="-171450" algn="just">
+              <a:buFont typeface="Arial" panose="020B0604020202020204" pitchFamily="34" charset="0"/>
+              <a:buChar char="•"/>
+            </a:pPr>
+            <a:r>
+              <a:rPr lang="es-ES" sz="1200" dirty="0">
+                <a:latin typeface="Arial" panose="020B0604020202020204" pitchFamily="34" charset="0"/>
+                <a:cs typeface="Arial" panose="020B0604020202020204" pitchFamily="34" charset="0"/>
+              </a:rPr>
+              <a:t>En nuestro caso lo hemos usado como divisor/acoplador 50:50, así que hemos mantenido los valores optimizados del Lab2: W_MMI = 6.6 µm y L_MMI = 33.918 µm. </a:t>
+            </a:r>
+          </a:p>
+          <a:p>
+            <a:pPr marL="171450" indent="-171450" algn="just">
+              <a:buFont typeface="Arial" panose="020B0604020202020204" pitchFamily="34" charset="0"/>
+              <a:buChar char="•"/>
+            </a:pPr>
+            <a:r>
+              <a:rPr lang="es-ES" sz="1200" dirty="0">
+                <a:latin typeface="Arial" panose="020B0604020202020204" pitchFamily="34" charset="0"/>
+                <a:cs typeface="Arial" panose="020B0604020202020204" pitchFamily="34" charset="0"/>
+              </a:rPr>
+              <a:t>Los accesos están colocados en y = ±1.165 µm respecto al eje central, ya que esa posición nos permitía equilibrar mejor la potencia en ambas salidas. Todos los puertos están definidos en la capa WG 1/0, con anchura de 1.7 µm. </a:t>
+            </a:r>
+          </a:p>
+          <a:p>
+            <a:pPr marL="171450" indent="-171450" algn="just">
+              <a:buFont typeface="Arial" panose="020B0604020202020204" pitchFamily="34" charset="0"/>
+              <a:buChar char="•"/>
+            </a:pPr>
+            <a:r>
+              <a:rPr lang="es-ES" sz="1200" dirty="0">
+                <a:latin typeface="Arial" panose="020B0604020202020204" pitchFamily="34" charset="0"/>
+                <a:cs typeface="Arial" panose="020B0604020202020204" pitchFamily="34" charset="0"/>
+              </a:rPr>
+              <a:t>Según la tabla de puertos, las entradas quedan en x = -20 µm y las salidas en x = 53.918 µm.</a:t>
+            </a:r>
+            <a:endParaRPr lang="en-US" sz="1200" dirty="0">
+              <a:latin typeface="Arial" panose="020B0604020202020204" pitchFamily="34" charset="0"/>
+              <a:cs typeface="Arial" panose="020B0604020202020204" pitchFamily="34" charset="0"/>
+            </a:endParaRPr>
+          </a:p>
+        </p:txBody>
+      </p:sp>
+      <p:sp>
+        <p:nvSpPr>
+          <p:cNvPr id="6" name="Rectángulo 5">
+            <a:extLst>
+              <a:ext uri="{FF2B5EF4-FFF2-40B4-BE49-F238E27FC236}">
+                <a16:creationId xmlns:a16="http://schemas.microsoft.com/office/drawing/2014/main" id="{E84A8CBA-7496-B6B4-6C30-A2E6B281D58B}"/>
+              </a:ext>
+            </a:extLst>
+          </p:cNvPr>
+          <p:cNvSpPr/>
+          <p:nvPr/>
+        </p:nvSpPr>
+        <p:spPr>
+          <a:xfrm>
+            <a:off x="609441" y="1418373"/>
+            <a:ext cx="5332571" cy="3151115"/>
+          </a:xfrm>
+          <a:prstGeom prst="rect">
+            <a:avLst/>
+          </a:prstGeom>
+          <a:noFill/>
+          <a:ln w="28575">
+            <a:solidFill>
+              <a:srgbClr val="E0700D"/>
+            </a:solidFill>
+          </a:ln>
+        </p:spPr>
+        <p:style>
+          <a:lnRef idx="2">
+            <a:schemeClr val="accent1">
+              <a:shade val="15000"/>
+            </a:schemeClr>
+          </a:lnRef>
+          <a:fillRef idx="1">
+            <a:schemeClr val="accent1"/>
+          </a:fillRef>
+          <a:effectRef idx="0">
+            <a:schemeClr val="accent1"/>
+          </a:effectRef>
+          <a:fontRef idx="minor">
+            <a:schemeClr val="lt1"/>
+          </a:fontRef>
+        </p:style>
+        <p:txBody>
+          <a:bodyPr rtlCol="0" anchor="ctr"/>
+          <a:lstStyle/>
+          <a:p>
+            <a:pPr algn="ctr"/>
+            <a:endParaRPr lang="en-US"/>
+          </a:p>
+        </p:txBody>
+      </p:sp>
+      <p:sp>
+        <p:nvSpPr>
+          <p:cNvPr id="7" name="CuadroTexto 6">
+            <a:extLst>
+              <a:ext uri="{FF2B5EF4-FFF2-40B4-BE49-F238E27FC236}">
+                <a16:creationId xmlns:a16="http://schemas.microsoft.com/office/drawing/2014/main" id="{A7A328C0-9DD8-A956-F669-A7EB3FFEE992}"/>
+              </a:ext>
+            </a:extLst>
+          </p:cNvPr>
+          <p:cNvSpPr txBox="1"/>
+          <p:nvPr/>
+        </p:nvSpPr>
+        <p:spPr>
+          <a:xfrm>
+            <a:off x="2375901" y="2494306"/>
+            <a:ext cx="1799660" cy="646331"/>
+          </a:xfrm>
+          <a:prstGeom prst="rect">
+            <a:avLst/>
+          </a:prstGeom>
+          <a:noFill/>
+        </p:spPr>
+        <p:txBody>
+          <a:bodyPr wrap="none" rtlCol="0">
+            <a:spAutoFit/>
+          </a:bodyPr>
+          <a:lstStyle/>
+          <a:p>
+            <a:pPr algn="ctr"/>
+            <a:r>
+              <a:rPr lang="en-US" dirty="0"/>
+              <a:t>Component code</a:t>
+            </a:r>
+          </a:p>
+          <a:p>
+            <a:pPr algn="ctr"/>
+            <a:endParaRPr lang="en-US" dirty="0"/>
+          </a:p>
+        </p:txBody>
+      </p:sp>
+      <p:sp>
+        <p:nvSpPr>
+          <p:cNvPr id="8" name="Rectángulo 7">
+            <a:extLst>
+              <a:ext uri="{FF2B5EF4-FFF2-40B4-BE49-F238E27FC236}">
+                <a16:creationId xmlns:a16="http://schemas.microsoft.com/office/drawing/2014/main" id="{4BE49E5C-3548-7AC4-E148-CAC5211D3758}"/>
+              </a:ext>
+            </a:extLst>
+          </p:cNvPr>
+          <p:cNvSpPr/>
+          <p:nvPr/>
+        </p:nvSpPr>
+        <p:spPr>
+          <a:xfrm>
+            <a:off x="6476841" y="1420406"/>
+            <a:ext cx="5332571" cy="3139704"/>
+          </a:xfrm>
+          <a:prstGeom prst="rect">
+            <a:avLst/>
+          </a:prstGeom>
+          <a:noFill/>
+          <a:ln w="28575">
+            <a:solidFill>
+              <a:srgbClr val="E0700D"/>
+            </a:solidFill>
+          </a:ln>
+        </p:spPr>
+        <p:style>
+          <a:lnRef idx="2">
+            <a:schemeClr val="accent1">
+              <a:shade val="15000"/>
+            </a:schemeClr>
+          </a:lnRef>
+          <a:fillRef idx="1">
+            <a:schemeClr val="accent1"/>
+          </a:fillRef>
+          <a:effectRef idx="0">
+            <a:schemeClr val="accent1"/>
+          </a:effectRef>
+          <a:fontRef idx="minor">
+            <a:schemeClr val="lt1"/>
+          </a:fontRef>
+        </p:style>
+        <p:txBody>
+          <a:bodyPr rtlCol="0" anchor="ctr"/>
+          <a:lstStyle/>
+          <a:p>
+            <a:pPr algn="ctr"/>
+            <a:endParaRPr lang="en-US"/>
+          </a:p>
+        </p:txBody>
+      </p:sp>
+      <p:sp>
+        <p:nvSpPr>
+          <p:cNvPr id="9" name="CuadroTexto 8">
+            <a:extLst>
+              <a:ext uri="{FF2B5EF4-FFF2-40B4-BE49-F238E27FC236}">
+                <a16:creationId xmlns:a16="http://schemas.microsoft.com/office/drawing/2014/main" id="{C993004E-651D-7771-3F79-72D2B8BC0802}"/>
+              </a:ext>
+            </a:extLst>
+          </p:cNvPr>
+          <p:cNvSpPr txBox="1"/>
+          <p:nvPr/>
+        </p:nvSpPr>
+        <p:spPr>
+          <a:xfrm>
+            <a:off x="7956912" y="2496339"/>
+            <a:ext cx="2372445" cy="369332"/>
+          </a:xfrm>
+          <a:prstGeom prst="rect">
+            <a:avLst/>
+          </a:prstGeom>
+          <a:noFill/>
+        </p:spPr>
+        <p:txBody>
+          <a:bodyPr wrap="none" rtlCol="0">
+            <a:spAutoFit/>
+          </a:bodyPr>
+          <a:lstStyle/>
+          <a:p>
+            <a:pPr algn="ctr"/>
+            <a:r>
+              <a:rPr lang="es-ES" dirty="0" err="1"/>
+              <a:t>Component</a:t>
+            </a:r>
+            <a:r>
+              <a:rPr lang="es-ES" dirty="0"/>
+              <a:t> </a:t>
+            </a:r>
+            <a:r>
+              <a:rPr lang="es-ES" dirty="0" err="1"/>
+              <a:t>screenshot</a:t>
+            </a:r>
+            <a:endParaRPr lang="en-US" dirty="0"/>
+          </a:p>
+        </p:txBody>
+      </p:sp>
+      <p:pic>
+        <p:nvPicPr>
+          <p:cNvPr id="5" name="Imagen 4">
+            <a:extLst>
+              <a:ext uri="{FF2B5EF4-FFF2-40B4-BE49-F238E27FC236}">
+                <a16:creationId xmlns:a16="http://schemas.microsoft.com/office/drawing/2014/main" id="{81435281-6C51-04E4-1BD5-6716800C50C3}"/>
+              </a:ext>
+            </a:extLst>
+          </p:cNvPr>
+          <p:cNvPicPr>
+            <a:picLocks noChangeAspect="1"/>
+          </p:cNvPicPr>
+          <p:nvPr/>
+        </p:nvPicPr>
+        <p:blipFill>
+          <a:blip r:embed="rId4"/>
+          <a:stretch>
+            <a:fillRect/>
+          </a:stretch>
+        </p:blipFill>
+        <p:spPr>
+          <a:xfrm>
+            <a:off x="7092292" y="1440942"/>
+            <a:ext cx="4101668" cy="3096357"/>
+          </a:xfrm>
+          <a:prstGeom prst="rect">
+            <a:avLst/>
+          </a:prstGeom>
+        </p:spPr>
+      </p:pic>
+      <p:pic>
+        <p:nvPicPr>
+          <p:cNvPr id="11" name="Imagen 10">
+            <a:extLst>
+              <a:ext uri="{FF2B5EF4-FFF2-40B4-BE49-F238E27FC236}">
+                <a16:creationId xmlns:a16="http://schemas.microsoft.com/office/drawing/2014/main" id="{E086EDDF-CF15-7041-1E9C-07960BA63753}"/>
+              </a:ext>
+            </a:extLst>
+          </p:cNvPr>
+          <p:cNvPicPr>
+            <a:picLocks noChangeAspect="1"/>
+          </p:cNvPicPr>
+          <p:nvPr/>
+        </p:nvPicPr>
+        <p:blipFill>
+          <a:blip r:embed="rId5"/>
+          <a:stretch>
+            <a:fillRect/>
+          </a:stretch>
+        </p:blipFill>
+        <p:spPr>
+          <a:xfrm>
+            <a:off x="1981200" y="1520619"/>
+            <a:ext cx="2458222" cy="2937005"/>
+          </a:xfrm>
+          <a:prstGeom prst="rect">
+            <a:avLst/>
+          </a:prstGeom>
+        </p:spPr>
+      </p:pic>
+    </p:spTree>
+    <p:extLst>
+      <p:ext uri="{BB962C8B-B14F-4D97-AF65-F5344CB8AC3E}">
+        <p14:creationId xmlns:p14="http://schemas.microsoft.com/office/powerpoint/2010/main" val="241095601"/>
+      </p:ext>
+    </p:extLst>
+  </p:cSld>
+  <p:clrMapOvr>
+    <a:masterClrMapping/>
+  </p:clrMapOvr>
+</p:sld>
+</file>
+
+<file path=ppt/slides/slide6.xml><?xml version="1.0" encoding="utf-8"?>
+<p:sld xmlns:a="http://schemas.openxmlformats.org/drawingml/2006/main" xmlns:r="http://schemas.openxmlformats.org/officeDocument/2006/relationships" xmlns:p="http://schemas.openxmlformats.org/presentationml/2006/main">
+  <p:cSld>
+    <p:spTree>
+      <p:nvGrpSpPr>
+        <p:cNvPr id="1" name="">
+          <a:extLst>
+            <a:ext uri="{FF2B5EF4-FFF2-40B4-BE49-F238E27FC236}">
+              <a16:creationId xmlns:a16="http://schemas.microsoft.com/office/drawing/2014/main" id="{3FAA4BAA-9D79-0F0E-C139-738C048BA471}"/>
+            </a:ext>
+          </a:extLst>
+        </p:cNvPr>
+        <p:cNvGrpSpPr/>
+        <p:nvPr/>
+      </p:nvGrpSpPr>
+      <p:grpSpPr>
+        <a:xfrm>
+          <a:off x="0" y="0"/>
+          <a:ext cx="0" cy="0"/>
+          <a:chOff x="0" y="0"/>
+          <a:chExt cx="0" cy="0"/>
+        </a:xfrm>
+      </p:grpSpPr>
+      <p:sp>
+        <p:nvSpPr>
+          <p:cNvPr id="16" name="object 16">
+            <a:extLst>
+              <a:ext uri="{FF2B5EF4-FFF2-40B4-BE49-F238E27FC236}">
+                <a16:creationId xmlns:a16="http://schemas.microsoft.com/office/drawing/2014/main" id="{67DB9176-8B73-030B-05E2-963E70D84861}"/>
+              </a:ext>
+            </a:extLst>
+          </p:cNvPr>
+          <p:cNvSpPr txBox="1">
+            <a:spLocks noGrp="1"/>
+          </p:cNvSpPr>
+          <p:nvPr>
+            <p:ph type="title"/>
+          </p:nvPr>
+        </p:nvSpPr>
+        <p:spPr>
+          <a:xfrm>
+            <a:off x="685800" y="408883"/>
+            <a:ext cx="10994410" cy="782265"/>
+          </a:xfrm>
+          <a:prstGeom prst="rect">
+            <a:avLst/>
+          </a:prstGeom>
+        </p:spPr>
+        <p:txBody>
+          <a:bodyPr vert="horz" wrap="square" lIns="0" tIns="12700" rIns="0" bIns="0" rtlCol="0">
+            <a:spAutoFit/>
+          </a:bodyPr>
+          <a:lstStyle/>
+          <a:p>
+            <a:pPr marL="12700" algn="just">
+              <a:lnSpc>
+                <a:spcPct val="100000"/>
+              </a:lnSpc>
+              <a:spcBef>
+                <a:spcPts val="100"/>
+              </a:spcBef>
+            </a:pPr>
+            <a:r>
+              <a:rPr lang="en-US" sz="2500" dirty="0"/>
+              <a:t>Learning outcome #1b – Notebook section 1. Technology – </a:t>
+            </a:r>
+            <a:r>
+              <a:rPr lang="en-US" sz="2500" dirty="0">
+                <a:solidFill>
+                  <a:srgbClr val="FF0000"/>
+                </a:solidFill>
+              </a:rPr>
+              <a:t>1 slide per component</a:t>
+            </a:r>
+            <a:br>
+              <a:rPr lang="en-US" sz="2500" dirty="0"/>
+            </a:br>
+            <a:endParaRPr sz="2500" b="0" i="1" dirty="0">
+              <a:latin typeface="+mj-lt"/>
+              <a:cs typeface="Lucida Sans"/>
+            </a:endParaRPr>
+          </a:p>
+        </p:txBody>
+      </p:sp>
+      <p:pic>
+        <p:nvPicPr>
+          <p:cNvPr id="83" name="Gráfico 82">
+            <a:extLst>
+              <a:ext uri="{FF2B5EF4-FFF2-40B4-BE49-F238E27FC236}">
+                <a16:creationId xmlns:a16="http://schemas.microsoft.com/office/drawing/2014/main" id="{3A44508D-C4D2-BF65-1CBA-05329BE29678}"/>
+              </a:ext>
+            </a:extLst>
+          </p:cNvPr>
+          <p:cNvPicPr>
+            <a:picLocks noChangeAspect="1"/>
+          </p:cNvPicPr>
+          <p:nvPr/>
+        </p:nvPicPr>
+        <p:blipFill>
+          <a:blip>
+            <a:extLst>
+              <a:ext uri="{96DAC541-7B7A-43D3-8B79-37D633B846F1}">
+                <asvg:svgBlip xmlns:asvg="http://schemas.microsoft.com/office/drawing/2016/SVG/main" r:embed="rId3"/>
+              </a:ext>
+            </a:extLst>
+          </a:blip>
+          <a:stretch>
+            <a:fillRect/>
+          </a:stretch>
+        </p:blipFill>
+        <p:spPr>
+          <a:xfrm>
+            <a:off x="5045006" y="6356057"/>
+            <a:ext cx="6409575" cy="363174"/>
+          </a:xfrm>
+          <a:prstGeom prst="rect">
+            <a:avLst/>
+          </a:prstGeom>
+        </p:spPr>
+      </p:pic>
+      <p:sp>
+        <p:nvSpPr>
+          <p:cNvPr id="84" name="Marcador de número de diapositiva 83">
+            <a:extLst>
+              <a:ext uri="{FF2B5EF4-FFF2-40B4-BE49-F238E27FC236}">
+                <a16:creationId xmlns:a16="http://schemas.microsoft.com/office/drawing/2014/main" id="{0D9AF0AC-07FF-2FCA-0428-84348E408889}"/>
+              </a:ext>
+            </a:extLst>
+          </p:cNvPr>
+          <p:cNvSpPr>
+            <a:spLocks noGrp="1"/>
+          </p:cNvSpPr>
+          <p:nvPr>
+            <p:ph type="sldNum" sz="quarter" idx="7"/>
+          </p:nvPr>
+        </p:nvSpPr>
+        <p:spPr/>
+        <p:txBody>
+          <a:bodyPr/>
+          <a:lstStyle/>
+          <a:p>
+            <a:fld id="{B6F15528-21DE-4FAA-801E-634DDDAF4B2B}" type="slidenum">
+              <a:rPr lang="es-ES" smtClean="0"/>
+              <a:t>6</a:t>
+            </a:fld>
+            <a:endParaRPr lang="es-ES"/>
+          </a:p>
+        </p:txBody>
+      </p:sp>
+      <p:sp>
+        <p:nvSpPr>
+          <p:cNvPr id="3" name="Marcador de pie de página 2">
+            <a:extLst>
+              <a:ext uri="{FF2B5EF4-FFF2-40B4-BE49-F238E27FC236}">
+                <a16:creationId xmlns:a16="http://schemas.microsoft.com/office/drawing/2014/main" id="{8CFD135D-9FAB-5A78-2CF8-A7081F11B93B}"/>
+              </a:ext>
+            </a:extLst>
+          </p:cNvPr>
+          <p:cNvSpPr>
+            <a:spLocks noGrp="1"/>
+          </p:cNvSpPr>
+          <p:nvPr>
+            <p:ph type="ftr" sz="quarter" idx="5"/>
+          </p:nvPr>
+        </p:nvSpPr>
+        <p:spPr/>
+        <p:txBody>
+          <a:bodyPr/>
+          <a:lstStyle/>
+          <a:p>
+            <a:pPr marL="12700">
+              <a:spcBef>
+                <a:spcPts val="15"/>
+              </a:spcBef>
+            </a:pPr>
+            <a:r>
+              <a:rPr lang="es-ES" spc="-5"/>
+              <a:t>LAB 4.0. LAYOUT</a:t>
+            </a:r>
+            <a:endParaRPr lang="es-ES" spc="-5" dirty="0"/>
+          </a:p>
+        </p:txBody>
+      </p:sp>
+      <p:sp>
+        <p:nvSpPr>
+          <p:cNvPr id="2" name="CuadroTexto 1">
+            <a:extLst>
+              <a:ext uri="{FF2B5EF4-FFF2-40B4-BE49-F238E27FC236}">
+                <a16:creationId xmlns:a16="http://schemas.microsoft.com/office/drawing/2014/main" id="{6D7A5C0E-41AE-D890-978A-700EC4B605BE}"/>
+              </a:ext>
+            </a:extLst>
+          </p:cNvPr>
+          <p:cNvSpPr txBox="1"/>
+          <p:nvPr/>
+        </p:nvSpPr>
+        <p:spPr>
+          <a:xfrm>
+            <a:off x="609441" y="4531191"/>
+            <a:ext cx="11199971" cy="1384995"/>
+          </a:xfrm>
+          <a:prstGeom prst="rect">
+            <a:avLst/>
+          </a:prstGeom>
+          <a:solidFill>
+            <a:schemeClr val="bg1">
+              <a:lumMod val="95000"/>
+            </a:schemeClr>
+          </a:solidFill>
+          <a:ln w="28575">
+            <a:solidFill>
+              <a:srgbClr val="E0700D"/>
+            </a:solidFill>
+          </a:ln>
+        </p:spPr>
+        <p:txBody>
+          <a:bodyPr wrap="square" rtlCol="0">
+            <a:spAutoFit/>
+          </a:bodyPr>
+          <a:lstStyle/>
+          <a:p>
+            <a:pPr marL="171450" indent="-171450" algn="just">
+              <a:buFont typeface="Arial" panose="020B0604020202020204" pitchFamily="34" charset="0"/>
+              <a:buChar char="•"/>
+            </a:pPr>
+            <a:r>
+              <a:rPr lang="es-ES" sz="1200" dirty="0">
+                <a:latin typeface="Arial" panose="020B0604020202020204" pitchFamily="34" charset="0"/>
+                <a:cs typeface="Arial" panose="020B0604020202020204" pitchFamily="34" charset="0"/>
+              </a:rPr>
+              <a:t>Este componente es el MZI desbalanceado que hemos llevado a </a:t>
+            </a:r>
+            <a:r>
+              <a:rPr lang="es-ES" sz="1200" dirty="0" err="1">
+                <a:latin typeface="Arial" panose="020B0604020202020204" pitchFamily="34" charset="0"/>
+                <a:cs typeface="Arial" panose="020B0604020202020204" pitchFamily="34" charset="0"/>
+              </a:rPr>
+              <a:t>layout</a:t>
+            </a:r>
+            <a:r>
+              <a:rPr lang="es-ES" sz="1200" dirty="0">
+                <a:latin typeface="Arial" panose="020B0604020202020204" pitchFamily="34" charset="0"/>
+                <a:cs typeface="Arial" panose="020B0604020202020204" pitchFamily="34" charset="0"/>
+              </a:rPr>
+              <a:t> a partir del diseño del Lab3. </a:t>
+            </a:r>
+          </a:p>
+          <a:p>
+            <a:pPr marL="171450" indent="-171450" algn="just">
+              <a:buFont typeface="Arial" panose="020B0604020202020204" pitchFamily="34" charset="0"/>
+              <a:buChar char="•"/>
+            </a:pPr>
+            <a:r>
+              <a:rPr lang="es-ES" sz="1200" dirty="0">
+                <a:latin typeface="Arial" panose="020B0604020202020204" pitchFamily="34" charset="0"/>
+                <a:cs typeface="Arial" panose="020B0604020202020204" pitchFamily="34" charset="0"/>
+              </a:rPr>
+              <a:t>Un MZI funciona dividiendo la luz en dos brazos y volviéndola a combinar después, de forma que si los dos caminos tienen distinta longitud, aparece una diferencia de fase dependiente de la longitud de onda y se obtiene una respuesta periódica.</a:t>
+            </a:r>
+          </a:p>
+          <a:p>
+            <a:pPr marL="171450" indent="-171450" algn="just">
+              <a:buFont typeface="Arial" panose="020B0604020202020204" pitchFamily="34" charset="0"/>
+              <a:buChar char="•"/>
+            </a:pPr>
+            <a:r>
+              <a:rPr lang="es-ES" sz="1200" dirty="0">
+                <a:latin typeface="Arial" panose="020B0604020202020204" pitchFamily="34" charset="0"/>
+                <a:cs typeface="Arial" panose="020B0604020202020204" pitchFamily="34" charset="0"/>
+              </a:rPr>
+              <a:t>En nuestro caso hemos usado una diferencia de longitud ΔL = 120.125 µm, que era la obtenida en Lab3 para buscar un FSR cercano a 10 nm. </a:t>
+            </a:r>
+          </a:p>
+          <a:p>
+            <a:pPr marL="171450" indent="-171450" algn="just">
+              <a:buFont typeface="Arial" panose="020B0604020202020204" pitchFamily="34" charset="0"/>
+              <a:buChar char="•"/>
+            </a:pPr>
+            <a:r>
+              <a:rPr lang="es-ES" sz="1200" dirty="0">
+                <a:latin typeface="Arial" panose="020B0604020202020204" pitchFamily="34" charset="0"/>
+                <a:cs typeface="Arial" panose="020B0604020202020204" pitchFamily="34" charset="0"/>
+              </a:rPr>
+              <a:t>Como </a:t>
+            </a:r>
+            <a:r>
+              <a:rPr lang="es-ES" sz="1200" i="1" dirty="0" err="1">
+                <a:latin typeface="Arial" panose="020B0604020202020204" pitchFamily="34" charset="0"/>
+                <a:cs typeface="Arial" panose="020B0604020202020204" pitchFamily="34" charset="0"/>
+              </a:rPr>
+              <a:t>splitter</a:t>
+            </a:r>
+            <a:r>
+              <a:rPr lang="es-ES" sz="1200" dirty="0">
+                <a:latin typeface="Arial" panose="020B0604020202020204" pitchFamily="34" charset="0"/>
+                <a:cs typeface="Arial" panose="020B0604020202020204" pitchFamily="34" charset="0"/>
+              </a:rPr>
+              <a:t> y </a:t>
+            </a:r>
+            <a:r>
+              <a:rPr lang="es-ES" sz="1200" i="1" dirty="0" err="1">
+                <a:latin typeface="Arial" panose="020B0604020202020204" pitchFamily="34" charset="0"/>
+                <a:cs typeface="Arial" panose="020B0604020202020204" pitchFamily="34" charset="0"/>
+              </a:rPr>
+              <a:t>combiner</a:t>
+            </a:r>
+            <a:r>
+              <a:rPr lang="es-ES" sz="1200" dirty="0">
+                <a:latin typeface="Arial" panose="020B0604020202020204" pitchFamily="34" charset="0"/>
+                <a:cs typeface="Arial" panose="020B0604020202020204" pitchFamily="34" charset="0"/>
+              </a:rPr>
+              <a:t> hemos reutilizado el MMI 2x2 diseñado anteriormente, de forma que el reparto de potencia sea aproximadamente 50:50. </a:t>
+            </a:r>
+          </a:p>
+          <a:p>
+            <a:pPr marL="171450" indent="-171450" algn="just">
+              <a:buFont typeface="Arial" panose="020B0604020202020204" pitchFamily="34" charset="0"/>
+              <a:buChar char="•"/>
+            </a:pPr>
+            <a:r>
+              <a:rPr lang="es-ES" sz="1200" dirty="0">
+                <a:latin typeface="Arial" panose="020B0604020202020204" pitchFamily="34" charset="0"/>
+                <a:cs typeface="Arial" panose="020B0604020202020204" pitchFamily="34" charset="0"/>
+              </a:rPr>
+              <a:t>Todos los puertos están en la capa WG 1/0, con anchura 1.7 µm, y en la tabla se observa que las entradas quedan en x = -20 µm y las salidas en x = 527.936 µm.</a:t>
+            </a:r>
+          </a:p>
+        </p:txBody>
+      </p:sp>
+      <p:sp>
+        <p:nvSpPr>
+          <p:cNvPr id="6" name="Rectángulo 5">
+            <a:extLst>
+              <a:ext uri="{FF2B5EF4-FFF2-40B4-BE49-F238E27FC236}">
+                <a16:creationId xmlns:a16="http://schemas.microsoft.com/office/drawing/2014/main" id="{D9FC2878-DD97-447C-E629-B7B00C45C2EC}"/>
+              </a:ext>
+            </a:extLst>
+          </p:cNvPr>
+          <p:cNvSpPr/>
+          <p:nvPr/>
+        </p:nvSpPr>
+        <p:spPr>
+          <a:xfrm>
+            <a:off x="615192" y="921819"/>
+            <a:ext cx="5332571" cy="3306028"/>
+          </a:xfrm>
+          <a:prstGeom prst="rect">
+            <a:avLst/>
+          </a:prstGeom>
+          <a:noFill/>
+          <a:ln w="28575">
+            <a:solidFill>
+              <a:srgbClr val="E0700D"/>
+            </a:solidFill>
+          </a:ln>
+        </p:spPr>
+        <p:style>
+          <a:lnRef idx="2">
+            <a:schemeClr val="accent1">
+              <a:shade val="15000"/>
+            </a:schemeClr>
+          </a:lnRef>
+          <a:fillRef idx="1">
+            <a:schemeClr val="accent1"/>
+          </a:fillRef>
+          <a:effectRef idx="0">
+            <a:schemeClr val="accent1"/>
+          </a:effectRef>
+          <a:fontRef idx="minor">
+            <a:schemeClr val="lt1"/>
+          </a:fontRef>
+        </p:style>
+        <p:txBody>
+          <a:bodyPr rtlCol="0" anchor="ctr"/>
+          <a:lstStyle/>
+          <a:p>
+            <a:pPr algn="ctr"/>
+            <a:endParaRPr lang="en-US" dirty="0"/>
+          </a:p>
+        </p:txBody>
+      </p:sp>
+      <p:sp>
+        <p:nvSpPr>
+          <p:cNvPr id="7" name="CuadroTexto 6">
+            <a:extLst>
+              <a:ext uri="{FF2B5EF4-FFF2-40B4-BE49-F238E27FC236}">
+                <a16:creationId xmlns:a16="http://schemas.microsoft.com/office/drawing/2014/main" id="{86D411EC-B320-89E6-35CD-6A08C8F95786}"/>
+              </a:ext>
+            </a:extLst>
+          </p:cNvPr>
+          <p:cNvSpPr txBox="1"/>
+          <p:nvPr/>
+        </p:nvSpPr>
+        <p:spPr>
+          <a:xfrm>
+            <a:off x="2375901" y="2494306"/>
+            <a:ext cx="1799660" cy="646331"/>
+          </a:xfrm>
+          <a:prstGeom prst="rect">
+            <a:avLst/>
+          </a:prstGeom>
+          <a:noFill/>
+        </p:spPr>
+        <p:txBody>
+          <a:bodyPr wrap="none" rtlCol="0">
+            <a:spAutoFit/>
+          </a:bodyPr>
+          <a:lstStyle/>
+          <a:p>
+            <a:pPr algn="ctr"/>
+            <a:r>
+              <a:rPr lang="en-US" dirty="0"/>
+              <a:t>Component code</a:t>
+            </a:r>
+          </a:p>
+          <a:p>
+            <a:pPr algn="ctr"/>
+            <a:endParaRPr lang="en-US" dirty="0"/>
+          </a:p>
+        </p:txBody>
+      </p:sp>
+      <p:sp>
+        <p:nvSpPr>
+          <p:cNvPr id="8" name="Rectángulo 7">
+            <a:extLst>
+              <a:ext uri="{FF2B5EF4-FFF2-40B4-BE49-F238E27FC236}">
+                <a16:creationId xmlns:a16="http://schemas.microsoft.com/office/drawing/2014/main" id="{271BC9EE-FE1C-B87D-65DC-F6541BCC3C80}"/>
+              </a:ext>
+            </a:extLst>
+          </p:cNvPr>
+          <p:cNvSpPr/>
+          <p:nvPr/>
+        </p:nvSpPr>
+        <p:spPr>
+          <a:xfrm>
+            <a:off x="6476841" y="921819"/>
+            <a:ext cx="5332571" cy="3306028"/>
+          </a:xfrm>
+          <a:prstGeom prst="rect">
+            <a:avLst/>
+          </a:prstGeom>
+          <a:noFill/>
+          <a:ln w="28575">
+            <a:solidFill>
+              <a:srgbClr val="E0700D"/>
+            </a:solidFill>
+          </a:ln>
+        </p:spPr>
+        <p:style>
+          <a:lnRef idx="2">
+            <a:schemeClr val="accent1">
+              <a:shade val="15000"/>
+            </a:schemeClr>
+          </a:lnRef>
+          <a:fillRef idx="1">
+            <a:schemeClr val="accent1"/>
+          </a:fillRef>
+          <a:effectRef idx="0">
+            <a:schemeClr val="accent1"/>
+          </a:effectRef>
+          <a:fontRef idx="minor">
+            <a:schemeClr val="lt1"/>
+          </a:fontRef>
+        </p:style>
+        <p:txBody>
+          <a:bodyPr rtlCol="0" anchor="ctr"/>
+          <a:lstStyle/>
+          <a:p>
+            <a:pPr algn="ctr"/>
+            <a:endParaRPr lang="en-US"/>
+          </a:p>
+        </p:txBody>
+      </p:sp>
+      <p:sp>
+        <p:nvSpPr>
+          <p:cNvPr id="9" name="CuadroTexto 8">
+            <a:extLst>
+              <a:ext uri="{FF2B5EF4-FFF2-40B4-BE49-F238E27FC236}">
+                <a16:creationId xmlns:a16="http://schemas.microsoft.com/office/drawing/2014/main" id="{BBD14849-FB0D-4BA6-B1F4-4C9B70D649CC}"/>
+              </a:ext>
+            </a:extLst>
+          </p:cNvPr>
+          <p:cNvSpPr txBox="1"/>
+          <p:nvPr/>
+        </p:nvSpPr>
+        <p:spPr>
+          <a:xfrm>
+            <a:off x="7956912" y="2496339"/>
+            <a:ext cx="2372445" cy="369332"/>
+          </a:xfrm>
+          <a:prstGeom prst="rect">
+            <a:avLst/>
+          </a:prstGeom>
+          <a:noFill/>
+        </p:spPr>
+        <p:txBody>
+          <a:bodyPr wrap="none" rtlCol="0">
+            <a:spAutoFit/>
+          </a:bodyPr>
+          <a:lstStyle/>
+          <a:p>
+            <a:pPr algn="ctr"/>
+            <a:r>
+              <a:rPr lang="es-ES" dirty="0" err="1"/>
+              <a:t>Component</a:t>
+            </a:r>
+            <a:r>
+              <a:rPr lang="es-ES" dirty="0"/>
+              <a:t> </a:t>
+            </a:r>
+            <a:r>
+              <a:rPr lang="es-ES" dirty="0" err="1"/>
+              <a:t>screenshot</a:t>
+            </a:r>
+            <a:endParaRPr lang="en-US" dirty="0"/>
+          </a:p>
+        </p:txBody>
+      </p:sp>
+      <p:pic>
+        <p:nvPicPr>
+          <p:cNvPr id="5" name="Imagen 4">
+            <a:extLst>
+              <a:ext uri="{FF2B5EF4-FFF2-40B4-BE49-F238E27FC236}">
+                <a16:creationId xmlns:a16="http://schemas.microsoft.com/office/drawing/2014/main" id="{0F622750-3589-E255-A9B2-BE6B39111791}"/>
+              </a:ext>
+            </a:extLst>
+          </p:cNvPr>
+          <p:cNvPicPr>
+            <a:picLocks noChangeAspect="1"/>
+          </p:cNvPicPr>
+          <p:nvPr/>
+        </p:nvPicPr>
+        <p:blipFill>
+          <a:blip r:embed="rId4"/>
+          <a:stretch>
+            <a:fillRect/>
+          </a:stretch>
+        </p:blipFill>
+        <p:spPr>
+          <a:xfrm>
+            <a:off x="7098016" y="1030975"/>
+            <a:ext cx="4090219" cy="3087715"/>
+          </a:xfrm>
+          <a:prstGeom prst="rect">
+            <a:avLst/>
+          </a:prstGeom>
+        </p:spPr>
+      </p:pic>
+      <p:pic>
+        <p:nvPicPr>
+          <p:cNvPr id="11" name="Imagen 10">
+            <a:extLst>
+              <a:ext uri="{FF2B5EF4-FFF2-40B4-BE49-F238E27FC236}">
+                <a16:creationId xmlns:a16="http://schemas.microsoft.com/office/drawing/2014/main" id="{D1134127-AEF6-3E4D-F776-6D08D65F322B}"/>
+              </a:ext>
+            </a:extLst>
+          </p:cNvPr>
+          <p:cNvPicPr>
+            <a:picLocks noChangeAspect="1"/>
+          </p:cNvPicPr>
+          <p:nvPr/>
+        </p:nvPicPr>
+        <p:blipFill>
+          <a:blip r:embed="rId5"/>
+          <a:stretch>
+            <a:fillRect/>
+          </a:stretch>
+        </p:blipFill>
+        <p:spPr>
+          <a:xfrm>
+            <a:off x="1376490" y="1030975"/>
+            <a:ext cx="3952619" cy="3152903"/>
+          </a:xfrm>
+          <a:prstGeom prst="rect">
+            <a:avLst/>
+          </a:prstGeom>
+        </p:spPr>
+      </p:pic>
+    </p:spTree>
+    <p:extLst>
+      <p:ext uri="{BB962C8B-B14F-4D97-AF65-F5344CB8AC3E}">
+        <p14:creationId xmlns:p14="http://schemas.microsoft.com/office/powerpoint/2010/main" val="3752706896"/>
+      </p:ext>
+    </p:extLst>
+  </p:cSld>
+  <p:clrMapOvr>
+    <a:masterClrMapping/>
+  </p:clrMapOvr>
+</p:sld>
+</file>
+
+<file path=ppt/slides/slide7.xml><?xml version="1.0" encoding="utf-8"?>
+<p:sld xmlns:a="http://schemas.openxmlformats.org/drawingml/2006/main" xmlns:r="http://schemas.openxmlformats.org/officeDocument/2006/relationships" xmlns:p="http://schemas.openxmlformats.org/presentationml/2006/main">
+  <p:cSld>
+    <p:spTree>
+      <p:nvGrpSpPr>
+        <p:cNvPr id="1" name="">
+          <a:extLst>
+            <a:ext uri="{FF2B5EF4-FFF2-40B4-BE49-F238E27FC236}">
+              <a16:creationId xmlns:a16="http://schemas.microsoft.com/office/drawing/2014/main" id="{0D2AABE9-0626-EDF5-0F4A-70E642B66B34}"/>
+            </a:ext>
+          </a:extLst>
+        </p:cNvPr>
+        <p:cNvGrpSpPr/>
+        <p:nvPr/>
+      </p:nvGrpSpPr>
+      <p:grpSpPr>
+        <a:xfrm>
+          <a:off x="0" y="0"/>
+          <a:ext cx="0" cy="0"/>
+          <a:chOff x="0" y="0"/>
+          <a:chExt cx="0" cy="0"/>
+        </a:xfrm>
+      </p:grpSpPr>
+      <p:sp>
+        <p:nvSpPr>
+          <p:cNvPr id="16" name="object 16">
+            <a:extLst>
+              <a:ext uri="{FF2B5EF4-FFF2-40B4-BE49-F238E27FC236}">
+                <a16:creationId xmlns:a16="http://schemas.microsoft.com/office/drawing/2014/main" id="{0B2A64C5-C05D-6EC8-A032-44B308C7D7B1}"/>
+              </a:ext>
+            </a:extLst>
+          </p:cNvPr>
+          <p:cNvSpPr txBox="1">
+            <a:spLocks noGrp="1"/>
+          </p:cNvSpPr>
+          <p:nvPr>
+            <p:ph type="title"/>
+          </p:nvPr>
+        </p:nvSpPr>
+        <p:spPr>
+          <a:xfrm>
+            <a:off x="685800" y="408883"/>
+            <a:ext cx="10994410" cy="397545"/>
+          </a:xfrm>
+          <a:prstGeom prst="rect">
+            <a:avLst/>
+          </a:prstGeom>
+        </p:spPr>
+        <p:txBody>
+          <a:bodyPr vert="horz" wrap="square" lIns="0" tIns="12700" rIns="0" bIns="0" rtlCol="0">
+            <a:spAutoFit/>
+          </a:bodyPr>
+          <a:lstStyle/>
+          <a:p>
+            <a:pPr marL="12700" algn="just">
+              <a:lnSpc>
+                <a:spcPct val="100000"/>
+              </a:lnSpc>
+              <a:spcBef>
+                <a:spcPts val="100"/>
+              </a:spcBef>
+            </a:pPr>
+            <a:r>
+              <a:rPr lang="en-US" sz="2500" dirty="0"/>
+              <a:t>Learning outcome #1b – Notebook section 1. Technology – </a:t>
+            </a:r>
+            <a:r>
+              <a:rPr lang="en-US" sz="2500" dirty="0">
+                <a:solidFill>
+                  <a:srgbClr val="FF0000"/>
+                </a:solidFill>
+              </a:rPr>
+              <a:t>1 slide per component</a:t>
+            </a:r>
+            <a:endParaRPr sz="2500" b="0" i="1" dirty="0">
+              <a:latin typeface="+mj-lt"/>
+              <a:cs typeface="Lucida Sans"/>
+            </a:endParaRPr>
+          </a:p>
+        </p:txBody>
+      </p:sp>
+      <p:pic>
+        <p:nvPicPr>
+          <p:cNvPr id="83" name="Gráfico 82">
+            <a:extLst>
+              <a:ext uri="{FF2B5EF4-FFF2-40B4-BE49-F238E27FC236}">
+                <a16:creationId xmlns:a16="http://schemas.microsoft.com/office/drawing/2014/main" id="{99218D80-1E3B-C8C2-0504-3D592D04EC39}"/>
+              </a:ext>
+            </a:extLst>
+          </p:cNvPr>
+          <p:cNvPicPr>
+            <a:picLocks noChangeAspect="1"/>
+          </p:cNvPicPr>
+          <p:nvPr/>
+        </p:nvPicPr>
+        <p:blipFill>
+          <a:blip>
+            <a:extLst>
+              <a:ext uri="{96DAC541-7B7A-43D3-8B79-37D633B846F1}">
+                <asvg:svgBlip xmlns:asvg="http://schemas.microsoft.com/office/drawing/2016/SVG/main" r:embed="rId3"/>
+              </a:ext>
+            </a:extLst>
+          </a:blip>
+          <a:stretch>
+            <a:fillRect/>
+          </a:stretch>
+        </p:blipFill>
+        <p:spPr>
+          <a:xfrm>
+            <a:off x="5045006" y="6356057"/>
+            <a:ext cx="6409575" cy="363174"/>
+          </a:xfrm>
+          <a:prstGeom prst="rect">
+            <a:avLst/>
+          </a:prstGeom>
+        </p:spPr>
+      </p:pic>
+      <p:sp>
+        <p:nvSpPr>
+          <p:cNvPr id="84" name="Marcador de número de diapositiva 83">
+            <a:extLst>
+              <a:ext uri="{FF2B5EF4-FFF2-40B4-BE49-F238E27FC236}">
+                <a16:creationId xmlns:a16="http://schemas.microsoft.com/office/drawing/2014/main" id="{0617DA04-9055-28E6-8C91-BBCED8F9450E}"/>
+              </a:ext>
+            </a:extLst>
+          </p:cNvPr>
+          <p:cNvSpPr>
+            <a:spLocks noGrp="1"/>
+          </p:cNvSpPr>
+          <p:nvPr>
+            <p:ph type="sldNum" sz="quarter" idx="7"/>
+          </p:nvPr>
+        </p:nvSpPr>
+        <p:spPr/>
+        <p:txBody>
+          <a:bodyPr/>
+          <a:lstStyle/>
+          <a:p>
+            <a:fld id="{B6F15528-21DE-4FAA-801E-634DDDAF4B2B}" type="slidenum">
+              <a:rPr lang="es-ES" smtClean="0"/>
+              <a:t>7</a:t>
+            </a:fld>
+            <a:endParaRPr lang="es-ES"/>
+          </a:p>
+        </p:txBody>
+      </p:sp>
+      <p:sp>
+        <p:nvSpPr>
+          <p:cNvPr id="3" name="Marcador de pie de página 2">
+            <a:extLst>
+              <a:ext uri="{FF2B5EF4-FFF2-40B4-BE49-F238E27FC236}">
+                <a16:creationId xmlns:a16="http://schemas.microsoft.com/office/drawing/2014/main" id="{B3BDF9C4-35A2-DD02-3699-9CDB07E6FBBB}"/>
+              </a:ext>
+            </a:extLst>
+          </p:cNvPr>
+          <p:cNvSpPr>
+            <a:spLocks noGrp="1"/>
+          </p:cNvSpPr>
+          <p:nvPr>
+            <p:ph type="ftr" sz="quarter" idx="5"/>
+          </p:nvPr>
+        </p:nvSpPr>
+        <p:spPr/>
+        <p:txBody>
+          <a:bodyPr/>
+          <a:lstStyle/>
+          <a:p>
+            <a:pPr marL="12700">
+              <a:spcBef>
+                <a:spcPts val="15"/>
+              </a:spcBef>
+            </a:pPr>
+            <a:r>
+              <a:rPr lang="es-ES" spc="-5"/>
+              <a:t>LAB 4.0. LAYOUT</a:t>
+            </a:r>
+            <a:endParaRPr lang="es-ES" spc="-5" dirty="0"/>
+          </a:p>
+        </p:txBody>
+      </p:sp>
+      <p:sp>
+        <p:nvSpPr>
+          <p:cNvPr id="2" name="CuadroTexto 1">
+            <a:extLst>
+              <a:ext uri="{FF2B5EF4-FFF2-40B4-BE49-F238E27FC236}">
+                <a16:creationId xmlns:a16="http://schemas.microsoft.com/office/drawing/2014/main" id="{109C8539-4409-5928-8E8F-98CA993768AC}"/>
+              </a:ext>
+            </a:extLst>
+          </p:cNvPr>
+          <p:cNvSpPr txBox="1"/>
+          <p:nvPr/>
+        </p:nvSpPr>
+        <p:spPr>
+          <a:xfrm>
+            <a:off x="480239" y="4419324"/>
+            <a:ext cx="11199971" cy="1569660"/>
+          </a:xfrm>
+          <a:prstGeom prst="rect">
+            <a:avLst/>
+          </a:prstGeom>
+          <a:solidFill>
+            <a:schemeClr val="bg1">
+              <a:lumMod val="95000"/>
+            </a:schemeClr>
+          </a:solidFill>
+          <a:ln w="28575">
+            <a:solidFill>
+              <a:srgbClr val="E0700D"/>
+            </a:solidFill>
+          </a:ln>
+        </p:spPr>
+        <p:txBody>
+          <a:bodyPr wrap="square" rtlCol="0">
+            <a:spAutoFit/>
+          </a:bodyPr>
+          <a:lstStyle/>
+          <a:p>
+            <a:pPr marL="171450" indent="-171450" algn="just">
+              <a:buFont typeface="Arial" panose="020B0604020202020204" pitchFamily="34" charset="0"/>
+              <a:buChar char="•"/>
+            </a:pPr>
+            <a:r>
+              <a:rPr lang="es-ES" sz="1200" dirty="0">
+                <a:latin typeface="Arial" panose="020B0604020202020204" pitchFamily="34" charset="0"/>
+                <a:cs typeface="Arial" panose="020B0604020202020204" pitchFamily="34" charset="0"/>
+              </a:rPr>
+              <a:t>Este componente es el resonador de anillo tipo “</a:t>
+            </a:r>
+            <a:r>
+              <a:rPr lang="es-ES" sz="1200" dirty="0" err="1">
+                <a:latin typeface="Arial" panose="020B0604020202020204" pitchFamily="34" charset="0"/>
+                <a:cs typeface="Arial" panose="020B0604020202020204" pitchFamily="34" charset="0"/>
+              </a:rPr>
+              <a:t>all-pass</a:t>
+            </a:r>
+            <a:r>
+              <a:rPr lang="es-ES" sz="1200" dirty="0">
+                <a:latin typeface="Arial" panose="020B0604020202020204" pitchFamily="34" charset="0"/>
+                <a:cs typeface="Arial" panose="020B0604020202020204" pitchFamily="34" charset="0"/>
+              </a:rPr>
+              <a:t>” que hemos pasado a </a:t>
+            </a:r>
+            <a:r>
+              <a:rPr lang="es-ES" sz="1200" dirty="0" err="1">
+                <a:latin typeface="Arial" panose="020B0604020202020204" pitchFamily="34" charset="0"/>
+                <a:cs typeface="Arial" panose="020B0604020202020204" pitchFamily="34" charset="0"/>
+              </a:rPr>
+              <a:t>layout</a:t>
+            </a:r>
+            <a:r>
+              <a:rPr lang="es-ES" sz="1200" dirty="0">
+                <a:latin typeface="Arial" panose="020B0604020202020204" pitchFamily="34" charset="0"/>
+                <a:cs typeface="Arial" panose="020B0604020202020204" pitchFamily="34" charset="0"/>
+              </a:rPr>
+              <a:t> a partir del diseño del Lab3. </a:t>
+            </a:r>
+          </a:p>
+          <a:p>
+            <a:pPr marL="171450" indent="-171450" algn="just">
+              <a:buFont typeface="Arial" panose="020B0604020202020204" pitchFamily="34" charset="0"/>
+              <a:buChar char="•"/>
+            </a:pPr>
+            <a:r>
+              <a:rPr lang="es-ES" sz="1200" dirty="0">
+                <a:latin typeface="Arial" panose="020B0604020202020204" pitchFamily="34" charset="0"/>
+                <a:cs typeface="Arial" panose="020B0604020202020204" pitchFamily="34" charset="0"/>
+              </a:rPr>
+              <a:t>Está formado por una guía recta, llamada bus, acoplada lateralmente a una guía cerrada en forma de anillo. La idea es que parte de la potencia que viaja por la guía bus se acople al anillo y pueda recircular varias veces.</a:t>
+            </a:r>
+          </a:p>
+          <a:p>
+            <a:pPr marL="171450" indent="-171450" algn="just">
+              <a:buFont typeface="Arial" panose="020B0604020202020204" pitchFamily="34" charset="0"/>
+              <a:buChar char="•"/>
+            </a:pPr>
+            <a:r>
+              <a:rPr lang="es-ES" sz="1200" dirty="0">
+                <a:latin typeface="Arial" panose="020B0604020202020204" pitchFamily="34" charset="0"/>
+                <a:cs typeface="Arial" panose="020B0604020202020204" pitchFamily="34" charset="0"/>
+              </a:rPr>
+              <a:t>En Lab3 diseñamos el resonador para un FSR objetivo de 15 nm, obteniendo una longitud de vuelta </a:t>
+            </a:r>
+            <a:r>
+              <a:rPr lang="es-ES" sz="1200" dirty="0" err="1">
+                <a:latin typeface="Arial" panose="020B0604020202020204" pitchFamily="34" charset="0"/>
+                <a:cs typeface="Arial" panose="020B0604020202020204" pitchFamily="34" charset="0"/>
+              </a:rPr>
+              <a:t>L_ring</a:t>
+            </a:r>
+            <a:r>
+              <a:rPr lang="es-ES" sz="1200" dirty="0">
+                <a:latin typeface="Arial" panose="020B0604020202020204" pitchFamily="34" charset="0"/>
+                <a:cs typeface="Arial" panose="020B0604020202020204" pitchFamily="34" charset="0"/>
+              </a:rPr>
+              <a:t> = 80.08 µm y un coeficiente de acoplo objetivo K = 0.5. </a:t>
+            </a:r>
+          </a:p>
+          <a:p>
+            <a:pPr marL="171450" indent="-171450" algn="just">
+              <a:buFont typeface="Arial" panose="020B0604020202020204" pitchFamily="34" charset="0"/>
+              <a:buChar char="•"/>
+            </a:pPr>
+            <a:r>
+              <a:rPr lang="es-ES" sz="1200" dirty="0">
+                <a:latin typeface="Arial" panose="020B0604020202020204" pitchFamily="34" charset="0"/>
+                <a:cs typeface="Arial" panose="020B0604020202020204" pitchFamily="34" charset="0"/>
+              </a:rPr>
+              <a:t>Para el </a:t>
+            </a:r>
+            <a:r>
+              <a:rPr lang="es-ES" sz="1200" dirty="0" err="1">
+                <a:latin typeface="Arial" panose="020B0604020202020204" pitchFamily="34" charset="0"/>
+                <a:cs typeface="Arial" panose="020B0604020202020204" pitchFamily="34" charset="0"/>
+              </a:rPr>
+              <a:t>layout</a:t>
+            </a:r>
+            <a:r>
+              <a:rPr lang="es-ES" sz="1200" dirty="0">
+                <a:latin typeface="Arial" panose="020B0604020202020204" pitchFamily="34" charset="0"/>
+                <a:cs typeface="Arial" panose="020B0604020202020204" pitchFamily="34" charset="0"/>
+              </a:rPr>
+              <a:t> hemos usado el radio equivalente calculado a partir de esa longitud, R = </a:t>
+            </a:r>
+            <a:r>
+              <a:rPr lang="es-ES" sz="1200" dirty="0" err="1">
+                <a:latin typeface="Arial" panose="020B0604020202020204" pitchFamily="34" charset="0"/>
+                <a:cs typeface="Arial" panose="020B0604020202020204" pitchFamily="34" charset="0"/>
+              </a:rPr>
+              <a:t>L_ring</a:t>
+            </a:r>
+            <a:r>
+              <a:rPr lang="es-ES" sz="1200" dirty="0">
+                <a:latin typeface="Arial" panose="020B0604020202020204" pitchFamily="34" charset="0"/>
+                <a:cs typeface="Arial" panose="020B0604020202020204" pitchFamily="34" charset="0"/>
+              </a:rPr>
+              <a:t>/(2π) = 12.75 µm. </a:t>
+            </a:r>
+          </a:p>
+          <a:p>
+            <a:pPr marL="171450" indent="-171450" algn="just">
+              <a:buFont typeface="Arial" panose="020B0604020202020204" pitchFamily="34" charset="0"/>
+              <a:buChar char="•"/>
+            </a:pPr>
+            <a:r>
+              <a:rPr lang="es-ES" sz="1200" dirty="0">
+                <a:latin typeface="Arial" panose="020B0604020202020204" pitchFamily="34" charset="0"/>
+                <a:cs typeface="Arial" panose="020B0604020202020204" pitchFamily="34" charset="0"/>
+              </a:rPr>
+              <a:t>Además, hemos añadido una sección recta de acoplo de 10 µm y un gap de 0.25 µm para que la zona de acoplo quede clara en el </a:t>
+            </a:r>
+            <a:r>
+              <a:rPr lang="es-ES" sz="1200" dirty="0" err="1">
+                <a:latin typeface="Arial" panose="020B0604020202020204" pitchFamily="34" charset="0"/>
+                <a:cs typeface="Arial" panose="020B0604020202020204" pitchFamily="34" charset="0"/>
+              </a:rPr>
+              <a:t>layout</a:t>
+            </a:r>
+            <a:r>
+              <a:rPr lang="es-ES" sz="1200" dirty="0">
+                <a:latin typeface="Arial" panose="020B0604020202020204" pitchFamily="34" charset="0"/>
+                <a:cs typeface="Arial" panose="020B0604020202020204" pitchFamily="34" charset="0"/>
+              </a:rPr>
+              <a:t>. </a:t>
+            </a:r>
+          </a:p>
+          <a:p>
+            <a:pPr marL="171450" indent="-171450" algn="just">
+              <a:buFont typeface="Arial" panose="020B0604020202020204" pitchFamily="34" charset="0"/>
+              <a:buChar char="•"/>
+            </a:pPr>
+            <a:r>
+              <a:rPr lang="es-ES" sz="1200" dirty="0">
+                <a:latin typeface="Arial" panose="020B0604020202020204" pitchFamily="34" charset="0"/>
+                <a:cs typeface="Arial" panose="020B0604020202020204" pitchFamily="34" charset="0"/>
+              </a:rPr>
+              <a:t>El componente está definido sobre la capa WG 1/0 con puertos ópticos de anchura 0.5 µm.</a:t>
+            </a:r>
+            <a:endParaRPr lang="en-US" sz="1200" dirty="0">
+              <a:latin typeface="Arial" panose="020B0604020202020204" pitchFamily="34" charset="0"/>
+              <a:cs typeface="Arial" panose="020B0604020202020204" pitchFamily="34" charset="0"/>
+            </a:endParaRPr>
+          </a:p>
+        </p:txBody>
+      </p:sp>
+      <p:sp>
+        <p:nvSpPr>
+          <p:cNvPr id="6" name="Rectángulo 5">
+            <a:extLst>
+              <a:ext uri="{FF2B5EF4-FFF2-40B4-BE49-F238E27FC236}">
+                <a16:creationId xmlns:a16="http://schemas.microsoft.com/office/drawing/2014/main" id="{17787E4D-39ED-F386-EFA8-0D32EB6389EB}"/>
+              </a:ext>
+            </a:extLst>
+          </p:cNvPr>
+          <p:cNvSpPr/>
+          <p:nvPr/>
+        </p:nvSpPr>
+        <p:spPr>
+          <a:xfrm>
+            <a:off x="480239" y="940653"/>
+            <a:ext cx="5332571" cy="3306028"/>
+          </a:xfrm>
+          <a:prstGeom prst="rect">
+            <a:avLst/>
+          </a:prstGeom>
+          <a:noFill/>
+          <a:ln w="28575">
+            <a:solidFill>
+              <a:srgbClr val="E0700D"/>
+            </a:solidFill>
+          </a:ln>
+        </p:spPr>
+        <p:style>
+          <a:lnRef idx="2">
+            <a:schemeClr val="accent1">
+              <a:shade val="15000"/>
+            </a:schemeClr>
+          </a:lnRef>
+          <a:fillRef idx="1">
+            <a:schemeClr val="accent1"/>
+          </a:fillRef>
+          <a:effectRef idx="0">
+            <a:schemeClr val="accent1"/>
+          </a:effectRef>
+          <a:fontRef idx="minor">
+            <a:schemeClr val="lt1"/>
+          </a:fontRef>
+        </p:style>
+        <p:txBody>
+          <a:bodyPr rtlCol="0" anchor="ctr"/>
+          <a:lstStyle/>
+          <a:p>
+            <a:pPr algn="ctr"/>
+            <a:endParaRPr lang="en-US"/>
+          </a:p>
+        </p:txBody>
+      </p:sp>
+      <p:sp>
+        <p:nvSpPr>
+          <p:cNvPr id="7" name="CuadroTexto 6">
+            <a:extLst>
+              <a:ext uri="{FF2B5EF4-FFF2-40B4-BE49-F238E27FC236}">
+                <a16:creationId xmlns:a16="http://schemas.microsoft.com/office/drawing/2014/main" id="{D7F57299-61E6-B7CF-A70E-F7574136DE56}"/>
+              </a:ext>
+            </a:extLst>
+          </p:cNvPr>
+          <p:cNvSpPr txBox="1"/>
+          <p:nvPr/>
+        </p:nvSpPr>
+        <p:spPr>
+          <a:xfrm>
+            <a:off x="2375901" y="2494306"/>
+            <a:ext cx="1799660" cy="646331"/>
+          </a:xfrm>
+          <a:prstGeom prst="rect">
+            <a:avLst/>
+          </a:prstGeom>
+          <a:noFill/>
+        </p:spPr>
+        <p:txBody>
+          <a:bodyPr wrap="none" rtlCol="0">
+            <a:spAutoFit/>
+          </a:bodyPr>
+          <a:lstStyle/>
+          <a:p>
+            <a:pPr algn="ctr"/>
+            <a:r>
+              <a:rPr lang="en-US" dirty="0"/>
+              <a:t>Component code</a:t>
+            </a:r>
+          </a:p>
+          <a:p>
+            <a:pPr algn="ctr"/>
+            <a:endParaRPr lang="en-US" dirty="0"/>
+          </a:p>
+        </p:txBody>
+      </p:sp>
+      <p:sp>
+        <p:nvSpPr>
+          <p:cNvPr id="8" name="Rectángulo 7">
+            <a:extLst>
+              <a:ext uri="{FF2B5EF4-FFF2-40B4-BE49-F238E27FC236}">
+                <a16:creationId xmlns:a16="http://schemas.microsoft.com/office/drawing/2014/main" id="{8C266D32-9194-CA01-87FD-F266A6E0F09C}"/>
+              </a:ext>
+            </a:extLst>
+          </p:cNvPr>
+          <p:cNvSpPr/>
+          <p:nvPr/>
+        </p:nvSpPr>
+        <p:spPr>
+          <a:xfrm>
+            <a:off x="6347639" y="942686"/>
+            <a:ext cx="5332571" cy="3306028"/>
+          </a:xfrm>
+          <a:prstGeom prst="rect">
+            <a:avLst/>
+          </a:prstGeom>
+          <a:noFill/>
+          <a:ln w="28575">
+            <a:solidFill>
+              <a:srgbClr val="E0700D"/>
+            </a:solidFill>
+          </a:ln>
+        </p:spPr>
+        <p:style>
+          <a:lnRef idx="2">
+            <a:schemeClr val="accent1">
+              <a:shade val="15000"/>
+            </a:schemeClr>
+          </a:lnRef>
+          <a:fillRef idx="1">
+            <a:schemeClr val="accent1"/>
+          </a:fillRef>
+          <a:effectRef idx="0">
+            <a:schemeClr val="accent1"/>
+          </a:effectRef>
+          <a:fontRef idx="minor">
+            <a:schemeClr val="lt1"/>
+          </a:fontRef>
+        </p:style>
+        <p:txBody>
+          <a:bodyPr rtlCol="0" anchor="ctr"/>
+          <a:lstStyle/>
+          <a:p>
+            <a:pPr algn="ctr"/>
+            <a:endParaRPr lang="en-US"/>
+          </a:p>
+        </p:txBody>
+      </p:sp>
+      <p:sp>
+        <p:nvSpPr>
+          <p:cNvPr id="9" name="CuadroTexto 8">
+            <a:extLst>
+              <a:ext uri="{FF2B5EF4-FFF2-40B4-BE49-F238E27FC236}">
+                <a16:creationId xmlns:a16="http://schemas.microsoft.com/office/drawing/2014/main" id="{594E525B-3C36-DD3F-000E-CBE03B49BA99}"/>
+              </a:ext>
+            </a:extLst>
+          </p:cNvPr>
+          <p:cNvSpPr txBox="1"/>
+          <p:nvPr/>
+        </p:nvSpPr>
+        <p:spPr>
+          <a:xfrm>
+            <a:off x="7956912" y="2496339"/>
+            <a:ext cx="2372445" cy="369332"/>
+          </a:xfrm>
+          <a:prstGeom prst="rect">
+            <a:avLst/>
+          </a:prstGeom>
+          <a:noFill/>
+        </p:spPr>
+        <p:txBody>
+          <a:bodyPr wrap="none" rtlCol="0">
+            <a:spAutoFit/>
+          </a:bodyPr>
+          <a:lstStyle/>
+          <a:p>
+            <a:pPr algn="ctr"/>
+            <a:r>
+              <a:rPr lang="es-ES" dirty="0" err="1"/>
+              <a:t>Component</a:t>
+            </a:r>
+            <a:r>
+              <a:rPr lang="es-ES" dirty="0"/>
+              <a:t> </a:t>
+            </a:r>
+            <a:r>
+              <a:rPr lang="es-ES" dirty="0" err="1"/>
+              <a:t>screenshot</a:t>
+            </a:r>
+            <a:endParaRPr lang="en-US" dirty="0"/>
+          </a:p>
+        </p:txBody>
+      </p:sp>
+      <p:pic>
+        <p:nvPicPr>
+          <p:cNvPr id="13" name="Imagen 12">
+            <a:extLst>
+              <a:ext uri="{FF2B5EF4-FFF2-40B4-BE49-F238E27FC236}">
+                <a16:creationId xmlns:a16="http://schemas.microsoft.com/office/drawing/2014/main" id="{B9CE5E80-1954-7AAC-B2C6-B115E6E63394}"/>
+              </a:ext>
+            </a:extLst>
+          </p:cNvPr>
+          <p:cNvPicPr>
+            <a:picLocks noChangeAspect="1"/>
+          </p:cNvPicPr>
+          <p:nvPr/>
+        </p:nvPicPr>
+        <p:blipFill>
+          <a:blip r:embed="rId4"/>
+          <a:stretch>
+            <a:fillRect/>
+          </a:stretch>
+        </p:blipFill>
+        <p:spPr>
+          <a:xfrm>
+            <a:off x="1084742" y="979660"/>
+            <a:ext cx="3912044" cy="3228013"/>
+          </a:xfrm>
+          <a:prstGeom prst="rect">
+            <a:avLst/>
+          </a:prstGeom>
+        </p:spPr>
+      </p:pic>
+      <p:pic>
+        <p:nvPicPr>
+          <p:cNvPr id="15" name="Imagen 14">
+            <a:extLst>
+              <a:ext uri="{FF2B5EF4-FFF2-40B4-BE49-F238E27FC236}">
+                <a16:creationId xmlns:a16="http://schemas.microsoft.com/office/drawing/2014/main" id="{9E51A072-9956-57C7-7FD4-1DB67F3FECC2}"/>
+              </a:ext>
+            </a:extLst>
+          </p:cNvPr>
+          <p:cNvPicPr>
+            <a:picLocks noChangeAspect="1"/>
+          </p:cNvPicPr>
+          <p:nvPr/>
+        </p:nvPicPr>
+        <p:blipFill>
+          <a:blip r:embed="rId5"/>
+          <a:stretch>
+            <a:fillRect/>
+          </a:stretch>
+        </p:blipFill>
+        <p:spPr>
+          <a:xfrm>
+            <a:off x="7057902" y="1117061"/>
+            <a:ext cx="3912044" cy="2953210"/>
+          </a:xfrm>
+          <a:prstGeom prst="rect">
+            <a:avLst/>
+          </a:prstGeom>
+        </p:spPr>
+      </p:pic>
+    </p:spTree>
+    <p:extLst>
+      <p:ext uri="{BB962C8B-B14F-4D97-AF65-F5344CB8AC3E}">
+        <p14:creationId xmlns:p14="http://schemas.microsoft.com/office/powerpoint/2010/main" val="846989775"/>
+      </p:ext>
+    </p:extLst>
+  </p:cSld>
+  <p:clrMapOvr>
+    <a:masterClrMapping/>
+  </p:clrMapOvr>
+</p:sld>
+</file>
+
+<file path=ppt/slides/slide8.xml><?xml version="1.0" encoding="utf-8"?>
 <p:sld xmlns:a="http://schemas.openxmlformats.org/drawingml/2006/main" xmlns:r="http://schemas.openxmlformats.org/officeDocument/2006/relationships" xmlns:p="http://schemas.openxmlformats.org/presentationml/2006/main">
   <p:cSld>
     <p:spTree>
@@ -5163,7 +10596,7 @@
           <a:p>
             <a:fld id="{B6F15528-21DE-4FAA-801E-634DDDAF4B2B}" type="slidenum">
               <a:rPr lang="es-ES" smtClean="0"/>
-              <a:t>5</a:t>
+              <a:t>8</a:t>
             </a:fld>
             <a:endParaRPr lang="es-ES"/>
           </a:p>
@@ -5218,7 +10651,7 @@
         <p:spPr>
           <a:xfrm>
             <a:off x="609441" y="4860334"/>
-            <a:ext cx="11199971" cy="276999"/>
+            <a:ext cx="11199971" cy="1200329"/>
           </a:xfrm>
           <a:prstGeom prst="rect">
             <a:avLst/>
@@ -5240,14 +10673,75 @@
           </a:bodyPr>
           <a:lstStyle/>
           <a:p>
-            <a:pPr algn="just"/>
-            <a:r>
-              <a:rPr lang="en-US" sz="1200" dirty="0">
+            <a:pPr marL="171450" indent="-171450" algn="just">
+              <a:buFont typeface="Arial" panose="020B0604020202020204" pitchFamily="34" charset="0"/>
+              <a:buChar char="•"/>
+            </a:pPr>
+            <a:r>
+              <a:rPr lang="es-ES" sz="1200" dirty="0">
                 <a:latin typeface="Arial" panose="020B0604020202020204" pitchFamily="34" charset="0"/>
                 <a:cs typeface="Arial" panose="020B0604020202020204" pitchFamily="34" charset="0"/>
               </a:rPr>
-              <a:t>Describe component: </a:t>
-            </a:r>
+              <a:t>En esta parte vemos un ejemplo de die o chip como una celda jerárquica. La función define el contorno del chip en la capa FLOORPLAN y añade un borde interior, de forma que podemos visualizar el área útil donde se colocarán los componentes fotónicos.</a:t>
+            </a:r>
+          </a:p>
+          <a:p>
+            <a:pPr marL="171450" indent="-171450" algn="just">
+              <a:buFont typeface="Arial" panose="020B0604020202020204" pitchFamily="34" charset="0"/>
+              <a:buChar char="•"/>
+            </a:pPr>
+            <a:r>
+              <a:rPr lang="es-ES" sz="1200" dirty="0">
+                <a:latin typeface="Arial" panose="020B0604020202020204" pitchFamily="34" charset="0"/>
+                <a:cs typeface="Arial" panose="020B0604020202020204" pitchFamily="34" charset="0"/>
+              </a:rPr>
+              <a:t>La importancia de convertirlo en una </a:t>
+            </a:r>
+            <a:r>
+              <a:rPr lang="es-ES" sz="1200" dirty="0" err="1">
+                <a:latin typeface="Arial" panose="020B0604020202020204" pitchFamily="34" charset="0"/>
+                <a:cs typeface="Arial" panose="020B0604020202020204" pitchFamily="34" charset="0"/>
+              </a:rPr>
+              <a:t>cell</a:t>
+            </a:r>
+            <a:r>
+              <a:rPr lang="es-ES" sz="1200" dirty="0">
+                <a:latin typeface="Arial" panose="020B0604020202020204" pitchFamily="34" charset="0"/>
+                <a:cs typeface="Arial" panose="020B0604020202020204" pitchFamily="34" charset="0"/>
+              </a:rPr>
+              <a:t> radica en que el mismo bloque se puede reutilizar varias veces dentro de un diseño mayor. En la imagen se ven varias instancias del die, con distintos tamaños y posiciones, sin tener que redibujar cada una desde cero. </a:t>
+            </a:r>
+          </a:p>
+          <a:p>
+            <a:pPr marL="171450" indent="-171450" algn="just">
+              <a:buFont typeface="Arial" panose="020B0604020202020204" pitchFamily="34" charset="0"/>
+              <a:buChar char="•"/>
+            </a:pPr>
+            <a:r>
+              <a:rPr lang="es-ES" sz="1200" dirty="0">
+                <a:latin typeface="Arial" panose="020B0604020202020204" pitchFamily="34" charset="0"/>
+                <a:cs typeface="Arial" panose="020B0604020202020204" pitchFamily="34" charset="0"/>
+              </a:rPr>
+              <a:t>Esto es especialmente útil ya que en un </a:t>
+            </a:r>
+            <a:r>
+              <a:rPr lang="es-ES" sz="1200" dirty="0" err="1">
+                <a:latin typeface="Arial" panose="020B0604020202020204" pitchFamily="34" charset="0"/>
+                <a:cs typeface="Arial" panose="020B0604020202020204" pitchFamily="34" charset="0"/>
+              </a:rPr>
+              <a:t>layout</a:t>
+            </a:r>
+            <a:r>
+              <a:rPr lang="es-ES" sz="1200" dirty="0">
+                <a:latin typeface="Arial" panose="020B0604020202020204" pitchFamily="34" charset="0"/>
+                <a:cs typeface="Arial" panose="020B0604020202020204" pitchFamily="34" charset="0"/>
+              </a:rPr>
+              <a:t> real se trabaja de forma jerárquica, como hemos visto en la teoría. Primero se definen bloques básicos y después se colocan y conectan dentro del chip completo.</a:t>
+            </a:r>
+            <a:endParaRPr lang="en-US" sz="1200" dirty="0">
+              <a:latin typeface="Arial" panose="020B0604020202020204" pitchFamily="34" charset="0"/>
+              <a:cs typeface="Arial" panose="020B0604020202020204" pitchFamily="34" charset="0"/>
+            </a:endParaRPr>
           </a:p>
         </p:txBody>
       </p:sp>
@@ -5454,6 +10948,66 @@
           </a:p>
         </p:txBody>
       </p:sp>
+      <p:pic>
+        <p:nvPicPr>
+          <p:cNvPr id="5" name="Imagen 4">
+            <a:extLst>
+              <a:ext uri="{FF2B5EF4-FFF2-40B4-BE49-F238E27FC236}">
+                <a16:creationId xmlns:a16="http://schemas.microsoft.com/office/drawing/2014/main" id="{D611DF20-03F2-D3C2-C065-E7998D3484EC}"/>
+              </a:ext>
+            </a:extLst>
+          </p:cNvPr>
+          <p:cNvPicPr>
+            <a:picLocks noChangeAspect="1"/>
+          </p:cNvPicPr>
+          <p:nvPr/>
+        </p:nvPicPr>
+        <p:blipFill>
+          <a:blip r:embed="rId4"/>
+          <a:stretch>
+            <a:fillRect/>
+          </a:stretch>
+        </p:blipFill>
+        <p:spPr>
+          <a:xfrm>
+            <a:off x="7027418" y="1474235"/>
+            <a:ext cx="4231416" cy="3194304"/>
+          </a:xfrm>
+          <a:prstGeom prst="rect">
+            <a:avLst/>
+          </a:prstGeom>
+        </p:spPr>
+      </p:pic>
+      <p:pic>
+        <p:nvPicPr>
+          <p:cNvPr id="11" name="Imagen 10">
+            <a:extLst>
+              <a:ext uri="{FF2B5EF4-FFF2-40B4-BE49-F238E27FC236}">
+                <a16:creationId xmlns:a16="http://schemas.microsoft.com/office/drawing/2014/main" id="{91E53E29-862A-87EF-3234-B5797B34E10B}"/>
+              </a:ext>
+            </a:extLst>
+          </p:cNvPr>
+          <p:cNvPicPr>
+            <a:picLocks noChangeAspect="1"/>
+          </p:cNvPicPr>
+          <p:nvPr/>
+        </p:nvPicPr>
+        <p:blipFill>
+          <a:blip r:embed="rId5"/>
+          <a:stretch>
+            <a:fillRect/>
+          </a:stretch>
+        </p:blipFill>
+        <p:spPr>
+          <a:xfrm>
+            <a:off x="705826" y="1756820"/>
+            <a:ext cx="5220437" cy="2610219"/>
+          </a:xfrm>
+          <a:prstGeom prst="rect">
+            <a:avLst/>
+          </a:prstGeom>
+        </p:spPr>
+      </p:pic>
     </p:spTree>
     <p:extLst>
       <p:ext uri="{BB962C8B-B14F-4D97-AF65-F5344CB8AC3E}">
@@ -5467,7 +11021,7 @@
 </p:sld>
 </file>
 
-<file path=ppt/slides/slide6.xml><?xml version="1.0" encoding="utf-8"?>
+<file path=ppt/slides/slide9.xml><?xml version="1.0" encoding="utf-8"?>
 <p:sld xmlns:a="http://schemas.openxmlformats.org/drawingml/2006/main" xmlns:r="http://schemas.openxmlformats.org/officeDocument/2006/relationships" xmlns:p="http://schemas.openxmlformats.org/presentationml/2006/main">
   <p:cSld>
     <p:spTree>
@@ -5626,7 +11180,7 @@
           <a:p>
             <a:fld id="{B6F15528-21DE-4FAA-801E-634DDDAF4B2B}" type="slidenum">
               <a:rPr lang="es-ES" smtClean="0"/>
-              <a:t>6</a:t>
+              <a:t>9</a:t>
             </a:fld>
             <a:endParaRPr lang="es-ES"/>
           </a:p>
@@ -5863,1175 +11417,107 @@
           </a:p>
         </p:txBody>
       </p:sp>
+      <p:pic>
+        <p:nvPicPr>
+          <p:cNvPr id="4" name="Imagen 3">
+            <a:extLst>
+              <a:ext uri="{FF2B5EF4-FFF2-40B4-BE49-F238E27FC236}">
+                <a16:creationId xmlns:a16="http://schemas.microsoft.com/office/drawing/2014/main" id="{263FEAF8-E86E-C0D9-CF90-DD3A4266CA07}"/>
+              </a:ext>
+            </a:extLst>
+          </p:cNvPr>
+          <p:cNvPicPr>
+            <a:picLocks noChangeAspect="1"/>
+          </p:cNvPicPr>
+          <p:nvPr/>
+        </p:nvPicPr>
+        <p:blipFill>
+          <a:blip r:embed="rId4"/>
+          <a:stretch>
+            <a:fillRect/>
+          </a:stretch>
+        </p:blipFill>
+        <p:spPr>
+          <a:xfrm>
+            <a:off x="669985" y="1471613"/>
+            <a:ext cx="5045015" cy="4476334"/>
+          </a:xfrm>
+          <a:prstGeom prst="rect">
+            <a:avLst/>
+          </a:prstGeom>
+        </p:spPr>
+      </p:pic>
+      <p:pic>
+        <p:nvPicPr>
+          <p:cNvPr id="10" name="Imagen 9">
+            <a:extLst>
+              <a:ext uri="{FF2B5EF4-FFF2-40B4-BE49-F238E27FC236}">
+                <a16:creationId xmlns:a16="http://schemas.microsoft.com/office/drawing/2014/main" id="{8AC46F17-1267-6B68-83EE-DA1150571EBA}"/>
+              </a:ext>
+            </a:extLst>
+          </p:cNvPr>
+          <p:cNvPicPr>
+            <a:picLocks noChangeAspect="1"/>
+          </p:cNvPicPr>
+          <p:nvPr/>
+        </p:nvPicPr>
+        <p:blipFill>
+          <a:blip r:embed="rId5"/>
+          <a:stretch>
+            <a:fillRect/>
+          </a:stretch>
+        </p:blipFill>
+        <p:spPr>
+          <a:xfrm>
+            <a:off x="6629400" y="1542917"/>
+            <a:ext cx="5050810" cy="3812867"/>
+          </a:xfrm>
+          <a:prstGeom prst="rect">
+            <a:avLst/>
+          </a:prstGeom>
+        </p:spPr>
+      </p:pic>
+      <p:sp>
+        <p:nvSpPr>
+          <p:cNvPr id="11" name="CuadroTexto 10">
+            <a:extLst>
+              <a:ext uri="{FF2B5EF4-FFF2-40B4-BE49-F238E27FC236}">
+                <a16:creationId xmlns:a16="http://schemas.microsoft.com/office/drawing/2014/main" id="{7719B649-2F96-4D5E-56DF-50E7D4B8AC79}"/>
+              </a:ext>
+            </a:extLst>
+          </p:cNvPr>
+          <p:cNvSpPr txBox="1"/>
+          <p:nvPr/>
+        </p:nvSpPr>
+        <p:spPr>
+          <a:xfrm>
+            <a:off x="6629400" y="5420341"/>
+            <a:ext cx="4572000" cy="646331"/>
+          </a:xfrm>
+          <a:prstGeom prst="rect">
+            <a:avLst/>
+          </a:prstGeom>
+          <a:noFill/>
+        </p:spPr>
+        <p:txBody>
+          <a:bodyPr wrap="square" rtlCol="0">
+            <a:spAutoFit/>
+          </a:bodyPr>
+          <a:lstStyle/>
+          <a:p>
+            <a:r>
+              <a:rPr lang="es-ES" sz="1200" dirty="0"/>
+              <a:t>La primera instancia es el acoplador direccional visto anteriormente, y adicionalmente con las otras 2 demostramos que la misma celda se puede reutilizar cambiando parámetros.</a:t>
+            </a:r>
+          </a:p>
+        </p:txBody>
+      </p:sp>
     </p:spTree>
     <p:extLst>
       <p:ext uri="{BB962C8B-B14F-4D97-AF65-F5344CB8AC3E}">
         <p14:creationId xmlns:p14="http://schemas.microsoft.com/office/powerpoint/2010/main" val="1504002157"/>
       </p:ext>
     </p:extLst>
-  </p:cSld>
-  <p:clrMapOvr>
-    <a:masterClrMapping/>
-  </p:clrMapOvr>
-</p:sld>
-</file>
-
-<file path=ppt/slides/slide7.xml><?xml version="1.0" encoding="utf-8"?>
-<p:sld xmlns:a="http://schemas.openxmlformats.org/drawingml/2006/main" xmlns:r="http://schemas.openxmlformats.org/officeDocument/2006/relationships" xmlns:p="http://schemas.openxmlformats.org/presentationml/2006/main">
-  <p:cSld>
-    <p:spTree>
-      <p:nvGrpSpPr>
-        <p:cNvPr id="1" name="">
-          <a:extLst>
-            <a:ext uri="{FF2B5EF4-FFF2-40B4-BE49-F238E27FC236}">
-              <a16:creationId xmlns:a16="http://schemas.microsoft.com/office/drawing/2014/main" id="{64DC463A-FEB0-DAC2-C592-982AED782F72}"/>
-            </a:ext>
-          </a:extLst>
-        </p:cNvPr>
-        <p:cNvGrpSpPr/>
-        <p:nvPr/>
-      </p:nvGrpSpPr>
-      <p:grpSpPr>
-        <a:xfrm>
-          <a:off x="0" y="0"/>
-          <a:ext cx="0" cy="0"/>
-          <a:chOff x="0" y="0"/>
-          <a:chExt cx="0" cy="0"/>
-        </a:xfrm>
-      </p:grpSpPr>
-      <p:sp>
-        <p:nvSpPr>
-          <p:cNvPr id="16" name="object 16">
-            <a:extLst>
-              <a:ext uri="{FF2B5EF4-FFF2-40B4-BE49-F238E27FC236}">
-                <a16:creationId xmlns:a16="http://schemas.microsoft.com/office/drawing/2014/main" id="{6D9825A0-3864-7B82-F4C0-6912BF1AE353}"/>
-              </a:ext>
-            </a:extLst>
-          </p:cNvPr>
-          <p:cNvSpPr txBox="1">
-            <a:spLocks noGrp="1"/>
-          </p:cNvSpPr>
-          <p:nvPr>
-            <p:ph type="title"/>
-          </p:nvPr>
-        </p:nvSpPr>
-        <p:spPr>
-          <a:xfrm>
-            <a:off x="685800" y="408883"/>
-            <a:ext cx="10994410" cy="397545"/>
-          </a:xfrm>
-          <a:prstGeom prst="rect">
-            <a:avLst/>
-          </a:prstGeom>
-        </p:spPr>
-        <p:txBody>
-          <a:bodyPr vert="horz" wrap="square" lIns="0" tIns="12700" rIns="0" bIns="0" rtlCol="0">
-            <a:spAutoFit/>
-          </a:bodyPr>
-          <a:lstStyle/>
-          <a:p>
-            <a:pPr marL="12700" algn="l">
-              <a:lnSpc>
-                <a:spcPct val="100000"/>
-              </a:lnSpc>
-              <a:spcBef>
-                <a:spcPts val="100"/>
-              </a:spcBef>
-            </a:pPr>
-            <a:r>
-              <a:rPr lang="en-US" sz="2500" dirty="0"/>
-              <a:t>Learning outcome #3 – Notebook section 3. Complete layout</a:t>
-            </a:r>
-            <a:endParaRPr sz="2500" b="0" i="1" dirty="0">
-              <a:latin typeface="+mj-lt"/>
-              <a:cs typeface="Lucida Sans"/>
-            </a:endParaRPr>
-          </a:p>
-        </p:txBody>
-      </p:sp>
-      <p:pic>
-        <p:nvPicPr>
-          <p:cNvPr id="83" name="Gráfico 82">
-            <a:extLst>
-              <a:ext uri="{FF2B5EF4-FFF2-40B4-BE49-F238E27FC236}">
-                <a16:creationId xmlns:a16="http://schemas.microsoft.com/office/drawing/2014/main" id="{0DEB6AD1-A7A1-CBBC-33E2-C1A03F2E3EC4}"/>
-              </a:ext>
-            </a:extLst>
-          </p:cNvPr>
-          <p:cNvPicPr>
-            <a:picLocks noChangeAspect="1"/>
-          </p:cNvPicPr>
-          <p:nvPr/>
-        </p:nvPicPr>
-        <p:blipFill>
-          <a:blip>
-            <a:extLst>
-              <a:ext uri="{96DAC541-7B7A-43D3-8B79-37D633B846F1}">
-                <asvg:svgBlip xmlns:asvg="http://schemas.microsoft.com/office/drawing/2016/SVG/main" r:embed="rId3"/>
-              </a:ext>
-            </a:extLst>
-          </a:blip>
-          <a:stretch>
-            <a:fillRect/>
-          </a:stretch>
-        </p:blipFill>
-        <p:spPr>
-          <a:xfrm>
-            <a:off x="5045006" y="6356057"/>
-            <a:ext cx="6409575" cy="363174"/>
-          </a:xfrm>
-          <a:prstGeom prst="rect">
-            <a:avLst/>
-          </a:prstGeom>
-        </p:spPr>
-      </p:pic>
-      <p:sp>
-        <p:nvSpPr>
-          <p:cNvPr id="84" name="Marcador de número de diapositiva 83">
-            <a:extLst>
-              <a:ext uri="{FF2B5EF4-FFF2-40B4-BE49-F238E27FC236}">
-                <a16:creationId xmlns:a16="http://schemas.microsoft.com/office/drawing/2014/main" id="{00F7002D-478B-4959-3169-5E518898EBC4}"/>
-              </a:ext>
-            </a:extLst>
-          </p:cNvPr>
-          <p:cNvSpPr>
-            <a:spLocks noGrp="1"/>
-          </p:cNvSpPr>
-          <p:nvPr>
-            <p:ph type="sldNum" sz="quarter" idx="7"/>
-          </p:nvPr>
-        </p:nvSpPr>
-        <p:spPr/>
-        <p:txBody>
-          <a:bodyPr/>
-          <a:lstStyle/>
-          <a:p>
-            <a:fld id="{B6F15528-21DE-4FAA-801E-634DDDAF4B2B}" type="slidenum">
-              <a:rPr lang="es-ES" smtClean="0"/>
-              <a:t>7</a:t>
-            </a:fld>
-            <a:endParaRPr lang="es-ES"/>
-          </a:p>
-        </p:txBody>
-      </p:sp>
-      <p:sp>
-        <p:nvSpPr>
-          <p:cNvPr id="3" name="Marcador de pie de página 2">
-            <a:extLst>
-              <a:ext uri="{FF2B5EF4-FFF2-40B4-BE49-F238E27FC236}">
-                <a16:creationId xmlns:a16="http://schemas.microsoft.com/office/drawing/2014/main" id="{C305F97E-3B7E-8203-F806-FFA5E41962D7}"/>
-              </a:ext>
-            </a:extLst>
-          </p:cNvPr>
-          <p:cNvSpPr>
-            <a:spLocks noGrp="1"/>
-          </p:cNvSpPr>
-          <p:nvPr>
-            <p:ph type="ftr" sz="quarter" idx="5"/>
-          </p:nvPr>
-        </p:nvSpPr>
-        <p:spPr/>
-        <p:txBody>
-          <a:bodyPr/>
-          <a:lstStyle/>
-          <a:p>
-            <a:pPr marL="12700">
-              <a:spcBef>
-                <a:spcPts val="15"/>
-              </a:spcBef>
-            </a:pPr>
-            <a:r>
-              <a:rPr lang="es-ES" spc="-5"/>
-              <a:t>LAB 4.0. LAYOUT</a:t>
-            </a:r>
-            <a:endParaRPr lang="es-ES" spc="-5" dirty="0"/>
-          </a:p>
-        </p:txBody>
-      </p:sp>
-      <p:sp>
-        <p:nvSpPr>
-          <p:cNvPr id="2" name="CuadroTexto 1">
-            <a:extLst>
-              <a:ext uri="{FF2B5EF4-FFF2-40B4-BE49-F238E27FC236}">
-                <a16:creationId xmlns:a16="http://schemas.microsoft.com/office/drawing/2014/main" id="{58187553-D412-F56C-DD26-11B2C97C2B31}"/>
-              </a:ext>
-            </a:extLst>
-          </p:cNvPr>
-          <p:cNvSpPr txBox="1"/>
-          <p:nvPr/>
-        </p:nvSpPr>
-        <p:spPr>
-          <a:xfrm>
-            <a:off x="685800" y="990600"/>
-            <a:ext cx="5410200" cy="5181600"/>
-          </a:xfrm>
-          <a:prstGeom prst="rect">
-            <a:avLst/>
-          </a:prstGeom>
-          <a:solidFill>
-            <a:schemeClr val="bg1">
-              <a:lumMod val="95000"/>
-            </a:schemeClr>
-          </a:solidFill>
-          <a:ln w="28575">
-            <a:solidFill>
-              <a:srgbClr val="E0700D"/>
-            </a:solidFill>
-          </a:ln>
-        </p:spPr>
-        <p:txBody>
-          <a:bodyPr wrap="square" rtlCol="0">
-            <a:noAutofit/>
-          </a:bodyPr>
-          <a:lstStyle/>
-          <a:p>
-            <a:pPr algn="just"/>
-            <a:r>
-              <a:rPr lang="en-US" sz="1200" dirty="0">
-                <a:latin typeface="Arial" panose="020B0604020202020204" pitchFamily="34" charset="0"/>
-                <a:cs typeface="Arial" panose="020B0604020202020204" pitchFamily="34" charset="0"/>
-              </a:rPr>
-              <a:t>Read and describe 4 code blocks in section 3</a:t>
-            </a:r>
-          </a:p>
-          <a:p>
-            <a:pPr algn="just"/>
-            <a:endParaRPr lang="en-US" sz="1200" dirty="0">
-              <a:latin typeface="Arial" panose="020B0604020202020204" pitchFamily="34" charset="0"/>
-              <a:cs typeface="Arial" panose="020B0604020202020204" pitchFamily="34" charset="0"/>
-            </a:endParaRPr>
-          </a:p>
-          <a:p>
-            <a:pPr algn="just"/>
-            <a:r>
-              <a:rPr lang="en-US" sz="1200" dirty="0">
-                <a:latin typeface="Arial" panose="020B0604020202020204" pitchFamily="34" charset="0"/>
-                <a:cs typeface="Arial" panose="020B0604020202020204" pitchFamily="34" charset="0"/>
-              </a:rPr>
-              <a:t>Python code block 1: </a:t>
-            </a:r>
-          </a:p>
-          <a:p>
-            <a:pPr algn="just"/>
-            <a:endParaRPr lang="en-US" sz="1200" dirty="0">
-              <a:latin typeface="Arial" panose="020B0604020202020204" pitchFamily="34" charset="0"/>
-              <a:cs typeface="Arial" panose="020B0604020202020204" pitchFamily="34" charset="0"/>
-            </a:endParaRPr>
-          </a:p>
-          <a:p>
-            <a:pPr algn="just"/>
-            <a:r>
-              <a:rPr lang="en-US" sz="1200" dirty="0">
-                <a:latin typeface="Arial" panose="020B0604020202020204" pitchFamily="34" charset="0"/>
-                <a:cs typeface="Arial" panose="020B0604020202020204" pitchFamily="34" charset="0"/>
-              </a:rPr>
-              <a:t>Python code block 2: </a:t>
-            </a:r>
-          </a:p>
-          <a:p>
-            <a:pPr algn="just"/>
-            <a:endParaRPr lang="en-US" sz="1200" dirty="0">
-              <a:latin typeface="Arial" panose="020B0604020202020204" pitchFamily="34" charset="0"/>
-              <a:cs typeface="Arial" panose="020B0604020202020204" pitchFamily="34" charset="0"/>
-            </a:endParaRPr>
-          </a:p>
-          <a:p>
-            <a:pPr algn="just"/>
-            <a:r>
-              <a:rPr lang="en-US" sz="1200" dirty="0">
-                <a:latin typeface="Arial" panose="020B0604020202020204" pitchFamily="34" charset="0"/>
-                <a:cs typeface="Arial" panose="020B0604020202020204" pitchFamily="34" charset="0"/>
-              </a:rPr>
-              <a:t>Python code block 3: </a:t>
-            </a:r>
-          </a:p>
-          <a:p>
-            <a:pPr algn="just"/>
-            <a:endParaRPr lang="en-US" sz="1200" dirty="0">
-              <a:latin typeface="Arial" panose="020B0604020202020204" pitchFamily="34" charset="0"/>
-              <a:cs typeface="Arial" panose="020B0604020202020204" pitchFamily="34" charset="0"/>
-            </a:endParaRPr>
-          </a:p>
-          <a:p>
-            <a:pPr algn="just"/>
-            <a:r>
-              <a:rPr lang="en-US" sz="1200" dirty="0">
-                <a:latin typeface="Arial" panose="020B0604020202020204" pitchFamily="34" charset="0"/>
-                <a:cs typeface="Arial" panose="020B0604020202020204" pitchFamily="34" charset="0"/>
-              </a:rPr>
-              <a:t>Python code block 4: </a:t>
-            </a:r>
-          </a:p>
-          <a:p>
-            <a:pPr algn="just"/>
-            <a:endParaRPr lang="en-US" sz="1200" dirty="0">
-              <a:latin typeface="Arial" panose="020B0604020202020204" pitchFamily="34" charset="0"/>
-              <a:cs typeface="Arial" panose="020B0604020202020204" pitchFamily="34" charset="0"/>
-            </a:endParaRPr>
-          </a:p>
-        </p:txBody>
-      </p:sp>
-      <p:sp>
-        <p:nvSpPr>
-          <p:cNvPr id="8" name="Rectángulo 7">
-            <a:extLst>
-              <a:ext uri="{FF2B5EF4-FFF2-40B4-BE49-F238E27FC236}">
-                <a16:creationId xmlns:a16="http://schemas.microsoft.com/office/drawing/2014/main" id="{F4B67F4D-126C-4796-4E73-E68F0F3CB6B3}"/>
-              </a:ext>
-            </a:extLst>
-          </p:cNvPr>
-          <p:cNvSpPr/>
-          <p:nvPr/>
-        </p:nvSpPr>
-        <p:spPr>
-          <a:xfrm>
-            <a:off x="6248400" y="990285"/>
-            <a:ext cx="5638799" cy="5181600"/>
-          </a:xfrm>
-          <a:prstGeom prst="rect">
-            <a:avLst/>
-          </a:prstGeom>
-          <a:noFill/>
-          <a:ln w="28575">
-            <a:solidFill>
-              <a:srgbClr val="E0700D"/>
-            </a:solidFill>
-          </a:ln>
-        </p:spPr>
-        <p:style>
-          <a:lnRef idx="2">
-            <a:schemeClr val="accent1">
-              <a:shade val="15000"/>
-            </a:schemeClr>
-          </a:lnRef>
-          <a:fillRef idx="1">
-            <a:schemeClr val="accent1"/>
-          </a:fillRef>
-          <a:effectRef idx="0">
-            <a:schemeClr val="accent1"/>
-          </a:effectRef>
-          <a:fontRef idx="minor">
-            <a:schemeClr val="lt1"/>
-          </a:fontRef>
-        </p:style>
-        <p:txBody>
-          <a:bodyPr rtlCol="0" anchor="ctr"/>
-          <a:lstStyle/>
-          <a:p>
-            <a:pPr algn="ctr"/>
-            <a:endParaRPr lang="en-US"/>
-          </a:p>
-        </p:txBody>
-      </p:sp>
-      <p:sp>
-        <p:nvSpPr>
-          <p:cNvPr id="9" name="CuadroTexto 8">
-            <a:extLst>
-              <a:ext uri="{FF2B5EF4-FFF2-40B4-BE49-F238E27FC236}">
-                <a16:creationId xmlns:a16="http://schemas.microsoft.com/office/drawing/2014/main" id="{24F5FE71-3005-DD28-5A06-1330678AD855}"/>
-              </a:ext>
-            </a:extLst>
-          </p:cNvPr>
-          <p:cNvSpPr txBox="1"/>
-          <p:nvPr/>
-        </p:nvSpPr>
-        <p:spPr>
-          <a:xfrm>
-            <a:off x="7663860" y="3105834"/>
-            <a:ext cx="2807885" cy="646331"/>
-          </a:xfrm>
-          <a:prstGeom prst="rect">
-            <a:avLst/>
-          </a:prstGeom>
-          <a:noFill/>
-        </p:spPr>
-        <p:txBody>
-          <a:bodyPr wrap="none" rtlCol="0">
-            <a:spAutoFit/>
-          </a:bodyPr>
-          <a:lstStyle/>
-          <a:p>
-            <a:pPr algn="ctr"/>
-            <a:r>
-              <a:rPr lang="es-ES" dirty="0"/>
-              <a:t>Complete </a:t>
-            </a:r>
-            <a:r>
-              <a:rPr lang="es-ES" dirty="0" err="1"/>
-              <a:t>layout</a:t>
-            </a:r>
-            <a:r>
-              <a:rPr lang="es-ES" dirty="0"/>
-              <a:t> </a:t>
-            </a:r>
-            <a:r>
-              <a:rPr lang="es-ES" dirty="0" err="1"/>
-              <a:t>screenshot</a:t>
-            </a:r>
-            <a:endParaRPr lang="es-ES" dirty="0"/>
-          </a:p>
-          <a:p>
-            <a:pPr algn="ctr"/>
-            <a:r>
-              <a:rPr lang="es-ES" dirty="0"/>
-              <a:t> </a:t>
-            </a:r>
-            <a:r>
-              <a:rPr lang="es-ES" dirty="0" err="1"/>
-              <a:t>screenshot</a:t>
-            </a:r>
-            <a:endParaRPr lang="en-US" dirty="0"/>
-          </a:p>
-        </p:txBody>
-      </p:sp>
-    </p:spTree>
-    <p:extLst>
-      <p:ext uri="{BB962C8B-B14F-4D97-AF65-F5344CB8AC3E}">
-        <p14:creationId xmlns:p14="http://schemas.microsoft.com/office/powerpoint/2010/main" val="3190811588"/>
-      </p:ext>
-    </p:extLst>
-  </p:cSld>
-  <p:clrMapOvr>
-    <a:masterClrMapping/>
-  </p:clrMapOvr>
-</p:sld>
-</file>
-
-<file path=ppt/slides/slide8.xml><?xml version="1.0" encoding="utf-8"?>
-<p:sld xmlns:a="http://schemas.openxmlformats.org/drawingml/2006/main" xmlns:r="http://schemas.openxmlformats.org/officeDocument/2006/relationships" xmlns:p="http://schemas.openxmlformats.org/presentationml/2006/main">
-  <p:cSld>
-    <p:spTree>
-      <p:nvGrpSpPr>
-        <p:cNvPr id="1" name="">
-          <a:extLst>
-            <a:ext uri="{FF2B5EF4-FFF2-40B4-BE49-F238E27FC236}">
-              <a16:creationId xmlns:a16="http://schemas.microsoft.com/office/drawing/2014/main" id="{AF9787F0-CB2C-2FE5-5614-A0F16A628E7A}"/>
-            </a:ext>
-          </a:extLst>
-        </p:cNvPr>
-        <p:cNvGrpSpPr/>
-        <p:nvPr/>
-      </p:nvGrpSpPr>
-      <p:grpSpPr>
-        <a:xfrm>
-          <a:off x="0" y="0"/>
-          <a:ext cx="0" cy="0"/>
-          <a:chOff x="0" y="0"/>
-          <a:chExt cx="0" cy="0"/>
-        </a:xfrm>
-      </p:grpSpPr>
-      <p:sp>
-        <p:nvSpPr>
-          <p:cNvPr id="16" name="object 16">
-            <a:extLst>
-              <a:ext uri="{FF2B5EF4-FFF2-40B4-BE49-F238E27FC236}">
-                <a16:creationId xmlns:a16="http://schemas.microsoft.com/office/drawing/2014/main" id="{102B708D-0704-5977-EC6F-88CF05CBBE8F}"/>
-              </a:ext>
-            </a:extLst>
-          </p:cNvPr>
-          <p:cNvSpPr txBox="1">
-            <a:spLocks noGrp="1"/>
-          </p:cNvSpPr>
-          <p:nvPr>
-            <p:ph type="title"/>
-          </p:nvPr>
-        </p:nvSpPr>
-        <p:spPr>
-          <a:xfrm>
-            <a:off x="685800" y="408883"/>
-            <a:ext cx="10994410" cy="397545"/>
-          </a:xfrm>
-          <a:prstGeom prst="rect">
-            <a:avLst/>
-          </a:prstGeom>
-        </p:spPr>
-        <p:txBody>
-          <a:bodyPr vert="horz" wrap="square" lIns="0" tIns="12700" rIns="0" bIns="0" rtlCol="0">
-            <a:spAutoFit/>
-          </a:bodyPr>
-          <a:lstStyle/>
-          <a:p>
-            <a:pPr marL="12700" algn="l">
-              <a:lnSpc>
-                <a:spcPct val="100000"/>
-              </a:lnSpc>
-              <a:spcBef>
-                <a:spcPts val="100"/>
-              </a:spcBef>
-            </a:pPr>
-            <a:r>
-              <a:rPr lang="en-US" sz="2500" dirty="0"/>
-              <a:t>Learning outcome #4 – Notebook section 4. Exercises – 1 slide per bullet point</a:t>
-            </a:r>
-            <a:endParaRPr sz="2500" b="0" i="1" dirty="0">
-              <a:latin typeface="+mj-lt"/>
-              <a:cs typeface="Lucida Sans"/>
-            </a:endParaRPr>
-          </a:p>
-        </p:txBody>
-      </p:sp>
-      <p:pic>
-        <p:nvPicPr>
-          <p:cNvPr id="83" name="Gráfico 82">
-            <a:extLst>
-              <a:ext uri="{FF2B5EF4-FFF2-40B4-BE49-F238E27FC236}">
-                <a16:creationId xmlns:a16="http://schemas.microsoft.com/office/drawing/2014/main" id="{25386122-0096-23D3-AB3A-550FBF0A3140}"/>
-              </a:ext>
-            </a:extLst>
-          </p:cNvPr>
-          <p:cNvPicPr>
-            <a:picLocks noChangeAspect="1"/>
-          </p:cNvPicPr>
-          <p:nvPr/>
-        </p:nvPicPr>
-        <p:blipFill>
-          <a:blip>
-            <a:extLst>
-              <a:ext uri="{96DAC541-7B7A-43D3-8B79-37D633B846F1}">
-                <asvg:svgBlip xmlns:asvg="http://schemas.microsoft.com/office/drawing/2016/SVG/main" r:embed="rId3"/>
-              </a:ext>
-            </a:extLst>
-          </a:blip>
-          <a:stretch>
-            <a:fillRect/>
-          </a:stretch>
-        </p:blipFill>
-        <p:spPr>
-          <a:xfrm>
-            <a:off x="5045006" y="6356057"/>
-            <a:ext cx="6409575" cy="363174"/>
-          </a:xfrm>
-          <a:prstGeom prst="rect">
-            <a:avLst/>
-          </a:prstGeom>
-        </p:spPr>
-      </p:pic>
-      <p:sp>
-        <p:nvSpPr>
-          <p:cNvPr id="84" name="Marcador de número de diapositiva 83">
-            <a:extLst>
-              <a:ext uri="{FF2B5EF4-FFF2-40B4-BE49-F238E27FC236}">
-                <a16:creationId xmlns:a16="http://schemas.microsoft.com/office/drawing/2014/main" id="{713FD8D6-DEAF-544C-DE8A-FEED1CFD257F}"/>
-              </a:ext>
-            </a:extLst>
-          </p:cNvPr>
-          <p:cNvSpPr>
-            <a:spLocks noGrp="1"/>
-          </p:cNvSpPr>
-          <p:nvPr>
-            <p:ph type="sldNum" sz="quarter" idx="7"/>
-          </p:nvPr>
-        </p:nvSpPr>
-        <p:spPr/>
-        <p:txBody>
-          <a:bodyPr/>
-          <a:lstStyle/>
-          <a:p>
-            <a:fld id="{B6F15528-21DE-4FAA-801E-634DDDAF4B2B}" type="slidenum">
-              <a:rPr lang="es-ES" smtClean="0"/>
-              <a:t>8</a:t>
-            </a:fld>
-            <a:endParaRPr lang="es-ES"/>
-          </a:p>
-        </p:txBody>
-      </p:sp>
-      <p:sp>
-        <p:nvSpPr>
-          <p:cNvPr id="3" name="Marcador de pie de página 2">
-            <a:extLst>
-              <a:ext uri="{FF2B5EF4-FFF2-40B4-BE49-F238E27FC236}">
-                <a16:creationId xmlns:a16="http://schemas.microsoft.com/office/drawing/2014/main" id="{30B40145-CD7B-EB6E-E37D-B6E973BB915B}"/>
-              </a:ext>
-            </a:extLst>
-          </p:cNvPr>
-          <p:cNvSpPr>
-            <a:spLocks noGrp="1"/>
-          </p:cNvSpPr>
-          <p:nvPr>
-            <p:ph type="ftr" sz="quarter" idx="5"/>
-          </p:nvPr>
-        </p:nvSpPr>
-        <p:spPr/>
-        <p:txBody>
-          <a:bodyPr/>
-          <a:lstStyle/>
-          <a:p>
-            <a:pPr marL="12700">
-              <a:spcBef>
-                <a:spcPts val="15"/>
-              </a:spcBef>
-            </a:pPr>
-            <a:r>
-              <a:rPr lang="es-ES" spc="-5"/>
-              <a:t>LAB 4.0. LAYOUT</a:t>
-            </a:r>
-            <a:endParaRPr lang="es-ES" spc="-5" dirty="0"/>
-          </a:p>
-        </p:txBody>
-      </p:sp>
-      <p:sp>
-        <p:nvSpPr>
-          <p:cNvPr id="2" name="CuadroTexto 1">
-            <a:extLst>
-              <a:ext uri="{FF2B5EF4-FFF2-40B4-BE49-F238E27FC236}">
-                <a16:creationId xmlns:a16="http://schemas.microsoft.com/office/drawing/2014/main" id="{3C6D55FC-5031-5DAE-893E-BF1355747932}"/>
-              </a:ext>
-            </a:extLst>
-          </p:cNvPr>
-          <p:cNvSpPr txBox="1"/>
-          <p:nvPr/>
-        </p:nvSpPr>
-        <p:spPr>
-          <a:xfrm>
-            <a:off x="685800" y="990600"/>
-            <a:ext cx="5410200" cy="5181600"/>
-          </a:xfrm>
-          <a:prstGeom prst="rect">
-            <a:avLst/>
-          </a:prstGeom>
-          <a:solidFill>
-            <a:schemeClr val="bg1">
-              <a:lumMod val="95000"/>
-            </a:schemeClr>
-          </a:solidFill>
-          <a:ln w="28575">
-            <a:solidFill>
-              <a:srgbClr val="E0700D"/>
-            </a:solidFill>
-          </a:ln>
-        </p:spPr>
-        <p:txBody>
-          <a:bodyPr wrap="square" rtlCol="0">
-            <a:noAutofit/>
-          </a:bodyPr>
-          <a:lstStyle/>
-          <a:p>
-            <a:pPr algn="just"/>
-            <a:r>
-              <a:rPr lang="en-US" sz="1200" b="1" dirty="0">
-                <a:latin typeface="Arial" panose="020B0604020202020204" pitchFamily="34" charset="0"/>
-                <a:cs typeface="Arial" panose="020B0604020202020204" pitchFamily="34" charset="0"/>
-              </a:rPr>
-              <a:t>Code for …</a:t>
-            </a:r>
-          </a:p>
-          <a:p>
-            <a:pPr algn="just"/>
-            <a:endParaRPr lang="en-US" sz="1200" b="1" dirty="0">
-              <a:latin typeface="Arial" panose="020B0604020202020204" pitchFamily="34" charset="0"/>
-              <a:cs typeface="Arial" panose="020B0604020202020204" pitchFamily="34" charset="0"/>
-            </a:endParaRPr>
-          </a:p>
-          <a:p>
-            <a:pPr algn="just"/>
-            <a:r>
-              <a:rPr lang="en-US" sz="1200" b="1" dirty="0">
-                <a:latin typeface="Arial" panose="020B0604020202020204" pitchFamily="34" charset="0"/>
-                <a:cs typeface="Arial" panose="020B0604020202020204" pitchFamily="34" charset="0"/>
-              </a:rPr>
-              <a:t>Part a) Creating components</a:t>
-            </a:r>
-          </a:p>
-          <a:p>
-            <a:pPr algn="just"/>
-            <a:r>
-              <a:rPr lang="en-US" sz="1200" dirty="0">
-                <a:latin typeface="Arial" panose="020B0604020202020204" pitchFamily="34" charset="0"/>
-                <a:cs typeface="Arial" panose="020B0604020202020204" pitchFamily="34" charset="0"/>
-              </a:rPr>
-              <a:t>- Create a cell component for a unbalanced MZI, using 2x2 50:50 MMIs with arm length difference as parameter</a:t>
-            </a:r>
-          </a:p>
-          <a:p>
-            <a:pPr algn="just"/>
-            <a:r>
-              <a:rPr lang="en-US" sz="1200" dirty="0">
-                <a:latin typeface="Arial" panose="020B0604020202020204" pitchFamily="34" charset="0"/>
-                <a:cs typeface="Arial" panose="020B0604020202020204" pitchFamily="34" charset="0"/>
-              </a:rPr>
-              <a:t>- Create a cell component based on the previous, where the arms have thermal tuners on top of each one</a:t>
-            </a:r>
-          </a:p>
-          <a:p>
-            <a:pPr algn="just"/>
-            <a:r>
-              <a:rPr lang="en-US" sz="1200" dirty="0">
-                <a:latin typeface="Arial" panose="020B0604020202020204" pitchFamily="34" charset="0"/>
-                <a:cs typeface="Arial" panose="020B0604020202020204" pitchFamily="34" charset="0"/>
-              </a:rPr>
-              <a:t>- Create a cell component for an all-pass ring resonator, using 2x2 50:50 MMIs, with extra length parameter for different perimeters</a:t>
-            </a:r>
-          </a:p>
-          <a:p>
-            <a:pPr algn="just"/>
-            <a:r>
-              <a:rPr lang="en-US" sz="1200" dirty="0">
-                <a:latin typeface="Arial" panose="020B0604020202020204" pitchFamily="34" charset="0"/>
-                <a:cs typeface="Arial" panose="020B0604020202020204" pitchFamily="34" charset="0"/>
-              </a:rPr>
-              <a:t>- Create a cell component based on the previous, where the ring has a thermal tuner on top along all the perimeter</a:t>
-            </a:r>
-          </a:p>
-          <a:p>
-            <a:pPr algn="just"/>
-            <a:r>
-              <a:rPr lang="en-US" sz="1200" dirty="0">
-                <a:latin typeface="Arial" panose="020B0604020202020204" pitchFamily="34" charset="0"/>
-                <a:cs typeface="Arial" panose="020B0604020202020204" pitchFamily="34" charset="0"/>
-              </a:rPr>
-              <a:t>- Create a cell component based on existing </a:t>
-            </a:r>
-            <a:r>
-              <a:rPr lang="en-US" sz="1200" dirty="0" err="1">
-                <a:latin typeface="Arial" panose="020B0604020202020204" pitchFamily="34" charset="0"/>
-                <a:cs typeface="Arial" panose="020B0604020202020204" pitchFamily="34" charset="0"/>
-              </a:rPr>
-              <a:t>GDSfactory</a:t>
-            </a:r>
-            <a:r>
-              <a:rPr lang="en-US" sz="1200" dirty="0">
-                <a:latin typeface="Arial" panose="020B0604020202020204" pitchFamily="34" charset="0"/>
-                <a:cs typeface="Arial" panose="020B0604020202020204" pitchFamily="34" charset="0"/>
-              </a:rPr>
-              <a:t> spiral components, with length as parameter</a:t>
-            </a:r>
-          </a:p>
-          <a:p>
-            <a:pPr algn="just"/>
-            <a:endParaRPr lang="en-US" sz="1200" dirty="0">
-              <a:latin typeface="Arial" panose="020B0604020202020204" pitchFamily="34" charset="0"/>
-              <a:cs typeface="Arial" panose="020B0604020202020204" pitchFamily="34" charset="0"/>
-            </a:endParaRPr>
-          </a:p>
-          <a:p>
-            <a:pPr algn="just"/>
-            <a:r>
-              <a:rPr lang="en-US" sz="1200" b="1" dirty="0">
-                <a:latin typeface="Arial" panose="020B0604020202020204" pitchFamily="34" charset="0"/>
-                <a:cs typeface="Arial" panose="020B0604020202020204" pitchFamily="34" charset="0"/>
-              </a:rPr>
-              <a:t>Part b) Creating die</a:t>
-            </a:r>
-          </a:p>
-          <a:p>
-            <a:pPr algn="just"/>
-            <a:r>
-              <a:rPr lang="en-US" sz="1200" dirty="0">
-                <a:latin typeface="Arial" panose="020B0604020202020204" pitchFamily="34" charset="0"/>
-                <a:cs typeface="Arial" panose="020B0604020202020204" pitchFamily="34" charset="0"/>
-              </a:rPr>
-              <a:t>- Create a die  W = 5 mm x L = 10 mm </a:t>
-            </a:r>
-          </a:p>
-          <a:p>
-            <a:pPr algn="just"/>
-            <a:r>
-              <a:rPr lang="en-US" sz="1200" dirty="0">
-                <a:latin typeface="Arial" panose="020B0604020202020204" pitchFamily="34" charset="0"/>
-                <a:cs typeface="Arial" panose="020B0604020202020204" pitchFamily="34" charset="0"/>
-              </a:rPr>
-              <a:t>- Create an array of I/</a:t>
-            </a:r>
-            <a:r>
-              <a:rPr lang="en-US" sz="1200" dirty="0" err="1">
-                <a:latin typeface="Arial" panose="020B0604020202020204" pitchFamily="34" charset="0"/>
-                <a:cs typeface="Arial" panose="020B0604020202020204" pitchFamily="34" charset="0"/>
-              </a:rPr>
-              <a:t>Os</a:t>
-            </a:r>
-            <a:r>
-              <a:rPr lang="en-US" sz="1200" dirty="0">
-                <a:latin typeface="Arial" panose="020B0604020202020204" pitchFamily="34" charset="0"/>
-                <a:cs typeface="Arial" panose="020B0604020202020204" pitchFamily="34" charset="0"/>
-              </a:rPr>
-              <a:t> spaced at 250 µm (as much I/</a:t>
-            </a:r>
-            <a:r>
-              <a:rPr lang="en-US" sz="1200" dirty="0" err="1">
-                <a:latin typeface="Arial" panose="020B0604020202020204" pitchFamily="34" charset="0"/>
-                <a:cs typeface="Arial" panose="020B0604020202020204" pitchFamily="34" charset="0"/>
-              </a:rPr>
-              <a:t>Os</a:t>
-            </a:r>
-            <a:r>
-              <a:rPr lang="en-US" sz="1200" dirty="0">
-                <a:latin typeface="Arial" panose="020B0604020202020204" pitchFamily="34" charset="0"/>
-                <a:cs typeface="Arial" panose="020B0604020202020204" pitchFamily="34" charset="0"/>
-              </a:rPr>
-              <a:t> as the width allows)</a:t>
-            </a:r>
-          </a:p>
-          <a:p>
-            <a:pPr algn="just"/>
-            <a:r>
-              <a:rPr lang="en-US" sz="1200" dirty="0">
-                <a:latin typeface="Arial" panose="020B0604020202020204" pitchFamily="34" charset="0"/>
-                <a:cs typeface="Arial" panose="020B0604020202020204" pitchFamily="34" charset="0"/>
-              </a:rPr>
-              <a:t>- Create a cell component of this die, with I/</a:t>
-            </a:r>
-            <a:r>
-              <a:rPr lang="en-US" sz="1200" dirty="0" err="1">
-                <a:latin typeface="Arial" panose="020B0604020202020204" pitchFamily="34" charset="0"/>
-                <a:cs typeface="Arial" panose="020B0604020202020204" pitchFamily="34" charset="0"/>
-              </a:rPr>
-              <a:t>Os</a:t>
-            </a:r>
-            <a:r>
-              <a:rPr lang="en-US" sz="1200" dirty="0">
-                <a:latin typeface="Arial" panose="020B0604020202020204" pitchFamily="34" charset="0"/>
-                <a:cs typeface="Arial" panose="020B0604020202020204" pitchFamily="34" charset="0"/>
-              </a:rPr>
-              <a:t> accessible to connect</a:t>
-            </a:r>
-          </a:p>
-          <a:p>
-            <a:pPr algn="just"/>
-            <a:endParaRPr lang="en-US" sz="1200" dirty="0">
-              <a:latin typeface="Arial" panose="020B0604020202020204" pitchFamily="34" charset="0"/>
-              <a:cs typeface="Arial" panose="020B0604020202020204" pitchFamily="34" charset="0"/>
-            </a:endParaRPr>
-          </a:p>
-          <a:p>
-            <a:pPr algn="just"/>
-            <a:r>
-              <a:rPr lang="en-US" sz="1200" b="1" dirty="0">
-                <a:latin typeface="Arial" panose="020B0604020202020204" pitchFamily="34" charset="0"/>
-                <a:cs typeface="Arial" panose="020B0604020202020204" pitchFamily="34" charset="0"/>
-              </a:rPr>
-              <a:t>Part c) </a:t>
-            </a:r>
-            <a:r>
-              <a:rPr lang="en-US" sz="1200" b="1" dirty="0" err="1">
-                <a:latin typeface="Arial" panose="020B0604020202020204" pitchFamily="34" charset="0"/>
-                <a:cs typeface="Arial" panose="020B0604020202020204" pitchFamily="34" charset="0"/>
-              </a:rPr>
-              <a:t>Floorplaning</a:t>
-            </a:r>
-            <a:r>
-              <a:rPr lang="en-US" sz="1200" b="1" dirty="0">
-                <a:latin typeface="Arial" panose="020B0604020202020204" pitchFamily="34" charset="0"/>
-                <a:cs typeface="Arial" panose="020B0604020202020204" pitchFamily="34" charset="0"/>
-              </a:rPr>
-              <a:t> and die layout</a:t>
-            </a:r>
-          </a:p>
-          <a:p>
-            <a:pPr algn="just"/>
-            <a:r>
-              <a:rPr lang="en-US" sz="1200" dirty="0">
-                <a:latin typeface="Arial" panose="020B0604020202020204" pitchFamily="34" charset="0"/>
-                <a:cs typeface="Arial" panose="020B0604020202020204" pitchFamily="34" charset="0"/>
-              </a:rPr>
-              <a:t>- Make an instance of the die as host component for your layout</a:t>
-            </a:r>
-          </a:p>
-          <a:p>
-            <a:pPr algn="just"/>
-            <a:r>
-              <a:rPr lang="en-US" sz="1200" dirty="0">
-                <a:latin typeface="Arial" panose="020B0604020202020204" pitchFamily="34" charset="0"/>
-                <a:cs typeface="Arial" panose="020B0604020202020204" pitchFamily="34" charset="0"/>
-              </a:rPr>
-              <a:t>- Add 3 sets of 3 straight waveguides, from left to right of the die, top, middle and bottom of the die</a:t>
-            </a:r>
-          </a:p>
-          <a:p>
-            <a:pPr algn="just"/>
-            <a:r>
-              <a:rPr lang="en-US" sz="1200" dirty="0">
-                <a:latin typeface="Arial" panose="020B0604020202020204" pitchFamily="34" charset="0"/>
-                <a:cs typeface="Arial" panose="020B0604020202020204" pitchFamily="34" charset="0"/>
-              </a:rPr>
-              <a:t>- Add 2 of each of the components above, with different lengths</a:t>
-            </a:r>
-          </a:p>
-          <a:p>
-            <a:pPr algn="just"/>
-            <a:r>
-              <a:rPr lang="en-US" sz="1200" dirty="0">
-                <a:latin typeface="Arial" panose="020B0604020202020204" pitchFamily="34" charset="0"/>
-                <a:cs typeface="Arial" panose="020B0604020202020204" pitchFamily="34" charset="0"/>
-              </a:rPr>
-              <a:t>- Connect all your components to the I/</a:t>
-            </a:r>
-            <a:r>
-              <a:rPr lang="en-US" sz="1200" dirty="0" err="1">
-                <a:latin typeface="Arial" panose="020B0604020202020204" pitchFamily="34" charset="0"/>
-                <a:cs typeface="Arial" panose="020B0604020202020204" pitchFamily="34" charset="0"/>
-              </a:rPr>
-              <a:t>Os</a:t>
-            </a:r>
-            <a:r>
-              <a:rPr lang="en-US" sz="1200" dirty="0">
-                <a:latin typeface="Arial" panose="020B0604020202020204" pitchFamily="34" charset="0"/>
-                <a:cs typeface="Arial" panose="020B0604020202020204" pitchFamily="34" charset="0"/>
-              </a:rPr>
-              <a:t> </a:t>
-            </a:r>
-          </a:p>
-        </p:txBody>
-      </p:sp>
-      <p:sp>
-        <p:nvSpPr>
-          <p:cNvPr id="8" name="Rectángulo 7">
-            <a:extLst>
-              <a:ext uri="{FF2B5EF4-FFF2-40B4-BE49-F238E27FC236}">
-                <a16:creationId xmlns:a16="http://schemas.microsoft.com/office/drawing/2014/main" id="{B7F15AC0-F440-2DF1-6C9D-0A7E2EAFC2C8}"/>
-              </a:ext>
-            </a:extLst>
-          </p:cNvPr>
-          <p:cNvSpPr/>
-          <p:nvPr/>
-        </p:nvSpPr>
-        <p:spPr>
-          <a:xfrm>
-            <a:off x="6248400" y="990285"/>
-            <a:ext cx="5638799" cy="5181600"/>
-          </a:xfrm>
-          <a:prstGeom prst="rect">
-            <a:avLst/>
-          </a:prstGeom>
-          <a:noFill/>
-          <a:ln w="28575">
-            <a:solidFill>
-              <a:srgbClr val="E0700D"/>
-            </a:solidFill>
-          </a:ln>
-        </p:spPr>
-        <p:style>
-          <a:lnRef idx="2">
-            <a:schemeClr val="accent1">
-              <a:shade val="15000"/>
-            </a:schemeClr>
-          </a:lnRef>
-          <a:fillRef idx="1">
-            <a:schemeClr val="accent1"/>
-          </a:fillRef>
-          <a:effectRef idx="0">
-            <a:schemeClr val="accent1"/>
-          </a:effectRef>
-          <a:fontRef idx="minor">
-            <a:schemeClr val="lt1"/>
-          </a:fontRef>
-        </p:style>
-        <p:txBody>
-          <a:bodyPr rtlCol="0" anchor="ctr"/>
-          <a:lstStyle/>
-          <a:p>
-            <a:pPr algn="ctr"/>
-            <a:endParaRPr lang="en-US"/>
-          </a:p>
-        </p:txBody>
-      </p:sp>
-      <p:sp>
-        <p:nvSpPr>
-          <p:cNvPr id="9" name="CuadroTexto 8">
-            <a:extLst>
-              <a:ext uri="{FF2B5EF4-FFF2-40B4-BE49-F238E27FC236}">
-                <a16:creationId xmlns:a16="http://schemas.microsoft.com/office/drawing/2014/main" id="{9452515D-9AC0-62DB-2A62-0C197A32C5E7}"/>
-              </a:ext>
-            </a:extLst>
-          </p:cNvPr>
-          <p:cNvSpPr txBox="1"/>
-          <p:nvPr/>
-        </p:nvSpPr>
-        <p:spPr>
-          <a:xfrm>
-            <a:off x="8180318" y="3105834"/>
-            <a:ext cx="1774973" cy="369332"/>
-          </a:xfrm>
-          <a:prstGeom prst="rect">
-            <a:avLst/>
-          </a:prstGeom>
-          <a:noFill/>
-        </p:spPr>
-        <p:txBody>
-          <a:bodyPr wrap="none" rtlCol="0">
-            <a:spAutoFit/>
-          </a:bodyPr>
-          <a:lstStyle/>
-          <a:p>
-            <a:pPr algn="ctr"/>
-            <a:r>
-              <a:rPr lang="es-ES" dirty="0" err="1"/>
-              <a:t>Screenshot</a:t>
-            </a:r>
-            <a:r>
-              <a:rPr lang="es-ES" dirty="0"/>
-              <a:t> </a:t>
-            </a:r>
-            <a:r>
-              <a:rPr lang="es-ES" dirty="0" err="1"/>
-              <a:t>for</a:t>
-            </a:r>
-            <a:r>
-              <a:rPr lang="es-ES" dirty="0"/>
-              <a:t> …</a:t>
-            </a:r>
-            <a:endParaRPr lang="en-US" dirty="0"/>
-          </a:p>
-        </p:txBody>
-      </p:sp>
-    </p:spTree>
-    <p:extLst>
-      <p:ext uri="{BB962C8B-B14F-4D97-AF65-F5344CB8AC3E}">
-        <p14:creationId xmlns:p14="http://schemas.microsoft.com/office/powerpoint/2010/main" val="708738583"/>
-      </p:ext>
-    </p:extLst>
-  </p:cSld>
-  <p:clrMapOvr>
-    <a:masterClrMapping/>
-  </p:clrMapOvr>
-</p:sld>
-</file>
-
-<file path=ppt/slides/slide9.xml><?xml version="1.0" encoding="utf-8"?>
-<p:sld xmlns:a="http://schemas.openxmlformats.org/drawingml/2006/main" xmlns:r="http://schemas.openxmlformats.org/officeDocument/2006/relationships" xmlns:p="http://schemas.openxmlformats.org/presentationml/2006/main">
-  <p:cSld>
-    <p:spTree>
-      <p:nvGrpSpPr>
-        <p:cNvPr id="1" name=""/>
-        <p:cNvGrpSpPr/>
-        <p:nvPr/>
-      </p:nvGrpSpPr>
-      <p:grpSpPr>
-        <a:xfrm>
-          <a:off x="0" y="0"/>
-          <a:ext cx="0" cy="0"/>
-          <a:chOff x="0" y="0"/>
-          <a:chExt cx="0" cy="0"/>
-        </a:xfrm>
-      </p:grpSpPr>
-      <p:sp>
-        <p:nvSpPr>
-          <p:cNvPr id="3" name="object 3"/>
-          <p:cNvSpPr/>
-          <p:nvPr/>
-        </p:nvSpPr>
-        <p:spPr>
-          <a:xfrm>
-            <a:off x="3945635" y="2636520"/>
-            <a:ext cx="8246363" cy="1584959"/>
-          </a:xfrm>
-          <a:prstGeom prst="rect">
-            <a:avLst/>
-          </a:prstGeom>
-          <a:blipFill>
-            <a:blip r:embed="rId2" cstate="print"/>
-            <a:stretch>
-              <a:fillRect/>
-            </a:stretch>
-          </a:blipFill>
-        </p:spPr>
-        <p:txBody>
-          <a:bodyPr wrap="square" lIns="0" tIns="0" rIns="0" bIns="0" rtlCol="0"/>
-          <a:lstStyle/>
-          <a:p>
-            <a:endParaRPr/>
-          </a:p>
-        </p:txBody>
-      </p:sp>
-      <p:sp>
-        <p:nvSpPr>
-          <p:cNvPr id="4" name="object 4"/>
-          <p:cNvSpPr txBox="1">
-            <a:spLocks noGrp="1"/>
-          </p:cNvSpPr>
-          <p:nvPr>
-            <p:ph type="title"/>
-          </p:nvPr>
-        </p:nvSpPr>
-        <p:spPr>
-          <a:xfrm>
-            <a:off x="4513326" y="3165729"/>
-            <a:ext cx="2233295" cy="513715"/>
-          </a:xfrm>
-          <a:prstGeom prst="rect">
-            <a:avLst/>
-          </a:prstGeom>
-        </p:spPr>
-        <p:txBody>
-          <a:bodyPr vert="horz" wrap="square" lIns="0" tIns="13335" rIns="0" bIns="0" rtlCol="0">
-            <a:spAutoFit/>
-          </a:bodyPr>
-          <a:lstStyle/>
-          <a:p>
-            <a:pPr marL="12700">
-              <a:lnSpc>
-                <a:spcPct val="100000"/>
-              </a:lnSpc>
-              <a:spcBef>
-                <a:spcPts val="105"/>
-              </a:spcBef>
-            </a:pPr>
-            <a:r>
-              <a:rPr sz="3200" b="1" spc="-5" dirty="0">
-                <a:solidFill>
-                  <a:srgbClr val="FFFFFF"/>
-                </a:solidFill>
-                <a:latin typeface="Lucida Sans"/>
-                <a:cs typeface="Lucida Sans"/>
-              </a:rPr>
-              <a:t>Thank</a:t>
-            </a:r>
-            <a:r>
-              <a:rPr sz="3200" b="1" spc="-55" dirty="0">
-                <a:solidFill>
-                  <a:srgbClr val="FFFFFF"/>
-                </a:solidFill>
-                <a:latin typeface="Lucida Sans"/>
-                <a:cs typeface="Lucida Sans"/>
-              </a:rPr>
-              <a:t> </a:t>
-            </a:r>
-            <a:r>
-              <a:rPr sz="3200" b="1" dirty="0">
-                <a:solidFill>
-                  <a:srgbClr val="FFFFFF"/>
-                </a:solidFill>
-                <a:latin typeface="Lucida Sans"/>
-                <a:cs typeface="Lucida Sans"/>
-              </a:rPr>
-              <a:t>you</a:t>
-            </a:r>
-            <a:endParaRPr sz="3200">
-              <a:latin typeface="Lucida Sans"/>
-              <a:cs typeface="Lucida Sans"/>
-            </a:endParaRPr>
-          </a:p>
-        </p:txBody>
-      </p:sp>
-      <p:sp>
-        <p:nvSpPr>
-          <p:cNvPr id="5" name="Marcador de número de diapositiva 4">
-            <a:extLst>
-              <a:ext uri="{FF2B5EF4-FFF2-40B4-BE49-F238E27FC236}">
-                <a16:creationId xmlns:a16="http://schemas.microsoft.com/office/drawing/2014/main" id="{B052DA19-AD24-7D24-2AE9-51F8F5A7F5E0}"/>
-              </a:ext>
-            </a:extLst>
-          </p:cNvPr>
-          <p:cNvSpPr>
-            <a:spLocks noGrp="1"/>
-          </p:cNvSpPr>
-          <p:nvPr>
-            <p:ph type="sldNum" sz="quarter" idx="7"/>
-          </p:nvPr>
-        </p:nvSpPr>
-        <p:spPr/>
-        <p:txBody>
-          <a:bodyPr/>
-          <a:lstStyle/>
-          <a:p>
-            <a:fld id="{B6F15528-21DE-4FAA-801E-634DDDAF4B2B}" type="slidenum">
-              <a:rPr lang="es-ES" smtClean="0"/>
-              <a:t>9</a:t>
-            </a:fld>
-            <a:endParaRPr lang="es-ES"/>
-          </a:p>
-        </p:txBody>
-      </p:sp>
-    </p:spTree>
   </p:cSld>
   <p:clrMapOvr>
     <a:masterClrMapping/>

--- a/LabBook_40.pptx
+++ b/LabBook_40.pptx
@@ -5,10 +5,10 @@
     <p:sldMasterId id="2147483648" r:id="rId1"/>
   </p:sldMasterIdLst>
   <p:notesMasterIdLst>
-    <p:notesMasterId r:id="rId17"/>
+    <p:notesMasterId r:id="rId19"/>
   </p:notesMasterIdLst>
   <p:handoutMasterIdLst>
-    <p:handoutMasterId r:id="rId18"/>
+    <p:handoutMasterId r:id="rId20"/>
   </p:handoutMasterIdLst>
   <p:sldIdLst>
     <p:sldId id="256" r:id="rId2"/>
@@ -24,8 +24,10 @@
     <p:sldId id="300" r:id="rId12"/>
     <p:sldId id="301" r:id="rId13"/>
     <p:sldId id="294" r:id="rId14"/>
-    <p:sldId id="295" r:id="rId15"/>
-    <p:sldId id="288" r:id="rId16"/>
+    <p:sldId id="302" r:id="rId15"/>
+    <p:sldId id="304" r:id="rId16"/>
+    <p:sldId id="295" r:id="rId17"/>
+    <p:sldId id="288" r:id="rId18"/>
   </p:sldIdLst>
   <p:sldSz cx="12192000" cy="6858000"/>
   <p:notesSz cx="12192000" cy="6858000"/>
@@ -992,6 +994,222 @@
         <p:cNvPr id="1" name="">
           <a:extLst>
             <a:ext uri="{FF2B5EF4-FFF2-40B4-BE49-F238E27FC236}">
+              <a16:creationId xmlns:a16="http://schemas.microsoft.com/office/drawing/2014/main" id="{06845B72-6BD0-50C0-BC5E-6883A1FB4105}"/>
+            </a:ext>
+          </a:extLst>
+        </p:cNvPr>
+        <p:cNvGrpSpPr/>
+        <p:nvPr/>
+      </p:nvGrpSpPr>
+      <p:grpSpPr>
+        <a:xfrm>
+          <a:off x="0" y="0"/>
+          <a:ext cx="0" cy="0"/>
+          <a:chOff x="0" y="0"/>
+          <a:chExt cx="0" cy="0"/>
+        </a:xfrm>
+      </p:grpSpPr>
+      <p:sp>
+        <p:nvSpPr>
+          <p:cNvPr id="2" name="Marcador de imagen de diapositiva 1">
+            <a:extLst>
+              <a:ext uri="{FF2B5EF4-FFF2-40B4-BE49-F238E27FC236}">
+                <a16:creationId xmlns:a16="http://schemas.microsoft.com/office/drawing/2014/main" id="{42FE526E-B6E2-5121-238B-15EB5B77EB46}"/>
+              </a:ext>
+            </a:extLst>
+          </p:cNvPr>
+          <p:cNvSpPr>
+            <a:spLocks noGrp="1" noRot="1" noChangeAspect="1"/>
+          </p:cNvSpPr>
+          <p:nvPr>
+            <p:ph type="sldImg"/>
+          </p:nvPr>
+        </p:nvSpPr>
+        <p:spPr/>
+      </p:sp>
+      <p:sp>
+        <p:nvSpPr>
+          <p:cNvPr id="3" name="Marcador de notas 2">
+            <a:extLst>
+              <a:ext uri="{FF2B5EF4-FFF2-40B4-BE49-F238E27FC236}">
+                <a16:creationId xmlns:a16="http://schemas.microsoft.com/office/drawing/2014/main" id="{A2A8A32C-DACD-8E27-13AE-8143ABDFA063}"/>
+              </a:ext>
+            </a:extLst>
+          </p:cNvPr>
+          <p:cNvSpPr>
+            <a:spLocks noGrp="1"/>
+          </p:cNvSpPr>
+          <p:nvPr>
+            <p:ph type="body" idx="1"/>
+          </p:nvPr>
+        </p:nvSpPr>
+        <p:spPr/>
+        <p:txBody>
+          <a:bodyPr/>
+          <a:lstStyle/>
+          <a:p>
+            <a:endParaRPr lang="es-ES" dirty="0"/>
+          </a:p>
+        </p:txBody>
+      </p:sp>
+      <p:sp>
+        <p:nvSpPr>
+          <p:cNvPr id="4" name="Marcador de número de diapositiva 3">
+            <a:extLst>
+              <a:ext uri="{FF2B5EF4-FFF2-40B4-BE49-F238E27FC236}">
+                <a16:creationId xmlns:a16="http://schemas.microsoft.com/office/drawing/2014/main" id="{A81F61A7-9402-2676-2E1D-F0B26536F1D0}"/>
+              </a:ext>
+            </a:extLst>
+          </p:cNvPr>
+          <p:cNvSpPr>
+            <a:spLocks noGrp="1"/>
+          </p:cNvSpPr>
+          <p:nvPr>
+            <p:ph type="sldNum" sz="quarter" idx="5"/>
+          </p:nvPr>
+        </p:nvSpPr>
+        <p:spPr/>
+        <p:txBody>
+          <a:bodyPr/>
+          <a:lstStyle/>
+          <a:p>
+            <a:fld id="{676223B9-C868-4436-87D9-1A3152E1157A}" type="slidenum">
+              <a:rPr lang="es-ES" smtClean="0"/>
+              <a:t>14</a:t>
+            </a:fld>
+            <a:endParaRPr lang="es-ES"/>
+          </a:p>
+        </p:txBody>
+      </p:sp>
+    </p:spTree>
+    <p:extLst>
+      <p:ext uri="{BB962C8B-B14F-4D97-AF65-F5344CB8AC3E}">
+        <p14:creationId xmlns:p14="http://schemas.microsoft.com/office/powerpoint/2010/main" val="4046623884"/>
+      </p:ext>
+    </p:extLst>
+  </p:cSld>
+  <p:clrMapOvr>
+    <a:masterClrMapping/>
+  </p:clrMapOvr>
+</p:notes>
+</file>
+
+<file path=ppt/notesSlides/notesSlide13.xml><?xml version="1.0" encoding="utf-8"?>
+<p:notes xmlns:a="http://schemas.openxmlformats.org/drawingml/2006/main" xmlns:r="http://schemas.openxmlformats.org/officeDocument/2006/relationships" xmlns:p="http://schemas.openxmlformats.org/presentationml/2006/main">
+  <p:cSld>
+    <p:spTree>
+      <p:nvGrpSpPr>
+        <p:cNvPr id="1" name="">
+          <a:extLst>
+            <a:ext uri="{FF2B5EF4-FFF2-40B4-BE49-F238E27FC236}">
+              <a16:creationId xmlns:a16="http://schemas.microsoft.com/office/drawing/2014/main" id="{E66D0545-76F6-9897-DBDD-67B0E0EB2279}"/>
+            </a:ext>
+          </a:extLst>
+        </p:cNvPr>
+        <p:cNvGrpSpPr/>
+        <p:nvPr/>
+      </p:nvGrpSpPr>
+      <p:grpSpPr>
+        <a:xfrm>
+          <a:off x="0" y="0"/>
+          <a:ext cx="0" cy="0"/>
+          <a:chOff x="0" y="0"/>
+          <a:chExt cx="0" cy="0"/>
+        </a:xfrm>
+      </p:grpSpPr>
+      <p:sp>
+        <p:nvSpPr>
+          <p:cNvPr id="2" name="Marcador de imagen de diapositiva 1">
+            <a:extLst>
+              <a:ext uri="{FF2B5EF4-FFF2-40B4-BE49-F238E27FC236}">
+                <a16:creationId xmlns:a16="http://schemas.microsoft.com/office/drawing/2014/main" id="{08D579B7-6695-6629-44E7-E7CA9629341A}"/>
+              </a:ext>
+            </a:extLst>
+          </p:cNvPr>
+          <p:cNvSpPr>
+            <a:spLocks noGrp="1" noRot="1" noChangeAspect="1"/>
+          </p:cNvSpPr>
+          <p:nvPr>
+            <p:ph type="sldImg"/>
+          </p:nvPr>
+        </p:nvSpPr>
+        <p:spPr/>
+      </p:sp>
+      <p:sp>
+        <p:nvSpPr>
+          <p:cNvPr id="3" name="Marcador de notas 2">
+            <a:extLst>
+              <a:ext uri="{FF2B5EF4-FFF2-40B4-BE49-F238E27FC236}">
+                <a16:creationId xmlns:a16="http://schemas.microsoft.com/office/drawing/2014/main" id="{6FDED7C1-0C7A-E64B-D3A2-DB70649F8A60}"/>
+              </a:ext>
+            </a:extLst>
+          </p:cNvPr>
+          <p:cNvSpPr>
+            <a:spLocks noGrp="1"/>
+          </p:cNvSpPr>
+          <p:nvPr>
+            <p:ph type="body" idx="1"/>
+          </p:nvPr>
+        </p:nvSpPr>
+        <p:spPr/>
+        <p:txBody>
+          <a:bodyPr/>
+          <a:lstStyle/>
+          <a:p>
+            <a:endParaRPr lang="es-ES" dirty="0"/>
+          </a:p>
+        </p:txBody>
+      </p:sp>
+      <p:sp>
+        <p:nvSpPr>
+          <p:cNvPr id="4" name="Marcador de número de diapositiva 3">
+            <a:extLst>
+              <a:ext uri="{FF2B5EF4-FFF2-40B4-BE49-F238E27FC236}">
+                <a16:creationId xmlns:a16="http://schemas.microsoft.com/office/drawing/2014/main" id="{0FA636BE-89C0-23DD-8152-802A32F5384A}"/>
+              </a:ext>
+            </a:extLst>
+          </p:cNvPr>
+          <p:cNvSpPr>
+            <a:spLocks noGrp="1"/>
+          </p:cNvSpPr>
+          <p:nvPr>
+            <p:ph type="sldNum" sz="quarter" idx="5"/>
+          </p:nvPr>
+        </p:nvSpPr>
+        <p:spPr/>
+        <p:txBody>
+          <a:bodyPr/>
+          <a:lstStyle/>
+          <a:p>
+            <a:fld id="{676223B9-C868-4436-87D9-1A3152E1157A}" type="slidenum">
+              <a:rPr lang="es-ES" smtClean="0"/>
+              <a:t>15</a:t>
+            </a:fld>
+            <a:endParaRPr lang="es-ES"/>
+          </a:p>
+        </p:txBody>
+      </p:sp>
+    </p:spTree>
+    <p:extLst>
+      <p:ext uri="{BB962C8B-B14F-4D97-AF65-F5344CB8AC3E}">
+        <p14:creationId xmlns:p14="http://schemas.microsoft.com/office/powerpoint/2010/main" val="1604649452"/>
+      </p:ext>
+    </p:extLst>
+  </p:cSld>
+  <p:clrMapOvr>
+    <a:masterClrMapping/>
+  </p:clrMapOvr>
+</p:notes>
+</file>
+
+<file path=ppt/notesSlides/notesSlide14.xml><?xml version="1.0" encoding="utf-8"?>
+<p:notes xmlns:a="http://schemas.openxmlformats.org/drawingml/2006/main" xmlns:r="http://schemas.openxmlformats.org/officeDocument/2006/relationships" xmlns:p="http://schemas.openxmlformats.org/presentationml/2006/main">
+  <p:cSld>
+    <p:spTree>
+      <p:nvGrpSpPr>
+        <p:cNvPr id="1" name="">
+          <a:extLst>
+            <a:ext uri="{FF2B5EF4-FFF2-40B4-BE49-F238E27FC236}">
               <a16:creationId xmlns:a16="http://schemas.microsoft.com/office/drawing/2014/main" id="{974169CA-A6E9-D0C3-4D3A-6AF908910447}"/>
             </a:ext>
           </a:extLst>
@@ -1073,7 +1291,7 @@
           <a:p>
             <a:fld id="{676223B9-C868-4436-87D9-1A3152E1157A}" type="slidenum">
               <a:rPr lang="es-ES" smtClean="0"/>
-              <a:t>14</a:t>
+              <a:t>16</a:t>
             </a:fld>
             <a:endParaRPr lang="es-ES"/>
           </a:p>
@@ -5537,7 +5755,7 @@
         <p:spPr>
           <a:xfrm>
             <a:off x="685800" y="990600"/>
-            <a:ext cx="5410200" cy="5181600"/>
+            <a:ext cx="5410200" cy="2438400"/>
           </a:xfrm>
           <a:prstGeom prst="rect">
             <a:avLst/>
@@ -5659,8 +5877,8 @@
         </p:nvSpPr>
         <p:spPr>
           <a:xfrm>
-            <a:off x="6248400" y="990285"/>
-            <a:ext cx="5638799" cy="5181600"/>
+            <a:off x="6248400" y="990284"/>
+            <a:ext cx="5638800" cy="3734115"/>
           </a:xfrm>
           <a:prstGeom prst="rect">
             <a:avLst/>
@@ -5758,6 +5976,174 @@
           </a:p>
         </p:txBody>
       </p:sp>
+      <p:pic>
+        <p:nvPicPr>
+          <p:cNvPr id="7" name="Imagen 6">
+            <a:extLst>
+              <a:ext uri="{FF2B5EF4-FFF2-40B4-BE49-F238E27FC236}">
+                <a16:creationId xmlns:a16="http://schemas.microsoft.com/office/drawing/2014/main" id="{A92BE973-5D1F-A862-0F22-A6674CE1A2FE}"/>
+              </a:ext>
+            </a:extLst>
+          </p:cNvPr>
+          <p:cNvPicPr>
+            <a:picLocks noChangeAspect="1"/>
+          </p:cNvPicPr>
+          <p:nvPr/>
+        </p:nvPicPr>
+        <p:blipFill>
+          <a:blip r:embed="rId4">
+            <a:extLst>
+              <a:ext uri="{28A0092B-C50C-407E-A947-70E740481C1C}">
+                <a14:useLocalDpi xmlns:a14="http://schemas.microsoft.com/office/drawing/2010/main" val="0"/>
+              </a:ext>
+            </a:extLst>
+          </a:blip>
+          <a:stretch>
+            <a:fillRect/>
+          </a:stretch>
+        </p:blipFill>
+        <p:spPr>
+          <a:xfrm>
+            <a:off x="6796643" y="1102341"/>
+            <a:ext cx="4542312" cy="3429000"/>
+          </a:xfrm>
+          <a:prstGeom prst="rect">
+            <a:avLst/>
+          </a:prstGeom>
+        </p:spPr>
+      </p:pic>
+      <p:pic>
+        <p:nvPicPr>
+          <p:cNvPr id="11" name="Imagen 10">
+            <a:extLst>
+              <a:ext uri="{FF2B5EF4-FFF2-40B4-BE49-F238E27FC236}">
+                <a16:creationId xmlns:a16="http://schemas.microsoft.com/office/drawing/2014/main" id="{53A68B08-AEAA-4B4B-082A-797A5B400CAF}"/>
+              </a:ext>
+            </a:extLst>
+          </p:cNvPr>
+          <p:cNvPicPr>
+            <a:picLocks noChangeAspect="1"/>
+          </p:cNvPicPr>
+          <p:nvPr/>
+        </p:nvPicPr>
+        <p:blipFill>
+          <a:blip r:embed="rId5"/>
+          <a:stretch>
+            <a:fillRect/>
+          </a:stretch>
+        </p:blipFill>
+        <p:spPr>
+          <a:xfrm>
+            <a:off x="723899" y="1016308"/>
+            <a:ext cx="5257801" cy="2319483"/>
+          </a:xfrm>
+          <a:prstGeom prst="rect">
+            <a:avLst/>
+          </a:prstGeom>
+        </p:spPr>
+      </p:pic>
+      <p:sp>
+        <p:nvSpPr>
+          <p:cNvPr id="12" name="CuadroTexto 11">
+            <a:extLst>
+              <a:ext uri="{FF2B5EF4-FFF2-40B4-BE49-F238E27FC236}">
+                <a16:creationId xmlns:a16="http://schemas.microsoft.com/office/drawing/2014/main" id="{F02A9976-6DA1-7231-CF65-F5264F2A9111}"/>
+              </a:ext>
+            </a:extLst>
+          </p:cNvPr>
+          <p:cNvSpPr txBox="1"/>
+          <p:nvPr/>
+        </p:nvSpPr>
+        <p:spPr>
+          <a:xfrm>
+            <a:off x="647699" y="3752165"/>
+            <a:ext cx="5410200" cy="1754326"/>
+          </a:xfrm>
+          <a:prstGeom prst="rect">
+            <a:avLst/>
+          </a:prstGeom>
+          <a:solidFill>
+            <a:schemeClr val="bg1"/>
+          </a:solidFill>
+          <a:ln w="19050">
+            <a:solidFill>
+              <a:schemeClr val="accent6">
+                <a:lumMod val="75000"/>
+              </a:schemeClr>
+            </a:solidFill>
+          </a:ln>
+        </p:spPr>
+        <p:txBody>
+          <a:bodyPr wrap="square" rtlCol="0">
+            <a:spAutoFit/>
+          </a:bodyPr>
+          <a:lstStyle/>
+          <a:p>
+            <a:pPr marL="171450" indent="-171450">
+              <a:buFont typeface="Arial" panose="020B0604020202020204" pitchFamily="34" charset="0"/>
+              <a:buChar char="•"/>
+            </a:pPr>
+            <a:r>
+              <a:rPr lang="es-ES" sz="1200" dirty="0"/>
+              <a:t>Este es el primer bloque componente principal del </a:t>
+            </a:r>
+            <a:r>
+              <a:rPr lang="es-ES" sz="1200" dirty="0" err="1"/>
+              <a:t>layout</a:t>
+            </a:r>
+            <a:r>
+              <a:rPr lang="es-ES" sz="1200" dirty="0"/>
+              <a:t> (</a:t>
+            </a:r>
+            <a:r>
+              <a:rPr lang="es-ES" sz="1200" dirty="0" err="1"/>
+              <a:t>main</a:t>
+            </a:r>
+            <a:r>
+              <a:rPr lang="es-ES" sz="1200" dirty="0"/>
+              <a:t>) y se añade el contorno del chip mediante la celda die, usando la capa FLOORPLAN. </a:t>
+            </a:r>
+          </a:p>
+          <a:p>
+            <a:pPr marL="171450" indent="-171450">
+              <a:buFont typeface="Arial" panose="020B0604020202020204" pitchFamily="34" charset="0"/>
+              <a:buChar char="•"/>
+            </a:pPr>
+            <a:r>
+              <a:rPr lang="es-ES" sz="1200" dirty="0"/>
+              <a:t>En él se coloca un MMI 1x2 dentro del chip, cerca de la parte inferior, para usarlo como primer ejemplo de circuito integrado dentro del die.</a:t>
+            </a:r>
+          </a:p>
+          <a:p>
+            <a:pPr marL="171450" indent="-171450">
+              <a:buFont typeface="Arial" panose="020B0604020202020204" pitchFamily="34" charset="0"/>
+              <a:buChar char="•"/>
+            </a:pPr>
+            <a:r>
+              <a:rPr lang="es-ES" sz="1200" dirty="0"/>
+              <a:t>A continuación, el script añadide tres guías rectas en los bordes del chip (una de entrada y dos de salida). Estas guías sirven para que el corte del chip se haga sobre tramos rectos, lo cual es más práctico para acoplar luz desde el exterior. </a:t>
+            </a:r>
+          </a:p>
+          <a:p>
+            <a:pPr marL="171450" indent="-171450">
+              <a:buFont typeface="Arial" panose="020B0604020202020204" pitchFamily="34" charset="0"/>
+              <a:buChar char="•"/>
+            </a:pPr>
+            <a:r>
+              <a:rPr lang="es-ES" sz="1200" dirty="0"/>
+              <a:t>Finalmente se conecta el MMI con esas guías usando rutas (tipo S-</a:t>
+            </a:r>
+            <a:r>
+              <a:rPr lang="es-ES" sz="1200" dirty="0" err="1"/>
+              <a:t>bend</a:t>
+            </a:r>
+            <a:r>
+              <a:rPr lang="es-ES" sz="1200" dirty="0"/>
+              <a:t>), evitando conexiones bruscas y manteniendo la trayectoria para las guías ópticas.</a:t>
+            </a:r>
+          </a:p>
+        </p:txBody>
+      </p:sp>
     </p:spTree>
     <p:extLst>
       <p:ext uri="{BB962C8B-B14F-4D97-AF65-F5344CB8AC3E}">
@@ -5772,6 +6158,1223 @@
 </file>
 
 <file path=ppt/slides/slide14.xml><?xml version="1.0" encoding="utf-8"?>
+<p:sld xmlns:a="http://schemas.openxmlformats.org/drawingml/2006/main" xmlns:r="http://schemas.openxmlformats.org/officeDocument/2006/relationships" xmlns:p="http://schemas.openxmlformats.org/presentationml/2006/main">
+  <p:cSld>
+    <p:spTree>
+      <p:nvGrpSpPr>
+        <p:cNvPr id="1" name="">
+          <a:extLst>
+            <a:ext uri="{FF2B5EF4-FFF2-40B4-BE49-F238E27FC236}">
+              <a16:creationId xmlns:a16="http://schemas.microsoft.com/office/drawing/2014/main" id="{772FC750-334F-A36E-45EA-81778FEAA10E}"/>
+            </a:ext>
+          </a:extLst>
+        </p:cNvPr>
+        <p:cNvGrpSpPr/>
+        <p:nvPr/>
+      </p:nvGrpSpPr>
+      <p:grpSpPr>
+        <a:xfrm>
+          <a:off x="0" y="0"/>
+          <a:ext cx="0" cy="0"/>
+          <a:chOff x="0" y="0"/>
+          <a:chExt cx="0" cy="0"/>
+        </a:xfrm>
+      </p:grpSpPr>
+      <p:sp>
+        <p:nvSpPr>
+          <p:cNvPr id="16" name="object 16">
+            <a:extLst>
+              <a:ext uri="{FF2B5EF4-FFF2-40B4-BE49-F238E27FC236}">
+                <a16:creationId xmlns:a16="http://schemas.microsoft.com/office/drawing/2014/main" id="{43E98860-D68E-8238-F22B-1883D5A56C46}"/>
+              </a:ext>
+            </a:extLst>
+          </p:cNvPr>
+          <p:cNvSpPr txBox="1">
+            <a:spLocks noGrp="1"/>
+          </p:cNvSpPr>
+          <p:nvPr>
+            <p:ph type="title"/>
+          </p:nvPr>
+        </p:nvSpPr>
+        <p:spPr>
+          <a:xfrm>
+            <a:off x="685800" y="408883"/>
+            <a:ext cx="10994410" cy="397545"/>
+          </a:xfrm>
+          <a:prstGeom prst="rect">
+            <a:avLst/>
+          </a:prstGeom>
+        </p:spPr>
+        <p:txBody>
+          <a:bodyPr vert="horz" wrap="square" lIns="0" tIns="12700" rIns="0" bIns="0" rtlCol="0">
+            <a:spAutoFit/>
+          </a:bodyPr>
+          <a:lstStyle/>
+          <a:p>
+            <a:pPr marL="12700" algn="l">
+              <a:lnSpc>
+                <a:spcPct val="100000"/>
+              </a:lnSpc>
+              <a:spcBef>
+                <a:spcPts val="100"/>
+              </a:spcBef>
+            </a:pPr>
+            <a:r>
+              <a:rPr lang="en-US" sz="2500" dirty="0"/>
+              <a:t>Learning outcome #3 – Notebook section 3. Complete layout</a:t>
+            </a:r>
+            <a:endParaRPr sz="2500" b="0" i="1" dirty="0">
+              <a:latin typeface="+mj-lt"/>
+              <a:cs typeface="Lucida Sans"/>
+            </a:endParaRPr>
+          </a:p>
+        </p:txBody>
+      </p:sp>
+      <p:pic>
+        <p:nvPicPr>
+          <p:cNvPr id="83" name="Gráfico 82">
+            <a:extLst>
+              <a:ext uri="{FF2B5EF4-FFF2-40B4-BE49-F238E27FC236}">
+                <a16:creationId xmlns:a16="http://schemas.microsoft.com/office/drawing/2014/main" id="{F7089EF5-B97E-500C-7914-396076B85A53}"/>
+              </a:ext>
+            </a:extLst>
+          </p:cNvPr>
+          <p:cNvPicPr>
+            <a:picLocks noChangeAspect="1"/>
+          </p:cNvPicPr>
+          <p:nvPr/>
+        </p:nvPicPr>
+        <p:blipFill>
+          <a:blip>
+            <a:extLst>
+              <a:ext uri="{96DAC541-7B7A-43D3-8B79-37D633B846F1}">
+                <asvg:svgBlip xmlns:asvg="http://schemas.microsoft.com/office/drawing/2016/SVG/main" r:embed="rId3"/>
+              </a:ext>
+            </a:extLst>
+          </a:blip>
+          <a:stretch>
+            <a:fillRect/>
+          </a:stretch>
+        </p:blipFill>
+        <p:spPr>
+          <a:xfrm>
+            <a:off x="5045006" y="6356057"/>
+            <a:ext cx="6409575" cy="363174"/>
+          </a:xfrm>
+          <a:prstGeom prst="rect">
+            <a:avLst/>
+          </a:prstGeom>
+        </p:spPr>
+      </p:pic>
+      <p:sp>
+        <p:nvSpPr>
+          <p:cNvPr id="84" name="Marcador de número de diapositiva 83">
+            <a:extLst>
+              <a:ext uri="{FF2B5EF4-FFF2-40B4-BE49-F238E27FC236}">
+                <a16:creationId xmlns:a16="http://schemas.microsoft.com/office/drawing/2014/main" id="{AFB93584-649B-C8FD-671F-BCA323708540}"/>
+              </a:ext>
+            </a:extLst>
+          </p:cNvPr>
+          <p:cNvSpPr>
+            <a:spLocks noGrp="1"/>
+          </p:cNvSpPr>
+          <p:nvPr>
+            <p:ph type="sldNum" sz="quarter" idx="7"/>
+          </p:nvPr>
+        </p:nvSpPr>
+        <p:spPr/>
+        <p:txBody>
+          <a:bodyPr/>
+          <a:lstStyle/>
+          <a:p>
+            <a:fld id="{B6F15528-21DE-4FAA-801E-634DDDAF4B2B}" type="slidenum">
+              <a:rPr lang="es-ES" smtClean="0"/>
+              <a:t>14</a:t>
+            </a:fld>
+            <a:endParaRPr lang="es-ES"/>
+          </a:p>
+        </p:txBody>
+      </p:sp>
+      <p:sp>
+        <p:nvSpPr>
+          <p:cNvPr id="3" name="Marcador de pie de página 2">
+            <a:extLst>
+              <a:ext uri="{FF2B5EF4-FFF2-40B4-BE49-F238E27FC236}">
+                <a16:creationId xmlns:a16="http://schemas.microsoft.com/office/drawing/2014/main" id="{6A731C17-405C-8BFF-399F-699790948168}"/>
+              </a:ext>
+            </a:extLst>
+          </p:cNvPr>
+          <p:cNvSpPr>
+            <a:spLocks noGrp="1"/>
+          </p:cNvSpPr>
+          <p:nvPr>
+            <p:ph type="ftr" sz="quarter" idx="5"/>
+          </p:nvPr>
+        </p:nvSpPr>
+        <p:spPr/>
+        <p:txBody>
+          <a:bodyPr/>
+          <a:lstStyle/>
+          <a:p>
+            <a:pPr marL="12700">
+              <a:spcBef>
+                <a:spcPts val="15"/>
+              </a:spcBef>
+            </a:pPr>
+            <a:r>
+              <a:rPr lang="es-ES" spc="-5"/>
+              <a:t>LAB 4.0. LAYOUT</a:t>
+            </a:r>
+            <a:endParaRPr lang="es-ES" spc="-5" dirty="0"/>
+          </a:p>
+        </p:txBody>
+      </p:sp>
+      <p:sp>
+        <p:nvSpPr>
+          <p:cNvPr id="2" name="CuadroTexto 1">
+            <a:extLst>
+              <a:ext uri="{FF2B5EF4-FFF2-40B4-BE49-F238E27FC236}">
+                <a16:creationId xmlns:a16="http://schemas.microsoft.com/office/drawing/2014/main" id="{541D8815-3331-A485-089D-E5CE76D4FD7B}"/>
+              </a:ext>
+            </a:extLst>
+          </p:cNvPr>
+          <p:cNvSpPr txBox="1"/>
+          <p:nvPr/>
+        </p:nvSpPr>
+        <p:spPr>
+          <a:xfrm>
+            <a:off x="685800" y="990600"/>
+            <a:ext cx="5410200" cy="3520907"/>
+          </a:xfrm>
+          <a:prstGeom prst="rect">
+            <a:avLst/>
+          </a:prstGeom>
+          <a:solidFill>
+            <a:schemeClr val="bg1">
+              <a:lumMod val="95000"/>
+            </a:schemeClr>
+          </a:solidFill>
+          <a:ln w="28575">
+            <a:solidFill>
+              <a:srgbClr val="E0700D"/>
+            </a:solidFill>
+          </a:ln>
+        </p:spPr>
+        <p:txBody>
+          <a:bodyPr wrap="square" rtlCol="0">
+            <a:noAutofit/>
+          </a:bodyPr>
+          <a:lstStyle/>
+          <a:p>
+            <a:pPr algn="just"/>
+            <a:r>
+              <a:rPr lang="en-US" sz="1200" dirty="0">
+                <a:latin typeface="Arial" panose="020B0604020202020204" pitchFamily="34" charset="0"/>
+                <a:cs typeface="Arial" panose="020B0604020202020204" pitchFamily="34" charset="0"/>
+              </a:rPr>
+              <a:t>Read and describe 4 code blocks in section 3</a:t>
+            </a:r>
+          </a:p>
+          <a:p>
+            <a:pPr algn="just"/>
+            <a:endParaRPr lang="en-US" sz="1200" dirty="0">
+              <a:latin typeface="Arial" panose="020B0604020202020204" pitchFamily="34" charset="0"/>
+              <a:cs typeface="Arial" panose="020B0604020202020204" pitchFamily="34" charset="0"/>
+            </a:endParaRPr>
+          </a:p>
+          <a:p>
+            <a:pPr algn="just"/>
+            <a:r>
+              <a:rPr lang="en-US" sz="1200" dirty="0">
+                <a:latin typeface="Arial" panose="020B0604020202020204" pitchFamily="34" charset="0"/>
+                <a:cs typeface="Arial" panose="020B0604020202020204" pitchFamily="34" charset="0"/>
+              </a:rPr>
+              <a:t>Python code block 1: </a:t>
+            </a:r>
+          </a:p>
+          <a:p>
+            <a:pPr algn="just"/>
+            <a:endParaRPr lang="en-US" sz="1200" dirty="0">
+              <a:latin typeface="Arial" panose="020B0604020202020204" pitchFamily="34" charset="0"/>
+              <a:cs typeface="Arial" panose="020B0604020202020204" pitchFamily="34" charset="0"/>
+            </a:endParaRPr>
+          </a:p>
+          <a:p>
+            <a:pPr algn="just"/>
+            <a:r>
+              <a:rPr lang="en-US" sz="1200" dirty="0">
+                <a:latin typeface="Arial" panose="020B0604020202020204" pitchFamily="34" charset="0"/>
+                <a:cs typeface="Arial" panose="020B0604020202020204" pitchFamily="34" charset="0"/>
+              </a:rPr>
+              <a:t>Python code block 2: </a:t>
+            </a:r>
+          </a:p>
+          <a:p>
+            <a:pPr algn="just"/>
+            <a:endParaRPr lang="en-US" sz="1200" dirty="0">
+              <a:latin typeface="Arial" panose="020B0604020202020204" pitchFamily="34" charset="0"/>
+              <a:cs typeface="Arial" panose="020B0604020202020204" pitchFamily="34" charset="0"/>
+            </a:endParaRPr>
+          </a:p>
+          <a:p>
+            <a:pPr algn="just"/>
+            <a:r>
+              <a:rPr lang="en-US" sz="1200" dirty="0">
+                <a:latin typeface="Arial" panose="020B0604020202020204" pitchFamily="34" charset="0"/>
+                <a:cs typeface="Arial" panose="020B0604020202020204" pitchFamily="34" charset="0"/>
+              </a:rPr>
+              <a:t>Python code block 3: </a:t>
+            </a:r>
+          </a:p>
+          <a:p>
+            <a:pPr algn="just"/>
+            <a:endParaRPr lang="en-US" sz="1200" dirty="0">
+              <a:latin typeface="Arial" panose="020B0604020202020204" pitchFamily="34" charset="0"/>
+              <a:cs typeface="Arial" panose="020B0604020202020204" pitchFamily="34" charset="0"/>
+            </a:endParaRPr>
+          </a:p>
+          <a:p>
+            <a:pPr algn="just"/>
+            <a:r>
+              <a:rPr lang="en-US" sz="1200" dirty="0">
+                <a:latin typeface="Arial" panose="020B0604020202020204" pitchFamily="34" charset="0"/>
+                <a:cs typeface="Arial" panose="020B0604020202020204" pitchFamily="34" charset="0"/>
+              </a:rPr>
+              <a:t>Python code block 4: </a:t>
+            </a:r>
+          </a:p>
+          <a:p>
+            <a:pPr algn="just"/>
+            <a:endParaRPr lang="en-US" sz="1200" dirty="0">
+              <a:latin typeface="Arial" panose="020B0604020202020204" pitchFamily="34" charset="0"/>
+              <a:cs typeface="Arial" panose="020B0604020202020204" pitchFamily="34" charset="0"/>
+            </a:endParaRPr>
+          </a:p>
+        </p:txBody>
+      </p:sp>
+      <p:sp>
+        <p:nvSpPr>
+          <p:cNvPr id="8" name="Rectángulo 7">
+            <a:extLst>
+              <a:ext uri="{FF2B5EF4-FFF2-40B4-BE49-F238E27FC236}">
+                <a16:creationId xmlns:a16="http://schemas.microsoft.com/office/drawing/2014/main" id="{9069E3F7-1BF2-BBAF-2DDC-F2649BBB8405}"/>
+              </a:ext>
+            </a:extLst>
+          </p:cNvPr>
+          <p:cNvSpPr/>
+          <p:nvPr/>
+        </p:nvSpPr>
+        <p:spPr>
+          <a:xfrm>
+            <a:off x="6248400" y="990285"/>
+            <a:ext cx="5638799" cy="3543105"/>
+          </a:xfrm>
+          <a:prstGeom prst="rect">
+            <a:avLst/>
+          </a:prstGeom>
+          <a:noFill/>
+          <a:ln w="28575">
+            <a:solidFill>
+              <a:srgbClr val="E0700D"/>
+            </a:solidFill>
+          </a:ln>
+        </p:spPr>
+        <p:style>
+          <a:lnRef idx="2">
+            <a:schemeClr val="accent1">
+              <a:shade val="15000"/>
+            </a:schemeClr>
+          </a:lnRef>
+          <a:fillRef idx="1">
+            <a:schemeClr val="accent1"/>
+          </a:fillRef>
+          <a:effectRef idx="0">
+            <a:schemeClr val="accent1"/>
+          </a:effectRef>
+          <a:fontRef idx="minor">
+            <a:schemeClr val="lt1"/>
+          </a:fontRef>
+        </p:style>
+        <p:txBody>
+          <a:bodyPr rtlCol="0" anchor="ctr"/>
+          <a:lstStyle/>
+          <a:p>
+            <a:pPr algn="ctr"/>
+            <a:endParaRPr lang="en-US"/>
+          </a:p>
+        </p:txBody>
+      </p:sp>
+      <p:sp>
+        <p:nvSpPr>
+          <p:cNvPr id="9" name="CuadroTexto 8">
+            <a:extLst>
+              <a:ext uri="{FF2B5EF4-FFF2-40B4-BE49-F238E27FC236}">
+                <a16:creationId xmlns:a16="http://schemas.microsoft.com/office/drawing/2014/main" id="{5E629C66-9D76-C925-21C6-98D06D8DEE36}"/>
+              </a:ext>
+            </a:extLst>
+          </p:cNvPr>
+          <p:cNvSpPr txBox="1"/>
+          <p:nvPr/>
+        </p:nvSpPr>
+        <p:spPr>
+          <a:xfrm>
+            <a:off x="7663860" y="3105834"/>
+            <a:ext cx="2807885" cy="646331"/>
+          </a:xfrm>
+          <a:prstGeom prst="rect">
+            <a:avLst/>
+          </a:prstGeom>
+          <a:noFill/>
+        </p:spPr>
+        <p:txBody>
+          <a:bodyPr wrap="none" rtlCol="0">
+            <a:spAutoFit/>
+          </a:bodyPr>
+          <a:lstStyle/>
+          <a:p>
+            <a:pPr algn="ctr"/>
+            <a:r>
+              <a:rPr lang="es-ES" dirty="0"/>
+              <a:t>Complete </a:t>
+            </a:r>
+            <a:r>
+              <a:rPr lang="es-ES" dirty="0" err="1"/>
+              <a:t>layout</a:t>
+            </a:r>
+            <a:r>
+              <a:rPr lang="es-ES" dirty="0"/>
+              <a:t> </a:t>
+            </a:r>
+            <a:r>
+              <a:rPr lang="es-ES" dirty="0" err="1"/>
+              <a:t>screenshot</a:t>
+            </a:r>
+            <a:endParaRPr lang="es-ES" dirty="0"/>
+          </a:p>
+          <a:p>
+            <a:pPr algn="ctr"/>
+            <a:r>
+              <a:rPr lang="es-ES" dirty="0"/>
+              <a:t> </a:t>
+            </a:r>
+            <a:r>
+              <a:rPr lang="es-ES" dirty="0" err="1"/>
+              <a:t>screenshot</a:t>
+            </a:r>
+            <a:endParaRPr lang="en-US" dirty="0"/>
+          </a:p>
+        </p:txBody>
+      </p:sp>
+      <p:pic>
+        <p:nvPicPr>
+          <p:cNvPr id="7" name="Imagen 6">
+            <a:extLst>
+              <a:ext uri="{FF2B5EF4-FFF2-40B4-BE49-F238E27FC236}">
+                <a16:creationId xmlns:a16="http://schemas.microsoft.com/office/drawing/2014/main" id="{91689B31-2A71-546C-E22E-B7FA71379A43}"/>
+              </a:ext>
+            </a:extLst>
+          </p:cNvPr>
+          <p:cNvPicPr>
+            <a:picLocks noChangeAspect="1"/>
+          </p:cNvPicPr>
+          <p:nvPr/>
+        </p:nvPicPr>
+        <p:blipFill>
+          <a:blip r:embed="rId4"/>
+          <a:stretch>
+            <a:fillRect/>
+          </a:stretch>
+        </p:blipFill>
+        <p:spPr>
+          <a:xfrm>
+            <a:off x="749709" y="1027926"/>
+            <a:ext cx="5282381" cy="3325944"/>
+          </a:xfrm>
+          <a:prstGeom prst="rect">
+            <a:avLst/>
+          </a:prstGeom>
+        </p:spPr>
+      </p:pic>
+      <p:pic>
+        <p:nvPicPr>
+          <p:cNvPr id="11" name="Imagen 10">
+            <a:extLst>
+              <a:ext uri="{FF2B5EF4-FFF2-40B4-BE49-F238E27FC236}">
+                <a16:creationId xmlns:a16="http://schemas.microsoft.com/office/drawing/2014/main" id="{16456A8E-7B97-81E7-DD03-44B8CDD6CE30}"/>
+              </a:ext>
+            </a:extLst>
+          </p:cNvPr>
+          <p:cNvPicPr>
+            <a:picLocks noChangeAspect="1"/>
+          </p:cNvPicPr>
+          <p:nvPr/>
+        </p:nvPicPr>
+        <p:blipFill>
+          <a:blip r:embed="rId5"/>
+          <a:stretch>
+            <a:fillRect/>
+          </a:stretch>
+        </p:blipFill>
+        <p:spPr>
+          <a:xfrm>
+            <a:off x="6839968" y="1009262"/>
+            <a:ext cx="4614613" cy="3483581"/>
+          </a:xfrm>
+          <a:prstGeom prst="rect">
+            <a:avLst/>
+          </a:prstGeom>
+        </p:spPr>
+      </p:pic>
+      <p:sp>
+        <p:nvSpPr>
+          <p:cNvPr id="12" name="CuadroTexto 11">
+            <a:extLst>
+              <a:ext uri="{FF2B5EF4-FFF2-40B4-BE49-F238E27FC236}">
+                <a16:creationId xmlns:a16="http://schemas.microsoft.com/office/drawing/2014/main" id="{D1D7295D-45AA-B903-8705-778F6AC88139}"/>
+              </a:ext>
+            </a:extLst>
+          </p:cNvPr>
+          <p:cNvSpPr txBox="1"/>
+          <p:nvPr/>
+        </p:nvSpPr>
+        <p:spPr>
+          <a:xfrm>
+            <a:off x="685800" y="4741284"/>
+            <a:ext cx="9601200" cy="1384995"/>
+          </a:xfrm>
+          <a:prstGeom prst="rect">
+            <a:avLst/>
+          </a:prstGeom>
+          <a:solidFill>
+            <a:schemeClr val="bg1">
+              <a:lumMod val="95000"/>
+            </a:schemeClr>
+          </a:solidFill>
+          <a:ln w="28575">
+            <a:solidFill>
+              <a:schemeClr val="accent6">
+                <a:lumMod val="75000"/>
+              </a:schemeClr>
+            </a:solidFill>
+          </a:ln>
+        </p:spPr>
+        <p:txBody>
+          <a:bodyPr wrap="square" rtlCol="0">
+            <a:spAutoFit/>
+          </a:bodyPr>
+          <a:lstStyle/>
+          <a:p>
+            <a:pPr marL="171450" indent="-171450">
+              <a:buFont typeface="Arial" panose="020B0604020202020204" pitchFamily="34" charset="0"/>
+              <a:buChar char="•"/>
+            </a:pPr>
+            <a:r>
+              <a:rPr lang="es-ES" sz="1200" dirty="0"/>
+              <a:t>En este bloque se convierte el árbol de </a:t>
+            </a:r>
+            <a:r>
+              <a:rPr lang="es-ES" sz="1200" dirty="0" err="1"/>
+              <a:t>MMIs</a:t>
+            </a:r>
+            <a:r>
+              <a:rPr lang="es-ES" sz="1200" dirty="0"/>
+              <a:t> 1x4 en una celda jerárquica mediante @gf.cell. </a:t>
+            </a:r>
+          </a:p>
+          <a:p>
+            <a:pPr marL="171450" indent="-171450">
+              <a:buFont typeface="Arial" panose="020B0604020202020204" pitchFamily="34" charset="0"/>
+              <a:buChar char="•"/>
+            </a:pPr>
+            <a:r>
+              <a:rPr lang="es-ES" sz="1200" dirty="0"/>
+              <a:t>La estructura se construye con tres </a:t>
+            </a:r>
+            <a:r>
+              <a:rPr lang="es-ES" sz="1200" dirty="0" err="1"/>
+              <a:t>MMIs</a:t>
+            </a:r>
+            <a:r>
+              <a:rPr lang="es-ES" sz="1200" dirty="0"/>
+              <a:t> 1x2</a:t>
+            </a:r>
+          </a:p>
+          <a:p>
+            <a:pPr marL="628650" lvl="1" indent="-171450">
+              <a:buFont typeface="Arial" panose="020B0604020202020204" pitchFamily="34" charset="0"/>
+              <a:buChar char="•"/>
+            </a:pPr>
+            <a:r>
+              <a:rPr lang="es-ES" sz="1200" dirty="0"/>
+              <a:t>el primero divide la señal inicial y sus dos salidas se conectan a otros dos </a:t>
+            </a:r>
+            <a:r>
+              <a:rPr lang="es-ES" sz="1200" dirty="0" err="1"/>
+              <a:t>MMIs</a:t>
+            </a:r>
+            <a:r>
+              <a:rPr lang="es-ES" sz="1200" dirty="0"/>
+              <a:t>, obteniendo finalmente cuatro salidas ópticas.</a:t>
+            </a:r>
+          </a:p>
+          <a:p>
+            <a:endParaRPr lang="es-ES" sz="1200" dirty="0"/>
+          </a:p>
+          <a:p>
+            <a:pPr marL="171450" indent="-171450">
+              <a:buFont typeface="Arial" panose="020B0604020202020204" pitchFamily="34" charset="0"/>
+              <a:buChar char="•"/>
+            </a:pPr>
+            <a:r>
+              <a:rPr lang="es-ES" sz="1200" dirty="0"/>
+              <a:t>El árbol completo queda encapsulado como un único bloque reutilizable, con sus propios puertos de entrada y salida (o1–o5. </a:t>
+            </a:r>
+          </a:p>
+          <a:p>
+            <a:pPr marL="171450" indent="-171450">
+              <a:buFont typeface="Arial" panose="020B0604020202020204" pitchFamily="34" charset="0"/>
+              <a:buChar char="•"/>
+            </a:pPr>
+            <a:r>
+              <a:rPr lang="es-ES" sz="1200" dirty="0"/>
+              <a:t>Después, esa celda se instancia dentro del componente principal “</a:t>
+            </a:r>
+            <a:r>
+              <a:rPr lang="es-ES" sz="1200" dirty="0" err="1"/>
+              <a:t>main</a:t>
+            </a:r>
+            <a:r>
+              <a:rPr lang="es-ES" sz="1200" dirty="0"/>
+              <a:t>”, que ya contiene el contorno del chip. </a:t>
+            </a:r>
+          </a:p>
+          <a:p>
+            <a:pPr marL="171450" indent="-171450">
+              <a:buFont typeface="Arial" panose="020B0604020202020204" pitchFamily="34" charset="0"/>
+              <a:buChar char="•"/>
+            </a:pPr>
+            <a:r>
+              <a:rPr lang="es-ES" sz="1200" dirty="0"/>
+              <a:t>En la captura se ve cómo el bloque 1x4 queda colocado dentro del die y preparado para ser conectado al resto del </a:t>
+            </a:r>
+            <a:r>
+              <a:rPr lang="es-ES" sz="1200" dirty="0" err="1"/>
+              <a:t>layout</a:t>
+            </a:r>
+            <a:r>
+              <a:rPr lang="es-ES" sz="1200" dirty="0"/>
+              <a:t>.</a:t>
+            </a:r>
+          </a:p>
+        </p:txBody>
+      </p:sp>
+    </p:spTree>
+    <p:extLst>
+      <p:ext uri="{BB962C8B-B14F-4D97-AF65-F5344CB8AC3E}">
+        <p14:creationId xmlns:p14="http://schemas.microsoft.com/office/powerpoint/2010/main" val="2869413724"/>
+      </p:ext>
+    </p:extLst>
+  </p:cSld>
+  <p:clrMapOvr>
+    <a:masterClrMapping/>
+  </p:clrMapOvr>
+</p:sld>
+</file>
+
+<file path=ppt/slides/slide15.xml><?xml version="1.0" encoding="utf-8"?>
+<p:sld xmlns:a="http://schemas.openxmlformats.org/drawingml/2006/main" xmlns:r="http://schemas.openxmlformats.org/officeDocument/2006/relationships" xmlns:p="http://schemas.openxmlformats.org/presentationml/2006/main">
+  <p:cSld>
+    <p:spTree>
+      <p:nvGrpSpPr>
+        <p:cNvPr id="1" name="">
+          <a:extLst>
+            <a:ext uri="{FF2B5EF4-FFF2-40B4-BE49-F238E27FC236}">
+              <a16:creationId xmlns:a16="http://schemas.microsoft.com/office/drawing/2014/main" id="{4B84B787-CC10-8F68-E5EB-26657FC9C558}"/>
+            </a:ext>
+          </a:extLst>
+        </p:cNvPr>
+        <p:cNvGrpSpPr/>
+        <p:nvPr/>
+      </p:nvGrpSpPr>
+      <p:grpSpPr>
+        <a:xfrm>
+          <a:off x="0" y="0"/>
+          <a:ext cx="0" cy="0"/>
+          <a:chOff x="0" y="0"/>
+          <a:chExt cx="0" cy="0"/>
+        </a:xfrm>
+      </p:grpSpPr>
+      <p:sp>
+        <p:nvSpPr>
+          <p:cNvPr id="16" name="object 16">
+            <a:extLst>
+              <a:ext uri="{FF2B5EF4-FFF2-40B4-BE49-F238E27FC236}">
+                <a16:creationId xmlns:a16="http://schemas.microsoft.com/office/drawing/2014/main" id="{FC82B2D1-9FC9-D17E-478A-F4E575B83B48}"/>
+              </a:ext>
+            </a:extLst>
+          </p:cNvPr>
+          <p:cNvSpPr txBox="1">
+            <a:spLocks noGrp="1"/>
+          </p:cNvSpPr>
+          <p:nvPr>
+            <p:ph type="title"/>
+          </p:nvPr>
+        </p:nvSpPr>
+        <p:spPr>
+          <a:xfrm>
+            <a:off x="685800" y="408883"/>
+            <a:ext cx="10994410" cy="397545"/>
+          </a:xfrm>
+          <a:prstGeom prst="rect">
+            <a:avLst/>
+          </a:prstGeom>
+        </p:spPr>
+        <p:txBody>
+          <a:bodyPr vert="horz" wrap="square" lIns="0" tIns="12700" rIns="0" bIns="0" rtlCol="0">
+            <a:spAutoFit/>
+          </a:bodyPr>
+          <a:lstStyle/>
+          <a:p>
+            <a:pPr marL="12700" algn="l">
+              <a:lnSpc>
+                <a:spcPct val="100000"/>
+              </a:lnSpc>
+              <a:spcBef>
+                <a:spcPts val="100"/>
+              </a:spcBef>
+            </a:pPr>
+            <a:r>
+              <a:rPr lang="en-US" sz="2500" dirty="0"/>
+              <a:t>Learning outcome #3 – Notebook section 3. Complete layout</a:t>
+            </a:r>
+            <a:endParaRPr sz="2500" b="0" i="1" dirty="0">
+              <a:latin typeface="+mj-lt"/>
+              <a:cs typeface="Lucida Sans"/>
+            </a:endParaRPr>
+          </a:p>
+        </p:txBody>
+      </p:sp>
+      <p:pic>
+        <p:nvPicPr>
+          <p:cNvPr id="83" name="Gráfico 82">
+            <a:extLst>
+              <a:ext uri="{FF2B5EF4-FFF2-40B4-BE49-F238E27FC236}">
+                <a16:creationId xmlns:a16="http://schemas.microsoft.com/office/drawing/2014/main" id="{B6120E1C-1457-5A3A-4F68-3BB74BD32049}"/>
+              </a:ext>
+            </a:extLst>
+          </p:cNvPr>
+          <p:cNvPicPr>
+            <a:picLocks noChangeAspect="1"/>
+          </p:cNvPicPr>
+          <p:nvPr/>
+        </p:nvPicPr>
+        <p:blipFill>
+          <a:blip>
+            <a:extLst>
+              <a:ext uri="{96DAC541-7B7A-43D3-8B79-37D633B846F1}">
+                <asvg:svgBlip xmlns:asvg="http://schemas.microsoft.com/office/drawing/2016/SVG/main" r:embed="rId3"/>
+              </a:ext>
+            </a:extLst>
+          </a:blip>
+          <a:stretch>
+            <a:fillRect/>
+          </a:stretch>
+        </p:blipFill>
+        <p:spPr>
+          <a:xfrm>
+            <a:off x="5045006" y="6356057"/>
+            <a:ext cx="6409575" cy="363174"/>
+          </a:xfrm>
+          <a:prstGeom prst="rect">
+            <a:avLst/>
+          </a:prstGeom>
+        </p:spPr>
+      </p:pic>
+      <p:sp>
+        <p:nvSpPr>
+          <p:cNvPr id="84" name="Marcador de número de diapositiva 83">
+            <a:extLst>
+              <a:ext uri="{FF2B5EF4-FFF2-40B4-BE49-F238E27FC236}">
+                <a16:creationId xmlns:a16="http://schemas.microsoft.com/office/drawing/2014/main" id="{79E0E49D-9148-B4E4-2681-94911D936059}"/>
+              </a:ext>
+            </a:extLst>
+          </p:cNvPr>
+          <p:cNvSpPr>
+            <a:spLocks noGrp="1"/>
+          </p:cNvSpPr>
+          <p:nvPr>
+            <p:ph type="sldNum" sz="quarter" idx="7"/>
+          </p:nvPr>
+        </p:nvSpPr>
+        <p:spPr/>
+        <p:txBody>
+          <a:bodyPr/>
+          <a:lstStyle/>
+          <a:p>
+            <a:fld id="{B6F15528-21DE-4FAA-801E-634DDDAF4B2B}" type="slidenum">
+              <a:rPr lang="es-ES" smtClean="0"/>
+              <a:t>15</a:t>
+            </a:fld>
+            <a:endParaRPr lang="es-ES"/>
+          </a:p>
+        </p:txBody>
+      </p:sp>
+      <p:sp>
+        <p:nvSpPr>
+          <p:cNvPr id="3" name="Marcador de pie de página 2">
+            <a:extLst>
+              <a:ext uri="{FF2B5EF4-FFF2-40B4-BE49-F238E27FC236}">
+                <a16:creationId xmlns:a16="http://schemas.microsoft.com/office/drawing/2014/main" id="{3EDE9CA4-7157-9BFB-04DB-852A6820101A}"/>
+              </a:ext>
+            </a:extLst>
+          </p:cNvPr>
+          <p:cNvSpPr>
+            <a:spLocks noGrp="1"/>
+          </p:cNvSpPr>
+          <p:nvPr>
+            <p:ph type="ftr" sz="quarter" idx="5"/>
+          </p:nvPr>
+        </p:nvSpPr>
+        <p:spPr/>
+        <p:txBody>
+          <a:bodyPr/>
+          <a:lstStyle/>
+          <a:p>
+            <a:pPr marL="12700">
+              <a:spcBef>
+                <a:spcPts val="15"/>
+              </a:spcBef>
+            </a:pPr>
+            <a:r>
+              <a:rPr lang="es-ES" spc="-5"/>
+              <a:t>LAB 4.0. LAYOUT</a:t>
+            </a:r>
+            <a:endParaRPr lang="es-ES" spc="-5" dirty="0"/>
+          </a:p>
+        </p:txBody>
+      </p:sp>
+      <p:sp>
+        <p:nvSpPr>
+          <p:cNvPr id="2" name="CuadroTexto 1">
+            <a:extLst>
+              <a:ext uri="{FF2B5EF4-FFF2-40B4-BE49-F238E27FC236}">
+                <a16:creationId xmlns:a16="http://schemas.microsoft.com/office/drawing/2014/main" id="{3AD70E3B-C524-BB72-C065-3A11722B04E2}"/>
+              </a:ext>
+            </a:extLst>
+          </p:cNvPr>
+          <p:cNvSpPr txBox="1"/>
+          <p:nvPr/>
+        </p:nvSpPr>
+        <p:spPr>
+          <a:xfrm>
+            <a:off x="685800" y="990600"/>
+            <a:ext cx="5410200" cy="3544392"/>
+          </a:xfrm>
+          <a:prstGeom prst="rect">
+            <a:avLst/>
+          </a:prstGeom>
+          <a:solidFill>
+            <a:schemeClr val="bg1">
+              <a:lumMod val="95000"/>
+            </a:schemeClr>
+          </a:solidFill>
+          <a:ln w="28575">
+            <a:solidFill>
+              <a:srgbClr val="E0700D"/>
+            </a:solidFill>
+          </a:ln>
+        </p:spPr>
+        <p:txBody>
+          <a:bodyPr wrap="square" rtlCol="0">
+            <a:noAutofit/>
+          </a:bodyPr>
+          <a:lstStyle/>
+          <a:p>
+            <a:pPr algn="just"/>
+            <a:r>
+              <a:rPr lang="en-US" sz="1200" dirty="0">
+                <a:latin typeface="Arial" panose="020B0604020202020204" pitchFamily="34" charset="0"/>
+                <a:cs typeface="Arial" panose="020B0604020202020204" pitchFamily="34" charset="0"/>
+              </a:rPr>
+              <a:t>Read and describe 4 code blocks in section 3</a:t>
+            </a:r>
+          </a:p>
+          <a:p>
+            <a:pPr algn="just"/>
+            <a:endParaRPr lang="en-US" sz="1200" dirty="0">
+              <a:latin typeface="Arial" panose="020B0604020202020204" pitchFamily="34" charset="0"/>
+              <a:cs typeface="Arial" panose="020B0604020202020204" pitchFamily="34" charset="0"/>
+            </a:endParaRPr>
+          </a:p>
+          <a:p>
+            <a:pPr algn="just"/>
+            <a:r>
+              <a:rPr lang="en-US" sz="1200" dirty="0">
+                <a:latin typeface="Arial" panose="020B0604020202020204" pitchFamily="34" charset="0"/>
+                <a:cs typeface="Arial" panose="020B0604020202020204" pitchFamily="34" charset="0"/>
+              </a:rPr>
+              <a:t>Python code block 1: </a:t>
+            </a:r>
+          </a:p>
+          <a:p>
+            <a:pPr algn="just"/>
+            <a:endParaRPr lang="en-US" sz="1200" dirty="0">
+              <a:latin typeface="Arial" panose="020B0604020202020204" pitchFamily="34" charset="0"/>
+              <a:cs typeface="Arial" panose="020B0604020202020204" pitchFamily="34" charset="0"/>
+            </a:endParaRPr>
+          </a:p>
+          <a:p>
+            <a:pPr algn="just"/>
+            <a:r>
+              <a:rPr lang="en-US" sz="1200" dirty="0">
+                <a:latin typeface="Arial" panose="020B0604020202020204" pitchFamily="34" charset="0"/>
+                <a:cs typeface="Arial" panose="020B0604020202020204" pitchFamily="34" charset="0"/>
+              </a:rPr>
+              <a:t>Python code block 2: </a:t>
+            </a:r>
+          </a:p>
+          <a:p>
+            <a:pPr algn="just"/>
+            <a:endParaRPr lang="en-US" sz="1200" dirty="0">
+              <a:latin typeface="Arial" panose="020B0604020202020204" pitchFamily="34" charset="0"/>
+              <a:cs typeface="Arial" panose="020B0604020202020204" pitchFamily="34" charset="0"/>
+            </a:endParaRPr>
+          </a:p>
+          <a:p>
+            <a:pPr algn="just"/>
+            <a:r>
+              <a:rPr lang="en-US" sz="1200" dirty="0">
+                <a:latin typeface="Arial" panose="020B0604020202020204" pitchFamily="34" charset="0"/>
+                <a:cs typeface="Arial" panose="020B0604020202020204" pitchFamily="34" charset="0"/>
+              </a:rPr>
+              <a:t>Python code block 3: </a:t>
+            </a:r>
+          </a:p>
+          <a:p>
+            <a:pPr algn="just"/>
+            <a:endParaRPr lang="en-US" sz="1200" dirty="0">
+              <a:latin typeface="Arial" panose="020B0604020202020204" pitchFamily="34" charset="0"/>
+              <a:cs typeface="Arial" panose="020B0604020202020204" pitchFamily="34" charset="0"/>
+            </a:endParaRPr>
+          </a:p>
+          <a:p>
+            <a:pPr algn="just"/>
+            <a:r>
+              <a:rPr lang="en-US" sz="1200" dirty="0">
+                <a:latin typeface="Arial" panose="020B0604020202020204" pitchFamily="34" charset="0"/>
+                <a:cs typeface="Arial" panose="020B0604020202020204" pitchFamily="34" charset="0"/>
+              </a:rPr>
+              <a:t>Python code block 4: </a:t>
+            </a:r>
+          </a:p>
+          <a:p>
+            <a:pPr algn="just"/>
+            <a:endParaRPr lang="en-US" sz="1200" dirty="0">
+              <a:latin typeface="Arial" panose="020B0604020202020204" pitchFamily="34" charset="0"/>
+              <a:cs typeface="Arial" panose="020B0604020202020204" pitchFamily="34" charset="0"/>
+            </a:endParaRPr>
+          </a:p>
+        </p:txBody>
+      </p:sp>
+      <p:sp>
+        <p:nvSpPr>
+          <p:cNvPr id="8" name="Rectángulo 7">
+            <a:extLst>
+              <a:ext uri="{FF2B5EF4-FFF2-40B4-BE49-F238E27FC236}">
+                <a16:creationId xmlns:a16="http://schemas.microsoft.com/office/drawing/2014/main" id="{698A6085-9CBB-565B-F0F0-7EF9CDC8DEDD}"/>
+              </a:ext>
+            </a:extLst>
+          </p:cNvPr>
+          <p:cNvSpPr/>
+          <p:nvPr/>
+        </p:nvSpPr>
+        <p:spPr>
+          <a:xfrm>
+            <a:off x="6248400" y="990285"/>
+            <a:ext cx="5638799" cy="3544707"/>
+          </a:xfrm>
+          <a:prstGeom prst="rect">
+            <a:avLst/>
+          </a:prstGeom>
+          <a:noFill/>
+          <a:ln w="28575">
+            <a:solidFill>
+              <a:srgbClr val="E0700D"/>
+            </a:solidFill>
+          </a:ln>
+        </p:spPr>
+        <p:style>
+          <a:lnRef idx="2">
+            <a:schemeClr val="accent1">
+              <a:shade val="15000"/>
+            </a:schemeClr>
+          </a:lnRef>
+          <a:fillRef idx="1">
+            <a:schemeClr val="accent1"/>
+          </a:fillRef>
+          <a:effectRef idx="0">
+            <a:schemeClr val="accent1"/>
+          </a:effectRef>
+          <a:fontRef idx="minor">
+            <a:schemeClr val="lt1"/>
+          </a:fontRef>
+        </p:style>
+        <p:txBody>
+          <a:bodyPr rtlCol="0" anchor="ctr"/>
+          <a:lstStyle/>
+          <a:p>
+            <a:pPr algn="ctr"/>
+            <a:endParaRPr lang="en-US"/>
+          </a:p>
+        </p:txBody>
+      </p:sp>
+      <p:sp>
+        <p:nvSpPr>
+          <p:cNvPr id="9" name="CuadroTexto 8">
+            <a:extLst>
+              <a:ext uri="{FF2B5EF4-FFF2-40B4-BE49-F238E27FC236}">
+                <a16:creationId xmlns:a16="http://schemas.microsoft.com/office/drawing/2014/main" id="{9956ED85-6D87-4971-FA7B-0BD19044B770}"/>
+              </a:ext>
+            </a:extLst>
+          </p:cNvPr>
+          <p:cNvSpPr txBox="1"/>
+          <p:nvPr/>
+        </p:nvSpPr>
+        <p:spPr>
+          <a:xfrm>
+            <a:off x="7663860" y="3105834"/>
+            <a:ext cx="2807885" cy="646331"/>
+          </a:xfrm>
+          <a:prstGeom prst="rect">
+            <a:avLst/>
+          </a:prstGeom>
+          <a:noFill/>
+        </p:spPr>
+        <p:txBody>
+          <a:bodyPr wrap="none" rtlCol="0">
+            <a:spAutoFit/>
+          </a:bodyPr>
+          <a:lstStyle/>
+          <a:p>
+            <a:pPr algn="ctr"/>
+            <a:r>
+              <a:rPr lang="es-ES" dirty="0"/>
+              <a:t>Complete </a:t>
+            </a:r>
+            <a:r>
+              <a:rPr lang="es-ES" dirty="0" err="1"/>
+              <a:t>layout</a:t>
+            </a:r>
+            <a:r>
+              <a:rPr lang="es-ES" dirty="0"/>
+              <a:t> </a:t>
+            </a:r>
+            <a:r>
+              <a:rPr lang="es-ES" dirty="0" err="1"/>
+              <a:t>screenshot</a:t>
+            </a:r>
+            <a:endParaRPr lang="es-ES" dirty="0"/>
+          </a:p>
+          <a:p>
+            <a:pPr algn="ctr"/>
+            <a:r>
+              <a:rPr lang="es-ES" dirty="0"/>
+              <a:t> </a:t>
+            </a:r>
+            <a:r>
+              <a:rPr lang="es-ES" dirty="0" err="1"/>
+              <a:t>screenshot</a:t>
+            </a:r>
+            <a:endParaRPr lang="en-US" dirty="0"/>
+          </a:p>
+        </p:txBody>
+      </p:sp>
+      <p:pic>
+        <p:nvPicPr>
+          <p:cNvPr id="5" name="Imagen 4">
+            <a:extLst>
+              <a:ext uri="{FF2B5EF4-FFF2-40B4-BE49-F238E27FC236}">
+                <a16:creationId xmlns:a16="http://schemas.microsoft.com/office/drawing/2014/main" id="{214B6168-4878-1BEF-9843-BC0217E1EB5D}"/>
+              </a:ext>
+            </a:extLst>
+          </p:cNvPr>
+          <p:cNvPicPr>
+            <a:picLocks noChangeAspect="1"/>
+          </p:cNvPicPr>
+          <p:nvPr/>
+        </p:nvPicPr>
+        <p:blipFill>
+          <a:blip r:embed="rId4"/>
+          <a:stretch>
+            <a:fillRect/>
+          </a:stretch>
+        </p:blipFill>
+        <p:spPr>
+          <a:xfrm>
+            <a:off x="6848066" y="1026057"/>
+            <a:ext cx="4648200" cy="3508935"/>
+          </a:xfrm>
+          <a:prstGeom prst="rect">
+            <a:avLst/>
+          </a:prstGeom>
+        </p:spPr>
+      </p:pic>
+      <p:pic>
+        <p:nvPicPr>
+          <p:cNvPr id="10" name="Imagen 9">
+            <a:extLst>
+              <a:ext uri="{FF2B5EF4-FFF2-40B4-BE49-F238E27FC236}">
+                <a16:creationId xmlns:a16="http://schemas.microsoft.com/office/drawing/2014/main" id="{070BD65C-C96F-5435-105A-6AE2C0CB2D07}"/>
+              </a:ext>
+            </a:extLst>
+          </p:cNvPr>
+          <p:cNvPicPr>
+            <a:picLocks noChangeAspect="1"/>
+          </p:cNvPicPr>
+          <p:nvPr/>
+        </p:nvPicPr>
+        <p:blipFill>
+          <a:blip r:embed="rId5"/>
+          <a:stretch>
+            <a:fillRect/>
+          </a:stretch>
+        </p:blipFill>
+        <p:spPr>
+          <a:xfrm>
+            <a:off x="762000" y="1026057"/>
+            <a:ext cx="4834070" cy="3310834"/>
+          </a:xfrm>
+          <a:prstGeom prst="rect">
+            <a:avLst/>
+          </a:prstGeom>
+        </p:spPr>
+      </p:pic>
+      <p:sp>
+        <p:nvSpPr>
+          <p:cNvPr id="11" name="CuadroTexto 10">
+            <a:extLst>
+              <a:ext uri="{FF2B5EF4-FFF2-40B4-BE49-F238E27FC236}">
+                <a16:creationId xmlns:a16="http://schemas.microsoft.com/office/drawing/2014/main" id="{31A042EC-CBB1-DF97-AF90-A17E68D2AD9A}"/>
+              </a:ext>
+            </a:extLst>
+          </p:cNvPr>
+          <p:cNvSpPr txBox="1"/>
+          <p:nvPr/>
+        </p:nvSpPr>
+        <p:spPr>
+          <a:xfrm>
+            <a:off x="685800" y="4718849"/>
+            <a:ext cx="10994410" cy="1015663"/>
+          </a:xfrm>
+          <a:prstGeom prst="rect">
+            <a:avLst/>
+          </a:prstGeom>
+          <a:solidFill>
+            <a:schemeClr val="bg1">
+              <a:lumMod val="95000"/>
+            </a:schemeClr>
+          </a:solidFill>
+          <a:ln w="28575">
+            <a:solidFill>
+              <a:schemeClr val="accent6">
+                <a:lumMod val="75000"/>
+              </a:schemeClr>
+            </a:solidFill>
+          </a:ln>
+        </p:spPr>
+        <p:txBody>
+          <a:bodyPr wrap="square" rtlCol="0">
+            <a:spAutoFit/>
+          </a:bodyPr>
+          <a:lstStyle/>
+          <a:p>
+            <a:pPr marL="171450" indent="-171450">
+              <a:buFont typeface="Arial" panose="020B0604020202020204" pitchFamily="34" charset="0"/>
+              <a:buChar char="•"/>
+            </a:pPr>
+            <a:r>
+              <a:rPr lang="es-ES" sz="1200" dirty="0"/>
+              <a:t>En este último bloque se completa el </a:t>
+            </a:r>
+            <a:r>
+              <a:rPr lang="es-ES" sz="1200" dirty="0" err="1"/>
+              <a:t>layout</a:t>
+            </a:r>
+            <a:r>
+              <a:rPr lang="es-ES" sz="1200" dirty="0"/>
+              <a:t> añadiendo </a:t>
+            </a:r>
+            <a:r>
+              <a:rPr lang="es-ES" sz="1200" dirty="0" err="1"/>
+              <a:t>arrays</a:t>
+            </a:r>
+            <a:r>
+              <a:rPr lang="es-ES" sz="1200" dirty="0"/>
+              <a:t> de guías rectas en los bordes izquierdo y derecho del chip. </a:t>
+            </a:r>
+          </a:p>
+          <a:p>
+            <a:pPr marL="171450" indent="-171450">
+              <a:buFont typeface="Arial" panose="020B0604020202020204" pitchFamily="34" charset="0"/>
+              <a:buChar char="•"/>
+            </a:pPr>
+            <a:r>
+              <a:rPr lang="es-ES" sz="1200" dirty="0"/>
+              <a:t>Estas guías actúan como accesos ópticos ordenados y facilitan que las entradas y salidas del circuito lleguen hasta el borde del die en tramos rectos.</a:t>
+            </a:r>
+          </a:p>
+          <a:p>
+            <a:pPr marL="171450" indent="-171450">
+              <a:buFont typeface="Arial" panose="020B0604020202020204" pitchFamily="34" charset="0"/>
+              <a:buChar char="•"/>
+            </a:pPr>
+            <a:r>
+              <a:rPr lang="es-ES" sz="1200" dirty="0"/>
+              <a:t>Después, la celda del árbol MMI 1x4 se coloca dentro del componente principal y se conecta mediante rutas S-</a:t>
+            </a:r>
+            <a:r>
+              <a:rPr lang="es-ES" sz="1200" dirty="0" err="1"/>
+              <a:t>bend</a:t>
+            </a:r>
+            <a:r>
+              <a:rPr lang="es-ES" sz="1200" dirty="0"/>
+              <a:t> (una guía de entrada alimenta el puerto o1 del árbol y las cuatro salidas o2 a o5 se conectan a las cuatro guías del array de salida. </a:t>
+            </a:r>
+          </a:p>
+          <a:p>
+            <a:pPr marL="171450" indent="-171450">
+              <a:buFont typeface="Arial" panose="020B0604020202020204" pitchFamily="34" charset="0"/>
+              <a:buChar char="•"/>
+            </a:pPr>
+            <a:r>
+              <a:rPr lang="es-ES" sz="1200" dirty="0"/>
+              <a:t>Con esto se obtiene un </a:t>
+            </a:r>
+            <a:r>
+              <a:rPr lang="es-ES" sz="1200" dirty="0" err="1"/>
+              <a:t>layout</a:t>
+            </a:r>
+            <a:r>
+              <a:rPr lang="es-ES" sz="1200" dirty="0"/>
+              <a:t> más completo, donde ya no solo aparece el componente interno, sino también su conexión hacia los bordes del chip.</a:t>
+            </a:r>
+          </a:p>
+        </p:txBody>
+      </p:sp>
+    </p:spTree>
+    <p:extLst>
+      <p:ext uri="{BB962C8B-B14F-4D97-AF65-F5344CB8AC3E}">
+        <p14:creationId xmlns:p14="http://schemas.microsoft.com/office/powerpoint/2010/main" val="3339079568"/>
+      </p:ext>
+    </p:extLst>
+  </p:cSld>
+  <p:clrMapOvr>
+    <a:masterClrMapping/>
+  </p:clrMapOvr>
+</p:sld>
+</file>
+
+<file path=ppt/slides/slide16.xml><?xml version="1.0" encoding="utf-8"?>
 <p:sld xmlns:a="http://schemas.openxmlformats.org/drawingml/2006/main" xmlns:r="http://schemas.openxmlformats.org/officeDocument/2006/relationships" xmlns:p="http://schemas.openxmlformats.org/presentationml/2006/main">
   <p:cSld>
     <p:spTree>
@@ -5903,7 +7506,7 @@
           <a:p>
             <a:fld id="{B6F15528-21DE-4FAA-801E-634DDDAF4B2B}" type="slidenum">
               <a:rPr lang="es-ES" smtClean="0"/>
-              <a:t>14</a:t>
+              <a:t>16</a:t>
             </a:fld>
             <a:endParaRPr lang="es-ES"/>
           </a:p>
@@ -6360,7 +7963,7 @@
 </p:sld>
 </file>
 
-<file path=ppt/slides/slide15.xml><?xml version="1.0" encoding="utf-8"?>
+<file path=ppt/slides/slide17.xml><?xml version="1.0" encoding="utf-8"?>
 <p:sld xmlns:a="http://schemas.openxmlformats.org/drawingml/2006/main" xmlns:r="http://schemas.openxmlformats.org/officeDocument/2006/relationships" xmlns:p="http://schemas.openxmlformats.org/presentationml/2006/main">
   <p:cSld>
     <p:spTree>
@@ -6499,7 +8102,7 @@
           <a:p>
             <a:fld id="{B6F15528-21DE-4FAA-801E-634DDDAF4B2B}" type="slidenum">
               <a:rPr lang="es-ES" smtClean="0"/>
-              <a:t>15</a:t>
+              <a:t>17</a:t>
             </a:fld>
             <a:endParaRPr lang="es-ES"/>
           </a:p>

--- a/LabBook_40.pptx
+++ b/LabBook_40.pptx
@@ -5,10 +5,10 @@
     <p:sldMasterId id="2147483648" r:id="rId1"/>
   </p:sldMasterIdLst>
   <p:notesMasterIdLst>
-    <p:notesMasterId r:id="rId19"/>
+    <p:notesMasterId r:id="rId31"/>
   </p:notesMasterIdLst>
   <p:handoutMasterIdLst>
-    <p:handoutMasterId r:id="rId20"/>
+    <p:handoutMasterId r:id="rId32"/>
   </p:handoutMasterIdLst>
   <p:sldIdLst>
     <p:sldId id="256" r:id="rId2"/>
@@ -27,7 +27,19 @@
     <p:sldId id="302" r:id="rId15"/>
     <p:sldId id="304" r:id="rId16"/>
     <p:sldId id="295" r:id="rId17"/>
-    <p:sldId id="288" r:id="rId18"/>
+    <p:sldId id="305" r:id="rId18"/>
+    <p:sldId id="316" r:id="rId19"/>
+    <p:sldId id="315" r:id="rId20"/>
+    <p:sldId id="314" r:id="rId21"/>
+    <p:sldId id="308" r:id="rId22"/>
+    <p:sldId id="313" r:id="rId23"/>
+    <p:sldId id="312" r:id="rId24"/>
+    <p:sldId id="311" r:id="rId25"/>
+    <p:sldId id="310" r:id="rId26"/>
+    <p:sldId id="309" r:id="rId27"/>
+    <p:sldId id="307" r:id="rId28"/>
+    <p:sldId id="306" r:id="rId29"/>
+    <p:sldId id="288" r:id="rId30"/>
   </p:sldIdLst>
   <p:sldSz cx="12192000" cy="6858000"/>
   <p:notesSz cx="12192000" cy="6858000"/>
@@ -242,7 +254,7 @@
           <a:p>
             <a:fld id="{8438F8DC-35B0-48E6-A86E-42F1F08DD00F}" type="datetimeFigureOut">
               <a:rPr lang="es-ES" smtClean="0"/>
-              <a:t>02/06/2026</a:t>
+              <a:t>10/06/2026</a:t>
             </a:fld>
             <a:endParaRPr lang="es-ES"/>
           </a:p>
@@ -419,7 +431,7 @@
           <a:p>
             <a:fld id="{FACBDC12-F39B-4B97-8F4D-6734F9D366FF}" type="datetimeFigureOut">
               <a:rPr lang="es-ES" smtClean="0"/>
-              <a:t>02/06/2026</a:t>
+              <a:t>10/06/2026</a:t>
             </a:fld>
             <a:endParaRPr lang="es-ES"/>
           </a:p>
@@ -1310,6 +1322,546 @@
 </p:notes>
 </file>
 
+<file path=ppt/notesSlides/notesSlide15.xml><?xml version="1.0" encoding="utf-8"?>
+<p:notes xmlns:a="http://schemas.openxmlformats.org/drawingml/2006/main" xmlns:r="http://schemas.openxmlformats.org/officeDocument/2006/relationships" xmlns:p="http://schemas.openxmlformats.org/presentationml/2006/main">
+  <p:cSld>
+    <p:spTree>
+      <p:nvGrpSpPr>
+        <p:cNvPr id="1" name="">
+          <a:extLst>
+            <a:ext uri="{FF2B5EF4-FFF2-40B4-BE49-F238E27FC236}">
+              <a16:creationId xmlns:a16="http://schemas.microsoft.com/office/drawing/2014/main" id="{B7A13302-C51B-1481-63F4-76249C8BB89D}"/>
+            </a:ext>
+          </a:extLst>
+        </p:cNvPr>
+        <p:cNvGrpSpPr/>
+        <p:nvPr/>
+      </p:nvGrpSpPr>
+      <p:grpSpPr>
+        <a:xfrm>
+          <a:off x="0" y="0"/>
+          <a:ext cx="0" cy="0"/>
+          <a:chOff x="0" y="0"/>
+          <a:chExt cx="0" cy="0"/>
+        </a:xfrm>
+      </p:grpSpPr>
+      <p:sp>
+        <p:nvSpPr>
+          <p:cNvPr id="2" name="Marcador de imagen de diapositiva 1">
+            <a:extLst>
+              <a:ext uri="{FF2B5EF4-FFF2-40B4-BE49-F238E27FC236}">
+                <a16:creationId xmlns:a16="http://schemas.microsoft.com/office/drawing/2014/main" id="{D365FC34-1E79-9703-FE20-E6476F461CC8}"/>
+              </a:ext>
+            </a:extLst>
+          </p:cNvPr>
+          <p:cNvSpPr>
+            <a:spLocks noGrp="1" noRot="1" noChangeAspect="1"/>
+          </p:cNvSpPr>
+          <p:nvPr>
+            <p:ph type="sldImg"/>
+          </p:nvPr>
+        </p:nvSpPr>
+        <p:spPr/>
+      </p:sp>
+      <p:sp>
+        <p:nvSpPr>
+          <p:cNvPr id="3" name="Marcador de notas 2">
+            <a:extLst>
+              <a:ext uri="{FF2B5EF4-FFF2-40B4-BE49-F238E27FC236}">
+                <a16:creationId xmlns:a16="http://schemas.microsoft.com/office/drawing/2014/main" id="{F3DE8658-CE8A-A8FA-FABF-CF42F5C574C7}"/>
+              </a:ext>
+            </a:extLst>
+          </p:cNvPr>
+          <p:cNvSpPr>
+            <a:spLocks noGrp="1"/>
+          </p:cNvSpPr>
+          <p:nvPr>
+            <p:ph type="body" idx="1"/>
+          </p:nvPr>
+        </p:nvSpPr>
+        <p:spPr/>
+        <p:txBody>
+          <a:bodyPr/>
+          <a:lstStyle/>
+          <a:p>
+            <a:endParaRPr lang="es-ES" dirty="0"/>
+          </a:p>
+        </p:txBody>
+      </p:sp>
+      <p:sp>
+        <p:nvSpPr>
+          <p:cNvPr id="4" name="Marcador de número de diapositiva 3">
+            <a:extLst>
+              <a:ext uri="{FF2B5EF4-FFF2-40B4-BE49-F238E27FC236}">
+                <a16:creationId xmlns:a16="http://schemas.microsoft.com/office/drawing/2014/main" id="{25757438-57F7-A3A1-28B6-5FF90024D3E3}"/>
+              </a:ext>
+            </a:extLst>
+          </p:cNvPr>
+          <p:cNvSpPr>
+            <a:spLocks noGrp="1"/>
+          </p:cNvSpPr>
+          <p:nvPr>
+            <p:ph type="sldNum" sz="quarter" idx="5"/>
+          </p:nvPr>
+        </p:nvSpPr>
+        <p:spPr/>
+        <p:txBody>
+          <a:bodyPr/>
+          <a:lstStyle/>
+          <a:p>
+            <a:fld id="{676223B9-C868-4436-87D9-1A3152E1157A}" type="slidenum">
+              <a:rPr lang="es-ES" smtClean="0"/>
+              <a:t>17</a:t>
+            </a:fld>
+            <a:endParaRPr lang="es-ES"/>
+          </a:p>
+        </p:txBody>
+      </p:sp>
+    </p:spTree>
+    <p:extLst>
+      <p:ext uri="{BB962C8B-B14F-4D97-AF65-F5344CB8AC3E}">
+        <p14:creationId xmlns:p14="http://schemas.microsoft.com/office/powerpoint/2010/main" val="602279935"/>
+      </p:ext>
+    </p:extLst>
+  </p:cSld>
+  <p:clrMapOvr>
+    <a:masterClrMapping/>
+  </p:clrMapOvr>
+</p:notes>
+</file>
+
+<file path=ppt/notesSlides/notesSlide16.xml><?xml version="1.0" encoding="utf-8"?>
+<p:notes xmlns:a="http://schemas.openxmlformats.org/drawingml/2006/main" xmlns:r="http://schemas.openxmlformats.org/officeDocument/2006/relationships" xmlns:p="http://schemas.openxmlformats.org/presentationml/2006/main">
+  <p:cSld>
+    <p:spTree>
+      <p:nvGrpSpPr>
+        <p:cNvPr id="1" name="">
+          <a:extLst>
+            <a:ext uri="{FF2B5EF4-FFF2-40B4-BE49-F238E27FC236}">
+              <a16:creationId xmlns:a16="http://schemas.microsoft.com/office/drawing/2014/main" id="{22F0D7E4-C1A1-1FFD-611B-786A536C07A4}"/>
+            </a:ext>
+          </a:extLst>
+        </p:cNvPr>
+        <p:cNvGrpSpPr/>
+        <p:nvPr/>
+      </p:nvGrpSpPr>
+      <p:grpSpPr>
+        <a:xfrm>
+          <a:off x="0" y="0"/>
+          <a:ext cx="0" cy="0"/>
+          <a:chOff x="0" y="0"/>
+          <a:chExt cx="0" cy="0"/>
+        </a:xfrm>
+      </p:grpSpPr>
+      <p:sp>
+        <p:nvSpPr>
+          <p:cNvPr id="2" name="Marcador de imagen de diapositiva 1">
+            <a:extLst>
+              <a:ext uri="{FF2B5EF4-FFF2-40B4-BE49-F238E27FC236}">
+                <a16:creationId xmlns:a16="http://schemas.microsoft.com/office/drawing/2014/main" id="{1CC35283-A632-BE36-20BC-FF6FC9DD69AB}"/>
+              </a:ext>
+            </a:extLst>
+          </p:cNvPr>
+          <p:cNvSpPr>
+            <a:spLocks noGrp="1" noRot="1" noChangeAspect="1"/>
+          </p:cNvSpPr>
+          <p:nvPr>
+            <p:ph type="sldImg"/>
+          </p:nvPr>
+        </p:nvSpPr>
+        <p:spPr/>
+      </p:sp>
+      <p:sp>
+        <p:nvSpPr>
+          <p:cNvPr id="3" name="Marcador de notas 2">
+            <a:extLst>
+              <a:ext uri="{FF2B5EF4-FFF2-40B4-BE49-F238E27FC236}">
+                <a16:creationId xmlns:a16="http://schemas.microsoft.com/office/drawing/2014/main" id="{430F01BF-C67E-5E88-1DF9-4136C1BD96BD}"/>
+              </a:ext>
+            </a:extLst>
+          </p:cNvPr>
+          <p:cNvSpPr>
+            <a:spLocks noGrp="1"/>
+          </p:cNvSpPr>
+          <p:nvPr>
+            <p:ph type="body" idx="1"/>
+          </p:nvPr>
+        </p:nvSpPr>
+        <p:spPr/>
+        <p:txBody>
+          <a:bodyPr/>
+          <a:lstStyle/>
+          <a:p>
+            <a:endParaRPr lang="es-ES" dirty="0"/>
+          </a:p>
+        </p:txBody>
+      </p:sp>
+      <p:sp>
+        <p:nvSpPr>
+          <p:cNvPr id="4" name="Marcador de número de diapositiva 3">
+            <a:extLst>
+              <a:ext uri="{FF2B5EF4-FFF2-40B4-BE49-F238E27FC236}">
+                <a16:creationId xmlns:a16="http://schemas.microsoft.com/office/drawing/2014/main" id="{134A3628-3E73-57C8-6B8F-D1DC02472A31}"/>
+              </a:ext>
+            </a:extLst>
+          </p:cNvPr>
+          <p:cNvSpPr>
+            <a:spLocks noGrp="1"/>
+          </p:cNvSpPr>
+          <p:nvPr>
+            <p:ph type="sldNum" sz="quarter" idx="5"/>
+          </p:nvPr>
+        </p:nvSpPr>
+        <p:spPr/>
+        <p:txBody>
+          <a:bodyPr/>
+          <a:lstStyle/>
+          <a:p>
+            <a:fld id="{676223B9-C868-4436-87D9-1A3152E1157A}" type="slidenum">
+              <a:rPr lang="es-ES" smtClean="0"/>
+              <a:t>18</a:t>
+            </a:fld>
+            <a:endParaRPr lang="es-ES"/>
+          </a:p>
+        </p:txBody>
+      </p:sp>
+    </p:spTree>
+    <p:extLst>
+      <p:ext uri="{BB962C8B-B14F-4D97-AF65-F5344CB8AC3E}">
+        <p14:creationId xmlns:p14="http://schemas.microsoft.com/office/powerpoint/2010/main" val="1270848936"/>
+      </p:ext>
+    </p:extLst>
+  </p:cSld>
+  <p:clrMapOvr>
+    <a:masterClrMapping/>
+  </p:clrMapOvr>
+</p:notes>
+</file>
+
+<file path=ppt/notesSlides/notesSlide17.xml><?xml version="1.0" encoding="utf-8"?>
+<p:notes xmlns:a="http://schemas.openxmlformats.org/drawingml/2006/main" xmlns:r="http://schemas.openxmlformats.org/officeDocument/2006/relationships" xmlns:p="http://schemas.openxmlformats.org/presentationml/2006/main">
+  <p:cSld>
+    <p:spTree>
+      <p:nvGrpSpPr>
+        <p:cNvPr id="1" name="">
+          <a:extLst>
+            <a:ext uri="{FF2B5EF4-FFF2-40B4-BE49-F238E27FC236}">
+              <a16:creationId xmlns:a16="http://schemas.microsoft.com/office/drawing/2014/main" id="{A0150659-BA41-D0AB-D04C-110920F4B5FD}"/>
+            </a:ext>
+          </a:extLst>
+        </p:cNvPr>
+        <p:cNvGrpSpPr/>
+        <p:nvPr/>
+      </p:nvGrpSpPr>
+      <p:grpSpPr>
+        <a:xfrm>
+          <a:off x="0" y="0"/>
+          <a:ext cx="0" cy="0"/>
+          <a:chOff x="0" y="0"/>
+          <a:chExt cx="0" cy="0"/>
+        </a:xfrm>
+      </p:grpSpPr>
+      <p:sp>
+        <p:nvSpPr>
+          <p:cNvPr id="2" name="Marcador de imagen de diapositiva 1">
+            <a:extLst>
+              <a:ext uri="{FF2B5EF4-FFF2-40B4-BE49-F238E27FC236}">
+                <a16:creationId xmlns:a16="http://schemas.microsoft.com/office/drawing/2014/main" id="{613AF224-D776-FAE5-0FB9-CF11F59313C4}"/>
+              </a:ext>
+            </a:extLst>
+          </p:cNvPr>
+          <p:cNvSpPr>
+            <a:spLocks noGrp="1" noRot="1" noChangeAspect="1"/>
+          </p:cNvSpPr>
+          <p:nvPr>
+            <p:ph type="sldImg"/>
+          </p:nvPr>
+        </p:nvSpPr>
+        <p:spPr/>
+      </p:sp>
+      <p:sp>
+        <p:nvSpPr>
+          <p:cNvPr id="3" name="Marcador de notas 2">
+            <a:extLst>
+              <a:ext uri="{FF2B5EF4-FFF2-40B4-BE49-F238E27FC236}">
+                <a16:creationId xmlns:a16="http://schemas.microsoft.com/office/drawing/2014/main" id="{A150A5E7-D3E2-8A81-27C5-0210D30A13A6}"/>
+              </a:ext>
+            </a:extLst>
+          </p:cNvPr>
+          <p:cNvSpPr>
+            <a:spLocks noGrp="1"/>
+          </p:cNvSpPr>
+          <p:nvPr>
+            <p:ph type="body" idx="1"/>
+          </p:nvPr>
+        </p:nvSpPr>
+        <p:spPr/>
+        <p:txBody>
+          <a:bodyPr/>
+          <a:lstStyle/>
+          <a:p>
+            <a:endParaRPr lang="es-ES" dirty="0"/>
+          </a:p>
+        </p:txBody>
+      </p:sp>
+      <p:sp>
+        <p:nvSpPr>
+          <p:cNvPr id="4" name="Marcador de número de diapositiva 3">
+            <a:extLst>
+              <a:ext uri="{FF2B5EF4-FFF2-40B4-BE49-F238E27FC236}">
+                <a16:creationId xmlns:a16="http://schemas.microsoft.com/office/drawing/2014/main" id="{6A35B2FD-6F6E-4C2C-EF2B-C00F3DCE4C4B}"/>
+              </a:ext>
+            </a:extLst>
+          </p:cNvPr>
+          <p:cNvSpPr>
+            <a:spLocks noGrp="1"/>
+          </p:cNvSpPr>
+          <p:nvPr>
+            <p:ph type="sldNum" sz="quarter" idx="5"/>
+          </p:nvPr>
+        </p:nvSpPr>
+        <p:spPr/>
+        <p:txBody>
+          <a:bodyPr/>
+          <a:lstStyle/>
+          <a:p>
+            <a:fld id="{676223B9-C868-4436-87D9-1A3152E1157A}" type="slidenum">
+              <a:rPr lang="es-ES" smtClean="0"/>
+              <a:t>19</a:t>
+            </a:fld>
+            <a:endParaRPr lang="es-ES"/>
+          </a:p>
+        </p:txBody>
+      </p:sp>
+    </p:spTree>
+    <p:extLst>
+      <p:ext uri="{BB962C8B-B14F-4D97-AF65-F5344CB8AC3E}">
+        <p14:creationId xmlns:p14="http://schemas.microsoft.com/office/powerpoint/2010/main" val="1009499592"/>
+      </p:ext>
+    </p:extLst>
+  </p:cSld>
+  <p:clrMapOvr>
+    <a:masterClrMapping/>
+  </p:clrMapOvr>
+</p:notes>
+</file>
+
+<file path=ppt/notesSlides/notesSlide18.xml><?xml version="1.0" encoding="utf-8"?>
+<p:notes xmlns:a="http://schemas.openxmlformats.org/drawingml/2006/main" xmlns:r="http://schemas.openxmlformats.org/officeDocument/2006/relationships" xmlns:p="http://schemas.openxmlformats.org/presentationml/2006/main">
+  <p:cSld>
+    <p:spTree>
+      <p:nvGrpSpPr>
+        <p:cNvPr id="1" name="">
+          <a:extLst>
+            <a:ext uri="{FF2B5EF4-FFF2-40B4-BE49-F238E27FC236}">
+              <a16:creationId xmlns:a16="http://schemas.microsoft.com/office/drawing/2014/main" id="{BB437EA4-370B-64DB-FE11-AE547B7C53A2}"/>
+            </a:ext>
+          </a:extLst>
+        </p:cNvPr>
+        <p:cNvGrpSpPr/>
+        <p:nvPr/>
+      </p:nvGrpSpPr>
+      <p:grpSpPr>
+        <a:xfrm>
+          <a:off x="0" y="0"/>
+          <a:ext cx="0" cy="0"/>
+          <a:chOff x="0" y="0"/>
+          <a:chExt cx="0" cy="0"/>
+        </a:xfrm>
+      </p:grpSpPr>
+      <p:sp>
+        <p:nvSpPr>
+          <p:cNvPr id="2" name="Marcador de imagen de diapositiva 1">
+            <a:extLst>
+              <a:ext uri="{FF2B5EF4-FFF2-40B4-BE49-F238E27FC236}">
+                <a16:creationId xmlns:a16="http://schemas.microsoft.com/office/drawing/2014/main" id="{76446547-FACB-9F3E-1CE5-67D8A26A22E0}"/>
+              </a:ext>
+            </a:extLst>
+          </p:cNvPr>
+          <p:cNvSpPr>
+            <a:spLocks noGrp="1" noRot="1" noChangeAspect="1"/>
+          </p:cNvSpPr>
+          <p:nvPr>
+            <p:ph type="sldImg"/>
+          </p:nvPr>
+        </p:nvSpPr>
+        <p:spPr/>
+      </p:sp>
+      <p:sp>
+        <p:nvSpPr>
+          <p:cNvPr id="3" name="Marcador de notas 2">
+            <a:extLst>
+              <a:ext uri="{FF2B5EF4-FFF2-40B4-BE49-F238E27FC236}">
+                <a16:creationId xmlns:a16="http://schemas.microsoft.com/office/drawing/2014/main" id="{5AC76C27-8F7E-CCA5-E849-D3EA8059FCBC}"/>
+              </a:ext>
+            </a:extLst>
+          </p:cNvPr>
+          <p:cNvSpPr>
+            <a:spLocks noGrp="1"/>
+          </p:cNvSpPr>
+          <p:nvPr>
+            <p:ph type="body" idx="1"/>
+          </p:nvPr>
+        </p:nvSpPr>
+        <p:spPr/>
+        <p:txBody>
+          <a:bodyPr/>
+          <a:lstStyle/>
+          <a:p>
+            <a:endParaRPr lang="es-ES" dirty="0"/>
+          </a:p>
+        </p:txBody>
+      </p:sp>
+      <p:sp>
+        <p:nvSpPr>
+          <p:cNvPr id="4" name="Marcador de número de diapositiva 3">
+            <a:extLst>
+              <a:ext uri="{FF2B5EF4-FFF2-40B4-BE49-F238E27FC236}">
+                <a16:creationId xmlns:a16="http://schemas.microsoft.com/office/drawing/2014/main" id="{A87A5F4A-368F-9F98-BFBE-DF7541704DEA}"/>
+              </a:ext>
+            </a:extLst>
+          </p:cNvPr>
+          <p:cNvSpPr>
+            <a:spLocks noGrp="1"/>
+          </p:cNvSpPr>
+          <p:nvPr>
+            <p:ph type="sldNum" sz="quarter" idx="5"/>
+          </p:nvPr>
+        </p:nvSpPr>
+        <p:spPr/>
+        <p:txBody>
+          <a:bodyPr/>
+          <a:lstStyle/>
+          <a:p>
+            <a:fld id="{676223B9-C868-4436-87D9-1A3152E1157A}" type="slidenum">
+              <a:rPr lang="es-ES" smtClean="0"/>
+              <a:t>20</a:t>
+            </a:fld>
+            <a:endParaRPr lang="es-ES"/>
+          </a:p>
+        </p:txBody>
+      </p:sp>
+    </p:spTree>
+    <p:extLst>
+      <p:ext uri="{BB962C8B-B14F-4D97-AF65-F5344CB8AC3E}">
+        <p14:creationId xmlns:p14="http://schemas.microsoft.com/office/powerpoint/2010/main" val="4033254914"/>
+      </p:ext>
+    </p:extLst>
+  </p:cSld>
+  <p:clrMapOvr>
+    <a:masterClrMapping/>
+  </p:clrMapOvr>
+</p:notes>
+</file>
+
+<file path=ppt/notesSlides/notesSlide19.xml><?xml version="1.0" encoding="utf-8"?>
+<p:notes xmlns:a="http://schemas.openxmlformats.org/drawingml/2006/main" xmlns:r="http://schemas.openxmlformats.org/officeDocument/2006/relationships" xmlns:p="http://schemas.openxmlformats.org/presentationml/2006/main">
+  <p:cSld>
+    <p:spTree>
+      <p:nvGrpSpPr>
+        <p:cNvPr id="1" name="">
+          <a:extLst>
+            <a:ext uri="{FF2B5EF4-FFF2-40B4-BE49-F238E27FC236}">
+              <a16:creationId xmlns:a16="http://schemas.microsoft.com/office/drawing/2014/main" id="{0E662FA3-78A0-4F90-C338-9BA4BD96FED6}"/>
+            </a:ext>
+          </a:extLst>
+        </p:cNvPr>
+        <p:cNvGrpSpPr/>
+        <p:nvPr/>
+      </p:nvGrpSpPr>
+      <p:grpSpPr>
+        <a:xfrm>
+          <a:off x="0" y="0"/>
+          <a:ext cx="0" cy="0"/>
+          <a:chOff x="0" y="0"/>
+          <a:chExt cx="0" cy="0"/>
+        </a:xfrm>
+      </p:grpSpPr>
+      <p:sp>
+        <p:nvSpPr>
+          <p:cNvPr id="2" name="Marcador de imagen de diapositiva 1">
+            <a:extLst>
+              <a:ext uri="{FF2B5EF4-FFF2-40B4-BE49-F238E27FC236}">
+                <a16:creationId xmlns:a16="http://schemas.microsoft.com/office/drawing/2014/main" id="{AF105646-E09D-C671-BAB8-DAEAD3036BE9}"/>
+              </a:ext>
+            </a:extLst>
+          </p:cNvPr>
+          <p:cNvSpPr>
+            <a:spLocks noGrp="1" noRot="1" noChangeAspect="1"/>
+          </p:cNvSpPr>
+          <p:nvPr>
+            <p:ph type="sldImg"/>
+          </p:nvPr>
+        </p:nvSpPr>
+        <p:spPr/>
+      </p:sp>
+      <p:sp>
+        <p:nvSpPr>
+          <p:cNvPr id="3" name="Marcador de notas 2">
+            <a:extLst>
+              <a:ext uri="{FF2B5EF4-FFF2-40B4-BE49-F238E27FC236}">
+                <a16:creationId xmlns:a16="http://schemas.microsoft.com/office/drawing/2014/main" id="{7DCEF2B6-C8DB-4661-0DE6-56BBEA86129D}"/>
+              </a:ext>
+            </a:extLst>
+          </p:cNvPr>
+          <p:cNvSpPr>
+            <a:spLocks noGrp="1"/>
+          </p:cNvSpPr>
+          <p:nvPr>
+            <p:ph type="body" idx="1"/>
+          </p:nvPr>
+        </p:nvSpPr>
+        <p:spPr/>
+        <p:txBody>
+          <a:bodyPr/>
+          <a:lstStyle/>
+          <a:p>
+            <a:endParaRPr lang="es-ES" dirty="0"/>
+          </a:p>
+        </p:txBody>
+      </p:sp>
+      <p:sp>
+        <p:nvSpPr>
+          <p:cNvPr id="4" name="Marcador de número de diapositiva 3">
+            <a:extLst>
+              <a:ext uri="{FF2B5EF4-FFF2-40B4-BE49-F238E27FC236}">
+                <a16:creationId xmlns:a16="http://schemas.microsoft.com/office/drawing/2014/main" id="{4DEED667-929E-79FF-CB1A-621DABEFCF34}"/>
+              </a:ext>
+            </a:extLst>
+          </p:cNvPr>
+          <p:cNvSpPr>
+            <a:spLocks noGrp="1"/>
+          </p:cNvSpPr>
+          <p:nvPr>
+            <p:ph type="sldNum" sz="quarter" idx="5"/>
+          </p:nvPr>
+        </p:nvSpPr>
+        <p:spPr/>
+        <p:txBody>
+          <a:bodyPr/>
+          <a:lstStyle/>
+          <a:p>
+            <a:fld id="{676223B9-C868-4436-87D9-1A3152E1157A}" type="slidenum">
+              <a:rPr lang="es-ES" smtClean="0"/>
+              <a:t>21</a:t>
+            </a:fld>
+            <a:endParaRPr lang="es-ES"/>
+          </a:p>
+        </p:txBody>
+      </p:sp>
+    </p:spTree>
+    <p:extLst>
+      <p:ext uri="{BB962C8B-B14F-4D97-AF65-F5344CB8AC3E}">
+        <p14:creationId xmlns:p14="http://schemas.microsoft.com/office/powerpoint/2010/main" val="1487023354"/>
+      </p:ext>
+    </p:extLst>
+  </p:cSld>
+  <p:clrMapOvr>
+    <a:masterClrMapping/>
+  </p:clrMapOvr>
+</p:notes>
+</file>
+
 <file path=ppt/notesSlides/notesSlide2.xml><?xml version="1.0" encoding="utf-8"?>
 <p:notes xmlns:a="http://schemas.openxmlformats.org/drawingml/2006/main" xmlns:r="http://schemas.openxmlformats.org/officeDocument/2006/relationships" xmlns:p="http://schemas.openxmlformats.org/presentationml/2006/main">
   <p:cSld>
@@ -1409,6 +1961,762 @@
     <p:extLst>
       <p:ext uri="{BB962C8B-B14F-4D97-AF65-F5344CB8AC3E}">
         <p14:creationId xmlns:p14="http://schemas.microsoft.com/office/powerpoint/2010/main" val="2687642475"/>
+      </p:ext>
+    </p:extLst>
+  </p:cSld>
+  <p:clrMapOvr>
+    <a:masterClrMapping/>
+  </p:clrMapOvr>
+</p:notes>
+</file>
+
+<file path=ppt/notesSlides/notesSlide20.xml><?xml version="1.0" encoding="utf-8"?>
+<p:notes xmlns:a="http://schemas.openxmlformats.org/drawingml/2006/main" xmlns:r="http://schemas.openxmlformats.org/officeDocument/2006/relationships" xmlns:p="http://schemas.openxmlformats.org/presentationml/2006/main">
+  <p:cSld>
+    <p:spTree>
+      <p:nvGrpSpPr>
+        <p:cNvPr id="1" name="">
+          <a:extLst>
+            <a:ext uri="{FF2B5EF4-FFF2-40B4-BE49-F238E27FC236}">
+              <a16:creationId xmlns:a16="http://schemas.microsoft.com/office/drawing/2014/main" id="{B5CD0F11-51C5-D380-0A3A-ADC0770A1DF3}"/>
+            </a:ext>
+          </a:extLst>
+        </p:cNvPr>
+        <p:cNvGrpSpPr/>
+        <p:nvPr/>
+      </p:nvGrpSpPr>
+      <p:grpSpPr>
+        <a:xfrm>
+          <a:off x="0" y="0"/>
+          <a:ext cx="0" cy="0"/>
+          <a:chOff x="0" y="0"/>
+          <a:chExt cx="0" cy="0"/>
+        </a:xfrm>
+      </p:grpSpPr>
+      <p:sp>
+        <p:nvSpPr>
+          <p:cNvPr id="2" name="Marcador de imagen de diapositiva 1">
+            <a:extLst>
+              <a:ext uri="{FF2B5EF4-FFF2-40B4-BE49-F238E27FC236}">
+                <a16:creationId xmlns:a16="http://schemas.microsoft.com/office/drawing/2014/main" id="{3AA6031E-FBC5-5B59-5D64-C3A44860A930}"/>
+              </a:ext>
+            </a:extLst>
+          </p:cNvPr>
+          <p:cNvSpPr>
+            <a:spLocks noGrp="1" noRot="1" noChangeAspect="1"/>
+          </p:cNvSpPr>
+          <p:nvPr>
+            <p:ph type="sldImg"/>
+          </p:nvPr>
+        </p:nvSpPr>
+        <p:spPr/>
+      </p:sp>
+      <p:sp>
+        <p:nvSpPr>
+          <p:cNvPr id="3" name="Marcador de notas 2">
+            <a:extLst>
+              <a:ext uri="{FF2B5EF4-FFF2-40B4-BE49-F238E27FC236}">
+                <a16:creationId xmlns:a16="http://schemas.microsoft.com/office/drawing/2014/main" id="{75D0AABB-96A1-F74C-9B47-487EF6BB1DC1}"/>
+              </a:ext>
+            </a:extLst>
+          </p:cNvPr>
+          <p:cNvSpPr>
+            <a:spLocks noGrp="1"/>
+          </p:cNvSpPr>
+          <p:nvPr>
+            <p:ph type="body" idx="1"/>
+          </p:nvPr>
+        </p:nvSpPr>
+        <p:spPr/>
+        <p:txBody>
+          <a:bodyPr/>
+          <a:lstStyle/>
+          <a:p>
+            <a:endParaRPr lang="es-ES" dirty="0"/>
+          </a:p>
+        </p:txBody>
+      </p:sp>
+      <p:sp>
+        <p:nvSpPr>
+          <p:cNvPr id="4" name="Marcador de número de diapositiva 3">
+            <a:extLst>
+              <a:ext uri="{FF2B5EF4-FFF2-40B4-BE49-F238E27FC236}">
+                <a16:creationId xmlns:a16="http://schemas.microsoft.com/office/drawing/2014/main" id="{FED45E4E-9B79-24D7-480F-1B2958D473AC}"/>
+              </a:ext>
+            </a:extLst>
+          </p:cNvPr>
+          <p:cNvSpPr>
+            <a:spLocks noGrp="1"/>
+          </p:cNvSpPr>
+          <p:nvPr>
+            <p:ph type="sldNum" sz="quarter" idx="5"/>
+          </p:nvPr>
+        </p:nvSpPr>
+        <p:spPr/>
+        <p:txBody>
+          <a:bodyPr/>
+          <a:lstStyle/>
+          <a:p>
+            <a:fld id="{676223B9-C868-4436-87D9-1A3152E1157A}" type="slidenum">
+              <a:rPr lang="es-ES" smtClean="0"/>
+              <a:t>22</a:t>
+            </a:fld>
+            <a:endParaRPr lang="es-ES"/>
+          </a:p>
+        </p:txBody>
+      </p:sp>
+    </p:spTree>
+    <p:extLst>
+      <p:ext uri="{BB962C8B-B14F-4D97-AF65-F5344CB8AC3E}">
+        <p14:creationId xmlns:p14="http://schemas.microsoft.com/office/powerpoint/2010/main" val="2572140978"/>
+      </p:ext>
+    </p:extLst>
+  </p:cSld>
+  <p:clrMapOvr>
+    <a:masterClrMapping/>
+  </p:clrMapOvr>
+</p:notes>
+</file>
+
+<file path=ppt/notesSlides/notesSlide21.xml><?xml version="1.0" encoding="utf-8"?>
+<p:notes xmlns:a="http://schemas.openxmlformats.org/drawingml/2006/main" xmlns:r="http://schemas.openxmlformats.org/officeDocument/2006/relationships" xmlns:p="http://schemas.openxmlformats.org/presentationml/2006/main">
+  <p:cSld>
+    <p:spTree>
+      <p:nvGrpSpPr>
+        <p:cNvPr id="1" name="">
+          <a:extLst>
+            <a:ext uri="{FF2B5EF4-FFF2-40B4-BE49-F238E27FC236}">
+              <a16:creationId xmlns:a16="http://schemas.microsoft.com/office/drawing/2014/main" id="{4DD472E5-C595-B7F8-3856-34264B96BDE4}"/>
+            </a:ext>
+          </a:extLst>
+        </p:cNvPr>
+        <p:cNvGrpSpPr/>
+        <p:nvPr/>
+      </p:nvGrpSpPr>
+      <p:grpSpPr>
+        <a:xfrm>
+          <a:off x="0" y="0"/>
+          <a:ext cx="0" cy="0"/>
+          <a:chOff x="0" y="0"/>
+          <a:chExt cx="0" cy="0"/>
+        </a:xfrm>
+      </p:grpSpPr>
+      <p:sp>
+        <p:nvSpPr>
+          <p:cNvPr id="2" name="Marcador de imagen de diapositiva 1">
+            <a:extLst>
+              <a:ext uri="{FF2B5EF4-FFF2-40B4-BE49-F238E27FC236}">
+                <a16:creationId xmlns:a16="http://schemas.microsoft.com/office/drawing/2014/main" id="{B59C0815-358C-FF54-F935-8E13D0A41598}"/>
+              </a:ext>
+            </a:extLst>
+          </p:cNvPr>
+          <p:cNvSpPr>
+            <a:spLocks noGrp="1" noRot="1" noChangeAspect="1"/>
+          </p:cNvSpPr>
+          <p:nvPr>
+            <p:ph type="sldImg"/>
+          </p:nvPr>
+        </p:nvSpPr>
+        <p:spPr/>
+      </p:sp>
+      <p:sp>
+        <p:nvSpPr>
+          <p:cNvPr id="3" name="Marcador de notas 2">
+            <a:extLst>
+              <a:ext uri="{FF2B5EF4-FFF2-40B4-BE49-F238E27FC236}">
+                <a16:creationId xmlns:a16="http://schemas.microsoft.com/office/drawing/2014/main" id="{8A037434-503E-B7D0-F698-14B399469F1F}"/>
+              </a:ext>
+            </a:extLst>
+          </p:cNvPr>
+          <p:cNvSpPr>
+            <a:spLocks noGrp="1"/>
+          </p:cNvSpPr>
+          <p:nvPr>
+            <p:ph type="body" idx="1"/>
+          </p:nvPr>
+        </p:nvSpPr>
+        <p:spPr/>
+        <p:txBody>
+          <a:bodyPr/>
+          <a:lstStyle/>
+          <a:p>
+            <a:endParaRPr lang="es-ES" dirty="0"/>
+          </a:p>
+        </p:txBody>
+      </p:sp>
+      <p:sp>
+        <p:nvSpPr>
+          <p:cNvPr id="4" name="Marcador de número de diapositiva 3">
+            <a:extLst>
+              <a:ext uri="{FF2B5EF4-FFF2-40B4-BE49-F238E27FC236}">
+                <a16:creationId xmlns:a16="http://schemas.microsoft.com/office/drawing/2014/main" id="{D887011D-E843-56E1-0B9C-272CE4F8C640}"/>
+              </a:ext>
+            </a:extLst>
+          </p:cNvPr>
+          <p:cNvSpPr>
+            <a:spLocks noGrp="1"/>
+          </p:cNvSpPr>
+          <p:nvPr>
+            <p:ph type="sldNum" sz="quarter" idx="5"/>
+          </p:nvPr>
+        </p:nvSpPr>
+        <p:spPr/>
+        <p:txBody>
+          <a:bodyPr/>
+          <a:lstStyle/>
+          <a:p>
+            <a:fld id="{676223B9-C868-4436-87D9-1A3152E1157A}" type="slidenum">
+              <a:rPr lang="es-ES" smtClean="0"/>
+              <a:t>23</a:t>
+            </a:fld>
+            <a:endParaRPr lang="es-ES"/>
+          </a:p>
+        </p:txBody>
+      </p:sp>
+    </p:spTree>
+    <p:extLst>
+      <p:ext uri="{BB962C8B-B14F-4D97-AF65-F5344CB8AC3E}">
+        <p14:creationId xmlns:p14="http://schemas.microsoft.com/office/powerpoint/2010/main" val="1354548356"/>
+      </p:ext>
+    </p:extLst>
+  </p:cSld>
+  <p:clrMapOvr>
+    <a:masterClrMapping/>
+  </p:clrMapOvr>
+</p:notes>
+</file>
+
+<file path=ppt/notesSlides/notesSlide22.xml><?xml version="1.0" encoding="utf-8"?>
+<p:notes xmlns:a="http://schemas.openxmlformats.org/drawingml/2006/main" xmlns:r="http://schemas.openxmlformats.org/officeDocument/2006/relationships" xmlns:p="http://schemas.openxmlformats.org/presentationml/2006/main">
+  <p:cSld>
+    <p:spTree>
+      <p:nvGrpSpPr>
+        <p:cNvPr id="1" name="">
+          <a:extLst>
+            <a:ext uri="{FF2B5EF4-FFF2-40B4-BE49-F238E27FC236}">
+              <a16:creationId xmlns:a16="http://schemas.microsoft.com/office/drawing/2014/main" id="{A2F2A5D8-F2C5-74D4-33C8-268D7768F1E4}"/>
+            </a:ext>
+          </a:extLst>
+        </p:cNvPr>
+        <p:cNvGrpSpPr/>
+        <p:nvPr/>
+      </p:nvGrpSpPr>
+      <p:grpSpPr>
+        <a:xfrm>
+          <a:off x="0" y="0"/>
+          <a:ext cx="0" cy="0"/>
+          <a:chOff x="0" y="0"/>
+          <a:chExt cx="0" cy="0"/>
+        </a:xfrm>
+      </p:grpSpPr>
+      <p:sp>
+        <p:nvSpPr>
+          <p:cNvPr id="2" name="Marcador de imagen de diapositiva 1">
+            <a:extLst>
+              <a:ext uri="{FF2B5EF4-FFF2-40B4-BE49-F238E27FC236}">
+                <a16:creationId xmlns:a16="http://schemas.microsoft.com/office/drawing/2014/main" id="{7F1273DC-4B21-903E-6F07-0199E5DCB0C1}"/>
+              </a:ext>
+            </a:extLst>
+          </p:cNvPr>
+          <p:cNvSpPr>
+            <a:spLocks noGrp="1" noRot="1" noChangeAspect="1"/>
+          </p:cNvSpPr>
+          <p:nvPr>
+            <p:ph type="sldImg"/>
+          </p:nvPr>
+        </p:nvSpPr>
+        <p:spPr/>
+      </p:sp>
+      <p:sp>
+        <p:nvSpPr>
+          <p:cNvPr id="3" name="Marcador de notas 2">
+            <a:extLst>
+              <a:ext uri="{FF2B5EF4-FFF2-40B4-BE49-F238E27FC236}">
+                <a16:creationId xmlns:a16="http://schemas.microsoft.com/office/drawing/2014/main" id="{B84855EE-64D5-A39F-4CFC-87C4F30AE3FD}"/>
+              </a:ext>
+            </a:extLst>
+          </p:cNvPr>
+          <p:cNvSpPr>
+            <a:spLocks noGrp="1"/>
+          </p:cNvSpPr>
+          <p:nvPr>
+            <p:ph type="body" idx="1"/>
+          </p:nvPr>
+        </p:nvSpPr>
+        <p:spPr/>
+        <p:txBody>
+          <a:bodyPr/>
+          <a:lstStyle/>
+          <a:p>
+            <a:endParaRPr lang="es-ES" dirty="0"/>
+          </a:p>
+        </p:txBody>
+      </p:sp>
+      <p:sp>
+        <p:nvSpPr>
+          <p:cNvPr id="4" name="Marcador de número de diapositiva 3">
+            <a:extLst>
+              <a:ext uri="{FF2B5EF4-FFF2-40B4-BE49-F238E27FC236}">
+                <a16:creationId xmlns:a16="http://schemas.microsoft.com/office/drawing/2014/main" id="{0EA608CF-8358-8FCC-C0DD-98A17F09A9F9}"/>
+              </a:ext>
+            </a:extLst>
+          </p:cNvPr>
+          <p:cNvSpPr>
+            <a:spLocks noGrp="1"/>
+          </p:cNvSpPr>
+          <p:nvPr>
+            <p:ph type="sldNum" sz="quarter" idx="5"/>
+          </p:nvPr>
+        </p:nvSpPr>
+        <p:spPr/>
+        <p:txBody>
+          <a:bodyPr/>
+          <a:lstStyle/>
+          <a:p>
+            <a:fld id="{676223B9-C868-4436-87D9-1A3152E1157A}" type="slidenum">
+              <a:rPr lang="es-ES" smtClean="0"/>
+              <a:t>24</a:t>
+            </a:fld>
+            <a:endParaRPr lang="es-ES"/>
+          </a:p>
+        </p:txBody>
+      </p:sp>
+    </p:spTree>
+    <p:extLst>
+      <p:ext uri="{BB962C8B-B14F-4D97-AF65-F5344CB8AC3E}">
+        <p14:creationId xmlns:p14="http://schemas.microsoft.com/office/powerpoint/2010/main" val="1710906270"/>
+      </p:ext>
+    </p:extLst>
+  </p:cSld>
+  <p:clrMapOvr>
+    <a:masterClrMapping/>
+  </p:clrMapOvr>
+</p:notes>
+</file>
+
+<file path=ppt/notesSlides/notesSlide23.xml><?xml version="1.0" encoding="utf-8"?>
+<p:notes xmlns:a="http://schemas.openxmlformats.org/drawingml/2006/main" xmlns:r="http://schemas.openxmlformats.org/officeDocument/2006/relationships" xmlns:p="http://schemas.openxmlformats.org/presentationml/2006/main">
+  <p:cSld>
+    <p:spTree>
+      <p:nvGrpSpPr>
+        <p:cNvPr id="1" name="">
+          <a:extLst>
+            <a:ext uri="{FF2B5EF4-FFF2-40B4-BE49-F238E27FC236}">
+              <a16:creationId xmlns:a16="http://schemas.microsoft.com/office/drawing/2014/main" id="{E1783EEE-1054-B7CE-C6DB-627B9D2BFA6A}"/>
+            </a:ext>
+          </a:extLst>
+        </p:cNvPr>
+        <p:cNvGrpSpPr/>
+        <p:nvPr/>
+      </p:nvGrpSpPr>
+      <p:grpSpPr>
+        <a:xfrm>
+          <a:off x="0" y="0"/>
+          <a:ext cx="0" cy="0"/>
+          <a:chOff x="0" y="0"/>
+          <a:chExt cx="0" cy="0"/>
+        </a:xfrm>
+      </p:grpSpPr>
+      <p:sp>
+        <p:nvSpPr>
+          <p:cNvPr id="2" name="Marcador de imagen de diapositiva 1">
+            <a:extLst>
+              <a:ext uri="{FF2B5EF4-FFF2-40B4-BE49-F238E27FC236}">
+                <a16:creationId xmlns:a16="http://schemas.microsoft.com/office/drawing/2014/main" id="{989BCD3F-0018-C4E3-0FE8-F36A7A02E43D}"/>
+              </a:ext>
+            </a:extLst>
+          </p:cNvPr>
+          <p:cNvSpPr>
+            <a:spLocks noGrp="1" noRot="1" noChangeAspect="1"/>
+          </p:cNvSpPr>
+          <p:nvPr>
+            <p:ph type="sldImg"/>
+          </p:nvPr>
+        </p:nvSpPr>
+        <p:spPr/>
+      </p:sp>
+      <p:sp>
+        <p:nvSpPr>
+          <p:cNvPr id="3" name="Marcador de notas 2">
+            <a:extLst>
+              <a:ext uri="{FF2B5EF4-FFF2-40B4-BE49-F238E27FC236}">
+                <a16:creationId xmlns:a16="http://schemas.microsoft.com/office/drawing/2014/main" id="{D1274275-419B-CC51-54DD-D58FCA14666A}"/>
+              </a:ext>
+            </a:extLst>
+          </p:cNvPr>
+          <p:cNvSpPr>
+            <a:spLocks noGrp="1"/>
+          </p:cNvSpPr>
+          <p:nvPr>
+            <p:ph type="body" idx="1"/>
+          </p:nvPr>
+        </p:nvSpPr>
+        <p:spPr/>
+        <p:txBody>
+          <a:bodyPr/>
+          <a:lstStyle/>
+          <a:p>
+            <a:endParaRPr lang="es-ES" dirty="0"/>
+          </a:p>
+        </p:txBody>
+      </p:sp>
+      <p:sp>
+        <p:nvSpPr>
+          <p:cNvPr id="4" name="Marcador de número de diapositiva 3">
+            <a:extLst>
+              <a:ext uri="{FF2B5EF4-FFF2-40B4-BE49-F238E27FC236}">
+                <a16:creationId xmlns:a16="http://schemas.microsoft.com/office/drawing/2014/main" id="{9F21A584-FEF5-58E6-E185-11498461B920}"/>
+              </a:ext>
+            </a:extLst>
+          </p:cNvPr>
+          <p:cNvSpPr>
+            <a:spLocks noGrp="1"/>
+          </p:cNvSpPr>
+          <p:nvPr>
+            <p:ph type="sldNum" sz="quarter" idx="5"/>
+          </p:nvPr>
+        </p:nvSpPr>
+        <p:spPr/>
+        <p:txBody>
+          <a:bodyPr/>
+          <a:lstStyle/>
+          <a:p>
+            <a:fld id="{676223B9-C868-4436-87D9-1A3152E1157A}" type="slidenum">
+              <a:rPr lang="es-ES" smtClean="0"/>
+              <a:t>25</a:t>
+            </a:fld>
+            <a:endParaRPr lang="es-ES"/>
+          </a:p>
+        </p:txBody>
+      </p:sp>
+    </p:spTree>
+    <p:extLst>
+      <p:ext uri="{BB962C8B-B14F-4D97-AF65-F5344CB8AC3E}">
+        <p14:creationId xmlns:p14="http://schemas.microsoft.com/office/powerpoint/2010/main" val="88811639"/>
+      </p:ext>
+    </p:extLst>
+  </p:cSld>
+  <p:clrMapOvr>
+    <a:masterClrMapping/>
+  </p:clrMapOvr>
+</p:notes>
+</file>
+
+<file path=ppt/notesSlides/notesSlide24.xml><?xml version="1.0" encoding="utf-8"?>
+<p:notes xmlns:a="http://schemas.openxmlformats.org/drawingml/2006/main" xmlns:r="http://schemas.openxmlformats.org/officeDocument/2006/relationships" xmlns:p="http://schemas.openxmlformats.org/presentationml/2006/main">
+  <p:cSld>
+    <p:spTree>
+      <p:nvGrpSpPr>
+        <p:cNvPr id="1" name="">
+          <a:extLst>
+            <a:ext uri="{FF2B5EF4-FFF2-40B4-BE49-F238E27FC236}">
+              <a16:creationId xmlns:a16="http://schemas.microsoft.com/office/drawing/2014/main" id="{0E19A2A3-5F46-B019-F4B5-96CCEAF57C81}"/>
+            </a:ext>
+          </a:extLst>
+        </p:cNvPr>
+        <p:cNvGrpSpPr/>
+        <p:nvPr/>
+      </p:nvGrpSpPr>
+      <p:grpSpPr>
+        <a:xfrm>
+          <a:off x="0" y="0"/>
+          <a:ext cx="0" cy="0"/>
+          <a:chOff x="0" y="0"/>
+          <a:chExt cx="0" cy="0"/>
+        </a:xfrm>
+      </p:grpSpPr>
+      <p:sp>
+        <p:nvSpPr>
+          <p:cNvPr id="2" name="Marcador de imagen de diapositiva 1">
+            <a:extLst>
+              <a:ext uri="{FF2B5EF4-FFF2-40B4-BE49-F238E27FC236}">
+                <a16:creationId xmlns:a16="http://schemas.microsoft.com/office/drawing/2014/main" id="{1FDB951D-09C4-F1D2-EBBD-69F5BF93D7A5}"/>
+              </a:ext>
+            </a:extLst>
+          </p:cNvPr>
+          <p:cNvSpPr>
+            <a:spLocks noGrp="1" noRot="1" noChangeAspect="1"/>
+          </p:cNvSpPr>
+          <p:nvPr>
+            <p:ph type="sldImg"/>
+          </p:nvPr>
+        </p:nvSpPr>
+        <p:spPr/>
+      </p:sp>
+      <p:sp>
+        <p:nvSpPr>
+          <p:cNvPr id="3" name="Marcador de notas 2">
+            <a:extLst>
+              <a:ext uri="{FF2B5EF4-FFF2-40B4-BE49-F238E27FC236}">
+                <a16:creationId xmlns:a16="http://schemas.microsoft.com/office/drawing/2014/main" id="{20D916E6-6EC4-ADC0-7BCD-AF47EBE333A7}"/>
+              </a:ext>
+            </a:extLst>
+          </p:cNvPr>
+          <p:cNvSpPr>
+            <a:spLocks noGrp="1"/>
+          </p:cNvSpPr>
+          <p:nvPr>
+            <p:ph type="body" idx="1"/>
+          </p:nvPr>
+        </p:nvSpPr>
+        <p:spPr/>
+        <p:txBody>
+          <a:bodyPr/>
+          <a:lstStyle/>
+          <a:p>
+            <a:endParaRPr lang="es-ES" dirty="0"/>
+          </a:p>
+        </p:txBody>
+      </p:sp>
+      <p:sp>
+        <p:nvSpPr>
+          <p:cNvPr id="4" name="Marcador de número de diapositiva 3">
+            <a:extLst>
+              <a:ext uri="{FF2B5EF4-FFF2-40B4-BE49-F238E27FC236}">
+                <a16:creationId xmlns:a16="http://schemas.microsoft.com/office/drawing/2014/main" id="{C84802E4-7EEC-FF0C-297D-B298C1E8F063}"/>
+              </a:ext>
+            </a:extLst>
+          </p:cNvPr>
+          <p:cNvSpPr>
+            <a:spLocks noGrp="1"/>
+          </p:cNvSpPr>
+          <p:nvPr>
+            <p:ph type="sldNum" sz="quarter" idx="5"/>
+          </p:nvPr>
+        </p:nvSpPr>
+        <p:spPr/>
+        <p:txBody>
+          <a:bodyPr/>
+          <a:lstStyle/>
+          <a:p>
+            <a:fld id="{676223B9-C868-4436-87D9-1A3152E1157A}" type="slidenum">
+              <a:rPr lang="es-ES" smtClean="0"/>
+              <a:t>26</a:t>
+            </a:fld>
+            <a:endParaRPr lang="es-ES"/>
+          </a:p>
+        </p:txBody>
+      </p:sp>
+    </p:spTree>
+    <p:extLst>
+      <p:ext uri="{BB962C8B-B14F-4D97-AF65-F5344CB8AC3E}">
+        <p14:creationId xmlns:p14="http://schemas.microsoft.com/office/powerpoint/2010/main" val="168128157"/>
+      </p:ext>
+    </p:extLst>
+  </p:cSld>
+  <p:clrMapOvr>
+    <a:masterClrMapping/>
+  </p:clrMapOvr>
+</p:notes>
+</file>
+
+<file path=ppt/notesSlides/notesSlide25.xml><?xml version="1.0" encoding="utf-8"?>
+<p:notes xmlns:a="http://schemas.openxmlformats.org/drawingml/2006/main" xmlns:r="http://schemas.openxmlformats.org/officeDocument/2006/relationships" xmlns:p="http://schemas.openxmlformats.org/presentationml/2006/main">
+  <p:cSld>
+    <p:spTree>
+      <p:nvGrpSpPr>
+        <p:cNvPr id="1" name="">
+          <a:extLst>
+            <a:ext uri="{FF2B5EF4-FFF2-40B4-BE49-F238E27FC236}">
+              <a16:creationId xmlns:a16="http://schemas.microsoft.com/office/drawing/2014/main" id="{DEFF984E-97B6-92B2-84BC-1A4D77632CE3}"/>
+            </a:ext>
+          </a:extLst>
+        </p:cNvPr>
+        <p:cNvGrpSpPr/>
+        <p:nvPr/>
+      </p:nvGrpSpPr>
+      <p:grpSpPr>
+        <a:xfrm>
+          <a:off x="0" y="0"/>
+          <a:ext cx="0" cy="0"/>
+          <a:chOff x="0" y="0"/>
+          <a:chExt cx="0" cy="0"/>
+        </a:xfrm>
+      </p:grpSpPr>
+      <p:sp>
+        <p:nvSpPr>
+          <p:cNvPr id="2" name="Marcador de imagen de diapositiva 1">
+            <a:extLst>
+              <a:ext uri="{FF2B5EF4-FFF2-40B4-BE49-F238E27FC236}">
+                <a16:creationId xmlns:a16="http://schemas.microsoft.com/office/drawing/2014/main" id="{E0AA64C8-03C1-6298-49D8-653C97974CB6}"/>
+              </a:ext>
+            </a:extLst>
+          </p:cNvPr>
+          <p:cNvSpPr>
+            <a:spLocks noGrp="1" noRot="1" noChangeAspect="1"/>
+          </p:cNvSpPr>
+          <p:nvPr>
+            <p:ph type="sldImg"/>
+          </p:nvPr>
+        </p:nvSpPr>
+        <p:spPr/>
+      </p:sp>
+      <p:sp>
+        <p:nvSpPr>
+          <p:cNvPr id="3" name="Marcador de notas 2">
+            <a:extLst>
+              <a:ext uri="{FF2B5EF4-FFF2-40B4-BE49-F238E27FC236}">
+                <a16:creationId xmlns:a16="http://schemas.microsoft.com/office/drawing/2014/main" id="{C4F1B52D-96FF-D1FA-7D4C-C7CAD3F8180C}"/>
+              </a:ext>
+            </a:extLst>
+          </p:cNvPr>
+          <p:cNvSpPr>
+            <a:spLocks noGrp="1"/>
+          </p:cNvSpPr>
+          <p:nvPr>
+            <p:ph type="body" idx="1"/>
+          </p:nvPr>
+        </p:nvSpPr>
+        <p:spPr/>
+        <p:txBody>
+          <a:bodyPr/>
+          <a:lstStyle/>
+          <a:p>
+            <a:endParaRPr lang="es-ES" dirty="0"/>
+          </a:p>
+        </p:txBody>
+      </p:sp>
+      <p:sp>
+        <p:nvSpPr>
+          <p:cNvPr id="4" name="Marcador de número de diapositiva 3">
+            <a:extLst>
+              <a:ext uri="{FF2B5EF4-FFF2-40B4-BE49-F238E27FC236}">
+                <a16:creationId xmlns:a16="http://schemas.microsoft.com/office/drawing/2014/main" id="{02DE7D01-FB3A-5019-F94E-D314F2DDE921}"/>
+              </a:ext>
+            </a:extLst>
+          </p:cNvPr>
+          <p:cNvSpPr>
+            <a:spLocks noGrp="1"/>
+          </p:cNvSpPr>
+          <p:nvPr>
+            <p:ph type="sldNum" sz="quarter" idx="5"/>
+          </p:nvPr>
+        </p:nvSpPr>
+        <p:spPr/>
+        <p:txBody>
+          <a:bodyPr/>
+          <a:lstStyle/>
+          <a:p>
+            <a:fld id="{676223B9-C868-4436-87D9-1A3152E1157A}" type="slidenum">
+              <a:rPr lang="es-ES" smtClean="0"/>
+              <a:t>27</a:t>
+            </a:fld>
+            <a:endParaRPr lang="es-ES"/>
+          </a:p>
+        </p:txBody>
+      </p:sp>
+    </p:spTree>
+    <p:extLst>
+      <p:ext uri="{BB962C8B-B14F-4D97-AF65-F5344CB8AC3E}">
+        <p14:creationId xmlns:p14="http://schemas.microsoft.com/office/powerpoint/2010/main" val="1828933668"/>
+      </p:ext>
+    </p:extLst>
+  </p:cSld>
+  <p:clrMapOvr>
+    <a:masterClrMapping/>
+  </p:clrMapOvr>
+</p:notes>
+</file>
+
+<file path=ppt/notesSlides/notesSlide26.xml><?xml version="1.0" encoding="utf-8"?>
+<p:notes xmlns:a="http://schemas.openxmlformats.org/drawingml/2006/main" xmlns:r="http://schemas.openxmlformats.org/officeDocument/2006/relationships" xmlns:p="http://schemas.openxmlformats.org/presentationml/2006/main">
+  <p:cSld>
+    <p:spTree>
+      <p:nvGrpSpPr>
+        <p:cNvPr id="1" name="">
+          <a:extLst>
+            <a:ext uri="{FF2B5EF4-FFF2-40B4-BE49-F238E27FC236}">
+              <a16:creationId xmlns:a16="http://schemas.microsoft.com/office/drawing/2014/main" id="{3F6ECEC1-3DBC-DBA7-2BE6-5ABF034095A0}"/>
+            </a:ext>
+          </a:extLst>
+        </p:cNvPr>
+        <p:cNvGrpSpPr/>
+        <p:nvPr/>
+      </p:nvGrpSpPr>
+      <p:grpSpPr>
+        <a:xfrm>
+          <a:off x="0" y="0"/>
+          <a:ext cx="0" cy="0"/>
+          <a:chOff x="0" y="0"/>
+          <a:chExt cx="0" cy="0"/>
+        </a:xfrm>
+      </p:grpSpPr>
+      <p:sp>
+        <p:nvSpPr>
+          <p:cNvPr id="2" name="Marcador de imagen de diapositiva 1">
+            <a:extLst>
+              <a:ext uri="{FF2B5EF4-FFF2-40B4-BE49-F238E27FC236}">
+                <a16:creationId xmlns:a16="http://schemas.microsoft.com/office/drawing/2014/main" id="{59CFAFBC-4EEB-F557-84CA-51E5134F99E4}"/>
+              </a:ext>
+            </a:extLst>
+          </p:cNvPr>
+          <p:cNvSpPr>
+            <a:spLocks noGrp="1" noRot="1" noChangeAspect="1"/>
+          </p:cNvSpPr>
+          <p:nvPr>
+            <p:ph type="sldImg"/>
+          </p:nvPr>
+        </p:nvSpPr>
+        <p:spPr/>
+      </p:sp>
+      <p:sp>
+        <p:nvSpPr>
+          <p:cNvPr id="3" name="Marcador de notas 2">
+            <a:extLst>
+              <a:ext uri="{FF2B5EF4-FFF2-40B4-BE49-F238E27FC236}">
+                <a16:creationId xmlns:a16="http://schemas.microsoft.com/office/drawing/2014/main" id="{4E1CE599-607D-DEBC-25E7-8A1BEFD0340C}"/>
+              </a:ext>
+            </a:extLst>
+          </p:cNvPr>
+          <p:cNvSpPr>
+            <a:spLocks noGrp="1"/>
+          </p:cNvSpPr>
+          <p:nvPr>
+            <p:ph type="body" idx="1"/>
+          </p:nvPr>
+        </p:nvSpPr>
+        <p:spPr/>
+        <p:txBody>
+          <a:bodyPr/>
+          <a:lstStyle/>
+          <a:p>
+            <a:endParaRPr lang="es-ES" dirty="0"/>
+          </a:p>
+        </p:txBody>
+      </p:sp>
+      <p:sp>
+        <p:nvSpPr>
+          <p:cNvPr id="4" name="Marcador de número de diapositiva 3">
+            <a:extLst>
+              <a:ext uri="{FF2B5EF4-FFF2-40B4-BE49-F238E27FC236}">
+                <a16:creationId xmlns:a16="http://schemas.microsoft.com/office/drawing/2014/main" id="{9999A66E-6EED-8989-99D4-1F9586252B79}"/>
+              </a:ext>
+            </a:extLst>
+          </p:cNvPr>
+          <p:cNvSpPr>
+            <a:spLocks noGrp="1"/>
+          </p:cNvSpPr>
+          <p:nvPr>
+            <p:ph type="sldNum" sz="quarter" idx="5"/>
+          </p:nvPr>
+        </p:nvSpPr>
+        <p:spPr/>
+        <p:txBody>
+          <a:bodyPr/>
+          <a:lstStyle/>
+          <a:p>
+            <a:fld id="{676223B9-C868-4436-87D9-1A3152E1157A}" type="slidenum">
+              <a:rPr lang="es-ES" smtClean="0"/>
+              <a:t>28</a:t>
+            </a:fld>
+            <a:endParaRPr lang="es-ES"/>
+          </a:p>
+        </p:txBody>
+      </p:sp>
+    </p:spTree>
+    <p:extLst>
+      <p:ext uri="{BB962C8B-B14F-4D97-AF65-F5344CB8AC3E}">
+        <p14:creationId xmlns:p14="http://schemas.microsoft.com/office/powerpoint/2010/main" val="2596355982"/>
       </p:ext>
     </p:extLst>
   </p:cSld>
@@ -7561,7 +8869,7 @@
         <p:spPr>
           <a:xfrm>
             <a:off x="685800" y="990600"/>
-            <a:ext cx="5410200" cy="5181600"/>
+            <a:ext cx="10994410" cy="5181600"/>
           </a:xfrm>
           <a:prstGeom prst="rect">
             <a:avLst/>
@@ -7846,107 +9154,6 @@
               </a:rPr>
               <a:t> </a:t>
             </a:r>
-          </a:p>
-        </p:txBody>
-      </p:sp>
-      <p:sp>
-        <p:nvSpPr>
-          <p:cNvPr id="8" name="Rectángulo 7">
-            <a:extLst>
-              <a:ext uri="{FF2B5EF4-FFF2-40B4-BE49-F238E27FC236}">
-                <a16:creationId xmlns:a16="http://schemas.microsoft.com/office/drawing/2014/main" id="{B7F15AC0-F440-2DF1-6C9D-0A7E2EAFC2C8}"/>
-              </a:ext>
-            </a:extLst>
-          </p:cNvPr>
-          <p:cNvSpPr/>
-          <p:nvPr/>
-        </p:nvSpPr>
-        <p:spPr>
-          <a:xfrm>
-            <a:off x="6248400" y="990285"/>
-            <a:ext cx="5638799" cy="5181600"/>
-          </a:xfrm>
-          <a:prstGeom prst="rect">
-            <a:avLst/>
-          </a:prstGeom>
-          <a:noFill/>
-          <a:ln w="28575">
-            <a:solidFill>
-              <a:srgbClr val="E0700D"/>
-            </a:solidFill>
-          </a:ln>
-        </p:spPr>
-        <p:style>
-          <a:lnRef idx="2">
-            <a:schemeClr val="accent1">
-              <a:shade val="15000"/>
-            </a:schemeClr>
-          </a:lnRef>
-          <a:fillRef idx="1">
-            <a:schemeClr val="accent1"/>
-          </a:fillRef>
-          <a:effectRef idx="0">
-            <a:schemeClr val="accent1"/>
-          </a:effectRef>
-          <a:fontRef idx="minor">
-            <a:schemeClr val="lt1"/>
-          </a:fontRef>
-        </p:style>
-        <p:txBody>
-          <a:bodyPr rtlCol="0" anchor="ctr"/>
-          <a:lstStyle/>
-          <a:p>
-            <a:pPr algn="ctr"/>
-            <a:endParaRPr lang="en-US"/>
-          </a:p>
-        </p:txBody>
-      </p:sp>
-      <p:sp>
-        <p:nvSpPr>
-          <p:cNvPr id="9" name="CuadroTexto 8">
-            <a:extLst>
-              <a:ext uri="{FF2B5EF4-FFF2-40B4-BE49-F238E27FC236}">
-                <a16:creationId xmlns:a16="http://schemas.microsoft.com/office/drawing/2014/main" id="{9452515D-9AC0-62DB-2A62-0C197A32C5E7}"/>
-              </a:ext>
-            </a:extLst>
-          </p:cNvPr>
-          <p:cNvSpPr txBox="1"/>
-          <p:nvPr/>
-        </p:nvSpPr>
-        <p:spPr>
-          <a:xfrm>
-            <a:off x="8180318" y="3105834"/>
-            <a:ext cx="1774973" cy="369332"/>
-          </a:xfrm>
-          <a:prstGeom prst="rect">
-            <a:avLst/>
-          </a:prstGeom>
-          <a:noFill/>
-        </p:spPr>
-        <p:txBody>
-          <a:bodyPr wrap="none" rtlCol="0">
-            <a:spAutoFit/>
-          </a:bodyPr>
-          <a:lstStyle/>
-          <a:p>
-            <a:pPr algn="ctr"/>
-            <a:r>
-              <a:rPr lang="es-ES" dirty="0" err="1"/>
-              <a:t>Screenshot</a:t>
-            </a:r>
-            <a:r>
-              <a:rPr lang="es-ES" dirty="0"/>
-              <a:t> </a:t>
-            </a:r>
-            <a:r>
-              <a:rPr lang="es-ES" dirty="0" err="1"/>
-              <a:t>for</a:t>
-            </a:r>
-            <a:r>
-              <a:rPr lang="es-ES" dirty="0"/>
-              <a:t> …</a:t>
-            </a:r>
-            <a:endParaRPr lang="en-US" dirty="0"/>
           </a:p>
         </p:txBody>
       </p:sp>
@@ -7968,7 +9175,13 @@
   <p:cSld>
     <p:spTree>
       <p:nvGrpSpPr>
-        <p:cNvPr id="1" name=""/>
+        <p:cNvPr id="1" name="">
+          <a:extLst>
+            <a:ext uri="{FF2B5EF4-FFF2-40B4-BE49-F238E27FC236}">
+              <a16:creationId xmlns:a16="http://schemas.microsoft.com/office/drawing/2014/main" id="{FF92C653-9562-D589-2BF8-8423D69E3221}"/>
+            </a:ext>
+          </a:extLst>
+        </p:cNvPr>
         <p:cNvGrpSpPr/>
         <p:nvPr/>
       </p:nvGrpSpPr>
@@ -7982,36 +9195,13 @@
       </p:grpSpPr>
       <p:sp>
         <p:nvSpPr>
-          <p:cNvPr id="3" name="object 3"/>
-          <p:cNvSpPr/>
-          <p:nvPr/>
-        </p:nvSpPr>
-        <p:spPr>
-          <a:xfrm>
-            <a:off x="3945635" y="2636520"/>
-            <a:ext cx="8246363" cy="1584959"/>
-          </a:xfrm>
-          <a:prstGeom prst="rect">
-            <a:avLst/>
-          </a:prstGeom>
-          <a:blipFill>
-            <a:blip r:embed="rId2" cstate="print"/>
-            <a:stretch>
-              <a:fillRect/>
-            </a:stretch>
-          </a:blipFill>
-        </p:spPr>
-        <p:txBody>
-          <a:bodyPr wrap="square" lIns="0" tIns="0" rIns="0" bIns="0" rtlCol="0"/>
-          <a:lstStyle/>
-          <a:p>
-            <a:endParaRPr/>
-          </a:p>
-        </p:txBody>
-      </p:sp>
-      <p:sp>
-        <p:nvSpPr>
-          <p:cNvPr id="4" name="object 4"/>
+          <p:cNvPr id="16" name="object 16">
+            <a:extLst>
+              <a:ext uri="{FF2B5EF4-FFF2-40B4-BE49-F238E27FC236}">
+                <a16:creationId xmlns:a16="http://schemas.microsoft.com/office/drawing/2014/main" id="{35998C4A-7680-E519-E806-6C60AB488516}"/>
+              </a:ext>
+            </a:extLst>
+          </p:cNvPr>
           <p:cNvSpPr txBox="1">
             <a:spLocks noGrp="1"/>
           </p:cNvSpPr>
@@ -8021,70 +9211,90 @@
         </p:nvSpPr>
         <p:spPr>
           <a:xfrm>
-            <a:off x="4513326" y="3165729"/>
-            <a:ext cx="2233295" cy="513715"/>
-          </a:xfrm>
-          <a:prstGeom prst="rect">
-            <a:avLst/>
-          </a:prstGeom>
-        </p:spPr>
-        <p:txBody>
-          <a:bodyPr vert="horz" wrap="square" lIns="0" tIns="13335" rIns="0" bIns="0" rtlCol="0">
+            <a:off x="685800" y="408883"/>
+            <a:ext cx="10994410" cy="559127"/>
+          </a:xfrm>
+          <a:prstGeom prst="rect">
+            <a:avLst/>
+          </a:prstGeom>
+        </p:spPr>
+        <p:txBody>
+          <a:bodyPr vert="horz" wrap="square" lIns="0" tIns="12700" rIns="0" bIns="0" rtlCol="0">
             <a:spAutoFit/>
           </a:bodyPr>
           <a:lstStyle/>
           <a:p>
-            <a:pPr marL="12700">
+            <a:pPr marL="12700" algn="l">
               <a:lnSpc>
                 <a:spcPct val="100000"/>
               </a:lnSpc>
               <a:spcBef>
-                <a:spcPts val="105"/>
+                <a:spcPts val="100"/>
               </a:spcBef>
             </a:pPr>
             <a:r>
-              <a:rPr sz="3200" b="1" spc="-5" dirty="0">
-                <a:solidFill>
-                  <a:srgbClr val="FFFFFF"/>
-                </a:solidFill>
-                <a:latin typeface="Lucida Sans"/>
-                <a:cs typeface="Lucida Sans"/>
-              </a:rPr>
-              <a:t>Thank</a:t>
-            </a:r>
-            <a:r>
-              <a:rPr sz="3200" b="1" spc="-55" dirty="0">
-                <a:solidFill>
-                  <a:srgbClr val="FFFFFF"/>
-                </a:solidFill>
-                <a:latin typeface="Lucida Sans"/>
-                <a:cs typeface="Lucida Sans"/>
-              </a:rPr>
-              <a:t> </a:t>
-            </a:r>
-            <a:r>
-              <a:rPr sz="3200" b="1" dirty="0">
-                <a:solidFill>
-                  <a:srgbClr val="FFFFFF"/>
-                </a:solidFill>
-                <a:latin typeface="Lucida Sans"/>
-                <a:cs typeface="Lucida Sans"/>
-              </a:rPr>
-              <a:t>you</a:t>
-            </a:r>
-            <a:endParaRPr sz="3200">
-              <a:latin typeface="Lucida Sans"/>
+              <a:rPr lang="en-US" sz="2500" dirty="0"/>
+              <a:t>Learning outcome #4 – Notebook section 4. Exercises – 1 slide per bullet point</a:t>
+            </a:r>
+            <a:br>
+              <a:rPr lang="en-US" sz="2500" dirty="0"/>
+            </a:br>
+            <a:r>
+              <a:rPr lang="en-US" sz="1050" b="0" dirty="0">
+                <a:latin typeface="Arial" panose="020B0604020202020204" pitchFamily="34" charset="0"/>
+                <a:cs typeface="Arial" panose="020B0604020202020204" pitchFamily="34" charset="0"/>
+              </a:rPr>
+              <a:t>a.1 - Create a cell component for a unbalanced MZI, using 2x2 50:50 MMIs with arm length difference as parameter</a:t>
+            </a:r>
+            <a:endParaRPr sz="2500" b="0" i="1" dirty="0">
+              <a:latin typeface="+mj-lt"/>
               <a:cs typeface="Lucida Sans"/>
             </a:endParaRPr>
           </a:p>
         </p:txBody>
       </p:sp>
-      <p:sp>
-        <p:nvSpPr>
-          <p:cNvPr id="5" name="Marcador de número de diapositiva 4">
-            <a:extLst>
-              <a:ext uri="{FF2B5EF4-FFF2-40B4-BE49-F238E27FC236}">
-                <a16:creationId xmlns:a16="http://schemas.microsoft.com/office/drawing/2014/main" id="{B052DA19-AD24-7D24-2AE9-51F8F5A7F5E0}"/>
+      <p:pic>
+        <p:nvPicPr>
+          <p:cNvPr id="83" name="Gráfico 82">
+            <a:extLst>
+              <a:ext uri="{FF2B5EF4-FFF2-40B4-BE49-F238E27FC236}">
+                <a16:creationId xmlns:a16="http://schemas.microsoft.com/office/drawing/2014/main" id="{391DFDEF-C50C-3280-6EA8-6006F0A0EED6}"/>
+              </a:ext>
+            </a:extLst>
+          </p:cNvPr>
+          <p:cNvPicPr>
+            <a:picLocks noChangeAspect="1"/>
+          </p:cNvPicPr>
+          <p:nvPr/>
+        </p:nvPicPr>
+        <p:blipFill>
+          <a:blip>
+            <a:extLst>
+              <a:ext uri="{96DAC541-7B7A-43D3-8B79-37D633B846F1}">
+                <asvg:svgBlip xmlns:asvg="http://schemas.microsoft.com/office/drawing/2016/SVG/main" r:embed="rId3"/>
+              </a:ext>
+            </a:extLst>
+          </a:blip>
+          <a:stretch>
+            <a:fillRect/>
+          </a:stretch>
+        </p:blipFill>
+        <p:spPr>
+          <a:xfrm>
+            <a:off x="5045006" y="6356057"/>
+            <a:ext cx="6409575" cy="363174"/>
+          </a:xfrm>
+          <a:prstGeom prst="rect">
+            <a:avLst/>
+          </a:prstGeom>
+        </p:spPr>
+      </p:pic>
+      <p:sp>
+        <p:nvSpPr>
+          <p:cNvPr id="84" name="Marcador de número de diapositiva 83">
+            <a:extLst>
+              <a:ext uri="{FF2B5EF4-FFF2-40B4-BE49-F238E27FC236}">
+                <a16:creationId xmlns:a16="http://schemas.microsoft.com/office/drawing/2014/main" id="{047D54F5-AA72-2DD6-DE58-14C8FDE7EC17}"/>
               </a:ext>
             </a:extLst>
           </p:cNvPr>
@@ -8108,7 +9318,1057 @@
           </a:p>
         </p:txBody>
       </p:sp>
+      <p:sp>
+        <p:nvSpPr>
+          <p:cNvPr id="3" name="Marcador de pie de página 2">
+            <a:extLst>
+              <a:ext uri="{FF2B5EF4-FFF2-40B4-BE49-F238E27FC236}">
+                <a16:creationId xmlns:a16="http://schemas.microsoft.com/office/drawing/2014/main" id="{3D5BA6E1-0DC0-62A5-D071-796F408C30FC}"/>
+              </a:ext>
+            </a:extLst>
+          </p:cNvPr>
+          <p:cNvSpPr>
+            <a:spLocks noGrp="1"/>
+          </p:cNvSpPr>
+          <p:nvPr>
+            <p:ph type="ftr" sz="quarter" idx="5"/>
+          </p:nvPr>
+        </p:nvSpPr>
+        <p:spPr/>
+        <p:txBody>
+          <a:bodyPr/>
+          <a:lstStyle/>
+          <a:p>
+            <a:pPr marL="12700">
+              <a:spcBef>
+                <a:spcPts val="15"/>
+              </a:spcBef>
+            </a:pPr>
+            <a:r>
+              <a:rPr lang="es-ES" spc="-5"/>
+              <a:t>LAB 4.0. LAYOUT</a:t>
+            </a:r>
+            <a:endParaRPr lang="es-ES" spc="-5" dirty="0"/>
+          </a:p>
+        </p:txBody>
+      </p:sp>
+      <p:sp>
+        <p:nvSpPr>
+          <p:cNvPr id="2" name="CuadroTexto 1">
+            <a:extLst>
+              <a:ext uri="{FF2B5EF4-FFF2-40B4-BE49-F238E27FC236}">
+                <a16:creationId xmlns:a16="http://schemas.microsoft.com/office/drawing/2014/main" id="{8E52EB8F-C2E2-D47B-CE3F-7A4163C55EDB}"/>
+              </a:ext>
+            </a:extLst>
+          </p:cNvPr>
+          <p:cNvSpPr txBox="1"/>
+          <p:nvPr/>
+        </p:nvSpPr>
+        <p:spPr>
+          <a:xfrm>
+            <a:off x="685800" y="990600"/>
+            <a:ext cx="5410200" cy="5181600"/>
+          </a:xfrm>
+          <a:prstGeom prst="rect">
+            <a:avLst/>
+          </a:prstGeom>
+          <a:solidFill>
+            <a:schemeClr val="bg1">
+              <a:lumMod val="95000"/>
+            </a:schemeClr>
+          </a:solidFill>
+          <a:ln w="28575">
+            <a:solidFill>
+              <a:srgbClr val="E0700D"/>
+            </a:solidFill>
+          </a:ln>
+        </p:spPr>
+        <p:txBody>
+          <a:bodyPr wrap="square" rtlCol="0">
+            <a:noAutofit/>
+          </a:bodyPr>
+          <a:lstStyle/>
+          <a:p>
+            <a:pPr algn="just"/>
+            <a:endParaRPr lang="en-US" sz="1200" dirty="0">
+              <a:latin typeface="Arial" panose="020B0604020202020204" pitchFamily="34" charset="0"/>
+              <a:cs typeface="Arial" panose="020B0604020202020204" pitchFamily="34" charset="0"/>
+            </a:endParaRPr>
+          </a:p>
+        </p:txBody>
+      </p:sp>
+      <p:sp>
+        <p:nvSpPr>
+          <p:cNvPr id="8" name="Rectángulo 7">
+            <a:extLst>
+              <a:ext uri="{FF2B5EF4-FFF2-40B4-BE49-F238E27FC236}">
+                <a16:creationId xmlns:a16="http://schemas.microsoft.com/office/drawing/2014/main" id="{F1656123-9AD5-3974-EBAD-8A448DD59F95}"/>
+              </a:ext>
+            </a:extLst>
+          </p:cNvPr>
+          <p:cNvSpPr/>
+          <p:nvPr/>
+        </p:nvSpPr>
+        <p:spPr>
+          <a:xfrm>
+            <a:off x="6248400" y="990285"/>
+            <a:ext cx="5638799" cy="5181600"/>
+          </a:xfrm>
+          <a:prstGeom prst="rect">
+            <a:avLst/>
+          </a:prstGeom>
+          <a:noFill/>
+          <a:ln w="28575">
+            <a:solidFill>
+              <a:srgbClr val="E0700D"/>
+            </a:solidFill>
+          </a:ln>
+        </p:spPr>
+        <p:style>
+          <a:lnRef idx="2">
+            <a:schemeClr val="accent1">
+              <a:shade val="15000"/>
+            </a:schemeClr>
+          </a:lnRef>
+          <a:fillRef idx="1">
+            <a:schemeClr val="accent1"/>
+          </a:fillRef>
+          <a:effectRef idx="0">
+            <a:schemeClr val="accent1"/>
+          </a:effectRef>
+          <a:fontRef idx="minor">
+            <a:schemeClr val="lt1"/>
+          </a:fontRef>
+        </p:style>
+        <p:txBody>
+          <a:bodyPr rtlCol="0" anchor="ctr"/>
+          <a:lstStyle/>
+          <a:p>
+            <a:pPr algn="ctr"/>
+            <a:endParaRPr lang="en-US"/>
+          </a:p>
+        </p:txBody>
+      </p:sp>
+      <p:sp>
+        <p:nvSpPr>
+          <p:cNvPr id="9" name="CuadroTexto 8">
+            <a:extLst>
+              <a:ext uri="{FF2B5EF4-FFF2-40B4-BE49-F238E27FC236}">
+                <a16:creationId xmlns:a16="http://schemas.microsoft.com/office/drawing/2014/main" id="{8E76385D-EC3E-DDE3-6868-397A1EB1EB3F}"/>
+              </a:ext>
+            </a:extLst>
+          </p:cNvPr>
+          <p:cNvSpPr txBox="1"/>
+          <p:nvPr/>
+        </p:nvSpPr>
+        <p:spPr>
+          <a:xfrm>
+            <a:off x="8180318" y="3105834"/>
+            <a:ext cx="1774973" cy="369332"/>
+          </a:xfrm>
+          <a:prstGeom prst="rect">
+            <a:avLst/>
+          </a:prstGeom>
+          <a:noFill/>
+        </p:spPr>
+        <p:txBody>
+          <a:bodyPr wrap="none" rtlCol="0">
+            <a:spAutoFit/>
+          </a:bodyPr>
+          <a:lstStyle/>
+          <a:p>
+            <a:pPr algn="ctr"/>
+            <a:r>
+              <a:rPr lang="es-ES" dirty="0" err="1"/>
+              <a:t>Screenshot</a:t>
+            </a:r>
+            <a:r>
+              <a:rPr lang="es-ES" dirty="0"/>
+              <a:t> </a:t>
+            </a:r>
+            <a:r>
+              <a:rPr lang="es-ES" dirty="0" err="1"/>
+              <a:t>for</a:t>
+            </a:r>
+            <a:r>
+              <a:rPr lang="es-ES" dirty="0"/>
+              <a:t> …</a:t>
+            </a:r>
+            <a:endParaRPr lang="en-US" dirty="0"/>
+          </a:p>
+        </p:txBody>
+      </p:sp>
+      <p:pic>
+        <p:nvPicPr>
+          <p:cNvPr id="5" name="Imagen 4">
+            <a:extLst>
+              <a:ext uri="{FF2B5EF4-FFF2-40B4-BE49-F238E27FC236}">
+                <a16:creationId xmlns:a16="http://schemas.microsoft.com/office/drawing/2014/main" id="{6D38230E-A3DC-7C24-2E85-F09226F13D97}"/>
+              </a:ext>
+            </a:extLst>
+          </p:cNvPr>
+          <p:cNvPicPr>
+            <a:picLocks noChangeAspect="1"/>
+          </p:cNvPicPr>
+          <p:nvPr/>
+        </p:nvPicPr>
+        <p:blipFill>
+          <a:blip r:embed="rId4"/>
+          <a:stretch>
+            <a:fillRect/>
+          </a:stretch>
+        </p:blipFill>
+        <p:spPr>
+          <a:xfrm>
+            <a:off x="1905000" y="1033482"/>
+            <a:ext cx="2604691" cy="5106773"/>
+          </a:xfrm>
+          <a:prstGeom prst="rect">
+            <a:avLst/>
+          </a:prstGeom>
+        </p:spPr>
+      </p:pic>
+      <p:pic>
+        <p:nvPicPr>
+          <p:cNvPr id="7" name="Imagen 6">
+            <a:extLst>
+              <a:ext uri="{FF2B5EF4-FFF2-40B4-BE49-F238E27FC236}">
+                <a16:creationId xmlns:a16="http://schemas.microsoft.com/office/drawing/2014/main" id="{362179F6-F737-81D4-E98A-34A9B628633C}"/>
+              </a:ext>
+            </a:extLst>
+          </p:cNvPr>
+          <p:cNvPicPr>
+            <a:picLocks noChangeAspect="1"/>
+          </p:cNvPicPr>
+          <p:nvPr/>
+        </p:nvPicPr>
+        <p:blipFill>
+          <a:blip r:embed="rId5"/>
+          <a:stretch>
+            <a:fillRect/>
+          </a:stretch>
+        </p:blipFill>
+        <p:spPr>
+          <a:xfrm>
+            <a:off x="6329837" y="1514192"/>
+            <a:ext cx="5475923" cy="4133785"/>
+          </a:xfrm>
+          <a:prstGeom prst="rect">
+            <a:avLst/>
+          </a:prstGeom>
+        </p:spPr>
+      </p:pic>
     </p:spTree>
+    <p:extLst>
+      <p:ext uri="{BB962C8B-B14F-4D97-AF65-F5344CB8AC3E}">
+        <p14:creationId xmlns:p14="http://schemas.microsoft.com/office/powerpoint/2010/main" val="3843484234"/>
+      </p:ext>
+    </p:extLst>
+  </p:cSld>
+  <p:clrMapOvr>
+    <a:masterClrMapping/>
+  </p:clrMapOvr>
+</p:sld>
+</file>
+
+<file path=ppt/slides/slide18.xml><?xml version="1.0" encoding="utf-8"?>
+<p:sld xmlns:a="http://schemas.openxmlformats.org/drawingml/2006/main" xmlns:r="http://schemas.openxmlformats.org/officeDocument/2006/relationships" xmlns:p="http://schemas.openxmlformats.org/presentationml/2006/main">
+  <p:cSld>
+    <p:spTree>
+      <p:nvGrpSpPr>
+        <p:cNvPr id="1" name="">
+          <a:extLst>
+            <a:ext uri="{FF2B5EF4-FFF2-40B4-BE49-F238E27FC236}">
+              <a16:creationId xmlns:a16="http://schemas.microsoft.com/office/drawing/2014/main" id="{C86F203A-8215-25B5-8B2A-489581AEC1C4}"/>
+            </a:ext>
+          </a:extLst>
+        </p:cNvPr>
+        <p:cNvGrpSpPr/>
+        <p:nvPr/>
+      </p:nvGrpSpPr>
+      <p:grpSpPr>
+        <a:xfrm>
+          <a:off x="0" y="0"/>
+          <a:ext cx="0" cy="0"/>
+          <a:chOff x="0" y="0"/>
+          <a:chExt cx="0" cy="0"/>
+        </a:xfrm>
+      </p:grpSpPr>
+      <p:sp>
+        <p:nvSpPr>
+          <p:cNvPr id="16" name="object 16">
+            <a:extLst>
+              <a:ext uri="{FF2B5EF4-FFF2-40B4-BE49-F238E27FC236}">
+                <a16:creationId xmlns:a16="http://schemas.microsoft.com/office/drawing/2014/main" id="{6A59BA4C-B1E9-F066-1E47-1709420949D7}"/>
+              </a:ext>
+            </a:extLst>
+          </p:cNvPr>
+          <p:cNvSpPr txBox="1">
+            <a:spLocks noGrp="1"/>
+          </p:cNvSpPr>
+          <p:nvPr>
+            <p:ph type="title"/>
+          </p:nvPr>
+        </p:nvSpPr>
+        <p:spPr>
+          <a:xfrm>
+            <a:off x="685800" y="408883"/>
+            <a:ext cx="10994410" cy="966931"/>
+          </a:xfrm>
+          <a:prstGeom prst="rect">
+            <a:avLst/>
+          </a:prstGeom>
+        </p:spPr>
+        <p:txBody>
+          <a:bodyPr vert="horz" wrap="square" lIns="0" tIns="12700" rIns="0" bIns="0" rtlCol="0">
+            <a:spAutoFit/>
+          </a:bodyPr>
+          <a:lstStyle/>
+          <a:p>
+            <a:pPr marL="12700" algn="l">
+              <a:spcBef>
+                <a:spcPts val="100"/>
+              </a:spcBef>
+            </a:pPr>
+            <a:r>
+              <a:rPr lang="en-US" sz="2500" dirty="0"/>
+              <a:t>Learning outcome #4 – Notebook section 4. Exercises – 1 slide per bullet point</a:t>
+            </a:r>
+            <a:br>
+              <a:rPr lang="en-US" sz="2500" dirty="0"/>
+            </a:br>
+            <a:r>
+              <a:rPr lang="en-US" sz="1100" b="0" dirty="0">
+                <a:latin typeface="Arial" panose="020B0604020202020204" pitchFamily="34" charset="0"/>
+                <a:cs typeface="Arial" panose="020B0604020202020204" pitchFamily="34" charset="0"/>
+              </a:rPr>
+              <a:t>a.2 - Create a cell component based on the previous, where the arms have thermal tuners on top of each one</a:t>
+            </a:r>
+            <a:br>
+              <a:rPr lang="en-US" sz="2800" dirty="0">
+                <a:latin typeface="Arial" panose="020B0604020202020204" pitchFamily="34" charset="0"/>
+                <a:cs typeface="Arial" panose="020B0604020202020204" pitchFamily="34" charset="0"/>
+              </a:rPr>
+            </a:br>
+            <a:endParaRPr sz="2500" b="0" i="1" dirty="0">
+              <a:latin typeface="+mj-lt"/>
+              <a:cs typeface="Lucida Sans"/>
+            </a:endParaRPr>
+          </a:p>
+        </p:txBody>
+      </p:sp>
+      <p:pic>
+        <p:nvPicPr>
+          <p:cNvPr id="83" name="Gráfico 82">
+            <a:extLst>
+              <a:ext uri="{FF2B5EF4-FFF2-40B4-BE49-F238E27FC236}">
+                <a16:creationId xmlns:a16="http://schemas.microsoft.com/office/drawing/2014/main" id="{A34506D3-8FC1-885B-9C2C-0BA5B9B0FD4D}"/>
+              </a:ext>
+            </a:extLst>
+          </p:cNvPr>
+          <p:cNvPicPr>
+            <a:picLocks noChangeAspect="1"/>
+          </p:cNvPicPr>
+          <p:nvPr/>
+        </p:nvPicPr>
+        <p:blipFill>
+          <a:blip>
+            <a:extLst>
+              <a:ext uri="{96DAC541-7B7A-43D3-8B79-37D633B846F1}">
+                <asvg:svgBlip xmlns:asvg="http://schemas.microsoft.com/office/drawing/2016/SVG/main" r:embed="rId3"/>
+              </a:ext>
+            </a:extLst>
+          </a:blip>
+          <a:stretch>
+            <a:fillRect/>
+          </a:stretch>
+        </p:blipFill>
+        <p:spPr>
+          <a:xfrm>
+            <a:off x="5045006" y="6356057"/>
+            <a:ext cx="6409575" cy="363174"/>
+          </a:xfrm>
+          <a:prstGeom prst="rect">
+            <a:avLst/>
+          </a:prstGeom>
+        </p:spPr>
+      </p:pic>
+      <p:sp>
+        <p:nvSpPr>
+          <p:cNvPr id="84" name="Marcador de número de diapositiva 83">
+            <a:extLst>
+              <a:ext uri="{FF2B5EF4-FFF2-40B4-BE49-F238E27FC236}">
+                <a16:creationId xmlns:a16="http://schemas.microsoft.com/office/drawing/2014/main" id="{CACD2269-956D-1534-4306-A296E6E161A7}"/>
+              </a:ext>
+            </a:extLst>
+          </p:cNvPr>
+          <p:cNvSpPr>
+            <a:spLocks noGrp="1"/>
+          </p:cNvSpPr>
+          <p:nvPr>
+            <p:ph type="sldNum" sz="quarter" idx="7"/>
+          </p:nvPr>
+        </p:nvSpPr>
+        <p:spPr/>
+        <p:txBody>
+          <a:bodyPr/>
+          <a:lstStyle/>
+          <a:p>
+            <a:fld id="{B6F15528-21DE-4FAA-801E-634DDDAF4B2B}" type="slidenum">
+              <a:rPr lang="es-ES" smtClean="0"/>
+              <a:t>18</a:t>
+            </a:fld>
+            <a:endParaRPr lang="es-ES"/>
+          </a:p>
+        </p:txBody>
+      </p:sp>
+      <p:sp>
+        <p:nvSpPr>
+          <p:cNvPr id="3" name="Marcador de pie de página 2">
+            <a:extLst>
+              <a:ext uri="{FF2B5EF4-FFF2-40B4-BE49-F238E27FC236}">
+                <a16:creationId xmlns:a16="http://schemas.microsoft.com/office/drawing/2014/main" id="{1453C4C8-9AB8-781D-85AB-A0B46DB3B772}"/>
+              </a:ext>
+            </a:extLst>
+          </p:cNvPr>
+          <p:cNvSpPr>
+            <a:spLocks noGrp="1"/>
+          </p:cNvSpPr>
+          <p:nvPr>
+            <p:ph type="ftr" sz="quarter" idx="5"/>
+          </p:nvPr>
+        </p:nvSpPr>
+        <p:spPr/>
+        <p:txBody>
+          <a:bodyPr/>
+          <a:lstStyle/>
+          <a:p>
+            <a:pPr marL="12700">
+              <a:spcBef>
+                <a:spcPts val="15"/>
+              </a:spcBef>
+            </a:pPr>
+            <a:r>
+              <a:rPr lang="es-ES" spc="-5"/>
+              <a:t>LAB 4.0. LAYOUT</a:t>
+            </a:r>
+            <a:endParaRPr lang="es-ES" spc="-5" dirty="0"/>
+          </a:p>
+        </p:txBody>
+      </p:sp>
+      <p:sp>
+        <p:nvSpPr>
+          <p:cNvPr id="2" name="CuadroTexto 1">
+            <a:extLst>
+              <a:ext uri="{FF2B5EF4-FFF2-40B4-BE49-F238E27FC236}">
+                <a16:creationId xmlns:a16="http://schemas.microsoft.com/office/drawing/2014/main" id="{AC900D46-7782-2BEE-F7C0-6F46787B8B2B}"/>
+              </a:ext>
+            </a:extLst>
+          </p:cNvPr>
+          <p:cNvSpPr txBox="1"/>
+          <p:nvPr/>
+        </p:nvSpPr>
+        <p:spPr>
+          <a:xfrm>
+            <a:off x="685800" y="1143000"/>
+            <a:ext cx="5410200" cy="5029200"/>
+          </a:xfrm>
+          <a:prstGeom prst="rect">
+            <a:avLst/>
+          </a:prstGeom>
+          <a:solidFill>
+            <a:schemeClr val="bg1">
+              <a:lumMod val="95000"/>
+            </a:schemeClr>
+          </a:solidFill>
+          <a:ln w="28575">
+            <a:solidFill>
+              <a:srgbClr val="E0700D"/>
+            </a:solidFill>
+          </a:ln>
+        </p:spPr>
+        <p:txBody>
+          <a:bodyPr wrap="square" rtlCol="0">
+            <a:noAutofit/>
+          </a:bodyPr>
+          <a:lstStyle/>
+          <a:p>
+            <a:pPr algn="just"/>
+            <a:endParaRPr lang="en-US" sz="1200" dirty="0">
+              <a:latin typeface="Arial" panose="020B0604020202020204" pitchFamily="34" charset="0"/>
+              <a:cs typeface="Arial" panose="020B0604020202020204" pitchFamily="34" charset="0"/>
+            </a:endParaRPr>
+          </a:p>
+        </p:txBody>
+      </p:sp>
+      <p:sp>
+        <p:nvSpPr>
+          <p:cNvPr id="8" name="Rectángulo 7">
+            <a:extLst>
+              <a:ext uri="{FF2B5EF4-FFF2-40B4-BE49-F238E27FC236}">
+                <a16:creationId xmlns:a16="http://schemas.microsoft.com/office/drawing/2014/main" id="{25FAB87D-75BF-98C8-5845-385E694B363D}"/>
+              </a:ext>
+            </a:extLst>
+          </p:cNvPr>
+          <p:cNvSpPr/>
+          <p:nvPr/>
+        </p:nvSpPr>
+        <p:spPr>
+          <a:xfrm>
+            <a:off x="6248400" y="1142683"/>
+            <a:ext cx="5638799" cy="5029201"/>
+          </a:xfrm>
+          <a:prstGeom prst="rect">
+            <a:avLst/>
+          </a:prstGeom>
+          <a:noFill/>
+          <a:ln w="28575">
+            <a:solidFill>
+              <a:srgbClr val="E0700D"/>
+            </a:solidFill>
+          </a:ln>
+        </p:spPr>
+        <p:style>
+          <a:lnRef idx="2">
+            <a:schemeClr val="accent1">
+              <a:shade val="15000"/>
+            </a:schemeClr>
+          </a:lnRef>
+          <a:fillRef idx="1">
+            <a:schemeClr val="accent1"/>
+          </a:fillRef>
+          <a:effectRef idx="0">
+            <a:schemeClr val="accent1"/>
+          </a:effectRef>
+          <a:fontRef idx="minor">
+            <a:schemeClr val="lt1"/>
+          </a:fontRef>
+        </p:style>
+        <p:txBody>
+          <a:bodyPr rtlCol="0" anchor="ctr"/>
+          <a:lstStyle/>
+          <a:p>
+            <a:pPr algn="ctr"/>
+            <a:endParaRPr lang="en-US"/>
+          </a:p>
+        </p:txBody>
+      </p:sp>
+      <p:sp>
+        <p:nvSpPr>
+          <p:cNvPr id="9" name="CuadroTexto 8">
+            <a:extLst>
+              <a:ext uri="{FF2B5EF4-FFF2-40B4-BE49-F238E27FC236}">
+                <a16:creationId xmlns:a16="http://schemas.microsoft.com/office/drawing/2014/main" id="{E908B4A8-9379-BB70-6D84-97769E3C838C}"/>
+              </a:ext>
+            </a:extLst>
+          </p:cNvPr>
+          <p:cNvSpPr txBox="1"/>
+          <p:nvPr/>
+        </p:nvSpPr>
+        <p:spPr>
+          <a:xfrm>
+            <a:off x="8180318" y="3105834"/>
+            <a:ext cx="1774973" cy="369332"/>
+          </a:xfrm>
+          <a:prstGeom prst="rect">
+            <a:avLst/>
+          </a:prstGeom>
+          <a:noFill/>
+        </p:spPr>
+        <p:txBody>
+          <a:bodyPr wrap="none" rtlCol="0">
+            <a:spAutoFit/>
+          </a:bodyPr>
+          <a:lstStyle/>
+          <a:p>
+            <a:pPr algn="ctr"/>
+            <a:r>
+              <a:rPr lang="es-ES" dirty="0" err="1"/>
+              <a:t>Screenshot</a:t>
+            </a:r>
+            <a:r>
+              <a:rPr lang="es-ES" dirty="0"/>
+              <a:t> </a:t>
+            </a:r>
+            <a:r>
+              <a:rPr lang="es-ES" dirty="0" err="1"/>
+              <a:t>for</a:t>
+            </a:r>
+            <a:r>
+              <a:rPr lang="es-ES" dirty="0"/>
+              <a:t> …</a:t>
+            </a:r>
+            <a:endParaRPr lang="en-US" dirty="0"/>
+          </a:p>
+        </p:txBody>
+      </p:sp>
+      <p:pic>
+        <p:nvPicPr>
+          <p:cNvPr id="5" name="Imagen 4">
+            <a:extLst>
+              <a:ext uri="{FF2B5EF4-FFF2-40B4-BE49-F238E27FC236}">
+                <a16:creationId xmlns:a16="http://schemas.microsoft.com/office/drawing/2014/main" id="{90A5FB95-D2F5-940B-4C7B-24F618FB27A1}"/>
+              </a:ext>
+            </a:extLst>
+          </p:cNvPr>
+          <p:cNvPicPr>
+            <a:picLocks noChangeAspect="1"/>
+          </p:cNvPicPr>
+          <p:nvPr/>
+        </p:nvPicPr>
+        <p:blipFill>
+          <a:blip r:embed="rId4"/>
+          <a:stretch>
+            <a:fillRect/>
+          </a:stretch>
+        </p:blipFill>
+        <p:spPr>
+          <a:xfrm>
+            <a:off x="1727113" y="1190962"/>
+            <a:ext cx="3073487" cy="4966067"/>
+          </a:xfrm>
+          <a:prstGeom prst="rect">
+            <a:avLst/>
+          </a:prstGeom>
+        </p:spPr>
+      </p:pic>
+      <p:pic>
+        <p:nvPicPr>
+          <p:cNvPr id="7" name="Imagen 6">
+            <a:extLst>
+              <a:ext uri="{FF2B5EF4-FFF2-40B4-BE49-F238E27FC236}">
+                <a16:creationId xmlns:a16="http://schemas.microsoft.com/office/drawing/2014/main" id="{F37CDAE3-D625-3F7D-4FCA-66E166B4DA4B}"/>
+              </a:ext>
+            </a:extLst>
+          </p:cNvPr>
+          <p:cNvPicPr>
+            <a:picLocks noChangeAspect="1"/>
+          </p:cNvPicPr>
+          <p:nvPr/>
+        </p:nvPicPr>
+        <p:blipFill>
+          <a:blip r:embed="rId5"/>
+          <a:stretch>
+            <a:fillRect/>
+          </a:stretch>
+        </p:blipFill>
+        <p:spPr>
+          <a:xfrm>
+            <a:off x="6629400" y="1718194"/>
+            <a:ext cx="5181602" cy="3911602"/>
+          </a:xfrm>
+          <a:prstGeom prst="rect">
+            <a:avLst/>
+          </a:prstGeom>
+        </p:spPr>
+      </p:pic>
+    </p:spTree>
+    <p:extLst>
+      <p:ext uri="{BB962C8B-B14F-4D97-AF65-F5344CB8AC3E}">
+        <p14:creationId xmlns:p14="http://schemas.microsoft.com/office/powerpoint/2010/main" val="1720404583"/>
+      </p:ext>
+    </p:extLst>
+  </p:cSld>
+  <p:clrMapOvr>
+    <a:masterClrMapping/>
+  </p:clrMapOvr>
+</p:sld>
+</file>
+
+<file path=ppt/slides/slide19.xml><?xml version="1.0" encoding="utf-8"?>
+<p:sld xmlns:a="http://schemas.openxmlformats.org/drawingml/2006/main" xmlns:r="http://schemas.openxmlformats.org/officeDocument/2006/relationships" xmlns:p="http://schemas.openxmlformats.org/presentationml/2006/main">
+  <p:cSld>
+    <p:spTree>
+      <p:nvGrpSpPr>
+        <p:cNvPr id="1" name="">
+          <a:extLst>
+            <a:ext uri="{FF2B5EF4-FFF2-40B4-BE49-F238E27FC236}">
+              <a16:creationId xmlns:a16="http://schemas.microsoft.com/office/drawing/2014/main" id="{6FBCC9BD-1AE0-4352-C81F-CFB7637C7BDA}"/>
+            </a:ext>
+          </a:extLst>
+        </p:cNvPr>
+        <p:cNvGrpSpPr/>
+        <p:nvPr/>
+      </p:nvGrpSpPr>
+      <p:grpSpPr>
+        <a:xfrm>
+          <a:off x="0" y="0"/>
+          <a:ext cx="0" cy="0"/>
+          <a:chOff x="0" y="0"/>
+          <a:chExt cx="0" cy="0"/>
+        </a:xfrm>
+      </p:grpSpPr>
+      <p:sp>
+        <p:nvSpPr>
+          <p:cNvPr id="16" name="object 16">
+            <a:extLst>
+              <a:ext uri="{FF2B5EF4-FFF2-40B4-BE49-F238E27FC236}">
+                <a16:creationId xmlns:a16="http://schemas.microsoft.com/office/drawing/2014/main" id="{7031A897-C916-CECE-71DA-FF86F0336555}"/>
+              </a:ext>
+            </a:extLst>
+          </p:cNvPr>
+          <p:cNvSpPr txBox="1">
+            <a:spLocks noGrp="1"/>
+          </p:cNvSpPr>
+          <p:nvPr>
+            <p:ph type="title"/>
+          </p:nvPr>
+        </p:nvSpPr>
+        <p:spPr>
+          <a:xfrm>
+            <a:off x="685800" y="408883"/>
+            <a:ext cx="10994410" cy="559127"/>
+          </a:xfrm>
+          <a:prstGeom prst="rect">
+            <a:avLst/>
+          </a:prstGeom>
+        </p:spPr>
+        <p:txBody>
+          <a:bodyPr vert="horz" wrap="square" lIns="0" tIns="12700" rIns="0" bIns="0" rtlCol="0">
+            <a:spAutoFit/>
+          </a:bodyPr>
+          <a:lstStyle/>
+          <a:p>
+            <a:pPr marL="12700" algn="l">
+              <a:lnSpc>
+                <a:spcPct val="100000"/>
+              </a:lnSpc>
+              <a:spcBef>
+                <a:spcPts val="100"/>
+              </a:spcBef>
+            </a:pPr>
+            <a:r>
+              <a:rPr lang="en-US" sz="2500" dirty="0"/>
+              <a:t>Learning outcome #4 – Notebook section 4. Exercises – 1 slide per bullet point</a:t>
+            </a:r>
+            <a:br>
+              <a:rPr lang="en-US" sz="2500" dirty="0"/>
+            </a:br>
+            <a:r>
+              <a:rPr lang="en-US" sz="1000" b="0" dirty="0">
+                <a:latin typeface="Arial" panose="020B0604020202020204" pitchFamily="34" charset="0"/>
+                <a:cs typeface="Arial" panose="020B0604020202020204" pitchFamily="34" charset="0"/>
+              </a:rPr>
+              <a:t>a.3 - Create a cell component for an all-pass ring resonator, using 2x2 50:50 MMIs, with extra length parameter for different perimeters</a:t>
+            </a:r>
+            <a:endParaRPr sz="2500" b="0" i="1" dirty="0">
+              <a:latin typeface="+mj-lt"/>
+              <a:cs typeface="Lucida Sans"/>
+            </a:endParaRPr>
+          </a:p>
+        </p:txBody>
+      </p:sp>
+      <p:pic>
+        <p:nvPicPr>
+          <p:cNvPr id="83" name="Gráfico 82">
+            <a:extLst>
+              <a:ext uri="{FF2B5EF4-FFF2-40B4-BE49-F238E27FC236}">
+                <a16:creationId xmlns:a16="http://schemas.microsoft.com/office/drawing/2014/main" id="{224D157F-0FC3-5A17-B27F-E84F72E8788C}"/>
+              </a:ext>
+            </a:extLst>
+          </p:cNvPr>
+          <p:cNvPicPr>
+            <a:picLocks noChangeAspect="1"/>
+          </p:cNvPicPr>
+          <p:nvPr/>
+        </p:nvPicPr>
+        <p:blipFill>
+          <a:blip>
+            <a:extLst>
+              <a:ext uri="{96DAC541-7B7A-43D3-8B79-37D633B846F1}">
+                <asvg:svgBlip xmlns:asvg="http://schemas.microsoft.com/office/drawing/2016/SVG/main" r:embed="rId3"/>
+              </a:ext>
+            </a:extLst>
+          </a:blip>
+          <a:stretch>
+            <a:fillRect/>
+          </a:stretch>
+        </p:blipFill>
+        <p:spPr>
+          <a:xfrm>
+            <a:off x="5045006" y="6356057"/>
+            <a:ext cx="6409575" cy="363174"/>
+          </a:xfrm>
+          <a:prstGeom prst="rect">
+            <a:avLst/>
+          </a:prstGeom>
+        </p:spPr>
+      </p:pic>
+      <p:sp>
+        <p:nvSpPr>
+          <p:cNvPr id="84" name="Marcador de número de diapositiva 83">
+            <a:extLst>
+              <a:ext uri="{FF2B5EF4-FFF2-40B4-BE49-F238E27FC236}">
+                <a16:creationId xmlns:a16="http://schemas.microsoft.com/office/drawing/2014/main" id="{3581B7CC-7557-8B44-C565-599881931DAD}"/>
+              </a:ext>
+            </a:extLst>
+          </p:cNvPr>
+          <p:cNvSpPr>
+            <a:spLocks noGrp="1"/>
+          </p:cNvSpPr>
+          <p:nvPr>
+            <p:ph type="sldNum" sz="quarter" idx="7"/>
+          </p:nvPr>
+        </p:nvSpPr>
+        <p:spPr/>
+        <p:txBody>
+          <a:bodyPr/>
+          <a:lstStyle/>
+          <a:p>
+            <a:fld id="{B6F15528-21DE-4FAA-801E-634DDDAF4B2B}" type="slidenum">
+              <a:rPr lang="es-ES" smtClean="0"/>
+              <a:t>19</a:t>
+            </a:fld>
+            <a:endParaRPr lang="es-ES"/>
+          </a:p>
+        </p:txBody>
+      </p:sp>
+      <p:sp>
+        <p:nvSpPr>
+          <p:cNvPr id="3" name="Marcador de pie de página 2">
+            <a:extLst>
+              <a:ext uri="{FF2B5EF4-FFF2-40B4-BE49-F238E27FC236}">
+                <a16:creationId xmlns:a16="http://schemas.microsoft.com/office/drawing/2014/main" id="{6B4B44D6-6E4C-B044-8303-ACCF65FBB1B2}"/>
+              </a:ext>
+            </a:extLst>
+          </p:cNvPr>
+          <p:cNvSpPr>
+            <a:spLocks noGrp="1"/>
+          </p:cNvSpPr>
+          <p:nvPr>
+            <p:ph type="ftr" sz="quarter" idx="5"/>
+          </p:nvPr>
+        </p:nvSpPr>
+        <p:spPr/>
+        <p:txBody>
+          <a:bodyPr/>
+          <a:lstStyle/>
+          <a:p>
+            <a:pPr marL="12700">
+              <a:spcBef>
+                <a:spcPts val="15"/>
+              </a:spcBef>
+            </a:pPr>
+            <a:r>
+              <a:rPr lang="es-ES" spc="-5"/>
+              <a:t>LAB 4.0. LAYOUT</a:t>
+            </a:r>
+            <a:endParaRPr lang="es-ES" spc="-5" dirty="0"/>
+          </a:p>
+        </p:txBody>
+      </p:sp>
+      <p:sp>
+        <p:nvSpPr>
+          <p:cNvPr id="2" name="CuadroTexto 1">
+            <a:extLst>
+              <a:ext uri="{FF2B5EF4-FFF2-40B4-BE49-F238E27FC236}">
+                <a16:creationId xmlns:a16="http://schemas.microsoft.com/office/drawing/2014/main" id="{4370EB62-2B9D-A0B9-47D4-09511D8EB6C5}"/>
+              </a:ext>
+            </a:extLst>
+          </p:cNvPr>
+          <p:cNvSpPr txBox="1"/>
+          <p:nvPr/>
+        </p:nvSpPr>
+        <p:spPr>
+          <a:xfrm>
+            <a:off x="685800" y="990600"/>
+            <a:ext cx="5410200" cy="5181600"/>
+          </a:xfrm>
+          <a:prstGeom prst="rect">
+            <a:avLst/>
+          </a:prstGeom>
+          <a:solidFill>
+            <a:schemeClr val="bg1">
+              <a:lumMod val="95000"/>
+            </a:schemeClr>
+          </a:solidFill>
+          <a:ln w="28575">
+            <a:solidFill>
+              <a:srgbClr val="E0700D"/>
+            </a:solidFill>
+          </a:ln>
+        </p:spPr>
+        <p:txBody>
+          <a:bodyPr wrap="square" rtlCol="0">
+            <a:noAutofit/>
+          </a:bodyPr>
+          <a:lstStyle/>
+          <a:p>
+            <a:pPr algn="just"/>
+            <a:endParaRPr lang="en-US" sz="1200" dirty="0">
+              <a:latin typeface="Arial" panose="020B0604020202020204" pitchFamily="34" charset="0"/>
+              <a:cs typeface="Arial" panose="020B0604020202020204" pitchFamily="34" charset="0"/>
+            </a:endParaRPr>
+          </a:p>
+        </p:txBody>
+      </p:sp>
+      <p:sp>
+        <p:nvSpPr>
+          <p:cNvPr id="8" name="Rectángulo 7">
+            <a:extLst>
+              <a:ext uri="{FF2B5EF4-FFF2-40B4-BE49-F238E27FC236}">
+                <a16:creationId xmlns:a16="http://schemas.microsoft.com/office/drawing/2014/main" id="{C7C27BCA-43D1-E221-BADE-A381A0EC0613}"/>
+              </a:ext>
+            </a:extLst>
+          </p:cNvPr>
+          <p:cNvSpPr/>
+          <p:nvPr/>
+        </p:nvSpPr>
+        <p:spPr>
+          <a:xfrm>
+            <a:off x="6248400" y="990285"/>
+            <a:ext cx="5638799" cy="5181600"/>
+          </a:xfrm>
+          <a:prstGeom prst="rect">
+            <a:avLst/>
+          </a:prstGeom>
+          <a:noFill/>
+          <a:ln w="28575">
+            <a:solidFill>
+              <a:srgbClr val="E0700D"/>
+            </a:solidFill>
+          </a:ln>
+        </p:spPr>
+        <p:style>
+          <a:lnRef idx="2">
+            <a:schemeClr val="accent1">
+              <a:shade val="15000"/>
+            </a:schemeClr>
+          </a:lnRef>
+          <a:fillRef idx="1">
+            <a:schemeClr val="accent1"/>
+          </a:fillRef>
+          <a:effectRef idx="0">
+            <a:schemeClr val="accent1"/>
+          </a:effectRef>
+          <a:fontRef idx="minor">
+            <a:schemeClr val="lt1"/>
+          </a:fontRef>
+        </p:style>
+        <p:txBody>
+          <a:bodyPr rtlCol="0" anchor="ctr"/>
+          <a:lstStyle/>
+          <a:p>
+            <a:pPr algn="ctr"/>
+            <a:endParaRPr lang="en-US"/>
+          </a:p>
+        </p:txBody>
+      </p:sp>
+      <p:sp>
+        <p:nvSpPr>
+          <p:cNvPr id="9" name="CuadroTexto 8">
+            <a:extLst>
+              <a:ext uri="{FF2B5EF4-FFF2-40B4-BE49-F238E27FC236}">
+                <a16:creationId xmlns:a16="http://schemas.microsoft.com/office/drawing/2014/main" id="{61E2CF23-CBF7-FD55-3E3C-50034A5613E7}"/>
+              </a:ext>
+            </a:extLst>
+          </p:cNvPr>
+          <p:cNvSpPr txBox="1"/>
+          <p:nvPr/>
+        </p:nvSpPr>
+        <p:spPr>
+          <a:xfrm>
+            <a:off x="8180318" y="3105834"/>
+            <a:ext cx="1774973" cy="369332"/>
+          </a:xfrm>
+          <a:prstGeom prst="rect">
+            <a:avLst/>
+          </a:prstGeom>
+          <a:noFill/>
+        </p:spPr>
+        <p:txBody>
+          <a:bodyPr wrap="none" rtlCol="0">
+            <a:spAutoFit/>
+          </a:bodyPr>
+          <a:lstStyle/>
+          <a:p>
+            <a:pPr algn="ctr"/>
+            <a:r>
+              <a:rPr lang="es-ES" dirty="0" err="1"/>
+              <a:t>Screenshot</a:t>
+            </a:r>
+            <a:r>
+              <a:rPr lang="es-ES" dirty="0"/>
+              <a:t> </a:t>
+            </a:r>
+            <a:r>
+              <a:rPr lang="es-ES" dirty="0" err="1"/>
+              <a:t>for</a:t>
+            </a:r>
+            <a:r>
+              <a:rPr lang="es-ES" dirty="0"/>
+              <a:t> …</a:t>
+            </a:r>
+            <a:endParaRPr lang="en-US" dirty="0"/>
+          </a:p>
+        </p:txBody>
+      </p:sp>
+      <p:pic>
+        <p:nvPicPr>
+          <p:cNvPr id="5" name="Imagen 4">
+            <a:extLst>
+              <a:ext uri="{FF2B5EF4-FFF2-40B4-BE49-F238E27FC236}">
+                <a16:creationId xmlns:a16="http://schemas.microsoft.com/office/drawing/2014/main" id="{5DE79CD8-0A99-CB95-E1F9-6338D72A49C7}"/>
+              </a:ext>
+            </a:extLst>
+          </p:cNvPr>
+          <p:cNvPicPr>
+            <a:picLocks noChangeAspect="1"/>
+          </p:cNvPicPr>
+          <p:nvPr/>
+        </p:nvPicPr>
+        <p:blipFill>
+          <a:blip r:embed="rId4"/>
+          <a:stretch>
+            <a:fillRect/>
+          </a:stretch>
+        </p:blipFill>
+        <p:spPr>
+          <a:xfrm>
+            <a:off x="6248400" y="1066800"/>
+            <a:ext cx="5638799" cy="4256741"/>
+          </a:xfrm>
+          <a:prstGeom prst="rect">
+            <a:avLst/>
+          </a:prstGeom>
+        </p:spPr>
+      </p:pic>
+      <p:pic>
+        <p:nvPicPr>
+          <p:cNvPr id="7" name="Imagen 6">
+            <a:extLst>
+              <a:ext uri="{FF2B5EF4-FFF2-40B4-BE49-F238E27FC236}">
+                <a16:creationId xmlns:a16="http://schemas.microsoft.com/office/drawing/2014/main" id="{81216466-B937-CEE4-6A2A-109DEB4155F4}"/>
+              </a:ext>
+            </a:extLst>
+          </p:cNvPr>
+          <p:cNvPicPr>
+            <a:picLocks noChangeAspect="1"/>
+          </p:cNvPicPr>
+          <p:nvPr/>
+        </p:nvPicPr>
+        <p:blipFill>
+          <a:blip r:embed="rId5"/>
+          <a:stretch>
+            <a:fillRect/>
+          </a:stretch>
+        </p:blipFill>
+        <p:spPr>
+          <a:xfrm>
+            <a:off x="1524000" y="1122247"/>
+            <a:ext cx="3657600" cy="4978573"/>
+          </a:xfrm>
+          <a:prstGeom prst="rect">
+            <a:avLst/>
+          </a:prstGeom>
+        </p:spPr>
+      </p:pic>
+    </p:spTree>
+    <p:extLst>
+      <p:ext uri="{BB962C8B-B14F-4D97-AF65-F5344CB8AC3E}">
+        <p14:creationId xmlns:p14="http://schemas.microsoft.com/office/powerpoint/2010/main" val="494749109"/>
+      </p:ext>
+    </p:extLst>
   </p:cSld>
   <p:clrMapOvr>
     <a:masterClrMapping/>
@@ -8704,6 +10964,4077 @@
         <p14:creationId xmlns:p14="http://schemas.microsoft.com/office/powerpoint/2010/main" val="560234623"/>
       </p:ext>
     </p:extLst>
+  </p:cSld>
+  <p:clrMapOvr>
+    <a:masterClrMapping/>
+  </p:clrMapOvr>
+</p:sld>
+</file>
+
+<file path=ppt/slides/slide20.xml><?xml version="1.0" encoding="utf-8"?>
+<p:sld xmlns:a="http://schemas.openxmlformats.org/drawingml/2006/main" xmlns:r="http://schemas.openxmlformats.org/officeDocument/2006/relationships" xmlns:p="http://schemas.openxmlformats.org/presentationml/2006/main">
+  <p:cSld>
+    <p:spTree>
+      <p:nvGrpSpPr>
+        <p:cNvPr id="1" name="">
+          <a:extLst>
+            <a:ext uri="{FF2B5EF4-FFF2-40B4-BE49-F238E27FC236}">
+              <a16:creationId xmlns:a16="http://schemas.microsoft.com/office/drawing/2014/main" id="{2961DD1D-BD5E-7EAD-B46C-813E47D18387}"/>
+            </a:ext>
+          </a:extLst>
+        </p:cNvPr>
+        <p:cNvGrpSpPr/>
+        <p:nvPr/>
+      </p:nvGrpSpPr>
+      <p:grpSpPr>
+        <a:xfrm>
+          <a:off x="0" y="0"/>
+          <a:ext cx="0" cy="0"/>
+          <a:chOff x="0" y="0"/>
+          <a:chExt cx="0" cy="0"/>
+        </a:xfrm>
+      </p:grpSpPr>
+      <p:sp>
+        <p:nvSpPr>
+          <p:cNvPr id="16" name="object 16">
+            <a:extLst>
+              <a:ext uri="{FF2B5EF4-FFF2-40B4-BE49-F238E27FC236}">
+                <a16:creationId xmlns:a16="http://schemas.microsoft.com/office/drawing/2014/main" id="{F882727C-203B-0970-47CC-735B0EE9F76A}"/>
+              </a:ext>
+            </a:extLst>
+          </p:cNvPr>
+          <p:cNvSpPr txBox="1">
+            <a:spLocks noGrp="1"/>
+          </p:cNvSpPr>
+          <p:nvPr>
+            <p:ph type="title"/>
+          </p:nvPr>
+        </p:nvSpPr>
+        <p:spPr>
+          <a:xfrm>
+            <a:off x="609600" y="203490"/>
+            <a:ext cx="10994410" cy="705321"/>
+          </a:xfrm>
+          <a:prstGeom prst="rect">
+            <a:avLst/>
+          </a:prstGeom>
+        </p:spPr>
+        <p:txBody>
+          <a:bodyPr vert="horz" wrap="square" lIns="0" tIns="12700" rIns="0" bIns="0" rtlCol="0">
+            <a:spAutoFit/>
+          </a:bodyPr>
+          <a:lstStyle/>
+          <a:p>
+            <a:pPr marL="12700" algn="l">
+              <a:lnSpc>
+                <a:spcPct val="100000"/>
+              </a:lnSpc>
+              <a:spcBef>
+                <a:spcPts val="100"/>
+              </a:spcBef>
+            </a:pPr>
+            <a:r>
+              <a:rPr lang="en-US" sz="2500" dirty="0"/>
+              <a:t>Learning outcome #4 – Notebook section 4. Exercises – 1 slide per bullet point</a:t>
+            </a:r>
+            <a:br>
+              <a:rPr lang="en-US" sz="2500" dirty="0"/>
+            </a:br>
+            <a:r>
+              <a:rPr lang="en-US" sz="1000" b="0" dirty="0">
+                <a:latin typeface="Arial" panose="020B0604020202020204" pitchFamily="34" charset="0"/>
+                <a:cs typeface="Arial" panose="020B0604020202020204" pitchFamily="34" charset="0"/>
+              </a:rPr>
+              <a:t>a.4 - Create a cell component based on the previous, where the ring has a thermal tuner on top along all the perimeter</a:t>
+            </a:r>
+            <a:br>
+              <a:rPr lang="en-US" sz="1000" b="0" dirty="0">
+                <a:latin typeface="Arial" panose="020B0604020202020204" pitchFamily="34" charset="0"/>
+                <a:cs typeface="Arial" panose="020B0604020202020204" pitchFamily="34" charset="0"/>
+              </a:rPr>
+            </a:br>
+            <a:endParaRPr sz="1000" b="0" i="1" dirty="0">
+              <a:latin typeface="Arial" panose="020B0604020202020204" pitchFamily="34" charset="0"/>
+              <a:cs typeface="Arial" panose="020B0604020202020204" pitchFamily="34" charset="0"/>
+            </a:endParaRPr>
+          </a:p>
+        </p:txBody>
+      </p:sp>
+      <p:pic>
+        <p:nvPicPr>
+          <p:cNvPr id="83" name="Gráfico 82">
+            <a:extLst>
+              <a:ext uri="{FF2B5EF4-FFF2-40B4-BE49-F238E27FC236}">
+                <a16:creationId xmlns:a16="http://schemas.microsoft.com/office/drawing/2014/main" id="{11D5FCF0-F8C7-F222-34F9-006BEE928853}"/>
+              </a:ext>
+            </a:extLst>
+          </p:cNvPr>
+          <p:cNvPicPr>
+            <a:picLocks noChangeAspect="1"/>
+          </p:cNvPicPr>
+          <p:nvPr/>
+        </p:nvPicPr>
+        <p:blipFill>
+          <a:blip>
+            <a:extLst>
+              <a:ext uri="{96DAC541-7B7A-43D3-8B79-37D633B846F1}">
+                <asvg:svgBlip xmlns:asvg="http://schemas.microsoft.com/office/drawing/2016/SVG/main" r:embed="rId3"/>
+              </a:ext>
+            </a:extLst>
+          </a:blip>
+          <a:stretch>
+            <a:fillRect/>
+          </a:stretch>
+        </p:blipFill>
+        <p:spPr>
+          <a:xfrm>
+            <a:off x="5045006" y="6356057"/>
+            <a:ext cx="6409575" cy="363174"/>
+          </a:xfrm>
+          <a:prstGeom prst="rect">
+            <a:avLst/>
+          </a:prstGeom>
+        </p:spPr>
+      </p:pic>
+      <p:sp>
+        <p:nvSpPr>
+          <p:cNvPr id="84" name="Marcador de número de diapositiva 83">
+            <a:extLst>
+              <a:ext uri="{FF2B5EF4-FFF2-40B4-BE49-F238E27FC236}">
+                <a16:creationId xmlns:a16="http://schemas.microsoft.com/office/drawing/2014/main" id="{B70F9E65-2032-8EF0-77E5-6C04B9397EDD}"/>
+              </a:ext>
+            </a:extLst>
+          </p:cNvPr>
+          <p:cNvSpPr>
+            <a:spLocks noGrp="1"/>
+          </p:cNvSpPr>
+          <p:nvPr>
+            <p:ph type="sldNum" sz="quarter" idx="7"/>
+          </p:nvPr>
+        </p:nvSpPr>
+        <p:spPr/>
+        <p:txBody>
+          <a:bodyPr/>
+          <a:lstStyle/>
+          <a:p>
+            <a:fld id="{B6F15528-21DE-4FAA-801E-634DDDAF4B2B}" type="slidenum">
+              <a:rPr lang="es-ES" smtClean="0"/>
+              <a:t>20</a:t>
+            </a:fld>
+            <a:endParaRPr lang="es-ES"/>
+          </a:p>
+        </p:txBody>
+      </p:sp>
+      <p:sp>
+        <p:nvSpPr>
+          <p:cNvPr id="3" name="Marcador de pie de página 2">
+            <a:extLst>
+              <a:ext uri="{FF2B5EF4-FFF2-40B4-BE49-F238E27FC236}">
+                <a16:creationId xmlns:a16="http://schemas.microsoft.com/office/drawing/2014/main" id="{205A7E75-8376-114A-4F02-EA8BC3316D87}"/>
+              </a:ext>
+            </a:extLst>
+          </p:cNvPr>
+          <p:cNvSpPr>
+            <a:spLocks noGrp="1"/>
+          </p:cNvSpPr>
+          <p:nvPr>
+            <p:ph type="ftr" sz="quarter" idx="5"/>
+          </p:nvPr>
+        </p:nvSpPr>
+        <p:spPr/>
+        <p:txBody>
+          <a:bodyPr/>
+          <a:lstStyle/>
+          <a:p>
+            <a:pPr marL="12700">
+              <a:spcBef>
+                <a:spcPts val="15"/>
+              </a:spcBef>
+            </a:pPr>
+            <a:r>
+              <a:rPr lang="es-ES" spc="-5"/>
+              <a:t>LAB 4.0. LAYOUT</a:t>
+            </a:r>
+            <a:endParaRPr lang="es-ES" spc="-5" dirty="0"/>
+          </a:p>
+        </p:txBody>
+      </p:sp>
+      <p:sp>
+        <p:nvSpPr>
+          <p:cNvPr id="2" name="CuadroTexto 1">
+            <a:extLst>
+              <a:ext uri="{FF2B5EF4-FFF2-40B4-BE49-F238E27FC236}">
+                <a16:creationId xmlns:a16="http://schemas.microsoft.com/office/drawing/2014/main" id="{409C31B3-795C-0997-6A5D-CDE58581965C}"/>
+              </a:ext>
+            </a:extLst>
+          </p:cNvPr>
+          <p:cNvSpPr txBox="1"/>
+          <p:nvPr/>
+        </p:nvSpPr>
+        <p:spPr>
+          <a:xfrm>
+            <a:off x="685800" y="990600"/>
+            <a:ext cx="5410200" cy="5181600"/>
+          </a:xfrm>
+          <a:prstGeom prst="rect">
+            <a:avLst/>
+          </a:prstGeom>
+          <a:solidFill>
+            <a:schemeClr val="bg1">
+              <a:lumMod val="95000"/>
+            </a:schemeClr>
+          </a:solidFill>
+          <a:ln w="28575">
+            <a:solidFill>
+              <a:srgbClr val="E0700D"/>
+            </a:solidFill>
+          </a:ln>
+        </p:spPr>
+        <p:txBody>
+          <a:bodyPr wrap="square" rtlCol="0">
+            <a:noAutofit/>
+          </a:bodyPr>
+          <a:lstStyle/>
+          <a:p>
+            <a:pPr algn="just"/>
+            <a:endParaRPr lang="en-US" sz="1200" dirty="0">
+              <a:latin typeface="Arial" panose="020B0604020202020204" pitchFamily="34" charset="0"/>
+              <a:cs typeface="Arial" panose="020B0604020202020204" pitchFamily="34" charset="0"/>
+            </a:endParaRPr>
+          </a:p>
+        </p:txBody>
+      </p:sp>
+      <p:sp>
+        <p:nvSpPr>
+          <p:cNvPr id="8" name="Rectángulo 7">
+            <a:extLst>
+              <a:ext uri="{FF2B5EF4-FFF2-40B4-BE49-F238E27FC236}">
+                <a16:creationId xmlns:a16="http://schemas.microsoft.com/office/drawing/2014/main" id="{A1A649CC-2823-414B-E36B-9B067EE793D9}"/>
+              </a:ext>
+            </a:extLst>
+          </p:cNvPr>
+          <p:cNvSpPr/>
+          <p:nvPr/>
+        </p:nvSpPr>
+        <p:spPr>
+          <a:xfrm>
+            <a:off x="6248400" y="990285"/>
+            <a:ext cx="5638799" cy="5181600"/>
+          </a:xfrm>
+          <a:prstGeom prst="rect">
+            <a:avLst/>
+          </a:prstGeom>
+          <a:noFill/>
+          <a:ln w="28575">
+            <a:solidFill>
+              <a:srgbClr val="E0700D"/>
+            </a:solidFill>
+          </a:ln>
+        </p:spPr>
+        <p:style>
+          <a:lnRef idx="2">
+            <a:schemeClr val="accent1">
+              <a:shade val="15000"/>
+            </a:schemeClr>
+          </a:lnRef>
+          <a:fillRef idx="1">
+            <a:schemeClr val="accent1"/>
+          </a:fillRef>
+          <a:effectRef idx="0">
+            <a:schemeClr val="accent1"/>
+          </a:effectRef>
+          <a:fontRef idx="minor">
+            <a:schemeClr val="lt1"/>
+          </a:fontRef>
+        </p:style>
+        <p:txBody>
+          <a:bodyPr rtlCol="0" anchor="ctr"/>
+          <a:lstStyle/>
+          <a:p>
+            <a:pPr algn="ctr"/>
+            <a:endParaRPr lang="en-US"/>
+          </a:p>
+        </p:txBody>
+      </p:sp>
+      <p:sp>
+        <p:nvSpPr>
+          <p:cNvPr id="9" name="CuadroTexto 8">
+            <a:extLst>
+              <a:ext uri="{FF2B5EF4-FFF2-40B4-BE49-F238E27FC236}">
+                <a16:creationId xmlns:a16="http://schemas.microsoft.com/office/drawing/2014/main" id="{8EA0010D-79EA-C154-AF4B-775A7592DA6B}"/>
+              </a:ext>
+            </a:extLst>
+          </p:cNvPr>
+          <p:cNvSpPr txBox="1"/>
+          <p:nvPr/>
+        </p:nvSpPr>
+        <p:spPr>
+          <a:xfrm>
+            <a:off x="8180318" y="3105834"/>
+            <a:ext cx="1774973" cy="369332"/>
+          </a:xfrm>
+          <a:prstGeom prst="rect">
+            <a:avLst/>
+          </a:prstGeom>
+          <a:noFill/>
+        </p:spPr>
+        <p:txBody>
+          <a:bodyPr wrap="none" rtlCol="0">
+            <a:spAutoFit/>
+          </a:bodyPr>
+          <a:lstStyle/>
+          <a:p>
+            <a:pPr algn="ctr"/>
+            <a:r>
+              <a:rPr lang="es-ES" dirty="0" err="1"/>
+              <a:t>Screenshot</a:t>
+            </a:r>
+            <a:r>
+              <a:rPr lang="es-ES" dirty="0"/>
+              <a:t> </a:t>
+            </a:r>
+            <a:r>
+              <a:rPr lang="es-ES" dirty="0" err="1"/>
+              <a:t>for</a:t>
+            </a:r>
+            <a:r>
+              <a:rPr lang="es-ES" dirty="0"/>
+              <a:t> …</a:t>
+            </a:r>
+            <a:endParaRPr lang="en-US" dirty="0"/>
+          </a:p>
+        </p:txBody>
+      </p:sp>
+      <p:pic>
+        <p:nvPicPr>
+          <p:cNvPr id="5" name="Imagen 4">
+            <a:extLst>
+              <a:ext uri="{FF2B5EF4-FFF2-40B4-BE49-F238E27FC236}">
+                <a16:creationId xmlns:a16="http://schemas.microsoft.com/office/drawing/2014/main" id="{25766E35-F76B-C283-A90A-3BBB2B8C8E37}"/>
+              </a:ext>
+            </a:extLst>
+          </p:cNvPr>
+          <p:cNvPicPr>
+            <a:picLocks noChangeAspect="1"/>
+          </p:cNvPicPr>
+          <p:nvPr/>
+        </p:nvPicPr>
+        <p:blipFill>
+          <a:blip r:embed="rId4"/>
+          <a:stretch>
+            <a:fillRect/>
+          </a:stretch>
+        </p:blipFill>
+        <p:spPr>
+          <a:xfrm>
+            <a:off x="6486895" y="1592225"/>
+            <a:ext cx="5400304" cy="4076700"/>
+          </a:xfrm>
+          <a:prstGeom prst="rect">
+            <a:avLst/>
+          </a:prstGeom>
+        </p:spPr>
+      </p:pic>
+      <p:pic>
+        <p:nvPicPr>
+          <p:cNvPr id="7" name="Imagen 6">
+            <a:extLst>
+              <a:ext uri="{FF2B5EF4-FFF2-40B4-BE49-F238E27FC236}">
+                <a16:creationId xmlns:a16="http://schemas.microsoft.com/office/drawing/2014/main" id="{9DAD899C-3F8C-09AD-3CAE-9FEDBA0CCF3F}"/>
+              </a:ext>
+            </a:extLst>
+          </p:cNvPr>
+          <p:cNvPicPr>
+            <a:picLocks noChangeAspect="1"/>
+          </p:cNvPicPr>
+          <p:nvPr/>
+        </p:nvPicPr>
+        <p:blipFill>
+          <a:blip r:embed="rId5"/>
+          <a:stretch>
+            <a:fillRect/>
+          </a:stretch>
+        </p:blipFill>
+        <p:spPr>
+          <a:xfrm>
+            <a:off x="1283576" y="1165082"/>
+            <a:ext cx="3837384" cy="4702318"/>
+          </a:xfrm>
+          <a:prstGeom prst="rect">
+            <a:avLst/>
+          </a:prstGeom>
+        </p:spPr>
+      </p:pic>
+    </p:spTree>
+    <p:extLst>
+      <p:ext uri="{BB962C8B-B14F-4D97-AF65-F5344CB8AC3E}">
+        <p14:creationId xmlns:p14="http://schemas.microsoft.com/office/powerpoint/2010/main" val="1692011820"/>
+      </p:ext>
+    </p:extLst>
+  </p:cSld>
+  <p:clrMapOvr>
+    <a:masterClrMapping/>
+  </p:clrMapOvr>
+</p:sld>
+</file>
+
+<file path=ppt/slides/slide21.xml><?xml version="1.0" encoding="utf-8"?>
+<p:sld xmlns:a="http://schemas.openxmlformats.org/drawingml/2006/main" xmlns:r="http://schemas.openxmlformats.org/officeDocument/2006/relationships" xmlns:p="http://schemas.openxmlformats.org/presentationml/2006/main">
+  <p:cSld>
+    <p:spTree>
+      <p:nvGrpSpPr>
+        <p:cNvPr id="1" name="">
+          <a:extLst>
+            <a:ext uri="{FF2B5EF4-FFF2-40B4-BE49-F238E27FC236}">
+              <a16:creationId xmlns:a16="http://schemas.microsoft.com/office/drawing/2014/main" id="{900F2B0F-7DF0-9974-96DD-BB957915D0F2}"/>
+            </a:ext>
+          </a:extLst>
+        </p:cNvPr>
+        <p:cNvGrpSpPr/>
+        <p:nvPr/>
+      </p:nvGrpSpPr>
+      <p:grpSpPr>
+        <a:xfrm>
+          <a:off x="0" y="0"/>
+          <a:ext cx="0" cy="0"/>
+          <a:chOff x="0" y="0"/>
+          <a:chExt cx="0" cy="0"/>
+        </a:xfrm>
+      </p:grpSpPr>
+      <p:sp>
+        <p:nvSpPr>
+          <p:cNvPr id="16" name="object 16">
+            <a:extLst>
+              <a:ext uri="{FF2B5EF4-FFF2-40B4-BE49-F238E27FC236}">
+                <a16:creationId xmlns:a16="http://schemas.microsoft.com/office/drawing/2014/main" id="{664B474D-03D9-36C7-DCDC-9C38F22BBFFF}"/>
+              </a:ext>
+            </a:extLst>
+          </p:cNvPr>
+          <p:cNvSpPr txBox="1">
+            <a:spLocks noGrp="1"/>
+          </p:cNvSpPr>
+          <p:nvPr>
+            <p:ph type="title"/>
+          </p:nvPr>
+        </p:nvSpPr>
+        <p:spPr>
+          <a:xfrm>
+            <a:off x="685800" y="408883"/>
+            <a:ext cx="10994410" cy="936154"/>
+          </a:xfrm>
+          <a:prstGeom prst="rect">
+            <a:avLst/>
+          </a:prstGeom>
+        </p:spPr>
+        <p:txBody>
+          <a:bodyPr vert="horz" wrap="square" lIns="0" tIns="12700" rIns="0" bIns="0" rtlCol="0">
+            <a:spAutoFit/>
+          </a:bodyPr>
+          <a:lstStyle/>
+          <a:p>
+            <a:pPr marL="12700" algn="l">
+              <a:spcBef>
+                <a:spcPts val="100"/>
+              </a:spcBef>
+            </a:pPr>
+            <a:r>
+              <a:rPr lang="en-US" sz="2500" dirty="0"/>
+              <a:t>Learning outcome #4 – Notebook section 4. Exercises – 1 slide per bullet point</a:t>
+            </a:r>
+            <a:br>
+              <a:rPr lang="en-US" sz="2500" dirty="0"/>
+            </a:br>
+            <a:r>
+              <a:rPr lang="en-US" sz="1000" b="0" dirty="0">
+                <a:latin typeface="Arial" panose="020B0604020202020204" pitchFamily="34" charset="0"/>
+                <a:cs typeface="Arial" panose="020B0604020202020204" pitchFamily="34" charset="0"/>
+              </a:rPr>
+              <a:t>a.5 - Create a cell component based on existing </a:t>
+            </a:r>
+            <a:r>
+              <a:rPr lang="en-US" sz="1000" b="0" dirty="0" err="1">
+                <a:latin typeface="Arial" panose="020B0604020202020204" pitchFamily="34" charset="0"/>
+                <a:cs typeface="Arial" panose="020B0604020202020204" pitchFamily="34" charset="0"/>
+              </a:rPr>
+              <a:t>GDSfactory</a:t>
+            </a:r>
+            <a:r>
+              <a:rPr lang="en-US" sz="1000" b="0" dirty="0">
+                <a:latin typeface="Arial" panose="020B0604020202020204" pitchFamily="34" charset="0"/>
+                <a:cs typeface="Arial" panose="020B0604020202020204" pitchFamily="34" charset="0"/>
+              </a:rPr>
+              <a:t> spiral components, with length as parameter</a:t>
+            </a:r>
+            <a:br>
+              <a:rPr lang="en-US" sz="2800" dirty="0">
+                <a:latin typeface="Arial" panose="020B0604020202020204" pitchFamily="34" charset="0"/>
+                <a:cs typeface="Arial" panose="020B0604020202020204" pitchFamily="34" charset="0"/>
+              </a:rPr>
+            </a:br>
+            <a:endParaRPr sz="2500" b="0" i="1" dirty="0">
+              <a:latin typeface="+mj-lt"/>
+              <a:cs typeface="Lucida Sans"/>
+            </a:endParaRPr>
+          </a:p>
+        </p:txBody>
+      </p:sp>
+      <p:pic>
+        <p:nvPicPr>
+          <p:cNvPr id="83" name="Gráfico 82">
+            <a:extLst>
+              <a:ext uri="{FF2B5EF4-FFF2-40B4-BE49-F238E27FC236}">
+                <a16:creationId xmlns:a16="http://schemas.microsoft.com/office/drawing/2014/main" id="{9CFF5E76-8409-E38C-8D5B-A5DA81697E32}"/>
+              </a:ext>
+            </a:extLst>
+          </p:cNvPr>
+          <p:cNvPicPr>
+            <a:picLocks noChangeAspect="1"/>
+          </p:cNvPicPr>
+          <p:nvPr/>
+        </p:nvPicPr>
+        <p:blipFill>
+          <a:blip>
+            <a:extLst>
+              <a:ext uri="{96DAC541-7B7A-43D3-8B79-37D633B846F1}">
+                <asvg:svgBlip xmlns:asvg="http://schemas.microsoft.com/office/drawing/2016/SVG/main" r:embed="rId3"/>
+              </a:ext>
+            </a:extLst>
+          </a:blip>
+          <a:stretch>
+            <a:fillRect/>
+          </a:stretch>
+        </p:blipFill>
+        <p:spPr>
+          <a:xfrm>
+            <a:off x="5045006" y="6356057"/>
+            <a:ext cx="6409575" cy="363174"/>
+          </a:xfrm>
+          <a:prstGeom prst="rect">
+            <a:avLst/>
+          </a:prstGeom>
+        </p:spPr>
+      </p:pic>
+      <p:sp>
+        <p:nvSpPr>
+          <p:cNvPr id="84" name="Marcador de número de diapositiva 83">
+            <a:extLst>
+              <a:ext uri="{FF2B5EF4-FFF2-40B4-BE49-F238E27FC236}">
+                <a16:creationId xmlns:a16="http://schemas.microsoft.com/office/drawing/2014/main" id="{4C1D0166-A435-B89A-3DFC-F7F0E911C5C9}"/>
+              </a:ext>
+            </a:extLst>
+          </p:cNvPr>
+          <p:cNvSpPr>
+            <a:spLocks noGrp="1"/>
+          </p:cNvSpPr>
+          <p:nvPr>
+            <p:ph type="sldNum" sz="quarter" idx="7"/>
+          </p:nvPr>
+        </p:nvSpPr>
+        <p:spPr/>
+        <p:txBody>
+          <a:bodyPr/>
+          <a:lstStyle/>
+          <a:p>
+            <a:fld id="{B6F15528-21DE-4FAA-801E-634DDDAF4B2B}" type="slidenum">
+              <a:rPr lang="es-ES" smtClean="0"/>
+              <a:t>21</a:t>
+            </a:fld>
+            <a:endParaRPr lang="es-ES"/>
+          </a:p>
+        </p:txBody>
+      </p:sp>
+      <p:sp>
+        <p:nvSpPr>
+          <p:cNvPr id="3" name="Marcador de pie de página 2">
+            <a:extLst>
+              <a:ext uri="{FF2B5EF4-FFF2-40B4-BE49-F238E27FC236}">
+                <a16:creationId xmlns:a16="http://schemas.microsoft.com/office/drawing/2014/main" id="{4F354CEB-1664-C70F-E935-7584203FAC01}"/>
+              </a:ext>
+            </a:extLst>
+          </p:cNvPr>
+          <p:cNvSpPr>
+            <a:spLocks noGrp="1"/>
+          </p:cNvSpPr>
+          <p:nvPr>
+            <p:ph type="ftr" sz="quarter" idx="5"/>
+          </p:nvPr>
+        </p:nvSpPr>
+        <p:spPr/>
+        <p:txBody>
+          <a:bodyPr/>
+          <a:lstStyle/>
+          <a:p>
+            <a:pPr marL="12700">
+              <a:spcBef>
+                <a:spcPts val="15"/>
+              </a:spcBef>
+            </a:pPr>
+            <a:r>
+              <a:rPr lang="es-ES" spc="-5"/>
+              <a:t>LAB 4.0. LAYOUT</a:t>
+            </a:r>
+            <a:endParaRPr lang="es-ES" spc="-5" dirty="0"/>
+          </a:p>
+        </p:txBody>
+      </p:sp>
+      <p:sp>
+        <p:nvSpPr>
+          <p:cNvPr id="2" name="CuadroTexto 1">
+            <a:extLst>
+              <a:ext uri="{FF2B5EF4-FFF2-40B4-BE49-F238E27FC236}">
+                <a16:creationId xmlns:a16="http://schemas.microsoft.com/office/drawing/2014/main" id="{C89561FE-14E7-702D-6992-F18090A9980F}"/>
+              </a:ext>
+            </a:extLst>
+          </p:cNvPr>
+          <p:cNvSpPr txBox="1"/>
+          <p:nvPr/>
+        </p:nvSpPr>
+        <p:spPr>
+          <a:xfrm>
+            <a:off x="685800" y="990600"/>
+            <a:ext cx="5410200" cy="5181600"/>
+          </a:xfrm>
+          <a:prstGeom prst="rect">
+            <a:avLst/>
+          </a:prstGeom>
+          <a:solidFill>
+            <a:schemeClr val="bg1">
+              <a:lumMod val="95000"/>
+            </a:schemeClr>
+          </a:solidFill>
+          <a:ln w="28575">
+            <a:solidFill>
+              <a:srgbClr val="E0700D"/>
+            </a:solidFill>
+          </a:ln>
+        </p:spPr>
+        <p:txBody>
+          <a:bodyPr wrap="square" rtlCol="0">
+            <a:noAutofit/>
+          </a:bodyPr>
+          <a:lstStyle/>
+          <a:p>
+            <a:pPr algn="just"/>
+            <a:endParaRPr lang="en-US" sz="1200" dirty="0">
+              <a:latin typeface="Arial" panose="020B0604020202020204" pitchFamily="34" charset="0"/>
+              <a:cs typeface="Arial" panose="020B0604020202020204" pitchFamily="34" charset="0"/>
+            </a:endParaRPr>
+          </a:p>
+        </p:txBody>
+      </p:sp>
+      <p:sp>
+        <p:nvSpPr>
+          <p:cNvPr id="8" name="Rectángulo 7">
+            <a:extLst>
+              <a:ext uri="{FF2B5EF4-FFF2-40B4-BE49-F238E27FC236}">
+                <a16:creationId xmlns:a16="http://schemas.microsoft.com/office/drawing/2014/main" id="{D2E7E3F7-B4E7-B1C8-A414-CF1FCAD5D1AF}"/>
+              </a:ext>
+            </a:extLst>
+          </p:cNvPr>
+          <p:cNvSpPr/>
+          <p:nvPr/>
+        </p:nvSpPr>
+        <p:spPr>
+          <a:xfrm>
+            <a:off x="6248400" y="990285"/>
+            <a:ext cx="5638799" cy="5181600"/>
+          </a:xfrm>
+          <a:prstGeom prst="rect">
+            <a:avLst/>
+          </a:prstGeom>
+          <a:noFill/>
+          <a:ln w="28575">
+            <a:solidFill>
+              <a:srgbClr val="E0700D"/>
+            </a:solidFill>
+          </a:ln>
+        </p:spPr>
+        <p:style>
+          <a:lnRef idx="2">
+            <a:schemeClr val="accent1">
+              <a:shade val="15000"/>
+            </a:schemeClr>
+          </a:lnRef>
+          <a:fillRef idx="1">
+            <a:schemeClr val="accent1"/>
+          </a:fillRef>
+          <a:effectRef idx="0">
+            <a:schemeClr val="accent1"/>
+          </a:effectRef>
+          <a:fontRef idx="minor">
+            <a:schemeClr val="lt1"/>
+          </a:fontRef>
+        </p:style>
+        <p:txBody>
+          <a:bodyPr rtlCol="0" anchor="ctr"/>
+          <a:lstStyle/>
+          <a:p>
+            <a:pPr algn="ctr"/>
+            <a:endParaRPr lang="en-US"/>
+          </a:p>
+        </p:txBody>
+      </p:sp>
+      <p:sp>
+        <p:nvSpPr>
+          <p:cNvPr id="9" name="CuadroTexto 8">
+            <a:extLst>
+              <a:ext uri="{FF2B5EF4-FFF2-40B4-BE49-F238E27FC236}">
+                <a16:creationId xmlns:a16="http://schemas.microsoft.com/office/drawing/2014/main" id="{E3B98C5B-9C4A-2552-3AD1-F49BDFB1495D}"/>
+              </a:ext>
+            </a:extLst>
+          </p:cNvPr>
+          <p:cNvSpPr txBox="1"/>
+          <p:nvPr/>
+        </p:nvSpPr>
+        <p:spPr>
+          <a:xfrm>
+            <a:off x="8180318" y="3105834"/>
+            <a:ext cx="1774973" cy="369332"/>
+          </a:xfrm>
+          <a:prstGeom prst="rect">
+            <a:avLst/>
+          </a:prstGeom>
+          <a:noFill/>
+        </p:spPr>
+        <p:txBody>
+          <a:bodyPr wrap="none" rtlCol="0">
+            <a:spAutoFit/>
+          </a:bodyPr>
+          <a:lstStyle/>
+          <a:p>
+            <a:pPr algn="ctr"/>
+            <a:r>
+              <a:rPr lang="es-ES" dirty="0" err="1"/>
+              <a:t>Screenshot</a:t>
+            </a:r>
+            <a:r>
+              <a:rPr lang="es-ES" dirty="0"/>
+              <a:t> </a:t>
+            </a:r>
+            <a:r>
+              <a:rPr lang="es-ES" dirty="0" err="1"/>
+              <a:t>for</a:t>
+            </a:r>
+            <a:r>
+              <a:rPr lang="es-ES" dirty="0"/>
+              <a:t> …</a:t>
+            </a:r>
+            <a:endParaRPr lang="en-US" dirty="0"/>
+          </a:p>
+        </p:txBody>
+      </p:sp>
+      <p:pic>
+        <p:nvPicPr>
+          <p:cNvPr id="5" name="Imagen 4">
+            <a:extLst>
+              <a:ext uri="{FF2B5EF4-FFF2-40B4-BE49-F238E27FC236}">
+                <a16:creationId xmlns:a16="http://schemas.microsoft.com/office/drawing/2014/main" id="{61ECF392-87DA-DBF3-D897-3D0FB955F129}"/>
+              </a:ext>
+            </a:extLst>
+          </p:cNvPr>
+          <p:cNvPicPr>
+            <a:picLocks noChangeAspect="1"/>
+          </p:cNvPicPr>
+          <p:nvPr/>
+        </p:nvPicPr>
+        <p:blipFill>
+          <a:blip r:embed="rId4"/>
+          <a:stretch>
+            <a:fillRect/>
+          </a:stretch>
+        </p:blipFill>
+        <p:spPr>
+          <a:xfrm>
+            <a:off x="6385955" y="1398716"/>
+            <a:ext cx="5501244" cy="4152900"/>
+          </a:xfrm>
+          <a:prstGeom prst="rect">
+            <a:avLst/>
+          </a:prstGeom>
+        </p:spPr>
+      </p:pic>
+      <p:pic>
+        <p:nvPicPr>
+          <p:cNvPr id="7" name="Imagen 6">
+            <a:extLst>
+              <a:ext uri="{FF2B5EF4-FFF2-40B4-BE49-F238E27FC236}">
+                <a16:creationId xmlns:a16="http://schemas.microsoft.com/office/drawing/2014/main" id="{CC60FC10-CE1D-E358-8D57-819A5EF8DFD2}"/>
+              </a:ext>
+            </a:extLst>
+          </p:cNvPr>
+          <p:cNvPicPr>
+            <a:picLocks noChangeAspect="1"/>
+          </p:cNvPicPr>
+          <p:nvPr/>
+        </p:nvPicPr>
+        <p:blipFill>
+          <a:blip r:embed="rId5"/>
+          <a:stretch>
+            <a:fillRect/>
+          </a:stretch>
+        </p:blipFill>
+        <p:spPr>
+          <a:xfrm>
+            <a:off x="1281776" y="1143548"/>
+            <a:ext cx="4142047" cy="5028337"/>
+          </a:xfrm>
+          <a:prstGeom prst="rect">
+            <a:avLst/>
+          </a:prstGeom>
+        </p:spPr>
+      </p:pic>
+    </p:spTree>
+    <p:extLst>
+      <p:ext uri="{BB962C8B-B14F-4D97-AF65-F5344CB8AC3E}">
+        <p14:creationId xmlns:p14="http://schemas.microsoft.com/office/powerpoint/2010/main" val="951646150"/>
+      </p:ext>
+    </p:extLst>
+  </p:cSld>
+  <p:clrMapOvr>
+    <a:masterClrMapping/>
+  </p:clrMapOvr>
+</p:sld>
+</file>
+
+<file path=ppt/slides/slide22.xml><?xml version="1.0" encoding="utf-8"?>
+<p:sld xmlns:a="http://schemas.openxmlformats.org/drawingml/2006/main" xmlns:r="http://schemas.openxmlformats.org/officeDocument/2006/relationships" xmlns:p="http://schemas.openxmlformats.org/presentationml/2006/main">
+  <p:cSld>
+    <p:spTree>
+      <p:nvGrpSpPr>
+        <p:cNvPr id="1" name="">
+          <a:extLst>
+            <a:ext uri="{FF2B5EF4-FFF2-40B4-BE49-F238E27FC236}">
+              <a16:creationId xmlns:a16="http://schemas.microsoft.com/office/drawing/2014/main" id="{E9C4D479-66C2-1F38-F121-7288EDACF45B}"/>
+            </a:ext>
+          </a:extLst>
+        </p:cNvPr>
+        <p:cNvGrpSpPr/>
+        <p:nvPr/>
+      </p:nvGrpSpPr>
+      <p:grpSpPr>
+        <a:xfrm>
+          <a:off x="0" y="0"/>
+          <a:ext cx="0" cy="0"/>
+          <a:chOff x="0" y="0"/>
+          <a:chExt cx="0" cy="0"/>
+        </a:xfrm>
+      </p:grpSpPr>
+      <p:sp>
+        <p:nvSpPr>
+          <p:cNvPr id="16" name="object 16">
+            <a:extLst>
+              <a:ext uri="{FF2B5EF4-FFF2-40B4-BE49-F238E27FC236}">
+                <a16:creationId xmlns:a16="http://schemas.microsoft.com/office/drawing/2014/main" id="{12C6A0C2-CFD1-F1E2-D1ED-3BC05AC04C0E}"/>
+              </a:ext>
+            </a:extLst>
+          </p:cNvPr>
+          <p:cNvSpPr txBox="1">
+            <a:spLocks noGrp="1"/>
+          </p:cNvSpPr>
+          <p:nvPr>
+            <p:ph type="title"/>
+          </p:nvPr>
+        </p:nvSpPr>
+        <p:spPr>
+          <a:xfrm>
+            <a:off x="685800" y="236095"/>
+            <a:ext cx="10994410" cy="551433"/>
+          </a:xfrm>
+          <a:prstGeom prst="rect">
+            <a:avLst/>
+          </a:prstGeom>
+        </p:spPr>
+        <p:txBody>
+          <a:bodyPr vert="horz" wrap="square" lIns="0" tIns="12700" rIns="0" bIns="0" rtlCol="0">
+            <a:spAutoFit/>
+          </a:bodyPr>
+          <a:lstStyle/>
+          <a:p>
+            <a:pPr algn="l"/>
+            <a:r>
+              <a:rPr lang="en-US" sz="2500" dirty="0"/>
+              <a:t>Learning outcome #4 – Notebook section 4. Exercises – 1 slide per bullet point</a:t>
+            </a:r>
+            <a:br>
+              <a:rPr lang="en-US" sz="2500" dirty="0"/>
+            </a:br>
+            <a:r>
+              <a:rPr lang="en-US" sz="1000" dirty="0">
+                <a:latin typeface="Arial" panose="020B0604020202020204" pitchFamily="34" charset="0"/>
+                <a:cs typeface="Arial" panose="020B0604020202020204" pitchFamily="34" charset="0"/>
+              </a:rPr>
+              <a:t>b.1 - Create a die  W = 5 mm x L = 10 mm </a:t>
+            </a:r>
+            <a:endParaRPr sz="1000" b="0" i="1" dirty="0">
+              <a:latin typeface="+mj-lt"/>
+              <a:cs typeface="Lucida Sans"/>
+            </a:endParaRPr>
+          </a:p>
+        </p:txBody>
+      </p:sp>
+      <p:pic>
+        <p:nvPicPr>
+          <p:cNvPr id="83" name="Gráfico 82">
+            <a:extLst>
+              <a:ext uri="{FF2B5EF4-FFF2-40B4-BE49-F238E27FC236}">
+                <a16:creationId xmlns:a16="http://schemas.microsoft.com/office/drawing/2014/main" id="{478E3630-73F3-4B5C-6C53-1390DF0B799C}"/>
+              </a:ext>
+            </a:extLst>
+          </p:cNvPr>
+          <p:cNvPicPr>
+            <a:picLocks noChangeAspect="1"/>
+          </p:cNvPicPr>
+          <p:nvPr/>
+        </p:nvPicPr>
+        <p:blipFill>
+          <a:blip>
+            <a:extLst>
+              <a:ext uri="{96DAC541-7B7A-43D3-8B79-37D633B846F1}">
+                <asvg:svgBlip xmlns:asvg="http://schemas.microsoft.com/office/drawing/2016/SVG/main" r:embed="rId3"/>
+              </a:ext>
+            </a:extLst>
+          </a:blip>
+          <a:stretch>
+            <a:fillRect/>
+          </a:stretch>
+        </p:blipFill>
+        <p:spPr>
+          <a:xfrm>
+            <a:off x="5045006" y="6356057"/>
+            <a:ext cx="6409575" cy="363174"/>
+          </a:xfrm>
+          <a:prstGeom prst="rect">
+            <a:avLst/>
+          </a:prstGeom>
+        </p:spPr>
+      </p:pic>
+      <p:sp>
+        <p:nvSpPr>
+          <p:cNvPr id="84" name="Marcador de número de diapositiva 83">
+            <a:extLst>
+              <a:ext uri="{FF2B5EF4-FFF2-40B4-BE49-F238E27FC236}">
+                <a16:creationId xmlns:a16="http://schemas.microsoft.com/office/drawing/2014/main" id="{9F6C667E-C67D-DE2B-AD21-9ABF8A826D67}"/>
+              </a:ext>
+            </a:extLst>
+          </p:cNvPr>
+          <p:cNvSpPr>
+            <a:spLocks noGrp="1"/>
+          </p:cNvSpPr>
+          <p:nvPr>
+            <p:ph type="sldNum" sz="quarter" idx="7"/>
+          </p:nvPr>
+        </p:nvSpPr>
+        <p:spPr/>
+        <p:txBody>
+          <a:bodyPr/>
+          <a:lstStyle/>
+          <a:p>
+            <a:fld id="{B6F15528-21DE-4FAA-801E-634DDDAF4B2B}" type="slidenum">
+              <a:rPr lang="es-ES" smtClean="0"/>
+              <a:t>22</a:t>
+            </a:fld>
+            <a:endParaRPr lang="es-ES"/>
+          </a:p>
+        </p:txBody>
+      </p:sp>
+      <p:sp>
+        <p:nvSpPr>
+          <p:cNvPr id="3" name="Marcador de pie de página 2">
+            <a:extLst>
+              <a:ext uri="{FF2B5EF4-FFF2-40B4-BE49-F238E27FC236}">
+                <a16:creationId xmlns:a16="http://schemas.microsoft.com/office/drawing/2014/main" id="{05C8F0F1-6C1C-059F-38BC-046D1641B17E}"/>
+              </a:ext>
+            </a:extLst>
+          </p:cNvPr>
+          <p:cNvSpPr>
+            <a:spLocks noGrp="1"/>
+          </p:cNvSpPr>
+          <p:nvPr>
+            <p:ph type="ftr" sz="quarter" idx="5"/>
+          </p:nvPr>
+        </p:nvSpPr>
+        <p:spPr/>
+        <p:txBody>
+          <a:bodyPr/>
+          <a:lstStyle/>
+          <a:p>
+            <a:pPr marL="12700">
+              <a:spcBef>
+                <a:spcPts val="15"/>
+              </a:spcBef>
+            </a:pPr>
+            <a:r>
+              <a:rPr lang="es-ES" spc="-5"/>
+              <a:t>LAB 4.0. LAYOUT</a:t>
+            </a:r>
+            <a:endParaRPr lang="es-ES" spc="-5" dirty="0"/>
+          </a:p>
+        </p:txBody>
+      </p:sp>
+      <p:sp>
+        <p:nvSpPr>
+          <p:cNvPr id="2" name="CuadroTexto 1">
+            <a:extLst>
+              <a:ext uri="{FF2B5EF4-FFF2-40B4-BE49-F238E27FC236}">
+                <a16:creationId xmlns:a16="http://schemas.microsoft.com/office/drawing/2014/main" id="{D2A2AA43-F160-E410-C695-3B89A5A23644}"/>
+              </a:ext>
+            </a:extLst>
+          </p:cNvPr>
+          <p:cNvSpPr txBox="1"/>
+          <p:nvPr/>
+        </p:nvSpPr>
+        <p:spPr>
+          <a:xfrm>
+            <a:off x="685800" y="990600"/>
+            <a:ext cx="5410200" cy="5181600"/>
+          </a:xfrm>
+          <a:prstGeom prst="rect">
+            <a:avLst/>
+          </a:prstGeom>
+          <a:solidFill>
+            <a:schemeClr val="bg1">
+              <a:lumMod val="95000"/>
+            </a:schemeClr>
+          </a:solidFill>
+          <a:ln w="28575">
+            <a:solidFill>
+              <a:srgbClr val="E0700D"/>
+            </a:solidFill>
+          </a:ln>
+        </p:spPr>
+        <p:txBody>
+          <a:bodyPr wrap="square" rtlCol="0">
+            <a:noAutofit/>
+          </a:bodyPr>
+          <a:lstStyle/>
+          <a:p>
+            <a:pPr algn="just"/>
+            <a:endParaRPr lang="en-US" sz="1200" b="1" dirty="0">
+              <a:latin typeface="Arial" panose="020B0604020202020204" pitchFamily="34" charset="0"/>
+              <a:cs typeface="Arial" panose="020B0604020202020204" pitchFamily="34" charset="0"/>
+            </a:endParaRPr>
+          </a:p>
+        </p:txBody>
+      </p:sp>
+      <p:sp>
+        <p:nvSpPr>
+          <p:cNvPr id="8" name="Rectángulo 7">
+            <a:extLst>
+              <a:ext uri="{FF2B5EF4-FFF2-40B4-BE49-F238E27FC236}">
+                <a16:creationId xmlns:a16="http://schemas.microsoft.com/office/drawing/2014/main" id="{1E39BB52-75F7-70EA-F4C3-B8DC5ED6A2A0}"/>
+              </a:ext>
+            </a:extLst>
+          </p:cNvPr>
+          <p:cNvSpPr/>
+          <p:nvPr/>
+        </p:nvSpPr>
+        <p:spPr>
+          <a:xfrm>
+            <a:off x="6248400" y="990285"/>
+            <a:ext cx="5638799" cy="5181600"/>
+          </a:xfrm>
+          <a:prstGeom prst="rect">
+            <a:avLst/>
+          </a:prstGeom>
+          <a:noFill/>
+          <a:ln w="28575">
+            <a:solidFill>
+              <a:srgbClr val="E0700D"/>
+            </a:solidFill>
+          </a:ln>
+        </p:spPr>
+        <p:style>
+          <a:lnRef idx="2">
+            <a:schemeClr val="accent1">
+              <a:shade val="15000"/>
+            </a:schemeClr>
+          </a:lnRef>
+          <a:fillRef idx="1">
+            <a:schemeClr val="accent1"/>
+          </a:fillRef>
+          <a:effectRef idx="0">
+            <a:schemeClr val="accent1"/>
+          </a:effectRef>
+          <a:fontRef idx="minor">
+            <a:schemeClr val="lt1"/>
+          </a:fontRef>
+        </p:style>
+        <p:txBody>
+          <a:bodyPr rtlCol="0" anchor="ctr"/>
+          <a:lstStyle/>
+          <a:p>
+            <a:pPr algn="ctr"/>
+            <a:endParaRPr lang="en-US"/>
+          </a:p>
+        </p:txBody>
+      </p:sp>
+      <p:sp>
+        <p:nvSpPr>
+          <p:cNvPr id="9" name="CuadroTexto 8">
+            <a:extLst>
+              <a:ext uri="{FF2B5EF4-FFF2-40B4-BE49-F238E27FC236}">
+                <a16:creationId xmlns:a16="http://schemas.microsoft.com/office/drawing/2014/main" id="{3779E9D8-F8EE-DF7A-3A08-5669A152B890}"/>
+              </a:ext>
+            </a:extLst>
+          </p:cNvPr>
+          <p:cNvSpPr txBox="1"/>
+          <p:nvPr/>
+        </p:nvSpPr>
+        <p:spPr>
+          <a:xfrm>
+            <a:off x="8180318" y="3105834"/>
+            <a:ext cx="1774973" cy="369332"/>
+          </a:xfrm>
+          <a:prstGeom prst="rect">
+            <a:avLst/>
+          </a:prstGeom>
+          <a:noFill/>
+        </p:spPr>
+        <p:txBody>
+          <a:bodyPr wrap="none" rtlCol="0">
+            <a:spAutoFit/>
+          </a:bodyPr>
+          <a:lstStyle/>
+          <a:p>
+            <a:pPr algn="ctr"/>
+            <a:r>
+              <a:rPr lang="es-ES" dirty="0" err="1"/>
+              <a:t>Screenshot</a:t>
+            </a:r>
+            <a:r>
+              <a:rPr lang="es-ES" dirty="0"/>
+              <a:t> </a:t>
+            </a:r>
+            <a:r>
+              <a:rPr lang="es-ES" dirty="0" err="1"/>
+              <a:t>for</a:t>
+            </a:r>
+            <a:r>
+              <a:rPr lang="es-ES" dirty="0"/>
+              <a:t> …</a:t>
+            </a:r>
+            <a:endParaRPr lang="en-US" dirty="0"/>
+          </a:p>
+        </p:txBody>
+      </p:sp>
+      <p:pic>
+        <p:nvPicPr>
+          <p:cNvPr id="5" name="Imagen 4">
+            <a:extLst>
+              <a:ext uri="{FF2B5EF4-FFF2-40B4-BE49-F238E27FC236}">
+                <a16:creationId xmlns:a16="http://schemas.microsoft.com/office/drawing/2014/main" id="{4DC9304E-A353-6864-958A-9810EB857F3A}"/>
+              </a:ext>
+            </a:extLst>
+          </p:cNvPr>
+          <p:cNvPicPr>
+            <a:picLocks noChangeAspect="1"/>
+          </p:cNvPicPr>
+          <p:nvPr/>
+        </p:nvPicPr>
+        <p:blipFill>
+          <a:blip r:embed="rId4"/>
+          <a:stretch>
+            <a:fillRect/>
+          </a:stretch>
+        </p:blipFill>
+        <p:spPr>
+          <a:xfrm>
+            <a:off x="6370911" y="1471166"/>
+            <a:ext cx="5309299" cy="4008000"/>
+          </a:xfrm>
+          <a:prstGeom prst="rect">
+            <a:avLst/>
+          </a:prstGeom>
+        </p:spPr>
+      </p:pic>
+      <p:pic>
+        <p:nvPicPr>
+          <p:cNvPr id="7" name="Imagen 6">
+            <a:extLst>
+              <a:ext uri="{FF2B5EF4-FFF2-40B4-BE49-F238E27FC236}">
+                <a16:creationId xmlns:a16="http://schemas.microsoft.com/office/drawing/2014/main" id="{45F3A6E8-2D1B-B4EF-07B0-191D3E909870}"/>
+              </a:ext>
+            </a:extLst>
+          </p:cNvPr>
+          <p:cNvPicPr>
+            <a:picLocks noChangeAspect="1"/>
+          </p:cNvPicPr>
+          <p:nvPr/>
+        </p:nvPicPr>
+        <p:blipFill>
+          <a:blip r:embed="rId5"/>
+          <a:stretch>
+            <a:fillRect/>
+          </a:stretch>
+        </p:blipFill>
+        <p:spPr>
+          <a:xfrm>
+            <a:off x="1089690" y="1449395"/>
+            <a:ext cx="4526219" cy="3939034"/>
+          </a:xfrm>
+          <a:prstGeom prst="rect">
+            <a:avLst/>
+          </a:prstGeom>
+        </p:spPr>
+      </p:pic>
+    </p:spTree>
+    <p:extLst>
+      <p:ext uri="{BB962C8B-B14F-4D97-AF65-F5344CB8AC3E}">
+        <p14:creationId xmlns:p14="http://schemas.microsoft.com/office/powerpoint/2010/main" val="3973005573"/>
+      </p:ext>
+    </p:extLst>
+  </p:cSld>
+  <p:clrMapOvr>
+    <a:masterClrMapping/>
+  </p:clrMapOvr>
+</p:sld>
+</file>
+
+<file path=ppt/slides/slide23.xml><?xml version="1.0" encoding="utf-8"?>
+<p:sld xmlns:a="http://schemas.openxmlformats.org/drawingml/2006/main" xmlns:r="http://schemas.openxmlformats.org/officeDocument/2006/relationships" xmlns:p="http://schemas.openxmlformats.org/presentationml/2006/main">
+  <p:cSld>
+    <p:spTree>
+      <p:nvGrpSpPr>
+        <p:cNvPr id="1" name="">
+          <a:extLst>
+            <a:ext uri="{FF2B5EF4-FFF2-40B4-BE49-F238E27FC236}">
+              <a16:creationId xmlns:a16="http://schemas.microsoft.com/office/drawing/2014/main" id="{69096504-BD27-E31B-7EC2-DC7A32D44913}"/>
+            </a:ext>
+          </a:extLst>
+        </p:cNvPr>
+        <p:cNvGrpSpPr/>
+        <p:nvPr/>
+      </p:nvGrpSpPr>
+      <p:grpSpPr>
+        <a:xfrm>
+          <a:off x="0" y="0"/>
+          <a:ext cx="0" cy="0"/>
+          <a:chOff x="0" y="0"/>
+          <a:chExt cx="0" cy="0"/>
+        </a:xfrm>
+      </p:grpSpPr>
+      <p:sp>
+        <p:nvSpPr>
+          <p:cNvPr id="16" name="object 16">
+            <a:extLst>
+              <a:ext uri="{FF2B5EF4-FFF2-40B4-BE49-F238E27FC236}">
+                <a16:creationId xmlns:a16="http://schemas.microsoft.com/office/drawing/2014/main" id="{E871658E-0EA6-B7D5-7682-2388B4DBE775}"/>
+              </a:ext>
+            </a:extLst>
+          </p:cNvPr>
+          <p:cNvSpPr txBox="1">
+            <a:spLocks noGrp="1"/>
+          </p:cNvSpPr>
+          <p:nvPr>
+            <p:ph type="title"/>
+          </p:nvPr>
+        </p:nvSpPr>
+        <p:spPr>
+          <a:xfrm>
+            <a:off x="685800" y="408883"/>
+            <a:ext cx="10994410" cy="705321"/>
+          </a:xfrm>
+          <a:prstGeom prst="rect">
+            <a:avLst/>
+          </a:prstGeom>
+        </p:spPr>
+        <p:txBody>
+          <a:bodyPr vert="horz" wrap="square" lIns="0" tIns="12700" rIns="0" bIns="0" rtlCol="0">
+            <a:spAutoFit/>
+          </a:bodyPr>
+          <a:lstStyle/>
+          <a:p>
+            <a:pPr marL="12700" algn="l">
+              <a:lnSpc>
+                <a:spcPct val="100000"/>
+              </a:lnSpc>
+              <a:spcBef>
+                <a:spcPts val="100"/>
+              </a:spcBef>
+            </a:pPr>
+            <a:r>
+              <a:rPr lang="en-US" sz="2500" dirty="0"/>
+              <a:t>Learning outcome #4 – Notebook section 4. Exercises – 1 slide per bullet point</a:t>
+            </a:r>
+            <a:br>
+              <a:rPr lang="en-US" sz="2500" dirty="0"/>
+            </a:br>
+            <a:r>
+              <a:rPr lang="en-US" sz="1000" dirty="0">
+                <a:latin typeface="Arial" panose="020B0604020202020204" pitchFamily="34" charset="0"/>
+                <a:cs typeface="Arial" panose="020B0604020202020204" pitchFamily="34" charset="0"/>
+              </a:rPr>
+              <a:t>b.2 - Create an array of I/</a:t>
+            </a:r>
+            <a:r>
+              <a:rPr lang="en-US" sz="1000" dirty="0" err="1">
+                <a:latin typeface="Arial" panose="020B0604020202020204" pitchFamily="34" charset="0"/>
+                <a:cs typeface="Arial" panose="020B0604020202020204" pitchFamily="34" charset="0"/>
+              </a:rPr>
+              <a:t>Os</a:t>
+            </a:r>
+            <a:r>
+              <a:rPr lang="en-US" sz="1000" dirty="0">
+                <a:latin typeface="Arial" panose="020B0604020202020204" pitchFamily="34" charset="0"/>
+                <a:cs typeface="Arial" panose="020B0604020202020204" pitchFamily="34" charset="0"/>
+              </a:rPr>
+              <a:t> spaced at 250 µm (as much I/</a:t>
+            </a:r>
+            <a:r>
+              <a:rPr lang="en-US" sz="1000" dirty="0" err="1">
+                <a:latin typeface="Arial" panose="020B0604020202020204" pitchFamily="34" charset="0"/>
+                <a:cs typeface="Arial" panose="020B0604020202020204" pitchFamily="34" charset="0"/>
+              </a:rPr>
+              <a:t>Os</a:t>
+            </a:r>
+            <a:r>
+              <a:rPr lang="en-US" sz="1000" dirty="0">
+                <a:latin typeface="Arial" panose="020B0604020202020204" pitchFamily="34" charset="0"/>
+                <a:cs typeface="Arial" panose="020B0604020202020204" pitchFamily="34" charset="0"/>
+              </a:rPr>
+              <a:t> as the width allows)</a:t>
+            </a:r>
+            <a:br>
+              <a:rPr lang="en-US" sz="1000" dirty="0">
+                <a:latin typeface="Arial" panose="020B0604020202020204" pitchFamily="34" charset="0"/>
+                <a:cs typeface="Arial" panose="020B0604020202020204" pitchFamily="34" charset="0"/>
+              </a:rPr>
+            </a:br>
+            <a:r>
+              <a:rPr lang="en-US" sz="1000" dirty="0">
+                <a:latin typeface="Arial" panose="020B0604020202020204" pitchFamily="34" charset="0"/>
+                <a:cs typeface="Arial" panose="020B0604020202020204" pitchFamily="34" charset="0"/>
+              </a:rPr>
+              <a:t>- b.3 - Create a cell component of this die, with I/</a:t>
+            </a:r>
+            <a:r>
+              <a:rPr lang="en-US" sz="1000" dirty="0" err="1">
+                <a:latin typeface="Arial" panose="020B0604020202020204" pitchFamily="34" charset="0"/>
+                <a:cs typeface="Arial" panose="020B0604020202020204" pitchFamily="34" charset="0"/>
+              </a:rPr>
+              <a:t>Os</a:t>
+            </a:r>
+            <a:r>
+              <a:rPr lang="en-US" sz="1000" dirty="0">
+                <a:latin typeface="Arial" panose="020B0604020202020204" pitchFamily="34" charset="0"/>
+                <a:cs typeface="Arial" panose="020B0604020202020204" pitchFamily="34" charset="0"/>
+              </a:rPr>
+              <a:t> accessible to connect</a:t>
+            </a:r>
+            <a:endParaRPr sz="1000" b="0" i="1" dirty="0">
+              <a:latin typeface="+mj-lt"/>
+              <a:cs typeface="Lucida Sans"/>
+            </a:endParaRPr>
+          </a:p>
+        </p:txBody>
+      </p:sp>
+      <p:pic>
+        <p:nvPicPr>
+          <p:cNvPr id="83" name="Gráfico 82">
+            <a:extLst>
+              <a:ext uri="{FF2B5EF4-FFF2-40B4-BE49-F238E27FC236}">
+                <a16:creationId xmlns:a16="http://schemas.microsoft.com/office/drawing/2014/main" id="{4DD5E2E7-892E-4EF4-C780-C8F00699242E}"/>
+              </a:ext>
+            </a:extLst>
+          </p:cNvPr>
+          <p:cNvPicPr>
+            <a:picLocks noChangeAspect="1"/>
+          </p:cNvPicPr>
+          <p:nvPr/>
+        </p:nvPicPr>
+        <p:blipFill>
+          <a:blip>
+            <a:extLst>
+              <a:ext uri="{96DAC541-7B7A-43D3-8B79-37D633B846F1}">
+                <asvg:svgBlip xmlns:asvg="http://schemas.microsoft.com/office/drawing/2016/SVG/main" r:embed="rId3"/>
+              </a:ext>
+            </a:extLst>
+          </a:blip>
+          <a:stretch>
+            <a:fillRect/>
+          </a:stretch>
+        </p:blipFill>
+        <p:spPr>
+          <a:xfrm>
+            <a:off x="5045006" y="6356057"/>
+            <a:ext cx="6409575" cy="363174"/>
+          </a:xfrm>
+          <a:prstGeom prst="rect">
+            <a:avLst/>
+          </a:prstGeom>
+        </p:spPr>
+      </p:pic>
+      <p:sp>
+        <p:nvSpPr>
+          <p:cNvPr id="84" name="Marcador de número de diapositiva 83">
+            <a:extLst>
+              <a:ext uri="{FF2B5EF4-FFF2-40B4-BE49-F238E27FC236}">
+                <a16:creationId xmlns:a16="http://schemas.microsoft.com/office/drawing/2014/main" id="{06766432-4165-11DB-60A8-73D5FEF37E2D}"/>
+              </a:ext>
+            </a:extLst>
+          </p:cNvPr>
+          <p:cNvSpPr>
+            <a:spLocks noGrp="1"/>
+          </p:cNvSpPr>
+          <p:nvPr>
+            <p:ph type="sldNum" sz="quarter" idx="7"/>
+          </p:nvPr>
+        </p:nvSpPr>
+        <p:spPr/>
+        <p:txBody>
+          <a:bodyPr/>
+          <a:lstStyle/>
+          <a:p>
+            <a:fld id="{B6F15528-21DE-4FAA-801E-634DDDAF4B2B}" type="slidenum">
+              <a:rPr lang="es-ES" smtClean="0"/>
+              <a:t>23</a:t>
+            </a:fld>
+            <a:endParaRPr lang="es-ES"/>
+          </a:p>
+        </p:txBody>
+      </p:sp>
+      <p:sp>
+        <p:nvSpPr>
+          <p:cNvPr id="3" name="Marcador de pie de página 2">
+            <a:extLst>
+              <a:ext uri="{FF2B5EF4-FFF2-40B4-BE49-F238E27FC236}">
+                <a16:creationId xmlns:a16="http://schemas.microsoft.com/office/drawing/2014/main" id="{D690A5AB-92F3-3D64-C6E2-D710AD17ED38}"/>
+              </a:ext>
+            </a:extLst>
+          </p:cNvPr>
+          <p:cNvSpPr>
+            <a:spLocks noGrp="1"/>
+          </p:cNvSpPr>
+          <p:nvPr>
+            <p:ph type="ftr" sz="quarter" idx="5"/>
+          </p:nvPr>
+        </p:nvSpPr>
+        <p:spPr/>
+        <p:txBody>
+          <a:bodyPr/>
+          <a:lstStyle/>
+          <a:p>
+            <a:pPr marL="12700">
+              <a:spcBef>
+                <a:spcPts val="15"/>
+              </a:spcBef>
+            </a:pPr>
+            <a:r>
+              <a:rPr lang="es-ES" spc="-5"/>
+              <a:t>LAB 4.0. LAYOUT</a:t>
+            </a:r>
+            <a:endParaRPr lang="es-ES" spc="-5" dirty="0"/>
+          </a:p>
+        </p:txBody>
+      </p:sp>
+      <p:sp>
+        <p:nvSpPr>
+          <p:cNvPr id="2" name="CuadroTexto 1">
+            <a:extLst>
+              <a:ext uri="{FF2B5EF4-FFF2-40B4-BE49-F238E27FC236}">
+                <a16:creationId xmlns:a16="http://schemas.microsoft.com/office/drawing/2014/main" id="{E8AF5752-0B83-8AE1-48D8-5F6368577215}"/>
+              </a:ext>
+            </a:extLst>
+          </p:cNvPr>
+          <p:cNvSpPr txBox="1"/>
+          <p:nvPr/>
+        </p:nvSpPr>
+        <p:spPr>
+          <a:xfrm>
+            <a:off x="685800" y="990600"/>
+            <a:ext cx="5410200" cy="5181600"/>
+          </a:xfrm>
+          <a:prstGeom prst="rect">
+            <a:avLst/>
+          </a:prstGeom>
+          <a:solidFill>
+            <a:schemeClr val="bg1">
+              <a:lumMod val="95000"/>
+            </a:schemeClr>
+          </a:solidFill>
+          <a:ln w="28575">
+            <a:solidFill>
+              <a:srgbClr val="E0700D"/>
+            </a:solidFill>
+          </a:ln>
+        </p:spPr>
+        <p:txBody>
+          <a:bodyPr wrap="square" rtlCol="0">
+            <a:noAutofit/>
+          </a:bodyPr>
+          <a:lstStyle/>
+          <a:p>
+            <a:pPr algn="just"/>
+            <a:endParaRPr lang="en-US" sz="1200" b="1" dirty="0">
+              <a:latin typeface="Arial" panose="020B0604020202020204" pitchFamily="34" charset="0"/>
+              <a:cs typeface="Arial" panose="020B0604020202020204" pitchFamily="34" charset="0"/>
+            </a:endParaRPr>
+          </a:p>
+        </p:txBody>
+      </p:sp>
+      <p:sp>
+        <p:nvSpPr>
+          <p:cNvPr id="8" name="Rectángulo 7">
+            <a:extLst>
+              <a:ext uri="{FF2B5EF4-FFF2-40B4-BE49-F238E27FC236}">
+                <a16:creationId xmlns:a16="http://schemas.microsoft.com/office/drawing/2014/main" id="{B548C383-2FE3-42F1-982B-E1043B24E8A5}"/>
+              </a:ext>
+            </a:extLst>
+          </p:cNvPr>
+          <p:cNvSpPr/>
+          <p:nvPr/>
+        </p:nvSpPr>
+        <p:spPr>
+          <a:xfrm>
+            <a:off x="6248400" y="990285"/>
+            <a:ext cx="5638799" cy="5181600"/>
+          </a:xfrm>
+          <a:prstGeom prst="rect">
+            <a:avLst/>
+          </a:prstGeom>
+          <a:noFill/>
+          <a:ln w="28575">
+            <a:solidFill>
+              <a:srgbClr val="E0700D"/>
+            </a:solidFill>
+          </a:ln>
+        </p:spPr>
+        <p:style>
+          <a:lnRef idx="2">
+            <a:schemeClr val="accent1">
+              <a:shade val="15000"/>
+            </a:schemeClr>
+          </a:lnRef>
+          <a:fillRef idx="1">
+            <a:schemeClr val="accent1"/>
+          </a:fillRef>
+          <a:effectRef idx="0">
+            <a:schemeClr val="accent1"/>
+          </a:effectRef>
+          <a:fontRef idx="minor">
+            <a:schemeClr val="lt1"/>
+          </a:fontRef>
+        </p:style>
+        <p:txBody>
+          <a:bodyPr rtlCol="0" anchor="ctr"/>
+          <a:lstStyle/>
+          <a:p>
+            <a:pPr algn="ctr"/>
+            <a:endParaRPr lang="en-US"/>
+          </a:p>
+        </p:txBody>
+      </p:sp>
+      <p:sp>
+        <p:nvSpPr>
+          <p:cNvPr id="9" name="CuadroTexto 8">
+            <a:extLst>
+              <a:ext uri="{FF2B5EF4-FFF2-40B4-BE49-F238E27FC236}">
+                <a16:creationId xmlns:a16="http://schemas.microsoft.com/office/drawing/2014/main" id="{522ADBC9-DA5C-6E38-7C75-5441AC3BE73C}"/>
+              </a:ext>
+            </a:extLst>
+          </p:cNvPr>
+          <p:cNvSpPr txBox="1"/>
+          <p:nvPr/>
+        </p:nvSpPr>
+        <p:spPr>
+          <a:xfrm>
+            <a:off x="8180318" y="3105834"/>
+            <a:ext cx="1774973" cy="369332"/>
+          </a:xfrm>
+          <a:prstGeom prst="rect">
+            <a:avLst/>
+          </a:prstGeom>
+          <a:noFill/>
+        </p:spPr>
+        <p:txBody>
+          <a:bodyPr wrap="none" rtlCol="0">
+            <a:spAutoFit/>
+          </a:bodyPr>
+          <a:lstStyle/>
+          <a:p>
+            <a:pPr algn="ctr"/>
+            <a:r>
+              <a:rPr lang="es-ES" dirty="0" err="1"/>
+              <a:t>Screenshot</a:t>
+            </a:r>
+            <a:r>
+              <a:rPr lang="es-ES" dirty="0"/>
+              <a:t> </a:t>
+            </a:r>
+            <a:r>
+              <a:rPr lang="es-ES" dirty="0" err="1"/>
+              <a:t>for</a:t>
+            </a:r>
+            <a:r>
+              <a:rPr lang="es-ES" dirty="0"/>
+              <a:t> …</a:t>
+            </a:r>
+            <a:endParaRPr lang="en-US" dirty="0"/>
+          </a:p>
+        </p:txBody>
+      </p:sp>
+      <p:pic>
+        <p:nvPicPr>
+          <p:cNvPr id="5" name="Imagen 4">
+            <a:extLst>
+              <a:ext uri="{FF2B5EF4-FFF2-40B4-BE49-F238E27FC236}">
+                <a16:creationId xmlns:a16="http://schemas.microsoft.com/office/drawing/2014/main" id="{3FB96805-730D-2DBB-B03E-C663FB6E316D}"/>
+              </a:ext>
+            </a:extLst>
+          </p:cNvPr>
+          <p:cNvPicPr>
+            <a:picLocks noChangeAspect="1"/>
+          </p:cNvPicPr>
+          <p:nvPr/>
+        </p:nvPicPr>
+        <p:blipFill>
+          <a:blip r:embed="rId4"/>
+          <a:stretch>
+            <a:fillRect/>
+          </a:stretch>
+        </p:blipFill>
+        <p:spPr>
+          <a:xfrm>
+            <a:off x="1447800" y="1191846"/>
+            <a:ext cx="3374944" cy="4902397"/>
+          </a:xfrm>
+          <a:prstGeom prst="rect">
+            <a:avLst/>
+          </a:prstGeom>
+        </p:spPr>
+      </p:pic>
+      <p:pic>
+        <p:nvPicPr>
+          <p:cNvPr id="7" name="Imagen 6">
+            <a:extLst>
+              <a:ext uri="{FF2B5EF4-FFF2-40B4-BE49-F238E27FC236}">
+                <a16:creationId xmlns:a16="http://schemas.microsoft.com/office/drawing/2014/main" id="{3B387821-8E24-C45B-20D7-F0E895189C16}"/>
+              </a:ext>
+            </a:extLst>
+          </p:cNvPr>
+          <p:cNvPicPr>
+            <a:picLocks noChangeAspect="1"/>
+          </p:cNvPicPr>
+          <p:nvPr/>
+        </p:nvPicPr>
+        <p:blipFill>
+          <a:blip r:embed="rId5"/>
+          <a:stretch>
+            <a:fillRect/>
+          </a:stretch>
+        </p:blipFill>
+        <p:spPr>
+          <a:xfrm>
+            <a:off x="6513694" y="1630203"/>
+            <a:ext cx="5108210" cy="3856197"/>
+          </a:xfrm>
+          <a:prstGeom prst="rect">
+            <a:avLst/>
+          </a:prstGeom>
+        </p:spPr>
+      </p:pic>
+    </p:spTree>
+    <p:extLst>
+      <p:ext uri="{BB962C8B-B14F-4D97-AF65-F5344CB8AC3E}">
+        <p14:creationId xmlns:p14="http://schemas.microsoft.com/office/powerpoint/2010/main" val="3401325199"/>
+      </p:ext>
+    </p:extLst>
+  </p:cSld>
+  <p:clrMapOvr>
+    <a:masterClrMapping/>
+  </p:clrMapOvr>
+</p:sld>
+</file>
+
+<file path=ppt/slides/slide24.xml><?xml version="1.0" encoding="utf-8"?>
+<p:sld xmlns:a="http://schemas.openxmlformats.org/drawingml/2006/main" xmlns:r="http://schemas.openxmlformats.org/officeDocument/2006/relationships" xmlns:p="http://schemas.openxmlformats.org/presentationml/2006/main">
+  <p:cSld>
+    <p:spTree>
+      <p:nvGrpSpPr>
+        <p:cNvPr id="1" name="">
+          <a:extLst>
+            <a:ext uri="{FF2B5EF4-FFF2-40B4-BE49-F238E27FC236}">
+              <a16:creationId xmlns:a16="http://schemas.microsoft.com/office/drawing/2014/main" id="{049789C1-8DBA-734E-9D26-C529559E6E46}"/>
+            </a:ext>
+          </a:extLst>
+        </p:cNvPr>
+        <p:cNvGrpSpPr/>
+        <p:nvPr/>
+      </p:nvGrpSpPr>
+      <p:grpSpPr>
+        <a:xfrm>
+          <a:off x="0" y="0"/>
+          <a:ext cx="0" cy="0"/>
+          <a:chOff x="0" y="0"/>
+          <a:chExt cx="0" cy="0"/>
+        </a:xfrm>
+      </p:grpSpPr>
+      <p:sp>
+        <p:nvSpPr>
+          <p:cNvPr id="16" name="object 16">
+            <a:extLst>
+              <a:ext uri="{FF2B5EF4-FFF2-40B4-BE49-F238E27FC236}">
+                <a16:creationId xmlns:a16="http://schemas.microsoft.com/office/drawing/2014/main" id="{B27A192B-6BC8-0CD3-BF83-D9FC3BB438F9}"/>
+              </a:ext>
+            </a:extLst>
+          </p:cNvPr>
+          <p:cNvSpPr txBox="1">
+            <a:spLocks noGrp="1"/>
+          </p:cNvSpPr>
+          <p:nvPr>
+            <p:ph type="title"/>
+          </p:nvPr>
+        </p:nvSpPr>
+        <p:spPr>
+          <a:xfrm>
+            <a:off x="685800" y="408883"/>
+            <a:ext cx="10994410" cy="551433"/>
+          </a:xfrm>
+          <a:prstGeom prst="rect">
+            <a:avLst/>
+          </a:prstGeom>
+        </p:spPr>
+        <p:txBody>
+          <a:bodyPr vert="horz" wrap="square" lIns="0" tIns="12700" rIns="0" bIns="0" rtlCol="0">
+            <a:spAutoFit/>
+          </a:bodyPr>
+          <a:lstStyle/>
+          <a:p>
+            <a:pPr marL="12700" algn="l">
+              <a:lnSpc>
+                <a:spcPct val="100000"/>
+              </a:lnSpc>
+              <a:spcBef>
+                <a:spcPts val="100"/>
+              </a:spcBef>
+            </a:pPr>
+            <a:r>
+              <a:rPr lang="en-US" sz="2500" dirty="0"/>
+              <a:t>Learning outcome #4 – Notebook section 4. Exercises – 1 slide per bullet point</a:t>
+            </a:r>
+            <a:br>
+              <a:rPr lang="en-US" sz="1000" dirty="0">
+                <a:latin typeface="Arial" panose="020B0604020202020204" pitchFamily="34" charset="0"/>
+                <a:cs typeface="Arial" panose="020B0604020202020204" pitchFamily="34" charset="0"/>
+              </a:rPr>
+            </a:br>
+            <a:r>
+              <a:rPr lang="en-US" sz="1000" dirty="0">
+                <a:latin typeface="Arial" panose="020B0604020202020204" pitchFamily="34" charset="0"/>
+                <a:cs typeface="Arial" panose="020B0604020202020204" pitchFamily="34" charset="0"/>
+              </a:rPr>
+              <a:t>b.3 - Create a cell component of this die, with I/</a:t>
+            </a:r>
+            <a:r>
+              <a:rPr lang="en-US" sz="1000" dirty="0" err="1">
+                <a:latin typeface="Arial" panose="020B0604020202020204" pitchFamily="34" charset="0"/>
+                <a:cs typeface="Arial" panose="020B0604020202020204" pitchFamily="34" charset="0"/>
+              </a:rPr>
+              <a:t>Os</a:t>
+            </a:r>
+            <a:r>
+              <a:rPr lang="en-US" sz="1000" dirty="0">
+                <a:latin typeface="Arial" panose="020B0604020202020204" pitchFamily="34" charset="0"/>
+                <a:cs typeface="Arial" panose="020B0604020202020204" pitchFamily="34" charset="0"/>
+              </a:rPr>
+              <a:t> accessible to connect</a:t>
+            </a:r>
+            <a:endParaRPr sz="1000" b="0" i="1" dirty="0">
+              <a:latin typeface="+mj-lt"/>
+              <a:cs typeface="Lucida Sans"/>
+            </a:endParaRPr>
+          </a:p>
+        </p:txBody>
+      </p:sp>
+      <p:pic>
+        <p:nvPicPr>
+          <p:cNvPr id="83" name="Gráfico 82">
+            <a:extLst>
+              <a:ext uri="{FF2B5EF4-FFF2-40B4-BE49-F238E27FC236}">
+                <a16:creationId xmlns:a16="http://schemas.microsoft.com/office/drawing/2014/main" id="{6929D0D9-C170-FB99-DA65-F684A29DA6EA}"/>
+              </a:ext>
+            </a:extLst>
+          </p:cNvPr>
+          <p:cNvPicPr>
+            <a:picLocks noChangeAspect="1"/>
+          </p:cNvPicPr>
+          <p:nvPr/>
+        </p:nvPicPr>
+        <p:blipFill>
+          <a:blip>
+            <a:extLst>
+              <a:ext uri="{96DAC541-7B7A-43D3-8B79-37D633B846F1}">
+                <asvg:svgBlip xmlns:asvg="http://schemas.microsoft.com/office/drawing/2016/SVG/main" r:embed="rId3"/>
+              </a:ext>
+            </a:extLst>
+          </a:blip>
+          <a:stretch>
+            <a:fillRect/>
+          </a:stretch>
+        </p:blipFill>
+        <p:spPr>
+          <a:xfrm>
+            <a:off x="5045006" y="6356057"/>
+            <a:ext cx="6409575" cy="363174"/>
+          </a:xfrm>
+          <a:prstGeom prst="rect">
+            <a:avLst/>
+          </a:prstGeom>
+        </p:spPr>
+      </p:pic>
+      <p:sp>
+        <p:nvSpPr>
+          <p:cNvPr id="84" name="Marcador de número de diapositiva 83">
+            <a:extLst>
+              <a:ext uri="{FF2B5EF4-FFF2-40B4-BE49-F238E27FC236}">
+                <a16:creationId xmlns:a16="http://schemas.microsoft.com/office/drawing/2014/main" id="{13663BA7-2F21-CD84-95AF-621A5B58868A}"/>
+              </a:ext>
+            </a:extLst>
+          </p:cNvPr>
+          <p:cNvSpPr>
+            <a:spLocks noGrp="1"/>
+          </p:cNvSpPr>
+          <p:nvPr>
+            <p:ph type="sldNum" sz="quarter" idx="7"/>
+          </p:nvPr>
+        </p:nvSpPr>
+        <p:spPr/>
+        <p:txBody>
+          <a:bodyPr/>
+          <a:lstStyle/>
+          <a:p>
+            <a:fld id="{B6F15528-21DE-4FAA-801E-634DDDAF4B2B}" type="slidenum">
+              <a:rPr lang="es-ES" smtClean="0"/>
+              <a:t>24</a:t>
+            </a:fld>
+            <a:endParaRPr lang="es-ES"/>
+          </a:p>
+        </p:txBody>
+      </p:sp>
+      <p:sp>
+        <p:nvSpPr>
+          <p:cNvPr id="3" name="Marcador de pie de página 2">
+            <a:extLst>
+              <a:ext uri="{FF2B5EF4-FFF2-40B4-BE49-F238E27FC236}">
+                <a16:creationId xmlns:a16="http://schemas.microsoft.com/office/drawing/2014/main" id="{43EC8435-7E4C-72A3-FA0C-94C4C7BFB146}"/>
+              </a:ext>
+            </a:extLst>
+          </p:cNvPr>
+          <p:cNvSpPr>
+            <a:spLocks noGrp="1"/>
+          </p:cNvSpPr>
+          <p:nvPr>
+            <p:ph type="ftr" sz="quarter" idx="5"/>
+          </p:nvPr>
+        </p:nvSpPr>
+        <p:spPr/>
+        <p:txBody>
+          <a:bodyPr/>
+          <a:lstStyle/>
+          <a:p>
+            <a:pPr marL="12700">
+              <a:spcBef>
+                <a:spcPts val="15"/>
+              </a:spcBef>
+            </a:pPr>
+            <a:r>
+              <a:rPr lang="es-ES" spc="-5"/>
+              <a:t>LAB 4.0. LAYOUT</a:t>
+            </a:r>
+            <a:endParaRPr lang="es-ES" spc="-5" dirty="0"/>
+          </a:p>
+        </p:txBody>
+      </p:sp>
+      <p:sp>
+        <p:nvSpPr>
+          <p:cNvPr id="2" name="CuadroTexto 1">
+            <a:extLst>
+              <a:ext uri="{FF2B5EF4-FFF2-40B4-BE49-F238E27FC236}">
+                <a16:creationId xmlns:a16="http://schemas.microsoft.com/office/drawing/2014/main" id="{6BA0AFE4-0409-BDAF-347F-AC56E98ED3E8}"/>
+              </a:ext>
+            </a:extLst>
+          </p:cNvPr>
+          <p:cNvSpPr txBox="1"/>
+          <p:nvPr/>
+        </p:nvSpPr>
+        <p:spPr>
+          <a:xfrm>
+            <a:off x="685800" y="990600"/>
+            <a:ext cx="5410200" cy="5181600"/>
+          </a:xfrm>
+          <a:prstGeom prst="rect">
+            <a:avLst/>
+          </a:prstGeom>
+          <a:solidFill>
+            <a:schemeClr val="bg1">
+              <a:lumMod val="95000"/>
+            </a:schemeClr>
+          </a:solidFill>
+          <a:ln w="28575">
+            <a:solidFill>
+              <a:srgbClr val="E0700D"/>
+            </a:solidFill>
+          </a:ln>
+        </p:spPr>
+        <p:txBody>
+          <a:bodyPr wrap="square" rtlCol="0">
+            <a:noAutofit/>
+          </a:bodyPr>
+          <a:lstStyle/>
+          <a:p>
+            <a:pPr algn="just"/>
+            <a:endParaRPr lang="en-US" sz="1200" dirty="0">
+              <a:latin typeface="Arial" panose="020B0604020202020204" pitchFamily="34" charset="0"/>
+              <a:cs typeface="Arial" panose="020B0604020202020204" pitchFamily="34" charset="0"/>
+            </a:endParaRPr>
+          </a:p>
+        </p:txBody>
+      </p:sp>
+      <p:sp>
+        <p:nvSpPr>
+          <p:cNvPr id="8" name="Rectángulo 7">
+            <a:extLst>
+              <a:ext uri="{FF2B5EF4-FFF2-40B4-BE49-F238E27FC236}">
+                <a16:creationId xmlns:a16="http://schemas.microsoft.com/office/drawing/2014/main" id="{BC9E3223-C31F-8E7D-9391-09CA8E28CB6E}"/>
+              </a:ext>
+            </a:extLst>
+          </p:cNvPr>
+          <p:cNvSpPr/>
+          <p:nvPr/>
+        </p:nvSpPr>
+        <p:spPr>
+          <a:xfrm>
+            <a:off x="6248400" y="990285"/>
+            <a:ext cx="5638799" cy="5181600"/>
+          </a:xfrm>
+          <a:prstGeom prst="rect">
+            <a:avLst/>
+          </a:prstGeom>
+          <a:noFill/>
+          <a:ln w="28575">
+            <a:solidFill>
+              <a:srgbClr val="E0700D"/>
+            </a:solidFill>
+          </a:ln>
+        </p:spPr>
+        <p:style>
+          <a:lnRef idx="2">
+            <a:schemeClr val="accent1">
+              <a:shade val="15000"/>
+            </a:schemeClr>
+          </a:lnRef>
+          <a:fillRef idx="1">
+            <a:schemeClr val="accent1"/>
+          </a:fillRef>
+          <a:effectRef idx="0">
+            <a:schemeClr val="accent1"/>
+          </a:effectRef>
+          <a:fontRef idx="minor">
+            <a:schemeClr val="lt1"/>
+          </a:fontRef>
+        </p:style>
+        <p:txBody>
+          <a:bodyPr rtlCol="0" anchor="ctr"/>
+          <a:lstStyle/>
+          <a:p>
+            <a:pPr algn="ctr"/>
+            <a:endParaRPr lang="en-US"/>
+          </a:p>
+        </p:txBody>
+      </p:sp>
+      <p:sp>
+        <p:nvSpPr>
+          <p:cNvPr id="9" name="CuadroTexto 8">
+            <a:extLst>
+              <a:ext uri="{FF2B5EF4-FFF2-40B4-BE49-F238E27FC236}">
+                <a16:creationId xmlns:a16="http://schemas.microsoft.com/office/drawing/2014/main" id="{20684A1C-50A7-2442-4A39-AEDD1798253F}"/>
+              </a:ext>
+            </a:extLst>
+          </p:cNvPr>
+          <p:cNvSpPr txBox="1"/>
+          <p:nvPr/>
+        </p:nvSpPr>
+        <p:spPr>
+          <a:xfrm>
+            <a:off x="8180318" y="3105834"/>
+            <a:ext cx="1774973" cy="369332"/>
+          </a:xfrm>
+          <a:prstGeom prst="rect">
+            <a:avLst/>
+          </a:prstGeom>
+          <a:noFill/>
+        </p:spPr>
+        <p:txBody>
+          <a:bodyPr wrap="none" rtlCol="0">
+            <a:spAutoFit/>
+          </a:bodyPr>
+          <a:lstStyle/>
+          <a:p>
+            <a:pPr algn="ctr"/>
+            <a:r>
+              <a:rPr lang="es-ES" dirty="0" err="1"/>
+              <a:t>Screenshot</a:t>
+            </a:r>
+            <a:r>
+              <a:rPr lang="es-ES" dirty="0"/>
+              <a:t> </a:t>
+            </a:r>
+            <a:r>
+              <a:rPr lang="es-ES" dirty="0" err="1"/>
+              <a:t>for</a:t>
+            </a:r>
+            <a:r>
+              <a:rPr lang="es-ES" dirty="0"/>
+              <a:t> …</a:t>
+            </a:r>
+            <a:endParaRPr lang="en-US" dirty="0"/>
+          </a:p>
+        </p:txBody>
+      </p:sp>
+      <p:pic>
+        <p:nvPicPr>
+          <p:cNvPr id="5" name="Imagen 4">
+            <a:extLst>
+              <a:ext uri="{FF2B5EF4-FFF2-40B4-BE49-F238E27FC236}">
+                <a16:creationId xmlns:a16="http://schemas.microsoft.com/office/drawing/2014/main" id="{7BA8C24C-143B-DEF0-E48B-A401BF03DEB8}"/>
+              </a:ext>
+            </a:extLst>
+          </p:cNvPr>
+          <p:cNvPicPr>
+            <a:picLocks noChangeAspect="1"/>
+          </p:cNvPicPr>
+          <p:nvPr/>
+        </p:nvPicPr>
+        <p:blipFill>
+          <a:blip r:embed="rId4"/>
+          <a:stretch>
+            <a:fillRect/>
+          </a:stretch>
+        </p:blipFill>
+        <p:spPr>
+          <a:xfrm>
+            <a:off x="6362699" y="1386914"/>
+            <a:ext cx="5410200" cy="4084171"/>
+          </a:xfrm>
+          <a:prstGeom prst="rect">
+            <a:avLst/>
+          </a:prstGeom>
+        </p:spPr>
+      </p:pic>
+      <p:pic>
+        <p:nvPicPr>
+          <p:cNvPr id="7" name="Imagen 6">
+            <a:extLst>
+              <a:ext uri="{FF2B5EF4-FFF2-40B4-BE49-F238E27FC236}">
+                <a16:creationId xmlns:a16="http://schemas.microsoft.com/office/drawing/2014/main" id="{74B9D67E-CDCD-863E-C3B9-2704CA586E7E}"/>
+              </a:ext>
+            </a:extLst>
+          </p:cNvPr>
+          <p:cNvPicPr>
+            <a:picLocks noChangeAspect="1"/>
+          </p:cNvPicPr>
+          <p:nvPr/>
+        </p:nvPicPr>
+        <p:blipFill>
+          <a:blip r:embed="rId5"/>
+          <a:stretch>
+            <a:fillRect/>
+          </a:stretch>
+        </p:blipFill>
+        <p:spPr>
+          <a:xfrm>
+            <a:off x="734716" y="1328001"/>
+            <a:ext cx="2645298" cy="4201996"/>
+          </a:xfrm>
+          <a:prstGeom prst="rect">
+            <a:avLst/>
+          </a:prstGeom>
+        </p:spPr>
+      </p:pic>
+      <p:pic>
+        <p:nvPicPr>
+          <p:cNvPr id="11" name="Imagen 10">
+            <a:extLst>
+              <a:ext uri="{FF2B5EF4-FFF2-40B4-BE49-F238E27FC236}">
+                <a16:creationId xmlns:a16="http://schemas.microsoft.com/office/drawing/2014/main" id="{516BBAA3-43ED-6631-DD6F-0276E8DD35D7}"/>
+              </a:ext>
+            </a:extLst>
+          </p:cNvPr>
+          <p:cNvPicPr>
+            <a:picLocks noChangeAspect="1"/>
+          </p:cNvPicPr>
+          <p:nvPr/>
+        </p:nvPicPr>
+        <p:blipFill>
+          <a:blip r:embed="rId6"/>
+          <a:stretch>
+            <a:fillRect/>
+          </a:stretch>
+        </p:blipFill>
+        <p:spPr>
+          <a:xfrm>
+            <a:off x="3275595" y="2162740"/>
+            <a:ext cx="2785599" cy="2925579"/>
+          </a:xfrm>
+          <a:prstGeom prst="rect">
+            <a:avLst/>
+          </a:prstGeom>
+        </p:spPr>
+      </p:pic>
+    </p:spTree>
+    <p:extLst>
+      <p:ext uri="{BB962C8B-B14F-4D97-AF65-F5344CB8AC3E}">
+        <p14:creationId xmlns:p14="http://schemas.microsoft.com/office/powerpoint/2010/main" val="4106558799"/>
+      </p:ext>
+    </p:extLst>
+  </p:cSld>
+  <p:clrMapOvr>
+    <a:masterClrMapping/>
+  </p:clrMapOvr>
+</p:sld>
+</file>
+
+<file path=ppt/slides/slide25.xml><?xml version="1.0" encoding="utf-8"?>
+<p:sld xmlns:a="http://schemas.openxmlformats.org/drawingml/2006/main" xmlns:r="http://schemas.openxmlformats.org/officeDocument/2006/relationships" xmlns:p="http://schemas.openxmlformats.org/presentationml/2006/main">
+  <p:cSld>
+    <p:spTree>
+      <p:nvGrpSpPr>
+        <p:cNvPr id="1" name="">
+          <a:extLst>
+            <a:ext uri="{FF2B5EF4-FFF2-40B4-BE49-F238E27FC236}">
+              <a16:creationId xmlns:a16="http://schemas.microsoft.com/office/drawing/2014/main" id="{8A943E53-4D7E-D208-7DD0-3D98A520C7BA}"/>
+            </a:ext>
+          </a:extLst>
+        </p:cNvPr>
+        <p:cNvGrpSpPr/>
+        <p:nvPr/>
+      </p:nvGrpSpPr>
+      <p:grpSpPr>
+        <a:xfrm>
+          <a:off x="0" y="0"/>
+          <a:ext cx="0" cy="0"/>
+          <a:chOff x="0" y="0"/>
+          <a:chExt cx="0" cy="0"/>
+        </a:xfrm>
+      </p:grpSpPr>
+      <p:sp>
+        <p:nvSpPr>
+          <p:cNvPr id="16" name="object 16">
+            <a:extLst>
+              <a:ext uri="{FF2B5EF4-FFF2-40B4-BE49-F238E27FC236}">
+                <a16:creationId xmlns:a16="http://schemas.microsoft.com/office/drawing/2014/main" id="{A269332D-CBF8-79AF-A8E1-3E884A976EC9}"/>
+              </a:ext>
+            </a:extLst>
+          </p:cNvPr>
+          <p:cNvSpPr txBox="1">
+            <a:spLocks noGrp="1"/>
+          </p:cNvSpPr>
+          <p:nvPr>
+            <p:ph type="title"/>
+          </p:nvPr>
+        </p:nvSpPr>
+        <p:spPr>
+          <a:xfrm>
+            <a:off x="685800" y="408883"/>
+            <a:ext cx="10994410" cy="1166986"/>
+          </a:xfrm>
+          <a:prstGeom prst="rect">
+            <a:avLst/>
+          </a:prstGeom>
+        </p:spPr>
+        <p:txBody>
+          <a:bodyPr vert="horz" wrap="square" lIns="0" tIns="12700" rIns="0" bIns="0" rtlCol="0">
+            <a:spAutoFit/>
+          </a:bodyPr>
+          <a:lstStyle/>
+          <a:p>
+            <a:pPr algn="l"/>
+            <a:r>
+              <a:rPr lang="en-US" sz="2500" dirty="0"/>
+              <a:t>Learning outcome #4 – Notebook section 4. Exercises – 1 slide per bullet point</a:t>
+            </a:r>
+            <a:br>
+              <a:rPr lang="en-US" sz="2500" dirty="0"/>
+            </a:br>
+            <a:r>
+              <a:rPr lang="en-US" sz="1000" b="0" dirty="0">
+                <a:latin typeface="Arial" panose="020B0604020202020204" pitchFamily="34" charset="0"/>
+                <a:cs typeface="Arial" panose="020B0604020202020204" pitchFamily="34" charset="0"/>
+              </a:rPr>
+              <a:t>c.1 - Make an instance of the die as host component for your layout</a:t>
+            </a:r>
+            <a:br>
+              <a:rPr lang="en-US" sz="1000" b="0" dirty="0">
+                <a:latin typeface="Arial" panose="020B0604020202020204" pitchFamily="34" charset="0"/>
+                <a:cs typeface="Arial" panose="020B0604020202020204" pitchFamily="34" charset="0"/>
+              </a:rPr>
+            </a:br>
+            <a:r>
+              <a:rPr lang="en-US" sz="1000" b="0" dirty="0">
+                <a:latin typeface="Arial" panose="020B0604020202020204" pitchFamily="34" charset="0"/>
+                <a:cs typeface="Arial" panose="020B0604020202020204" pitchFamily="34" charset="0"/>
+              </a:rPr>
+              <a:t>- Add 3 sets of 3 straight waveguides, from left to right of the die, top, middle and bottom of the die</a:t>
+            </a:r>
+            <a:br>
+              <a:rPr lang="en-US" sz="1000" b="0" dirty="0">
+                <a:latin typeface="Arial" panose="020B0604020202020204" pitchFamily="34" charset="0"/>
+                <a:cs typeface="Arial" panose="020B0604020202020204" pitchFamily="34" charset="0"/>
+              </a:rPr>
+            </a:br>
+            <a:r>
+              <a:rPr lang="en-US" sz="1000" b="0" dirty="0">
+                <a:latin typeface="Arial" panose="020B0604020202020204" pitchFamily="34" charset="0"/>
+                <a:cs typeface="Arial" panose="020B0604020202020204" pitchFamily="34" charset="0"/>
+              </a:rPr>
+              <a:t>- Add 2 of each of the components above, with different lengths</a:t>
+            </a:r>
+            <a:br>
+              <a:rPr lang="en-US" sz="1000" b="0" dirty="0">
+                <a:latin typeface="Arial" panose="020B0604020202020204" pitchFamily="34" charset="0"/>
+                <a:cs typeface="Arial" panose="020B0604020202020204" pitchFamily="34" charset="0"/>
+              </a:rPr>
+            </a:br>
+            <a:r>
+              <a:rPr lang="en-US" sz="1000" b="0" dirty="0">
+                <a:latin typeface="Arial" panose="020B0604020202020204" pitchFamily="34" charset="0"/>
+                <a:cs typeface="Arial" panose="020B0604020202020204" pitchFamily="34" charset="0"/>
+              </a:rPr>
+              <a:t>- Connect all your components to the I/</a:t>
+            </a:r>
+            <a:r>
+              <a:rPr lang="en-US" sz="1000" b="0" dirty="0" err="1">
+                <a:latin typeface="Arial" panose="020B0604020202020204" pitchFamily="34" charset="0"/>
+                <a:cs typeface="Arial" panose="020B0604020202020204" pitchFamily="34" charset="0"/>
+              </a:rPr>
+              <a:t>Os</a:t>
+            </a:r>
+            <a:r>
+              <a:rPr lang="en-US" sz="1000" b="0" dirty="0">
+                <a:latin typeface="Arial" panose="020B0604020202020204" pitchFamily="34" charset="0"/>
+                <a:cs typeface="Arial" panose="020B0604020202020204" pitchFamily="34" charset="0"/>
+              </a:rPr>
+              <a:t> </a:t>
+            </a:r>
+            <a:br>
+              <a:rPr lang="en-US" sz="1000" b="0" dirty="0">
+                <a:latin typeface="Arial" panose="020B0604020202020204" pitchFamily="34" charset="0"/>
+                <a:cs typeface="Arial" panose="020B0604020202020204" pitchFamily="34" charset="0"/>
+              </a:rPr>
+            </a:br>
+            <a:endParaRPr sz="1000" b="0" i="1" dirty="0">
+              <a:latin typeface="+mj-lt"/>
+              <a:cs typeface="Lucida Sans"/>
+            </a:endParaRPr>
+          </a:p>
+        </p:txBody>
+      </p:sp>
+      <p:pic>
+        <p:nvPicPr>
+          <p:cNvPr id="83" name="Gráfico 82">
+            <a:extLst>
+              <a:ext uri="{FF2B5EF4-FFF2-40B4-BE49-F238E27FC236}">
+                <a16:creationId xmlns:a16="http://schemas.microsoft.com/office/drawing/2014/main" id="{8DA6EC28-008B-2FAF-86AC-70957280E04B}"/>
+              </a:ext>
+            </a:extLst>
+          </p:cNvPr>
+          <p:cNvPicPr>
+            <a:picLocks noChangeAspect="1"/>
+          </p:cNvPicPr>
+          <p:nvPr/>
+        </p:nvPicPr>
+        <p:blipFill>
+          <a:blip>
+            <a:extLst>
+              <a:ext uri="{96DAC541-7B7A-43D3-8B79-37D633B846F1}">
+                <asvg:svgBlip xmlns:asvg="http://schemas.microsoft.com/office/drawing/2016/SVG/main" r:embed="rId3"/>
+              </a:ext>
+            </a:extLst>
+          </a:blip>
+          <a:stretch>
+            <a:fillRect/>
+          </a:stretch>
+        </p:blipFill>
+        <p:spPr>
+          <a:xfrm>
+            <a:off x="5045006" y="6356057"/>
+            <a:ext cx="6409575" cy="363174"/>
+          </a:xfrm>
+          <a:prstGeom prst="rect">
+            <a:avLst/>
+          </a:prstGeom>
+        </p:spPr>
+      </p:pic>
+      <p:sp>
+        <p:nvSpPr>
+          <p:cNvPr id="84" name="Marcador de número de diapositiva 83">
+            <a:extLst>
+              <a:ext uri="{FF2B5EF4-FFF2-40B4-BE49-F238E27FC236}">
+                <a16:creationId xmlns:a16="http://schemas.microsoft.com/office/drawing/2014/main" id="{3D831B3E-7EBF-A049-258C-2C7DF62BF73F}"/>
+              </a:ext>
+            </a:extLst>
+          </p:cNvPr>
+          <p:cNvSpPr>
+            <a:spLocks noGrp="1"/>
+          </p:cNvSpPr>
+          <p:nvPr>
+            <p:ph type="sldNum" sz="quarter" idx="7"/>
+          </p:nvPr>
+        </p:nvSpPr>
+        <p:spPr/>
+        <p:txBody>
+          <a:bodyPr/>
+          <a:lstStyle/>
+          <a:p>
+            <a:fld id="{B6F15528-21DE-4FAA-801E-634DDDAF4B2B}" type="slidenum">
+              <a:rPr lang="es-ES" smtClean="0"/>
+              <a:t>25</a:t>
+            </a:fld>
+            <a:endParaRPr lang="es-ES"/>
+          </a:p>
+        </p:txBody>
+      </p:sp>
+      <p:sp>
+        <p:nvSpPr>
+          <p:cNvPr id="3" name="Marcador de pie de página 2">
+            <a:extLst>
+              <a:ext uri="{FF2B5EF4-FFF2-40B4-BE49-F238E27FC236}">
+                <a16:creationId xmlns:a16="http://schemas.microsoft.com/office/drawing/2014/main" id="{E4F69F0E-2540-1CB8-BC48-A26E614E8295}"/>
+              </a:ext>
+            </a:extLst>
+          </p:cNvPr>
+          <p:cNvSpPr>
+            <a:spLocks noGrp="1"/>
+          </p:cNvSpPr>
+          <p:nvPr>
+            <p:ph type="ftr" sz="quarter" idx="5"/>
+          </p:nvPr>
+        </p:nvSpPr>
+        <p:spPr/>
+        <p:txBody>
+          <a:bodyPr/>
+          <a:lstStyle/>
+          <a:p>
+            <a:pPr marL="12700">
+              <a:spcBef>
+                <a:spcPts val="15"/>
+              </a:spcBef>
+            </a:pPr>
+            <a:r>
+              <a:rPr lang="es-ES" spc="-5"/>
+              <a:t>LAB 4.0. LAYOUT</a:t>
+            </a:r>
+            <a:endParaRPr lang="es-ES" spc="-5" dirty="0"/>
+          </a:p>
+        </p:txBody>
+      </p:sp>
+      <p:sp>
+        <p:nvSpPr>
+          <p:cNvPr id="2" name="CuadroTexto 1">
+            <a:extLst>
+              <a:ext uri="{FF2B5EF4-FFF2-40B4-BE49-F238E27FC236}">
+                <a16:creationId xmlns:a16="http://schemas.microsoft.com/office/drawing/2014/main" id="{46768242-A916-C0F8-6159-FF0B625D0861}"/>
+              </a:ext>
+            </a:extLst>
+          </p:cNvPr>
+          <p:cNvSpPr txBox="1"/>
+          <p:nvPr/>
+        </p:nvSpPr>
+        <p:spPr>
+          <a:xfrm>
+            <a:off x="685800" y="990600"/>
+            <a:ext cx="5410200" cy="5181600"/>
+          </a:xfrm>
+          <a:prstGeom prst="rect">
+            <a:avLst/>
+          </a:prstGeom>
+          <a:solidFill>
+            <a:schemeClr val="bg1">
+              <a:lumMod val="95000"/>
+            </a:schemeClr>
+          </a:solidFill>
+          <a:ln w="28575">
+            <a:solidFill>
+              <a:srgbClr val="E0700D"/>
+            </a:solidFill>
+          </a:ln>
+        </p:spPr>
+        <p:txBody>
+          <a:bodyPr wrap="square" rtlCol="0">
+            <a:noAutofit/>
+          </a:bodyPr>
+          <a:lstStyle/>
+          <a:p>
+            <a:pPr algn="just"/>
+            <a:endParaRPr lang="en-US" sz="1200" dirty="0">
+              <a:latin typeface="Arial" panose="020B0604020202020204" pitchFamily="34" charset="0"/>
+              <a:cs typeface="Arial" panose="020B0604020202020204" pitchFamily="34" charset="0"/>
+            </a:endParaRPr>
+          </a:p>
+        </p:txBody>
+      </p:sp>
+      <p:sp>
+        <p:nvSpPr>
+          <p:cNvPr id="8" name="Rectángulo 7">
+            <a:extLst>
+              <a:ext uri="{FF2B5EF4-FFF2-40B4-BE49-F238E27FC236}">
+                <a16:creationId xmlns:a16="http://schemas.microsoft.com/office/drawing/2014/main" id="{F1B06996-95B0-73BA-C53B-85D2424AF03A}"/>
+              </a:ext>
+            </a:extLst>
+          </p:cNvPr>
+          <p:cNvSpPr/>
+          <p:nvPr/>
+        </p:nvSpPr>
+        <p:spPr>
+          <a:xfrm>
+            <a:off x="6248400" y="990285"/>
+            <a:ext cx="5638799" cy="5181600"/>
+          </a:xfrm>
+          <a:prstGeom prst="rect">
+            <a:avLst/>
+          </a:prstGeom>
+          <a:noFill/>
+          <a:ln w="28575">
+            <a:solidFill>
+              <a:srgbClr val="E0700D"/>
+            </a:solidFill>
+          </a:ln>
+        </p:spPr>
+        <p:style>
+          <a:lnRef idx="2">
+            <a:schemeClr val="accent1">
+              <a:shade val="15000"/>
+            </a:schemeClr>
+          </a:lnRef>
+          <a:fillRef idx="1">
+            <a:schemeClr val="accent1"/>
+          </a:fillRef>
+          <a:effectRef idx="0">
+            <a:schemeClr val="accent1"/>
+          </a:effectRef>
+          <a:fontRef idx="minor">
+            <a:schemeClr val="lt1"/>
+          </a:fontRef>
+        </p:style>
+        <p:txBody>
+          <a:bodyPr rtlCol="0" anchor="ctr"/>
+          <a:lstStyle/>
+          <a:p>
+            <a:pPr algn="ctr"/>
+            <a:endParaRPr lang="en-US"/>
+          </a:p>
+        </p:txBody>
+      </p:sp>
+      <p:sp>
+        <p:nvSpPr>
+          <p:cNvPr id="9" name="CuadroTexto 8">
+            <a:extLst>
+              <a:ext uri="{FF2B5EF4-FFF2-40B4-BE49-F238E27FC236}">
+                <a16:creationId xmlns:a16="http://schemas.microsoft.com/office/drawing/2014/main" id="{7AFD6488-7AA2-06C0-BA7B-25DBE8C8B88C}"/>
+              </a:ext>
+            </a:extLst>
+          </p:cNvPr>
+          <p:cNvSpPr txBox="1"/>
+          <p:nvPr/>
+        </p:nvSpPr>
+        <p:spPr>
+          <a:xfrm>
+            <a:off x="8180318" y="3105834"/>
+            <a:ext cx="1774973" cy="369332"/>
+          </a:xfrm>
+          <a:prstGeom prst="rect">
+            <a:avLst/>
+          </a:prstGeom>
+          <a:noFill/>
+        </p:spPr>
+        <p:txBody>
+          <a:bodyPr wrap="none" rtlCol="0">
+            <a:spAutoFit/>
+          </a:bodyPr>
+          <a:lstStyle/>
+          <a:p>
+            <a:pPr algn="ctr"/>
+            <a:r>
+              <a:rPr lang="es-ES" dirty="0" err="1"/>
+              <a:t>Screenshot</a:t>
+            </a:r>
+            <a:r>
+              <a:rPr lang="es-ES" dirty="0"/>
+              <a:t> </a:t>
+            </a:r>
+            <a:r>
+              <a:rPr lang="es-ES" dirty="0" err="1"/>
+              <a:t>for</a:t>
+            </a:r>
+            <a:r>
+              <a:rPr lang="es-ES" dirty="0"/>
+              <a:t> …</a:t>
+            </a:r>
+            <a:endParaRPr lang="en-US" dirty="0"/>
+          </a:p>
+        </p:txBody>
+      </p:sp>
+      <p:pic>
+        <p:nvPicPr>
+          <p:cNvPr id="11" name="Imagen 10">
+            <a:extLst>
+              <a:ext uri="{FF2B5EF4-FFF2-40B4-BE49-F238E27FC236}">
+                <a16:creationId xmlns:a16="http://schemas.microsoft.com/office/drawing/2014/main" id="{6BDF1A71-F031-39FF-85C0-9FCEBB88ED22}"/>
+              </a:ext>
+            </a:extLst>
+          </p:cNvPr>
+          <p:cNvPicPr>
+            <a:picLocks noChangeAspect="1"/>
+          </p:cNvPicPr>
+          <p:nvPr/>
+        </p:nvPicPr>
+        <p:blipFill>
+          <a:blip r:embed="rId4"/>
+          <a:stretch>
+            <a:fillRect/>
+          </a:stretch>
+        </p:blipFill>
+        <p:spPr>
+          <a:xfrm>
+            <a:off x="6863938" y="1665416"/>
+            <a:ext cx="4794662" cy="3619500"/>
+          </a:xfrm>
+          <a:prstGeom prst="rect">
+            <a:avLst/>
+          </a:prstGeom>
+        </p:spPr>
+      </p:pic>
+      <p:pic>
+        <p:nvPicPr>
+          <p:cNvPr id="13" name="Imagen 12">
+            <a:extLst>
+              <a:ext uri="{FF2B5EF4-FFF2-40B4-BE49-F238E27FC236}">
+                <a16:creationId xmlns:a16="http://schemas.microsoft.com/office/drawing/2014/main" id="{ECCB6CE0-1A99-635B-3343-3E0E4E365F16}"/>
+              </a:ext>
+            </a:extLst>
+          </p:cNvPr>
+          <p:cNvPicPr>
+            <a:picLocks noChangeAspect="1"/>
+          </p:cNvPicPr>
+          <p:nvPr/>
+        </p:nvPicPr>
+        <p:blipFill>
+          <a:blip r:embed="rId5"/>
+          <a:stretch>
+            <a:fillRect/>
+          </a:stretch>
+        </p:blipFill>
+        <p:spPr>
+          <a:xfrm>
+            <a:off x="1295400" y="1886633"/>
+            <a:ext cx="3865229" cy="2666839"/>
+          </a:xfrm>
+          <a:prstGeom prst="rect">
+            <a:avLst/>
+          </a:prstGeom>
+        </p:spPr>
+      </p:pic>
+    </p:spTree>
+    <p:extLst>
+      <p:ext uri="{BB962C8B-B14F-4D97-AF65-F5344CB8AC3E}">
+        <p14:creationId xmlns:p14="http://schemas.microsoft.com/office/powerpoint/2010/main" val="457432795"/>
+      </p:ext>
+    </p:extLst>
+  </p:cSld>
+  <p:clrMapOvr>
+    <a:masterClrMapping/>
+  </p:clrMapOvr>
+</p:sld>
+</file>
+
+<file path=ppt/slides/slide26.xml><?xml version="1.0" encoding="utf-8"?>
+<p:sld xmlns:a="http://schemas.openxmlformats.org/drawingml/2006/main" xmlns:r="http://schemas.openxmlformats.org/officeDocument/2006/relationships" xmlns:p="http://schemas.openxmlformats.org/presentationml/2006/main">
+  <p:cSld>
+    <p:spTree>
+      <p:nvGrpSpPr>
+        <p:cNvPr id="1" name="">
+          <a:extLst>
+            <a:ext uri="{FF2B5EF4-FFF2-40B4-BE49-F238E27FC236}">
+              <a16:creationId xmlns:a16="http://schemas.microsoft.com/office/drawing/2014/main" id="{5BE7F3BF-9EC5-35C4-53BA-530D6F7E6726}"/>
+            </a:ext>
+          </a:extLst>
+        </p:cNvPr>
+        <p:cNvGrpSpPr/>
+        <p:nvPr/>
+      </p:nvGrpSpPr>
+      <p:grpSpPr>
+        <a:xfrm>
+          <a:off x="0" y="0"/>
+          <a:ext cx="0" cy="0"/>
+          <a:chOff x="0" y="0"/>
+          <a:chExt cx="0" cy="0"/>
+        </a:xfrm>
+      </p:grpSpPr>
+      <p:sp>
+        <p:nvSpPr>
+          <p:cNvPr id="16" name="object 16">
+            <a:extLst>
+              <a:ext uri="{FF2B5EF4-FFF2-40B4-BE49-F238E27FC236}">
+                <a16:creationId xmlns:a16="http://schemas.microsoft.com/office/drawing/2014/main" id="{4E6E7D8B-E221-38DC-9A3B-623D30B157F1}"/>
+              </a:ext>
+            </a:extLst>
+          </p:cNvPr>
+          <p:cNvSpPr txBox="1">
+            <a:spLocks noGrp="1"/>
+          </p:cNvSpPr>
+          <p:nvPr>
+            <p:ph type="title"/>
+          </p:nvPr>
+        </p:nvSpPr>
+        <p:spPr>
+          <a:xfrm>
+            <a:off x="685800" y="408883"/>
+            <a:ext cx="10994410" cy="1013098"/>
+          </a:xfrm>
+          <a:prstGeom prst="rect">
+            <a:avLst/>
+          </a:prstGeom>
+        </p:spPr>
+        <p:txBody>
+          <a:bodyPr vert="horz" wrap="square" lIns="0" tIns="12700" rIns="0" bIns="0" rtlCol="0">
+            <a:spAutoFit/>
+          </a:bodyPr>
+          <a:lstStyle/>
+          <a:p>
+            <a:pPr algn="l"/>
+            <a:r>
+              <a:rPr lang="en-US" sz="2500" dirty="0"/>
+              <a:t>Learning outcome #4 – Notebook section 4. Exercises – 1 slide per bullet point</a:t>
+            </a:r>
+            <a:br>
+              <a:rPr lang="en-US" sz="1000" b="0" dirty="0">
+                <a:latin typeface="Arial" panose="020B0604020202020204" pitchFamily="34" charset="0"/>
+                <a:cs typeface="Arial" panose="020B0604020202020204" pitchFamily="34" charset="0"/>
+              </a:rPr>
+            </a:br>
+            <a:r>
+              <a:rPr lang="en-US" sz="1000" b="0" dirty="0">
+                <a:latin typeface="Arial" panose="020B0604020202020204" pitchFamily="34" charset="0"/>
+                <a:cs typeface="Arial" panose="020B0604020202020204" pitchFamily="34" charset="0"/>
+              </a:rPr>
+              <a:t>c.2 - Add 3 sets of 3 straight waveguides, from left to right of the die, top, middle and bottom of the die</a:t>
+            </a:r>
+            <a:br>
+              <a:rPr lang="en-US" sz="1000" b="0" dirty="0">
+                <a:latin typeface="Arial" panose="020B0604020202020204" pitchFamily="34" charset="0"/>
+                <a:cs typeface="Arial" panose="020B0604020202020204" pitchFamily="34" charset="0"/>
+              </a:rPr>
+            </a:br>
+            <a:r>
+              <a:rPr lang="en-US" sz="1000" b="0" dirty="0">
+                <a:latin typeface="Arial" panose="020B0604020202020204" pitchFamily="34" charset="0"/>
+                <a:cs typeface="Arial" panose="020B0604020202020204" pitchFamily="34" charset="0"/>
+              </a:rPr>
+              <a:t>- Add 2 of each of the components above, with different lengths</a:t>
+            </a:r>
+            <a:br>
+              <a:rPr lang="en-US" sz="1000" b="0" dirty="0">
+                <a:latin typeface="Arial" panose="020B0604020202020204" pitchFamily="34" charset="0"/>
+                <a:cs typeface="Arial" panose="020B0604020202020204" pitchFamily="34" charset="0"/>
+              </a:rPr>
+            </a:br>
+            <a:r>
+              <a:rPr lang="en-US" sz="1000" b="0" dirty="0">
+                <a:latin typeface="Arial" panose="020B0604020202020204" pitchFamily="34" charset="0"/>
+                <a:cs typeface="Arial" panose="020B0604020202020204" pitchFamily="34" charset="0"/>
+              </a:rPr>
+              <a:t>- Connect all your components to the I/</a:t>
+            </a:r>
+            <a:r>
+              <a:rPr lang="en-US" sz="1000" b="0" dirty="0" err="1">
+                <a:latin typeface="Arial" panose="020B0604020202020204" pitchFamily="34" charset="0"/>
+                <a:cs typeface="Arial" panose="020B0604020202020204" pitchFamily="34" charset="0"/>
+              </a:rPr>
+              <a:t>Os</a:t>
+            </a:r>
+            <a:r>
+              <a:rPr lang="en-US" sz="1000" b="0" dirty="0">
+                <a:latin typeface="Arial" panose="020B0604020202020204" pitchFamily="34" charset="0"/>
+                <a:cs typeface="Arial" panose="020B0604020202020204" pitchFamily="34" charset="0"/>
+              </a:rPr>
+              <a:t> </a:t>
+            </a:r>
+            <a:br>
+              <a:rPr lang="en-US" sz="1000" b="0" dirty="0">
+                <a:latin typeface="Arial" panose="020B0604020202020204" pitchFamily="34" charset="0"/>
+                <a:cs typeface="Arial" panose="020B0604020202020204" pitchFamily="34" charset="0"/>
+              </a:rPr>
+            </a:br>
+            <a:endParaRPr sz="1000" b="0" i="1" dirty="0">
+              <a:latin typeface="+mj-lt"/>
+              <a:cs typeface="Lucida Sans"/>
+            </a:endParaRPr>
+          </a:p>
+        </p:txBody>
+      </p:sp>
+      <p:pic>
+        <p:nvPicPr>
+          <p:cNvPr id="83" name="Gráfico 82">
+            <a:extLst>
+              <a:ext uri="{FF2B5EF4-FFF2-40B4-BE49-F238E27FC236}">
+                <a16:creationId xmlns:a16="http://schemas.microsoft.com/office/drawing/2014/main" id="{3D91C3D5-3D56-70E0-D0A6-45C056626743}"/>
+              </a:ext>
+            </a:extLst>
+          </p:cNvPr>
+          <p:cNvPicPr>
+            <a:picLocks noChangeAspect="1"/>
+          </p:cNvPicPr>
+          <p:nvPr/>
+        </p:nvPicPr>
+        <p:blipFill>
+          <a:blip>
+            <a:extLst>
+              <a:ext uri="{96DAC541-7B7A-43D3-8B79-37D633B846F1}">
+                <asvg:svgBlip xmlns:asvg="http://schemas.microsoft.com/office/drawing/2016/SVG/main" r:embed="rId3"/>
+              </a:ext>
+            </a:extLst>
+          </a:blip>
+          <a:stretch>
+            <a:fillRect/>
+          </a:stretch>
+        </p:blipFill>
+        <p:spPr>
+          <a:xfrm>
+            <a:off x="5045006" y="6356057"/>
+            <a:ext cx="6409575" cy="363174"/>
+          </a:xfrm>
+          <a:prstGeom prst="rect">
+            <a:avLst/>
+          </a:prstGeom>
+        </p:spPr>
+      </p:pic>
+      <p:sp>
+        <p:nvSpPr>
+          <p:cNvPr id="84" name="Marcador de número de diapositiva 83">
+            <a:extLst>
+              <a:ext uri="{FF2B5EF4-FFF2-40B4-BE49-F238E27FC236}">
+                <a16:creationId xmlns:a16="http://schemas.microsoft.com/office/drawing/2014/main" id="{F7610FFB-9F22-100B-4DD3-9C9113A737A9}"/>
+              </a:ext>
+            </a:extLst>
+          </p:cNvPr>
+          <p:cNvSpPr>
+            <a:spLocks noGrp="1"/>
+          </p:cNvSpPr>
+          <p:nvPr>
+            <p:ph type="sldNum" sz="quarter" idx="7"/>
+          </p:nvPr>
+        </p:nvSpPr>
+        <p:spPr/>
+        <p:txBody>
+          <a:bodyPr/>
+          <a:lstStyle/>
+          <a:p>
+            <a:fld id="{B6F15528-21DE-4FAA-801E-634DDDAF4B2B}" type="slidenum">
+              <a:rPr lang="es-ES" smtClean="0"/>
+              <a:t>26</a:t>
+            </a:fld>
+            <a:endParaRPr lang="es-ES"/>
+          </a:p>
+        </p:txBody>
+      </p:sp>
+      <p:sp>
+        <p:nvSpPr>
+          <p:cNvPr id="3" name="Marcador de pie de página 2">
+            <a:extLst>
+              <a:ext uri="{FF2B5EF4-FFF2-40B4-BE49-F238E27FC236}">
+                <a16:creationId xmlns:a16="http://schemas.microsoft.com/office/drawing/2014/main" id="{0ADB6DF3-8F54-999A-3925-FA33811CC253}"/>
+              </a:ext>
+            </a:extLst>
+          </p:cNvPr>
+          <p:cNvSpPr>
+            <a:spLocks noGrp="1"/>
+          </p:cNvSpPr>
+          <p:nvPr>
+            <p:ph type="ftr" sz="quarter" idx="5"/>
+          </p:nvPr>
+        </p:nvSpPr>
+        <p:spPr/>
+        <p:txBody>
+          <a:bodyPr/>
+          <a:lstStyle/>
+          <a:p>
+            <a:pPr marL="12700">
+              <a:spcBef>
+                <a:spcPts val="15"/>
+              </a:spcBef>
+            </a:pPr>
+            <a:r>
+              <a:rPr lang="es-ES" spc="-5"/>
+              <a:t>LAB 4.0. LAYOUT</a:t>
+            </a:r>
+            <a:endParaRPr lang="es-ES" spc="-5" dirty="0"/>
+          </a:p>
+        </p:txBody>
+      </p:sp>
+      <p:sp>
+        <p:nvSpPr>
+          <p:cNvPr id="2" name="CuadroTexto 1">
+            <a:extLst>
+              <a:ext uri="{FF2B5EF4-FFF2-40B4-BE49-F238E27FC236}">
+                <a16:creationId xmlns:a16="http://schemas.microsoft.com/office/drawing/2014/main" id="{E256A6B2-F81B-A952-C1FF-DAB68459880E}"/>
+              </a:ext>
+            </a:extLst>
+          </p:cNvPr>
+          <p:cNvSpPr txBox="1"/>
+          <p:nvPr/>
+        </p:nvSpPr>
+        <p:spPr>
+          <a:xfrm>
+            <a:off x="685800" y="990600"/>
+            <a:ext cx="5410200" cy="5181600"/>
+          </a:xfrm>
+          <a:prstGeom prst="rect">
+            <a:avLst/>
+          </a:prstGeom>
+          <a:solidFill>
+            <a:schemeClr val="bg1">
+              <a:lumMod val="95000"/>
+            </a:schemeClr>
+          </a:solidFill>
+          <a:ln w="28575">
+            <a:solidFill>
+              <a:srgbClr val="E0700D"/>
+            </a:solidFill>
+          </a:ln>
+        </p:spPr>
+        <p:txBody>
+          <a:bodyPr wrap="square" rtlCol="0">
+            <a:noAutofit/>
+          </a:bodyPr>
+          <a:lstStyle/>
+          <a:p>
+            <a:pPr algn="just"/>
+            <a:endParaRPr lang="en-US" sz="1200" dirty="0">
+              <a:latin typeface="Arial" panose="020B0604020202020204" pitchFamily="34" charset="0"/>
+              <a:cs typeface="Arial" panose="020B0604020202020204" pitchFamily="34" charset="0"/>
+            </a:endParaRPr>
+          </a:p>
+        </p:txBody>
+      </p:sp>
+      <p:sp>
+        <p:nvSpPr>
+          <p:cNvPr id="8" name="Rectángulo 7">
+            <a:extLst>
+              <a:ext uri="{FF2B5EF4-FFF2-40B4-BE49-F238E27FC236}">
+                <a16:creationId xmlns:a16="http://schemas.microsoft.com/office/drawing/2014/main" id="{CB5D49EA-6B75-2278-66DF-05932AF0A6D3}"/>
+              </a:ext>
+            </a:extLst>
+          </p:cNvPr>
+          <p:cNvSpPr/>
+          <p:nvPr/>
+        </p:nvSpPr>
+        <p:spPr>
+          <a:xfrm>
+            <a:off x="6248400" y="990285"/>
+            <a:ext cx="5638799" cy="5181600"/>
+          </a:xfrm>
+          <a:prstGeom prst="rect">
+            <a:avLst/>
+          </a:prstGeom>
+          <a:noFill/>
+          <a:ln w="28575">
+            <a:solidFill>
+              <a:srgbClr val="E0700D"/>
+            </a:solidFill>
+          </a:ln>
+        </p:spPr>
+        <p:style>
+          <a:lnRef idx="2">
+            <a:schemeClr val="accent1">
+              <a:shade val="15000"/>
+            </a:schemeClr>
+          </a:lnRef>
+          <a:fillRef idx="1">
+            <a:schemeClr val="accent1"/>
+          </a:fillRef>
+          <a:effectRef idx="0">
+            <a:schemeClr val="accent1"/>
+          </a:effectRef>
+          <a:fontRef idx="minor">
+            <a:schemeClr val="lt1"/>
+          </a:fontRef>
+        </p:style>
+        <p:txBody>
+          <a:bodyPr rtlCol="0" anchor="ctr"/>
+          <a:lstStyle/>
+          <a:p>
+            <a:pPr algn="ctr"/>
+            <a:endParaRPr lang="en-US"/>
+          </a:p>
+        </p:txBody>
+      </p:sp>
+      <p:sp>
+        <p:nvSpPr>
+          <p:cNvPr id="9" name="CuadroTexto 8">
+            <a:extLst>
+              <a:ext uri="{FF2B5EF4-FFF2-40B4-BE49-F238E27FC236}">
+                <a16:creationId xmlns:a16="http://schemas.microsoft.com/office/drawing/2014/main" id="{5AE820D2-D4DF-2A72-40ED-2E1ACA1A4A76}"/>
+              </a:ext>
+            </a:extLst>
+          </p:cNvPr>
+          <p:cNvSpPr txBox="1"/>
+          <p:nvPr/>
+        </p:nvSpPr>
+        <p:spPr>
+          <a:xfrm>
+            <a:off x="8180318" y="3105834"/>
+            <a:ext cx="1774973" cy="369332"/>
+          </a:xfrm>
+          <a:prstGeom prst="rect">
+            <a:avLst/>
+          </a:prstGeom>
+          <a:noFill/>
+        </p:spPr>
+        <p:txBody>
+          <a:bodyPr wrap="none" rtlCol="0">
+            <a:spAutoFit/>
+          </a:bodyPr>
+          <a:lstStyle/>
+          <a:p>
+            <a:pPr algn="ctr"/>
+            <a:r>
+              <a:rPr lang="es-ES" dirty="0" err="1"/>
+              <a:t>Screenshot</a:t>
+            </a:r>
+            <a:r>
+              <a:rPr lang="es-ES" dirty="0"/>
+              <a:t> </a:t>
+            </a:r>
+            <a:r>
+              <a:rPr lang="es-ES" dirty="0" err="1"/>
+              <a:t>for</a:t>
+            </a:r>
+            <a:r>
+              <a:rPr lang="es-ES" dirty="0"/>
+              <a:t> …</a:t>
+            </a:r>
+            <a:endParaRPr lang="en-US" dirty="0"/>
+          </a:p>
+        </p:txBody>
+      </p:sp>
+      <p:pic>
+        <p:nvPicPr>
+          <p:cNvPr id="13" name="Imagen 12">
+            <a:extLst>
+              <a:ext uri="{FF2B5EF4-FFF2-40B4-BE49-F238E27FC236}">
+                <a16:creationId xmlns:a16="http://schemas.microsoft.com/office/drawing/2014/main" id="{ADBA357E-B934-FEBE-C1EB-D2CAC14701D4}"/>
+              </a:ext>
+            </a:extLst>
+          </p:cNvPr>
+          <p:cNvPicPr>
+            <a:picLocks noChangeAspect="1"/>
+          </p:cNvPicPr>
+          <p:nvPr/>
+        </p:nvPicPr>
+        <p:blipFill>
+          <a:blip r:embed="rId4"/>
+          <a:stretch>
+            <a:fillRect/>
+          </a:stretch>
+        </p:blipFill>
+        <p:spPr>
+          <a:xfrm>
+            <a:off x="6411686" y="1605838"/>
+            <a:ext cx="5246914" cy="3960906"/>
+          </a:xfrm>
+          <a:prstGeom prst="rect">
+            <a:avLst/>
+          </a:prstGeom>
+        </p:spPr>
+      </p:pic>
+      <p:pic>
+        <p:nvPicPr>
+          <p:cNvPr id="15" name="Imagen 14">
+            <a:extLst>
+              <a:ext uri="{FF2B5EF4-FFF2-40B4-BE49-F238E27FC236}">
+                <a16:creationId xmlns:a16="http://schemas.microsoft.com/office/drawing/2014/main" id="{E0F3A740-206F-921D-996A-4FCD32C04C9E}"/>
+              </a:ext>
+            </a:extLst>
+          </p:cNvPr>
+          <p:cNvPicPr>
+            <a:picLocks noChangeAspect="1"/>
+          </p:cNvPicPr>
+          <p:nvPr/>
+        </p:nvPicPr>
+        <p:blipFill>
+          <a:blip r:embed="rId5"/>
+          <a:stretch>
+            <a:fillRect/>
+          </a:stretch>
+        </p:blipFill>
+        <p:spPr>
+          <a:xfrm>
+            <a:off x="1143000" y="1706838"/>
+            <a:ext cx="4170240" cy="3323013"/>
+          </a:xfrm>
+          <a:prstGeom prst="rect">
+            <a:avLst/>
+          </a:prstGeom>
+        </p:spPr>
+      </p:pic>
+    </p:spTree>
+    <p:extLst>
+      <p:ext uri="{BB962C8B-B14F-4D97-AF65-F5344CB8AC3E}">
+        <p14:creationId xmlns:p14="http://schemas.microsoft.com/office/powerpoint/2010/main" val="1005756796"/>
+      </p:ext>
+    </p:extLst>
+  </p:cSld>
+  <p:clrMapOvr>
+    <a:masterClrMapping/>
+  </p:clrMapOvr>
+</p:sld>
+</file>
+
+<file path=ppt/slides/slide27.xml><?xml version="1.0" encoding="utf-8"?>
+<p:sld xmlns:a="http://schemas.openxmlformats.org/drawingml/2006/main" xmlns:r="http://schemas.openxmlformats.org/officeDocument/2006/relationships" xmlns:p="http://schemas.openxmlformats.org/presentationml/2006/main">
+  <p:cSld>
+    <p:spTree>
+      <p:nvGrpSpPr>
+        <p:cNvPr id="1" name="">
+          <a:extLst>
+            <a:ext uri="{FF2B5EF4-FFF2-40B4-BE49-F238E27FC236}">
+              <a16:creationId xmlns:a16="http://schemas.microsoft.com/office/drawing/2014/main" id="{75E5968E-C732-BD6E-BAB2-5D13E85BFE66}"/>
+            </a:ext>
+          </a:extLst>
+        </p:cNvPr>
+        <p:cNvGrpSpPr/>
+        <p:nvPr/>
+      </p:nvGrpSpPr>
+      <p:grpSpPr>
+        <a:xfrm>
+          <a:off x="0" y="0"/>
+          <a:ext cx="0" cy="0"/>
+          <a:chOff x="0" y="0"/>
+          <a:chExt cx="0" cy="0"/>
+        </a:xfrm>
+      </p:grpSpPr>
+      <p:sp>
+        <p:nvSpPr>
+          <p:cNvPr id="16" name="object 16">
+            <a:extLst>
+              <a:ext uri="{FF2B5EF4-FFF2-40B4-BE49-F238E27FC236}">
+                <a16:creationId xmlns:a16="http://schemas.microsoft.com/office/drawing/2014/main" id="{B5E844F1-904A-A975-2E6D-0E8C4CA7157B}"/>
+              </a:ext>
+            </a:extLst>
+          </p:cNvPr>
+          <p:cNvSpPr txBox="1">
+            <a:spLocks noGrp="1"/>
+          </p:cNvSpPr>
+          <p:nvPr>
+            <p:ph type="title"/>
+          </p:nvPr>
+        </p:nvSpPr>
+        <p:spPr>
+          <a:xfrm>
+            <a:off x="685800" y="408883"/>
+            <a:ext cx="10994410" cy="859210"/>
+          </a:xfrm>
+          <a:prstGeom prst="rect">
+            <a:avLst/>
+          </a:prstGeom>
+        </p:spPr>
+        <p:txBody>
+          <a:bodyPr vert="horz" wrap="square" lIns="0" tIns="12700" rIns="0" bIns="0" rtlCol="0">
+            <a:spAutoFit/>
+          </a:bodyPr>
+          <a:lstStyle/>
+          <a:p>
+            <a:pPr algn="l"/>
+            <a:r>
+              <a:rPr lang="en-US" sz="2500" dirty="0"/>
+              <a:t>Learning outcome #4 – Notebook section 4. Exercises – 1 slide per bullet point</a:t>
+            </a:r>
+            <a:br>
+              <a:rPr lang="en-US" sz="1000" b="0" dirty="0">
+                <a:latin typeface="Arial" panose="020B0604020202020204" pitchFamily="34" charset="0"/>
+                <a:cs typeface="Arial" panose="020B0604020202020204" pitchFamily="34" charset="0"/>
+              </a:rPr>
+            </a:br>
+            <a:r>
+              <a:rPr lang="en-US" sz="1000" b="0" dirty="0">
+                <a:latin typeface="Arial" panose="020B0604020202020204" pitchFamily="34" charset="0"/>
+                <a:cs typeface="Arial" panose="020B0604020202020204" pitchFamily="34" charset="0"/>
+              </a:rPr>
+              <a:t>c.3 - Add 2 of each of the components above, with different lengths</a:t>
+            </a:r>
+            <a:br>
+              <a:rPr lang="en-US" sz="1000" b="0" dirty="0">
+                <a:latin typeface="Arial" panose="020B0604020202020204" pitchFamily="34" charset="0"/>
+                <a:cs typeface="Arial" panose="020B0604020202020204" pitchFamily="34" charset="0"/>
+              </a:rPr>
+            </a:br>
+            <a:r>
+              <a:rPr lang="en-US" sz="1000" b="0" dirty="0">
+                <a:latin typeface="Arial" panose="020B0604020202020204" pitchFamily="34" charset="0"/>
+                <a:cs typeface="Arial" panose="020B0604020202020204" pitchFamily="34" charset="0"/>
+              </a:rPr>
+              <a:t>- Connect all your components to the I/</a:t>
+            </a:r>
+            <a:r>
+              <a:rPr lang="en-US" sz="1000" b="0" dirty="0" err="1">
+                <a:latin typeface="Arial" panose="020B0604020202020204" pitchFamily="34" charset="0"/>
+                <a:cs typeface="Arial" panose="020B0604020202020204" pitchFamily="34" charset="0"/>
+              </a:rPr>
+              <a:t>Os</a:t>
+            </a:r>
+            <a:r>
+              <a:rPr lang="en-US" sz="1000" b="0" dirty="0">
+                <a:latin typeface="Arial" panose="020B0604020202020204" pitchFamily="34" charset="0"/>
+                <a:cs typeface="Arial" panose="020B0604020202020204" pitchFamily="34" charset="0"/>
+              </a:rPr>
+              <a:t> </a:t>
+            </a:r>
+            <a:br>
+              <a:rPr lang="en-US" sz="1000" b="0" dirty="0">
+                <a:latin typeface="Arial" panose="020B0604020202020204" pitchFamily="34" charset="0"/>
+                <a:cs typeface="Arial" panose="020B0604020202020204" pitchFamily="34" charset="0"/>
+              </a:rPr>
+            </a:br>
+            <a:endParaRPr sz="1000" b="0" i="1" dirty="0">
+              <a:latin typeface="+mj-lt"/>
+              <a:cs typeface="Lucida Sans"/>
+            </a:endParaRPr>
+          </a:p>
+        </p:txBody>
+      </p:sp>
+      <p:pic>
+        <p:nvPicPr>
+          <p:cNvPr id="83" name="Gráfico 82">
+            <a:extLst>
+              <a:ext uri="{FF2B5EF4-FFF2-40B4-BE49-F238E27FC236}">
+                <a16:creationId xmlns:a16="http://schemas.microsoft.com/office/drawing/2014/main" id="{7757AE1F-60BC-E1B4-69E2-6A51F6CF9643}"/>
+              </a:ext>
+            </a:extLst>
+          </p:cNvPr>
+          <p:cNvPicPr>
+            <a:picLocks noChangeAspect="1"/>
+          </p:cNvPicPr>
+          <p:nvPr/>
+        </p:nvPicPr>
+        <p:blipFill>
+          <a:blip>
+            <a:extLst>
+              <a:ext uri="{96DAC541-7B7A-43D3-8B79-37D633B846F1}">
+                <asvg:svgBlip xmlns:asvg="http://schemas.microsoft.com/office/drawing/2016/SVG/main" r:embed="rId3"/>
+              </a:ext>
+            </a:extLst>
+          </a:blip>
+          <a:stretch>
+            <a:fillRect/>
+          </a:stretch>
+        </p:blipFill>
+        <p:spPr>
+          <a:xfrm>
+            <a:off x="5045006" y="6356057"/>
+            <a:ext cx="6409575" cy="363174"/>
+          </a:xfrm>
+          <a:prstGeom prst="rect">
+            <a:avLst/>
+          </a:prstGeom>
+        </p:spPr>
+      </p:pic>
+      <p:sp>
+        <p:nvSpPr>
+          <p:cNvPr id="84" name="Marcador de número de diapositiva 83">
+            <a:extLst>
+              <a:ext uri="{FF2B5EF4-FFF2-40B4-BE49-F238E27FC236}">
+                <a16:creationId xmlns:a16="http://schemas.microsoft.com/office/drawing/2014/main" id="{1AE1A8DA-58B8-7718-EF9B-19AAAF333256}"/>
+              </a:ext>
+            </a:extLst>
+          </p:cNvPr>
+          <p:cNvSpPr>
+            <a:spLocks noGrp="1"/>
+          </p:cNvSpPr>
+          <p:nvPr>
+            <p:ph type="sldNum" sz="quarter" idx="7"/>
+          </p:nvPr>
+        </p:nvSpPr>
+        <p:spPr/>
+        <p:txBody>
+          <a:bodyPr/>
+          <a:lstStyle/>
+          <a:p>
+            <a:fld id="{B6F15528-21DE-4FAA-801E-634DDDAF4B2B}" type="slidenum">
+              <a:rPr lang="es-ES" smtClean="0"/>
+              <a:t>27</a:t>
+            </a:fld>
+            <a:endParaRPr lang="es-ES"/>
+          </a:p>
+        </p:txBody>
+      </p:sp>
+      <p:sp>
+        <p:nvSpPr>
+          <p:cNvPr id="3" name="Marcador de pie de página 2">
+            <a:extLst>
+              <a:ext uri="{FF2B5EF4-FFF2-40B4-BE49-F238E27FC236}">
+                <a16:creationId xmlns:a16="http://schemas.microsoft.com/office/drawing/2014/main" id="{7D65EDC1-48E1-C37A-C7F5-1E13E44ABE35}"/>
+              </a:ext>
+            </a:extLst>
+          </p:cNvPr>
+          <p:cNvSpPr>
+            <a:spLocks noGrp="1"/>
+          </p:cNvSpPr>
+          <p:nvPr>
+            <p:ph type="ftr" sz="quarter" idx="5"/>
+          </p:nvPr>
+        </p:nvSpPr>
+        <p:spPr/>
+        <p:txBody>
+          <a:bodyPr/>
+          <a:lstStyle/>
+          <a:p>
+            <a:pPr marL="12700">
+              <a:spcBef>
+                <a:spcPts val="15"/>
+              </a:spcBef>
+            </a:pPr>
+            <a:r>
+              <a:rPr lang="es-ES" spc="-5"/>
+              <a:t>LAB 4.0. LAYOUT</a:t>
+            </a:r>
+            <a:endParaRPr lang="es-ES" spc="-5" dirty="0"/>
+          </a:p>
+        </p:txBody>
+      </p:sp>
+      <p:sp>
+        <p:nvSpPr>
+          <p:cNvPr id="2" name="CuadroTexto 1">
+            <a:extLst>
+              <a:ext uri="{FF2B5EF4-FFF2-40B4-BE49-F238E27FC236}">
+                <a16:creationId xmlns:a16="http://schemas.microsoft.com/office/drawing/2014/main" id="{DCD1F7C1-3DA4-63AA-BD99-0737D4ADCCDF}"/>
+              </a:ext>
+            </a:extLst>
+          </p:cNvPr>
+          <p:cNvSpPr txBox="1"/>
+          <p:nvPr/>
+        </p:nvSpPr>
+        <p:spPr>
+          <a:xfrm>
+            <a:off x="609600" y="990285"/>
+            <a:ext cx="5571546" cy="5181600"/>
+          </a:xfrm>
+          <a:prstGeom prst="rect">
+            <a:avLst/>
+          </a:prstGeom>
+          <a:solidFill>
+            <a:schemeClr val="bg1">
+              <a:lumMod val="95000"/>
+            </a:schemeClr>
+          </a:solidFill>
+          <a:ln w="28575">
+            <a:solidFill>
+              <a:srgbClr val="E0700D"/>
+            </a:solidFill>
+          </a:ln>
+        </p:spPr>
+        <p:txBody>
+          <a:bodyPr wrap="square" rtlCol="0">
+            <a:noAutofit/>
+          </a:bodyPr>
+          <a:lstStyle/>
+          <a:p>
+            <a:pPr algn="just"/>
+            <a:endParaRPr lang="en-US" sz="1200" dirty="0">
+              <a:latin typeface="Arial" panose="020B0604020202020204" pitchFamily="34" charset="0"/>
+              <a:cs typeface="Arial" panose="020B0604020202020204" pitchFamily="34" charset="0"/>
+            </a:endParaRPr>
+          </a:p>
+        </p:txBody>
+      </p:sp>
+      <p:sp>
+        <p:nvSpPr>
+          <p:cNvPr id="8" name="Rectángulo 7">
+            <a:extLst>
+              <a:ext uri="{FF2B5EF4-FFF2-40B4-BE49-F238E27FC236}">
+                <a16:creationId xmlns:a16="http://schemas.microsoft.com/office/drawing/2014/main" id="{D522B4AB-BD35-E39E-130E-96C4FE69ADD2}"/>
+              </a:ext>
+            </a:extLst>
+          </p:cNvPr>
+          <p:cNvSpPr/>
+          <p:nvPr/>
+        </p:nvSpPr>
+        <p:spPr>
+          <a:xfrm>
+            <a:off x="6248400" y="990285"/>
+            <a:ext cx="5638799" cy="5181600"/>
+          </a:xfrm>
+          <a:prstGeom prst="rect">
+            <a:avLst/>
+          </a:prstGeom>
+          <a:noFill/>
+          <a:ln w="28575">
+            <a:solidFill>
+              <a:srgbClr val="E0700D"/>
+            </a:solidFill>
+          </a:ln>
+        </p:spPr>
+        <p:style>
+          <a:lnRef idx="2">
+            <a:schemeClr val="accent1">
+              <a:shade val="15000"/>
+            </a:schemeClr>
+          </a:lnRef>
+          <a:fillRef idx="1">
+            <a:schemeClr val="accent1"/>
+          </a:fillRef>
+          <a:effectRef idx="0">
+            <a:schemeClr val="accent1"/>
+          </a:effectRef>
+          <a:fontRef idx="minor">
+            <a:schemeClr val="lt1"/>
+          </a:fontRef>
+        </p:style>
+        <p:txBody>
+          <a:bodyPr rtlCol="0" anchor="ctr"/>
+          <a:lstStyle/>
+          <a:p>
+            <a:pPr algn="ctr"/>
+            <a:endParaRPr lang="en-US"/>
+          </a:p>
+        </p:txBody>
+      </p:sp>
+      <p:sp>
+        <p:nvSpPr>
+          <p:cNvPr id="9" name="CuadroTexto 8">
+            <a:extLst>
+              <a:ext uri="{FF2B5EF4-FFF2-40B4-BE49-F238E27FC236}">
+                <a16:creationId xmlns:a16="http://schemas.microsoft.com/office/drawing/2014/main" id="{9A219116-61D9-7B78-471D-2DA1EFB1E44B}"/>
+              </a:ext>
+            </a:extLst>
+          </p:cNvPr>
+          <p:cNvSpPr txBox="1"/>
+          <p:nvPr/>
+        </p:nvSpPr>
+        <p:spPr>
+          <a:xfrm>
+            <a:off x="8180318" y="3105834"/>
+            <a:ext cx="1774973" cy="369332"/>
+          </a:xfrm>
+          <a:prstGeom prst="rect">
+            <a:avLst/>
+          </a:prstGeom>
+          <a:noFill/>
+        </p:spPr>
+        <p:txBody>
+          <a:bodyPr wrap="none" rtlCol="0">
+            <a:spAutoFit/>
+          </a:bodyPr>
+          <a:lstStyle/>
+          <a:p>
+            <a:pPr algn="ctr"/>
+            <a:r>
+              <a:rPr lang="es-ES" dirty="0" err="1"/>
+              <a:t>Screenshot</a:t>
+            </a:r>
+            <a:r>
+              <a:rPr lang="es-ES" dirty="0"/>
+              <a:t> </a:t>
+            </a:r>
+            <a:r>
+              <a:rPr lang="es-ES" dirty="0" err="1"/>
+              <a:t>for</a:t>
+            </a:r>
+            <a:r>
+              <a:rPr lang="es-ES" dirty="0"/>
+              <a:t> …</a:t>
+            </a:r>
+            <a:endParaRPr lang="en-US" dirty="0"/>
+          </a:p>
+        </p:txBody>
+      </p:sp>
+      <p:pic>
+        <p:nvPicPr>
+          <p:cNvPr id="7" name="Imagen 6">
+            <a:extLst>
+              <a:ext uri="{FF2B5EF4-FFF2-40B4-BE49-F238E27FC236}">
+                <a16:creationId xmlns:a16="http://schemas.microsoft.com/office/drawing/2014/main" id="{D6D4C842-BBDF-E479-4C4A-14A957C5B605}"/>
+              </a:ext>
+            </a:extLst>
+          </p:cNvPr>
+          <p:cNvPicPr>
+            <a:picLocks noChangeAspect="1"/>
+          </p:cNvPicPr>
+          <p:nvPr/>
+        </p:nvPicPr>
+        <p:blipFill>
+          <a:blip r:embed="rId4"/>
+          <a:stretch>
+            <a:fillRect/>
+          </a:stretch>
+        </p:blipFill>
+        <p:spPr>
+          <a:xfrm>
+            <a:off x="6248400" y="1423148"/>
+            <a:ext cx="5638799" cy="4256740"/>
+          </a:xfrm>
+          <a:prstGeom prst="rect">
+            <a:avLst/>
+          </a:prstGeom>
+        </p:spPr>
+      </p:pic>
+      <p:pic>
+        <p:nvPicPr>
+          <p:cNvPr id="11" name="Imagen 10">
+            <a:extLst>
+              <a:ext uri="{FF2B5EF4-FFF2-40B4-BE49-F238E27FC236}">
+                <a16:creationId xmlns:a16="http://schemas.microsoft.com/office/drawing/2014/main" id="{886B0523-A4D3-3CC7-2E49-F8DFC5E09B07}"/>
+              </a:ext>
+            </a:extLst>
+          </p:cNvPr>
+          <p:cNvPicPr>
+            <a:picLocks noChangeAspect="1"/>
+          </p:cNvPicPr>
+          <p:nvPr/>
+        </p:nvPicPr>
+        <p:blipFill>
+          <a:blip r:embed="rId5"/>
+          <a:stretch>
+            <a:fillRect/>
+          </a:stretch>
+        </p:blipFill>
+        <p:spPr>
+          <a:xfrm>
+            <a:off x="838200" y="1143000"/>
+            <a:ext cx="3733800" cy="4601124"/>
+          </a:xfrm>
+          <a:prstGeom prst="rect">
+            <a:avLst/>
+          </a:prstGeom>
+        </p:spPr>
+      </p:pic>
+      <p:sp>
+        <p:nvSpPr>
+          <p:cNvPr id="12" name="CuadroTexto 11">
+            <a:extLst>
+              <a:ext uri="{FF2B5EF4-FFF2-40B4-BE49-F238E27FC236}">
+                <a16:creationId xmlns:a16="http://schemas.microsoft.com/office/drawing/2014/main" id="{BF1E3BE1-5AB4-1236-5D9E-68B62399E412}"/>
+              </a:ext>
+            </a:extLst>
+          </p:cNvPr>
+          <p:cNvSpPr txBox="1"/>
+          <p:nvPr/>
+        </p:nvSpPr>
+        <p:spPr>
+          <a:xfrm>
+            <a:off x="838200" y="5715000"/>
+            <a:ext cx="1676400" cy="369332"/>
+          </a:xfrm>
+          <a:prstGeom prst="rect">
+            <a:avLst/>
+          </a:prstGeom>
+          <a:noFill/>
+        </p:spPr>
+        <p:txBody>
+          <a:bodyPr wrap="square" rtlCol="0">
+            <a:spAutoFit/>
+          </a:bodyPr>
+          <a:lstStyle/>
+          <a:p>
+            <a:r>
+              <a:rPr lang="es-ES" dirty="0"/>
+              <a:t>…..</a:t>
+            </a:r>
+          </a:p>
+        </p:txBody>
+      </p:sp>
+    </p:spTree>
+    <p:extLst>
+      <p:ext uri="{BB962C8B-B14F-4D97-AF65-F5344CB8AC3E}">
+        <p14:creationId xmlns:p14="http://schemas.microsoft.com/office/powerpoint/2010/main" val="1440389483"/>
+      </p:ext>
+    </p:extLst>
+  </p:cSld>
+  <p:clrMapOvr>
+    <a:masterClrMapping/>
+  </p:clrMapOvr>
+</p:sld>
+</file>
+
+<file path=ppt/slides/slide28.xml><?xml version="1.0" encoding="utf-8"?>
+<p:sld xmlns:a="http://schemas.openxmlformats.org/drawingml/2006/main" xmlns:r="http://schemas.openxmlformats.org/officeDocument/2006/relationships" xmlns:p="http://schemas.openxmlformats.org/presentationml/2006/main">
+  <p:cSld>
+    <p:spTree>
+      <p:nvGrpSpPr>
+        <p:cNvPr id="1" name="">
+          <a:extLst>
+            <a:ext uri="{FF2B5EF4-FFF2-40B4-BE49-F238E27FC236}">
+              <a16:creationId xmlns:a16="http://schemas.microsoft.com/office/drawing/2014/main" id="{F25F0C40-D74B-FE01-7FB1-58871B4DD2AA}"/>
+            </a:ext>
+          </a:extLst>
+        </p:cNvPr>
+        <p:cNvGrpSpPr/>
+        <p:nvPr/>
+      </p:nvGrpSpPr>
+      <p:grpSpPr>
+        <a:xfrm>
+          <a:off x="0" y="0"/>
+          <a:ext cx="0" cy="0"/>
+          <a:chOff x="0" y="0"/>
+          <a:chExt cx="0" cy="0"/>
+        </a:xfrm>
+      </p:grpSpPr>
+      <p:sp>
+        <p:nvSpPr>
+          <p:cNvPr id="16" name="object 16">
+            <a:extLst>
+              <a:ext uri="{FF2B5EF4-FFF2-40B4-BE49-F238E27FC236}">
+                <a16:creationId xmlns:a16="http://schemas.microsoft.com/office/drawing/2014/main" id="{E8C5686E-7C12-8407-6954-D1C8D01ACE19}"/>
+              </a:ext>
+            </a:extLst>
+          </p:cNvPr>
+          <p:cNvSpPr txBox="1">
+            <a:spLocks noGrp="1"/>
+          </p:cNvSpPr>
+          <p:nvPr>
+            <p:ph type="title"/>
+          </p:nvPr>
+        </p:nvSpPr>
+        <p:spPr>
+          <a:xfrm>
+            <a:off x="685800" y="408883"/>
+            <a:ext cx="10994410" cy="705321"/>
+          </a:xfrm>
+          <a:prstGeom prst="rect">
+            <a:avLst/>
+          </a:prstGeom>
+        </p:spPr>
+        <p:txBody>
+          <a:bodyPr vert="horz" wrap="square" lIns="0" tIns="12700" rIns="0" bIns="0" rtlCol="0">
+            <a:spAutoFit/>
+          </a:bodyPr>
+          <a:lstStyle/>
+          <a:p>
+            <a:pPr algn="l"/>
+            <a:r>
+              <a:rPr lang="en-US" sz="2500" dirty="0"/>
+              <a:t>Learning outcome #4 – Notebook section 4. Exercises – 1 slide per bullet point</a:t>
+            </a:r>
+            <a:br>
+              <a:rPr lang="en-US" sz="1000" b="0" dirty="0">
+                <a:latin typeface="Arial" panose="020B0604020202020204" pitchFamily="34" charset="0"/>
+                <a:cs typeface="Arial" panose="020B0604020202020204" pitchFamily="34" charset="0"/>
+              </a:rPr>
+            </a:br>
+            <a:r>
+              <a:rPr lang="en-US" sz="1000" b="0" dirty="0">
+                <a:latin typeface="Arial" panose="020B0604020202020204" pitchFamily="34" charset="0"/>
+                <a:cs typeface="Arial" panose="020B0604020202020204" pitchFamily="34" charset="0"/>
+              </a:rPr>
+              <a:t>Connect all your components to the I/</a:t>
+            </a:r>
+            <a:r>
+              <a:rPr lang="en-US" sz="1000" b="0" dirty="0" err="1">
+                <a:latin typeface="Arial" panose="020B0604020202020204" pitchFamily="34" charset="0"/>
+                <a:cs typeface="Arial" panose="020B0604020202020204" pitchFamily="34" charset="0"/>
+              </a:rPr>
+              <a:t>Os</a:t>
+            </a:r>
+            <a:r>
+              <a:rPr lang="en-US" sz="1000" b="0" dirty="0">
+                <a:latin typeface="Arial" panose="020B0604020202020204" pitchFamily="34" charset="0"/>
+                <a:cs typeface="Arial" panose="020B0604020202020204" pitchFamily="34" charset="0"/>
+              </a:rPr>
+              <a:t> </a:t>
+            </a:r>
+            <a:br>
+              <a:rPr lang="en-US" sz="1000" b="0" dirty="0">
+                <a:latin typeface="Arial" panose="020B0604020202020204" pitchFamily="34" charset="0"/>
+                <a:cs typeface="Arial" panose="020B0604020202020204" pitchFamily="34" charset="0"/>
+              </a:rPr>
+            </a:br>
+            <a:endParaRPr sz="1000" b="0" i="1" dirty="0">
+              <a:latin typeface="+mj-lt"/>
+              <a:cs typeface="Lucida Sans"/>
+            </a:endParaRPr>
+          </a:p>
+        </p:txBody>
+      </p:sp>
+      <p:pic>
+        <p:nvPicPr>
+          <p:cNvPr id="83" name="Gráfico 82">
+            <a:extLst>
+              <a:ext uri="{FF2B5EF4-FFF2-40B4-BE49-F238E27FC236}">
+                <a16:creationId xmlns:a16="http://schemas.microsoft.com/office/drawing/2014/main" id="{E1F98F34-463A-D8FF-ADD7-10ECD083C022}"/>
+              </a:ext>
+            </a:extLst>
+          </p:cNvPr>
+          <p:cNvPicPr>
+            <a:picLocks noChangeAspect="1"/>
+          </p:cNvPicPr>
+          <p:nvPr/>
+        </p:nvPicPr>
+        <p:blipFill>
+          <a:blip>
+            <a:extLst>
+              <a:ext uri="{96DAC541-7B7A-43D3-8B79-37D633B846F1}">
+                <asvg:svgBlip xmlns:asvg="http://schemas.microsoft.com/office/drawing/2016/SVG/main" r:embed="rId3"/>
+              </a:ext>
+            </a:extLst>
+          </a:blip>
+          <a:stretch>
+            <a:fillRect/>
+          </a:stretch>
+        </p:blipFill>
+        <p:spPr>
+          <a:xfrm>
+            <a:off x="5045006" y="6356057"/>
+            <a:ext cx="6409575" cy="363174"/>
+          </a:xfrm>
+          <a:prstGeom prst="rect">
+            <a:avLst/>
+          </a:prstGeom>
+        </p:spPr>
+      </p:pic>
+      <p:sp>
+        <p:nvSpPr>
+          <p:cNvPr id="84" name="Marcador de número de diapositiva 83">
+            <a:extLst>
+              <a:ext uri="{FF2B5EF4-FFF2-40B4-BE49-F238E27FC236}">
+                <a16:creationId xmlns:a16="http://schemas.microsoft.com/office/drawing/2014/main" id="{F644A30C-6AA7-0B49-7479-10F0088A93A1}"/>
+              </a:ext>
+            </a:extLst>
+          </p:cNvPr>
+          <p:cNvSpPr>
+            <a:spLocks noGrp="1"/>
+          </p:cNvSpPr>
+          <p:nvPr>
+            <p:ph type="sldNum" sz="quarter" idx="7"/>
+          </p:nvPr>
+        </p:nvSpPr>
+        <p:spPr/>
+        <p:txBody>
+          <a:bodyPr/>
+          <a:lstStyle/>
+          <a:p>
+            <a:fld id="{B6F15528-21DE-4FAA-801E-634DDDAF4B2B}" type="slidenum">
+              <a:rPr lang="es-ES" smtClean="0"/>
+              <a:t>28</a:t>
+            </a:fld>
+            <a:endParaRPr lang="es-ES"/>
+          </a:p>
+        </p:txBody>
+      </p:sp>
+      <p:sp>
+        <p:nvSpPr>
+          <p:cNvPr id="3" name="Marcador de pie de página 2">
+            <a:extLst>
+              <a:ext uri="{FF2B5EF4-FFF2-40B4-BE49-F238E27FC236}">
+                <a16:creationId xmlns:a16="http://schemas.microsoft.com/office/drawing/2014/main" id="{5C2EA24D-5723-1AB9-7F66-7C92F3270DE0}"/>
+              </a:ext>
+            </a:extLst>
+          </p:cNvPr>
+          <p:cNvSpPr>
+            <a:spLocks noGrp="1"/>
+          </p:cNvSpPr>
+          <p:nvPr>
+            <p:ph type="ftr" sz="quarter" idx="5"/>
+          </p:nvPr>
+        </p:nvSpPr>
+        <p:spPr/>
+        <p:txBody>
+          <a:bodyPr/>
+          <a:lstStyle/>
+          <a:p>
+            <a:pPr marL="12700">
+              <a:spcBef>
+                <a:spcPts val="15"/>
+              </a:spcBef>
+            </a:pPr>
+            <a:r>
+              <a:rPr lang="es-ES" spc="-5"/>
+              <a:t>LAB 4.0. LAYOUT</a:t>
+            </a:r>
+            <a:endParaRPr lang="es-ES" spc="-5" dirty="0"/>
+          </a:p>
+        </p:txBody>
+      </p:sp>
+      <p:sp>
+        <p:nvSpPr>
+          <p:cNvPr id="2" name="CuadroTexto 1">
+            <a:extLst>
+              <a:ext uri="{FF2B5EF4-FFF2-40B4-BE49-F238E27FC236}">
+                <a16:creationId xmlns:a16="http://schemas.microsoft.com/office/drawing/2014/main" id="{30ED2251-C3BC-06CE-C4BD-96471360DF53}"/>
+              </a:ext>
+            </a:extLst>
+          </p:cNvPr>
+          <p:cNvSpPr txBox="1"/>
+          <p:nvPr/>
+        </p:nvSpPr>
+        <p:spPr>
+          <a:xfrm>
+            <a:off x="7250047" y="1114204"/>
+            <a:ext cx="4648039" cy="4883713"/>
+          </a:xfrm>
+          <a:prstGeom prst="rect">
+            <a:avLst/>
+          </a:prstGeom>
+          <a:solidFill>
+            <a:schemeClr val="bg1">
+              <a:lumMod val="95000"/>
+            </a:schemeClr>
+          </a:solidFill>
+          <a:ln w="28575">
+            <a:solidFill>
+              <a:srgbClr val="E0700D"/>
+            </a:solidFill>
+          </a:ln>
+        </p:spPr>
+        <p:txBody>
+          <a:bodyPr wrap="square" rtlCol="0">
+            <a:noAutofit/>
+          </a:bodyPr>
+          <a:lstStyle/>
+          <a:p>
+            <a:pPr marL="171450" indent="-171450" algn="just">
+              <a:buFont typeface="Arial" panose="020B0604020202020204" pitchFamily="34" charset="0"/>
+              <a:buChar char="•"/>
+            </a:pPr>
+            <a:endParaRPr lang="es-ES" sz="1200" dirty="0">
+              <a:latin typeface="Arial" panose="020B0604020202020204" pitchFamily="34" charset="0"/>
+              <a:cs typeface="Arial" panose="020B0604020202020204" pitchFamily="34" charset="0"/>
+            </a:endParaRPr>
+          </a:p>
+          <a:p>
+            <a:pPr marL="171450" indent="-171450" algn="just">
+              <a:buFont typeface="Arial" panose="020B0604020202020204" pitchFamily="34" charset="0"/>
+              <a:buChar char="•"/>
+            </a:pPr>
+            <a:r>
+              <a:rPr lang="es-ES" sz="1200" dirty="0">
+                <a:latin typeface="Arial" panose="020B0604020202020204" pitchFamily="34" charset="0"/>
+                <a:cs typeface="Arial" panose="020B0604020202020204" pitchFamily="34" charset="0"/>
+              </a:rPr>
+              <a:t>Para el </a:t>
+            </a:r>
+            <a:r>
+              <a:rPr lang="es-ES" sz="1200" dirty="0" err="1">
+                <a:latin typeface="Arial" panose="020B0604020202020204" pitchFamily="34" charset="0"/>
+                <a:cs typeface="Arial" panose="020B0604020202020204" pitchFamily="34" charset="0"/>
+              </a:rPr>
+              <a:t>layout</a:t>
+            </a:r>
+            <a:r>
+              <a:rPr lang="es-ES" sz="1200" dirty="0">
+                <a:latin typeface="Arial" panose="020B0604020202020204" pitchFamily="34" charset="0"/>
+                <a:cs typeface="Arial" panose="020B0604020202020204" pitchFamily="34" charset="0"/>
+              </a:rPr>
+              <a:t> final hemos usado un die de 10 ×5 mm con los accesos ópticos separados 250 micras. </a:t>
+            </a:r>
+          </a:p>
+          <a:p>
+            <a:pPr marL="171450" indent="-171450" algn="just">
+              <a:buFont typeface="Arial" panose="020B0604020202020204" pitchFamily="34" charset="0"/>
+              <a:buChar char="•"/>
+            </a:pPr>
+            <a:r>
+              <a:rPr lang="es-ES" sz="1200" dirty="0">
+                <a:latin typeface="Arial" panose="020B0604020202020204" pitchFamily="34" charset="0"/>
+                <a:cs typeface="Arial" panose="020B0604020202020204" pitchFamily="34" charset="0"/>
+              </a:rPr>
+              <a:t>Hemos reservado nueve pares de puertos para las guías rectas de referencia</a:t>
+            </a:r>
+          </a:p>
+          <a:p>
+            <a:pPr marL="628650" lvl="1" indent="-171450" algn="just">
+              <a:buFont typeface="Arial" panose="020B0604020202020204" pitchFamily="34" charset="0"/>
+              <a:buChar char="•"/>
+            </a:pPr>
+            <a:r>
+              <a:rPr lang="es-ES" sz="1200" dirty="0">
+                <a:latin typeface="Arial" panose="020B0604020202020204" pitchFamily="34" charset="0"/>
+                <a:cs typeface="Arial" panose="020B0604020202020204" pitchFamily="34" charset="0"/>
+              </a:rPr>
+              <a:t>tres en la parte inferior</a:t>
+            </a:r>
+          </a:p>
+          <a:p>
+            <a:pPr marL="628650" lvl="1" indent="-171450" algn="just">
+              <a:buFont typeface="Arial" panose="020B0604020202020204" pitchFamily="34" charset="0"/>
+              <a:buChar char="•"/>
+            </a:pPr>
+            <a:r>
+              <a:rPr lang="es-ES" sz="1200" dirty="0">
+                <a:latin typeface="Arial" panose="020B0604020202020204" pitchFamily="34" charset="0"/>
+                <a:cs typeface="Arial" panose="020B0604020202020204" pitchFamily="34" charset="0"/>
+              </a:rPr>
+              <a:t>tres en el centro</a:t>
+            </a:r>
+          </a:p>
+          <a:p>
+            <a:pPr marL="628650" lvl="1" indent="-171450" algn="just">
+              <a:buFont typeface="Arial" panose="020B0604020202020204" pitchFamily="34" charset="0"/>
+              <a:buChar char="•"/>
+            </a:pPr>
+            <a:r>
+              <a:rPr lang="es-ES" sz="1200" dirty="0">
+                <a:latin typeface="Arial" panose="020B0604020202020204" pitchFamily="34" charset="0"/>
+                <a:cs typeface="Arial" panose="020B0604020202020204" pitchFamily="34" charset="0"/>
+              </a:rPr>
+              <a:t>tres en la parte superior</a:t>
+            </a:r>
+          </a:p>
+          <a:p>
+            <a:pPr marL="171450" indent="-171450" algn="just">
+              <a:buFont typeface="Arial" panose="020B0604020202020204" pitchFamily="34" charset="0"/>
+              <a:buChar char="•"/>
+            </a:pPr>
+            <a:r>
+              <a:rPr lang="es-ES" sz="1200" dirty="0">
+                <a:latin typeface="Arial" panose="020B0604020202020204" pitchFamily="34" charset="0"/>
+                <a:cs typeface="Arial" panose="020B0604020202020204" pitchFamily="34" charset="0"/>
+              </a:rPr>
+              <a:t>En los puertos restantes hemos colocado dos versiones de cada componente, cambiando parámetros como la diferencia de longitud de los MZI, el perímetro de los anillos y la longitud de las espirales.</a:t>
+            </a:r>
+          </a:p>
+          <a:p>
+            <a:pPr marL="171450" indent="-171450" algn="just">
+              <a:buFont typeface="Arial" panose="020B0604020202020204" pitchFamily="34" charset="0"/>
+              <a:buChar char="•"/>
+            </a:pPr>
+            <a:r>
+              <a:rPr lang="es-ES" sz="1200" dirty="0">
+                <a:latin typeface="Arial" panose="020B0604020202020204" pitchFamily="34" charset="0"/>
+                <a:cs typeface="Arial" panose="020B0604020202020204" pitchFamily="34" charset="0"/>
+              </a:rPr>
+              <a:t>Los dispositivos se han distribuido en dos zonas del chip y se han alineado con las filas de entrada y salida para simplificar las conexiones. </a:t>
+            </a:r>
+          </a:p>
+          <a:p>
+            <a:pPr marL="171450" indent="-171450" algn="just">
+              <a:buFont typeface="Arial" panose="020B0604020202020204" pitchFamily="34" charset="0"/>
+              <a:buChar char="•"/>
+            </a:pPr>
+            <a:r>
+              <a:rPr lang="es-ES" sz="1200" dirty="0">
+                <a:latin typeface="Arial" panose="020B0604020202020204" pitchFamily="34" charset="0"/>
+                <a:cs typeface="Arial" panose="020B0604020202020204" pitchFamily="34" charset="0"/>
+              </a:rPr>
+              <a:t>En la vista completa algunos componentes apenas se distinguen porque son mucho más pequeños que el die, pero todos quedan dentro del área útil y conectados a sus I/Outputs. </a:t>
+            </a:r>
+          </a:p>
+          <a:p>
+            <a:pPr marL="171450" indent="-171450" algn="just">
+              <a:buFont typeface="Arial" panose="020B0604020202020204" pitchFamily="34" charset="0"/>
+              <a:buChar char="•"/>
+            </a:pPr>
+            <a:r>
+              <a:rPr lang="es-ES" sz="1200" dirty="0">
+                <a:latin typeface="Arial" panose="020B0604020202020204" pitchFamily="34" charset="0"/>
+                <a:cs typeface="Arial" panose="020B0604020202020204" pitchFamily="34" charset="0"/>
+              </a:rPr>
+              <a:t>El resultado demuestra que las celdas creadas anteriormente se pueden reutilizar y combinar dentro de un </a:t>
+            </a:r>
+            <a:r>
+              <a:rPr lang="es-ES" sz="1200" dirty="0" err="1">
+                <a:latin typeface="Arial" panose="020B0604020202020204" pitchFamily="34" charset="0"/>
+                <a:cs typeface="Arial" panose="020B0604020202020204" pitchFamily="34" charset="0"/>
+              </a:rPr>
+              <a:t>layout</a:t>
+            </a:r>
+            <a:r>
+              <a:rPr lang="es-ES" sz="1200" dirty="0">
+                <a:latin typeface="Arial" panose="020B0604020202020204" pitchFamily="34" charset="0"/>
+                <a:cs typeface="Arial" panose="020B0604020202020204" pitchFamily="34" charset="0"/>
+              </a:rPr>
+              <a:t> jerárquico más grande.</a:t>
+            </a:r>
+          </a:p>
+        </p:txBody>
+      </p:sp>
+      <p:pic>
+        <p:nvPicPr>
+          <p:cNvPr id="5" name="Imagen 4">
+            <a:extLst>
+              <a:ext uri="{FF2B5EF4-FFF2-40B4-BE49-F238E27FC236}">
+                <a16:creationId xmlns:a16="http://schemas.microsoft.com/office/drawing/2014/main" id="{06DFE6AB-7E6B-6F25-C9CF-F270ADF00B7F}"/>
+              </a:ext>
+            </a:extLst>
+          </p:cNvPr>
+          <p:cNvPicPr>
+            <a:picLocks noChangeAspect="1"/>
+          </p:cNvPicPr>
+          <p:nvPr/>
+        </p:nvPicPr>
+        <p:blipFill>
+          <a:blip r:embed="rId4"/>
+          <a:stretch>
+            <a:fillRect/>
+          </a:stretch>
+        </p:blipFill>
+        <p:spPr>
+          <a:xfrm>
+            <a:off x="304800" y="1103318"/>
+            <a:ext cx="6705600" cy="5062071"/>
+          </a:xfrm>
+          <a:prstGeom prst="rect">
+            <a:avLst/>
+          </a:prstGeom>
+        </p:spPr>
+      </p:pic>
+    </p:spTree>
+    <p:extLst>
+      <p:ext uri="{BB962C8B-B14F-4D97-AF65-F5344CB8AC3E}">
+        <p14:creationId xmlns:p14="http://schemas.microsoft.com/office/powerpoint/2010/main" val="3282790445"/>
+      </p:ext>
+    </p:extLst>
+  </p:cSld>
+  <p:clrMapOvr>
+    <a:masterClrMapping/>
+  </p:clrMapOvr>
+</p:sld>
+</file>
+
+<file path=ppt/slides/slide29.xml><?xml version="1.0" encoding="utf-8"?>
+<p:sld xmlns:a="http://schemas.openxmlformats.org/drawingml/2006/main" xmlns:r="http://schemas.openxmlformats.org/officeDocument/2006/relationships" xmlns:p="http://schemas.openxmlformats.org/presentationml/2006/main">
+  <p:cSld>
+    <p:spTree>
+      <p:nvGrpSpPr>
+        <p:cNvPr id="1" name=""/>
+        <p:cNvGrpSpPr/>
+        <p:nvPr/>
+      </p:nvGrpSpPr>
+      <p:grpSpPr>
+        <a:xfrm>
+          <a:off x="0" y="0"/>
+          <a:ext cx="0" cy="0"/>
+          <a:chOff x="0" y="0"/>
+          <a:chExt cx="0" cy="0"/>
+        </a:xfrm>
+      </p:grpSpPr>
+      <p:sp>
+        <p:nvSpPr>
+          <p:cNvPr id="3" name="object 3"/>
+          <p:cNvSpPr/>
+          <p:nvPr/>
+        </p:nvSpPr>
+        <p:spPr>
+          <a:xfrm>
+            <a:off x="3945635" y="2636520"/>
+            <a:ext cx="8246363" cy="1584959"/>
+          </a:xfrm>
+          <a:prstGeom prst="rect">
+            <a:avLst/>
+          </a:prstGeom>
+          <a:blipFill>
+            <a:blip r:embed="rId2" cstate="print"/>
+            <a:stretch>
+              <a:fillRect/>
+            </a:stretch>
+          </a:blipFill>
+        </p:spPr>
+        <p:txBody>
+          <a:bodyPr wrap="square" lIns="0" tIns="0" rIns="0" bIns="0" rtlCol="0"/>
+          <a:lstStyle/>
+          <a:p>
+            <a:endParaRPr/>
+          </a:p>
+        </p:txBody>
+      </p:sp>
+      <p:sp>
+        <p:nvSpPr>
+          <p:cNvPr id="4" name="object 4"/>
+          <p:cNvSpPr txBox="1">
+            <a:spLocks noGrp="1"/>
+          </p:cNvSpPr>
+          <p:nvPr>
+            <p:ph type="title"/>
+          </p:nvPr>
+        </p:nvSpPr>
+        <p:spPr>
+          <a:xfrm>
+            <a:off x="4513326" y="3165729"/>
+            <a:ext cx="2233295" cy="513715"/>
+          </a:xfrm>
+          <a:prstGeom prst="rect">
+            <a:avLst/>
+          </a:prstGeom>
+        </p:spPr>
+        <p:txBody>
+          <a:bodyPr vert="horz" wrap="square" lIns="0" tIns="13335" rIns="0" bIns="0" rtlCol="0">
+            <a:spAutoFit/>
+          </a:bodyPr>
+          <a:lstStyle/>
+          <a:p>
+            <a:pPr marL="12700">
+              <a:lnSpc>
+                <a:spcPct val="100000"/>
+              </a:lnSpc>
+              <a:spcBef>
+                <a:spcPts val="105"/>
+              </a:spcBef>
+            </a:pPr>
+            <a:r>
+              <a:rPr sz="3200" b="1" spc="-5" dirty="0">
+                <a:solidFill>
+                  <a:srgbClr val="FFFFFF"/>
+                </a:solidFill>
+                <a:latin typeface="Lucida Sans"/>
+                <a:cs typeface="Lucida Sans"/>
+              </a:rPr>
+              <a:t>Thank</a:t>
+            </a:r>
+            <a:r>
+              <a:rPr sz="3200" b="1" spc="-55" dirty="0">
+                <a:solidFill>
+                  <a:srgbClr val="FFFFFF"/>
+                </a:solidFill>
+                <a:latin typeface="Lucida Sans"/>
+                <a:cs typeface="Lucida Sans"/>
+              </a:rPr>
+              <a:t> </a:t>
+            </a:r>
+            <a:r>
+              <a:rPr sz="3200" b="1" dirty="0">
+                <a:solidFill>
+                  <a:srgbClr val="FFFFFF"/>
+                </a:solidFill>
+                <a:latin typeface="Lucida Sans"/>
+                <a:cs typeface="Lucida Sans"/>
+              </a:rPr>
+              <a:t>you</a:t>
+            </a:r>
+            <a:endParaRPr sz="3200">
+              <a:latin typeface="Lucida Sans"/>
+              <a:cs typeface="Lucida Sans"/>
+            </a:endParaRPr>
+          </a:p>
+        </p:txBody>
+      </p:sp>
+      <p:sp>
+        <p:nvSpPr>
+          <p:cNvPr id="5" name="Marcador de número de diapositiva 4">
+            <a:extLst>
+              <a:ext uri="{FF2B5EF4-FFF2-40B4-BE49-F238E27FC236}">
+                <a16:creationId xmlns:a16="http://schemas.microsoft.com/office/drawing/2014/main" id="{B052DA19-AD24-7D24-2AE9-51F8F5A7F5E0}"/>
+              </a:ext>
+            </a:extLst>
+          </p:cNvPr>
+          <p:cNvSpPr>
+            <a:spLocks noGrp="1"/>
+          </p:cNvSpPr>
+          <p:nvPr>
+            <p:ph type="sldNum" sz="quarter" idx="7"/>
+          </p:nvPr>
+        </p:nvSpPr>
+        <p:spPr/>
+        <p:txBody>
+          <a:bodyPr/>
+          <a:lstStyle/>
+          <a:p>
+            <a:fld id="{B6F15528-21DE-4FAA-801E-634DDDAF4B2B}" type="slidenum">
+              <a:rPr lang="es-ES" smtClean="0"/>
+              <a:t>29</a:t>
+            </a:fld>
+            <a:endParaRPr lang="es-ES"/>
+          </a:p>
+        </p:txBody>
+      </p:sp>
+    </p:spTree>
   </p:cSld>
   <p:clrMapOvr>
     <a:masterClrMapping/>
